--- a/enablement/deck/presentation-deck.pptx
+++ b/enablement/deck/presentation-deck.pptx
@@ -777,7 +777,7 @@
           <a:p>
             <a:r>
               <a:rPr lang="en-US" dirty="0"/>
-              <a:t>Close by deleting the local plugin and removing the marketplace so the machine is clean for the next rehearsal, then point the room at the repo. Everything on this slide exists in the published kit today.</a:t>
+              <a:t>Close by uninstalling and reinstalling the plugin on screen, under a minute; distribution is the product, worth showing twice. After the room leaves, uninstall and remove the marketplace so the machine is clean for the next session. Everything on this slide exists in the published kit today.</a:t>
             </a:r>
             <a:endParaRPr lang="en-US" dirty="0"/>
           </a:p>
@@ -865,7 +865,7 @@
           <a:p>
             <a:r>
               <a:rPr lang="en-US" dirty="0"/>
-              <a:t>State the scope out loud before anything else. The cut list is as deliberate as the covered list; the reasons come from 01-design-note.md. If someone wants the cut topics, point them at the docs links on the closing slide.</a:t>
+              <a:t>State the scope out loud before anything else. The cut list is as deliberate as the covered list; the reasons come from 01-design-note.md. If someone wants the cut topics, point them at the docs links at the bottom of the handout.</a:t>
             </a:r>
             <a:endParaRPr lang="en-US" dirty="0"/>
           </a:p>
@@ -6836,7 +6836,7 @@
                 <a:ea typeface="Arial" pitchFamily="34" charset="-122"/>
                 <a:cs typeface="Arial" pitchFamily="34" charset="-120"/>
               </a:rPr>
-              <a:t>try.js gives an instant decision. The 22-check harness guards regressions.</a:t>
+              <a:t>try.js gives an instant decision. The 22-check harness catches regressions.</a:t>
             </a:r>
             <a:endParaRPr lang="en-US" sz="1300" dirty="0"/>
           </a:p>
@@ -7443,7 +7443,7 @@
                 <a:ea typeface="Arial" pitchFamily="34" charset="-122"/>
                 <a:cs typeface="Arial" pitchFamily="34" charset="-120"/>
               </a:rPr>
-              <a:t>Their conventions, applied by their reviewer.</a:t>
+              <a:t>Your conventions, applied by your reviewer.</a:t>
             </a:r>
             <a:endParaRPr lang="en-US" sz="1250" dirty="0"/>
           </a:p>

--- a/enablement/deck/presentation-deck.pptx
+++ b/enablement/deck/presentation-deck.pptx
@@ -17,9 +17,11 @@
     <p:sldId id="265" r:id="rId11"/>
     <p:sldId id="266" r:id="rId12"/>
     <p:sldId id="267" r:id="rId13"/>
+    <p:sldId id="268" r:id="rId14"/>
+    <p:sldId id="269" r:id="rId15"/>
   </p:sldIdLst>
   <p:notesMasterIdLst>
-    <p:notesMasterId r:id="rId14"/>
+    <p:notesMasterId r:id="rId16"/>
   </p:notesMasterIdLst>
   <p:sldSz cx="9144000" cy="5143500"/>
   <p:notesSz cx="5143500" cy="9144000"/>
@@ -601,7 +603,7 @@
           <a:p>
             <a:r>
               <a:rPr lang="en-US" dirty="0"/>
-              <a:t>Active practice with immediate feedback: the harness gives an instant pass or fail, so every attendee gets a tight loop. Facilitator circulates. No laptops in the room? Run beat 4 twice more with audience-supplied rules instead.</a:t>
+              <a:t>This is the rollout motion the platform lead has been asking for. Beat 4 of the demo performs it live with a rule the room suggests. The offline proof step matters: the seller never burns a token to know the policy works.</a:t>
             </a:r>
             <a:endParaRPr lang="en-US" dirty="0"/>
           </a:p>
@@ -689,7 +691,7 @@
           <a:p>
             <a:r>
               <a:rPr lang="en-US" dirty="0"/>
-              <a:t>Pose the three questions to the room and let them answer; they're discovery, and the answers tell you where a pilot lands. The next step on the slide is the ask: a two-week pilot in their repo with their conventions. Internally, the success signal stays the 14-day real-customer run from 01-design-note.md.</a:t>
+              <a:t>Each beat names the alternative it replaces; let those land. Prompts are verbatim in PROMPTS.md; narrate decisions, not keystrokes. Beat 3 is where the principle slides pay off: the deny arrives with a rule id and reason, and the audit file shows attempts and outcomes together. Beat 4 takes a rule from the room and ships it.</a:t>
             </a:r>
             <a:endParaRPr lang="en-US" dirty="0"/>
           </a:p>
@@ -777,7 +779,7 @@
           <a:p>
             <a:r>
               <a:rPr lang="en-US" dirty="0"/>
-              <a:t>Close by uninstalling and reinstalling the plugin on screen, under a minute; distribution is the product, worth showing twice. After the room leaves, uninstall and remove the marketplace so the machine is clean for the next session. Everything on this slide exists in the published kit today.</a:t>
+              <a:t>Active practice with immediate feedback: the harness gives an instant pass or fail, so every attendee gets a tight loop. Facilitator circulates. No laptops in the room? Run beat 4 twice more with audience-supplied rules instead.</a:t>
             </a:r>
             <a:endParaRPr lang="en-US" dirty="0"/>
           </a:p>
@@ -801,6 +803,182 @@
             <a:fld id="{F7021451-1387-4CA6-816F-3879F97B5CBC}" type="slidenum">
               <a:rPr lang="en-US"/>
               <a:t>12</a:t>
+            </a:fld>
+            <a:endParaRPr lang="en-US"/>
+          </a:p>
+        </p:txBody>
+      </p:sp>
+    </p:spTree>
+    <p:extLst>
+      <p:ext uri="{BB962C8B-B14F-4D97-AF65-F5344CB8AC3E}">
+        <p14:creationId xmlns:p14="http://schemas.microsoft.com/office/powerpoint/2010/main" val="1024086991"/>
+      </p:ext>
+    </p:extLst>
+  </p:cSld>
+  <p:clrMapOvr>
+    <a:masterClrMapping/>
+  </p:clrMapOvr>
+</p:notes>
+</file>
+
+<file path=ppt/notesSlides/notesSlide13.xml><?xml version="1.0" encoding="utf-8"?>
+<p:notes xmlns:a="http://schemas.openxmlformats.org/drawingml/2006/main" xmlns:r="http://schemas.openxmlformats.org/officeDocument/2006/relationships" xmlns:p="http://schemas.openxmlformats.org/presentationml/2006/main">
+  <p:cSld>
+    <p:spTree>
+      <p:nvGrpSpPr>
+        <p:cNvPr id="1" name=""/>
+        <p:cNvGrpSpPr/>
+        <p:nvPr/>
+      </p:nvGrpSpPr>
+      <p:grpSpPr>
+        <a:xfrm>
+          <a:off x="0" y="0"/>
+          <a:ext cx="0" cy="0"/>
+          <a:chOff x="0" y="0"/>
+          <a:chExt cx="0" cy="0"/>
+        </a:xfrm>
+      </p:grpSpPr>
+      <p:sp>
+        <p:nvSpPr>
+          <p:cNvPr id="2" name="Slide Image Placeholder 1"/>
+          <p:cNvSpPr>
+            <a:spLocks noGrp="1" noRot="1" noChangeAspect="1"/>
+          </p:cNvSpPr>
+          <p:nvPr>
+            <p:ph type="sldImg"/>
+          </p:nvPr>
+        </p:nvSpPr>
+        <p:spPr/>
+      </p:sp>
+      <p:sp>
+        <p:nvSpPr>
+          <p:cNvPr id="3" name="Notes Placeholder 2"/>
+          <p:cNvSpPr>
+            <a:spLocks noGrp="1"/>
+          </p:cNvSpPr>
+          <p:nvPr>
+            <p:ph type="body" idx="1"/>
+          </p:nvPr>
+        </p:nvSpPr>
+        <p:spPr/>
+        <p:txBody>
+          <a:bodyPr/>
+          <a:lstStyle/>
+          <a:p>
+            <a:r>
+              <a:rPr lang="en-US" dirty="0"/>
+              <a:t>Pose the three questions to the room and let them answer; they're discovery, and the answers tell you where a pilot lands. The next step on the slide is the ask: a two-week pilot in their repo with their conventions. Internally, the success signal stays the 14-day real-customer run from 01-design-note.md.</a:t>
+            </a:r>
+            <a:endParaRPr lang="en-US" dirty="0"/>
+          </a:p>
+        </p:txBody>
+      </p:sp>
+      <p:sp>
+        <p:nvSpPr>
+          <p:cNvPr id="4" name="Slide Number Placeholder 3"/>
+          <p:cNvSpPr>
+            <a:spLocks noGrp="1"/>
+          </p:cNvSpPr>
+          <p:nvPr>
+            <p:ph type="sldNum" sz="quarter" idx="10"/>
+          </p:nvPr>
+        </p:nvSpPr>
+        <p:spPr/>
+        <p:txBody>
+          <a:bodyPr/>
+          <a:lstStyle/>
+          <a:p>
+            <a:fld id="{F7021451-1387-4CA6-816F-3879F97B5CBC}" type="slidenum">
+              <a:rPr lang="en-US"/>
+              <a:t>13</a:t>
+            </a:fld>
+            <a:endParaRPr lang="en-US"/>
+          </a:p>
+        </p:txBody>
+      </p:sp>
+    </p:spTree>
+    <p:extLst>
+      <p:ext uri="{BB962C8B-B14F-4D97-AF65-F5344CB8AC3E}">
+        <p14:creationId xmlns:p14="http://schemas.microsoft.com/office/powerpoint/2010/main" val="1024086991"/>
+      </p:ext>
+    </p:extLst>
+  </p:cSld>
+  <p:clrMapOvr>
+    <a:masterClrMapping/>
+  </p:clrMapOvr>
+</p:notes>
+</file>
+
+<file path=ppt/notesSlides/notesSlide14.xml><?xml version="1.0" encoding="utf-8"?>
+<p:notes xmlns:a="http://schemas.openxmlformats.org/drawingml/2006/main" xmlns:r="http://schemas.openxmlformats.org/officeDocument/2006/relationships" xmlns:p="http://schemas.openxmlformats.org/presentationml/2006/main">
+  <p:cSld>
+    <p:spTree>
+      <p:nvGrpSpPr>
+        <p:cNvPr id="1" name=""/>
+        <p:cNvGrpSpPr/>
+        <p:nvPr/>
+      </p:nvGrpSpPr>
+      <p:grpSpPr>
+        <a:xfrm>
+          <a:off x="0" y="0"/>
+          <a:ext cx="0" cy="0"/>
+          <a:chOff x="0" y="0"/>
+          <a:chExt cx="0" cy="0"/>
+        </a:xfrm>
+      </p:grpSpPr>
+      <p:sp>
+        <p:nvSpPr>
+          <p:cNvPr id="2" name="Slide Image Placeholder 1"/>
+          <p:cNvSpPr>
+            <a:spLocks noGrp="1" noRot="1" noChangeAspect="1"/>
+          </p:cNvSpPr>
+          <p:nvPr>
+            <p:ph type="sldImg"/>
+          </p:nvPr>
+        </p:nvSpPr>
+        <p:spPr/>
+      </p:sp>
+      <p:sp>
+        <p:nvSpPr>
+          <p:cNvPr id="3" name="Notes Placeholder 2"/>
+          <p:cNvSpPr>
+            <a:spLocks noGrp="1"/>
+          </p:cNvSpPr>
+          <p:nvPr>
+            <p:ph type="body" idx="1"/>
+          </p:nvPr>
+        </p:nvSpPr>
+        <p:spPr/>
+        <p:txBody>
+          <a:bodyPr/>
+          <a:lstStyle/>
+          <a:p>
+            <a:r>
+              <a:rPr lang="en-US" dirty="0"/>
+              <a:t>Close by uninstalling and reinstalling the plugin on screen, under a minute; distribution is the product, worth showing twice. After the room leaves, uninstall and remove the marketplace so the machine is clean for the next session. Everything on this slide exists in the published kit today.</a:t>
+            </a:r>
+            <a:endParaRPr lang="en-US" dirty="0"/>
+          </a:p>
+        </p:txBody>
+      </p:sp>
+      <p:sp>
+        <p:nvSpPr>
+          <p:cNvPr id="4" name="Slide Number Placeholder 3"/>
+          <p:cNvSpPr>
+            <a:spLocks noGrp="1"/>
+          </p:cNvSpPr>
+          <p:nvPr>
+            <p:ph type="sldNum" sz="quarter" idx="10"/>
+          </p:nvPr>
+        </p:nvSpPr>
+        <p:spPr/>
+        <p:txBody>
+          <a:bodyPr/>
+          <a:lstStyle/>
+          <a:p>
+            <a:fld id="{F7021451-1387-4CA6-816F-3879F97B5CBC}" type="slidenum">
+              <a:rPr lang="en-US"/>
+              <a:t>14</a:t>
             </a:fld>
             <a:endParaRPr lang="en-US"/>
           </a:p>
@@ -1217,7 +1395,7 @@
           <a:p>
             <a:r>
               <a:rPr lang="en-US" dirty="0"/>
-              <a:t>Walk the three layers left to right, then land the two commands. Two facts to say out loud because they prevent later confusion: components live at the plugin root, not inside .claude-plugin/, and installed plugins run from a cache copy, so editing a checkout changes nothing until a new version ships.</a:t>
+              <a:t>Say the definition sentence first, then walk the three layers left to right and land the two commands. Two facts to say out loud because they prevent later confusion: components live at the plugin root, not inside .claude-plugin/, and installed plugins run from a cache copy, so editing a checkout changes nothing until a new version ships.</a:t>
             </a:r>
             <a:endParaRPr lang="en-US" dirty="0"/>
           </a:p>
@@ -1305,7 +1483,7 @@
           <a:p>
             <a:r>
               <a:rPr lang="en-US" dirty="0"/>
-              <a:t>This is the slide that answers 'what if the model ignores instructions.' It isn't an instruction. The guard is a separate process gating the tool call before it executes. Invite skeptics to read guard.js; 158 lines is the point. Demo beat 3 makes this concrete at minute 13.</a:t>
+              <a:t>Use this plugin's real components as the example, not abstractions. The skill is the team's written SQL standards; the agent is the reviewer that applies them; the hooks are the guard and audit scripts the demo exercises in beat 3; the manifest version is what beat 4 bumps. Everything on this slide gets touched live within fifteen minutes.</a:t>
             </a:r>
             <a:endParaRPr lang="en-US" dirty="0"/>
           </a:p>
@@ -1393,7 +1571,7 @@
           <a:p>
             <a:r>
               <a:rPr lang="en-US" dirty="0"/>
-              <a:t>This is the rollout motion the platform lead has been asking for. Beat 4 of the demo performs it live with a rule the room suggests. The offline proof step matters: the seller never burns a token to know the policy works.</a:t>
+              <a:t>This is the objection every room raises, so answer it before anyone asks. The folder works for one repo on one laptop; the plugin is the same content with an operating model around it. Beats 3 and 4 of the demo prove the right column live: the gate denies deterministically, and one version bump updates the fleet.</a:t>
             </a:r>
             <a:endParaRPr lang="en-US" dirty="0"/>
           </a:p>
@@ -1481,7 +1659,7 @@
           <a:p>
             <a:r>
               <a:rPr lang="en-US" dirty="0"/>
-              <a:t>Prompts are verbatim in PROMPTS.md; narrate decisions, not keystrokes. Beat 3 is where the principle slides pay off: the deny arrives with a rule id and reason, and the audit file shows attempts and outcomes together. Beat 4 takes a rule from the room and ships it.</a:t>
+              <a:t>This is the slide that answers 'what if the model ignores instructions.' It isn't an instruction. The guard is a separate process gating the tool call before it executes. Invite skeptics to read guard.js; 158 lines is the point. Demo beat 3 makes this concrete at minute 13.</a:t>
             </a:r>
             <a:endParaRPr lang="en-US" dirty="0"/>
           </a:p>
@@ -2076,7 +2254,7 @@
                 <a:ea typeface="Georgia" pitchFamily="34" charset="-122"/>
                 <a:cs typeface="Georgia" pitchFamily="34" charset="-120"/>
               </a:rPr>
-              <a:t>Your turn. Minutes 20 to 26.</a:t>
+              <a:t>Policy ships like software.</a:t>
             </a:r>
             <a:endParaRPr lang="en-US" sz="2600" dirty="0"/>
           </a:p>
@@ -2084,14 +2262,73 @@
       </p:sp>
       <p:sp>
         <p:nvSpPr>
-          <p:cNvPr id="4" name="Text 2"/>
-          <p:cNvSpPr/>
-          <p:nvPr/>
-        </p:nvSpPr>
-        <p:spPr>
-          <a:xfrm>
-            <a:off x="548640" y="1463040"/>
-            <a:ext cx="4663440" cy="2377440"/>
+          <p:cNvPr id="4" name="Shape 2"/>
+          <p:cNvSpPr/>
+          <p:nvPr/>
+        </p:nvSpPr>
+        <p:spPr>
+          <a:xfrm>
+            <a:off x="548640" y="1554480"/>
+            <a:ext cx="1847088" cy="1828800"/>
+          </a:xfrm>
+          <a:prstGeom prst="rect">
+            <a:avLst/>
+          </a:prstGeom>
+          <a:solidFill>
+            <a:srgbClr val="F0EEE6"/>
+          </a:solidFill>
+          <a:ln/>
+        </p:spPr>
+      </p:sp>
+      <p:sp>
+        <p:nvSpPr>
+          <p:cNvPr id="5" name="Text 3"/>
+          <p:cNvSpPr/>
+          <p:nvPr/>
+        </p:nvSpPr>
+        <p:spPr>
+          <a:xfrm>
+            <a:off x="731520" y="1700784"/>
+            <a:ext cx="457200" cy="411480"/>
+          </a:xfrm>
+          <a:prstGeom prst="rect">
+            <a:avLst/>
+          </a:prstGeom>
+          <a:noFill/>
+          <a:ln/>
+        </p:spPr>
+        <p:txBody>
+          <a:bodyPr wrap="square" lIns="0" tIns="0" rIns="0" bIns="0" rtlCol="0" anchor="ctr"/>
+          <a:lstStyle/>
+          <a:p>
+            <a:pPr indent="0" marL="0">
+              <a:buNone/>
+            </a:pPr>
+            <a:r>
+              <a:rPr lang="en-US" sz="2000" dirty="0">
+                <a:solidFill>
+                  <a:srgbClr val="CC785C"/>
+                </a:solidFill>
+                <a:latin typeface="Georgia" pitchFamily="34" charset="0"/>
+                <a:ea typeface="Georgia" pitchFamily="34" charset="-122"/>
+                <a:cs typeface="Georgia" pitchFamily="34" charset="-120"/>
+              </a:rPr>
+              <a:t>1</a:t>
+            </a:r>
+            <a:endParaRPr lang="en-US" sz="2000" dirty="0"/>
+          </a:p>
+        </p:txBody>
+      </p:sp>
+      <p:sp>
+        <p:nvSpPr>
+          <p:cNvPr id="6" name="Text 4"/>
+          <p:cNvSpPr/>
+          <p:nvPr/>
+        </p:nvSpPr>
+        <p:spPr>
+          <a:xfrm>
+            <a:off x="731520" y="2148840"/>
+            <a:ext cx="1481328" cy="1051560"/>
           </a:xfrm>
           <a:prstGeom prst="rect">
             <a:avLst/>
@@ -2103,15 +2340,14 @@
           <a:bodyPr wrap="square" lIns="0" tIns="0" rIns="0" bIns="0" rtlCol="0" anchor="t"/>
           <a:lstStyle/>
           <a:p>
-            <a:pPr marL="342900" indent="-342900">
+            <a:pPr indent="0" marL="0">
               <a:spcAft>
-                <a:spcPts val="1400"/>
+                <a:spcPts val="400"/>
               </a:spcAft>
-              <a:buSzPct val="100000"/>
-              <a:buChar char="•"/>
-            </a:pPr>
-            <a:r>
-              <a:rPr lang="en-US" sz="1350" dirty="0">
+              <a:buNone/>
+            </a:pPr>
+            <a:r>
+              <a:rPr lang="en-US" sz="1300" b="1" dirty="0">
                 <a:solidFill>
                   <a:srgbClr val="191919"/>
                 </a:solidFill>
@@ -2119,41 +2355,120 @@
                 <a:ea typeface="Arial" pitchFamily="34" charset="-122"/>
                 <a:cs typeface="Arial" pitchFamily="34" charset="-120"/>
               </a:rPr>
-              <a:t>Run the 22-check harness from your own clone</a:t>
-            </a:r>
-            <a:endParaRPr lang="en-US" sz="1350" dirty="0"/>
-          </a:p>
-          <a:p>
-            <a:pPr marL="342900" indent="-342900">
+              <a:t>Edit policy.json</a:t>
+            </a:r>
+            <a:endParaRPr lang="en-US" sz="1300" dirty="0"/>
+          </a:p>
+          <a:p>
+            <a:pPr indent="0" marL="0">
               <a:spcAft>
-                <a:spcPts val="1400"/>
+                <a:spcPts val="400"/>
               </a:spcAft>
-              <a:buSzPct val="100000"/>
-              <a:buChar char="•"/>
-            </a:pPr>
-            <a:r>
-              <a:rPr lang="en-US" sz="1350" dirty="0">
-                <a:solidFill>
-                  <a:srgbClr val="191919"/>
+              <a:buNone/>
+            </a:pPr>
+            <a:r>
+              <a:rPr lang="en-US" sz="1150" dirty="0">
+                <a:solidFill>
+                  <a:srgbClr val="6B6B66"/>
                 </a:solidFill>
                 <a:latin typeface="Arial" pitchFamily="34" charset="0"/>
                 <a:ea typeface="Arial" pitchFamily="34" charset="-122"/>
                 <a:cs typeface="Arial" pitchFamily="34" charset="-120"/>
               </a:rPr>
-              <a:t>Install the plugin from the local marketplace</a:t>
-            </a:r>
-            <a:endParaRPr lang="en-US" sz="1350" dirty="0"/>
-          </a:p>
-          <a:p>
-            <a:pPr marL="342900" indent="-342900">
+              <a:t>The rules are reviewable config, not prompt text.</a:t>
+            </a:r>
+            <a:endParaRPr lang="en-US" sz="1300" dirty="0"/>
+          </a:p>
+        </p:txBody>
+      </p:sp>
+      <p:sp>
+        <p:nvSpPr>
+          <p:cNvPr id="7" name="Shape 5"/>
+          <p:cNvSpPr/>
+          <p:nvPr/>
+        </p:nvSpPr>
+        <p:spPr>
+          <a:xfrm>
+            <a:off x="2615184" y="1554480"/>
+            <a:ext cx="1847088" cy="1828800"/>
+          </a:xfrm>
+          <a:prstGeom prst="rect">
+            <a:avLst/>
+          </a:prstGeom>
+          <a:solidFill>
+            <a:srgbClr val="F0EEE6"/>
+          </a:solidFill>
+          <a:ln/>
+        </p:spPr>
+      </p:sp>
+      <p:sp>
+        <p:nvSpPr>
+          <p:cNvPr id="8" name="Text 6"/>
+          <p:cNvSpPr/>
+          <p:nvPr/>
+        </p:nvSpPr>
+        <p:spPr>
+          <a:xfrm>
+            <a:off x="2798064" y="1700784"/>
+            <a:ext cx="457200" cy="411480"/>
+          </a:xfrm>
+          <a:prstGeom prst="rect">
+            <a:avLst/>
+          </a:prstGeom>
+          <a:noFill/>
+          <a:ln/>
+        </p:spPr>
+        <p:txBody>
+          <a:bodyPr wrap="square" lIns="0" tIns="0" rIns="0" bIns="0" rtlCol="0" anchor="ctr"/>
+          <a:lstStyle/>
+          <a:p>
+            <a:pPr indent="0" marL="0">
+              <a:buNone/>
+            </a:pPr>
+            <a:r>
+              <a:rPr lang="en-US" sz="2000" dirty="0">
+                <a:solidFill>
+                  <a:srgbClr val="CC785C"/>
+                </a:solidFill>
+                <a:latin typeface="Georgia" pitchFamily="34" charset="0"/>
+                <a:ea typeface="Georgia" pitchFamily="34" charset="-122"/>
+                <a:cs typeface="Georgia" pitchFamily="34" charset="-120"/>
+              </a:rPr>
+              <a:t>2</a:t>
+            </a:r>
+            <a:endParaRPr lang="en-US" sz="2000" dirty="0"/>
+          </a:p>
+        </p:txBody>
+      </p:sp>
+      <p:sp>
+        <p:nvSpPr>
+          <p:cNvPr id="9" name="Text 7"/>
+          <p:cNvSpPr/>
+          <p:nvPr/>
+        </p:nvSpPr>
+        <p:spPr>
+          <a:xfrm>
+            <a:off x="2798064" y="2148840"/>
+            <a:ext cx="1481328" cy="1051560"/>
+          </a:xfrm>
+          <a:prstGeom prst="rect">
+            <a:avLst/>
+          </a:prstGeom>
+          <a:noFill/>
+          <a:ln/>
+        </p:spPr>
+        <p:txBody>
+          <a:bodyPr wrap="square" lIns="0" tIns="0" rIns="0" bIns="0" rtlCol="0" anchor="t"/>
+          <a:lstStyle/>
+          <a:p>
+            <a:pPr indent="0" marL="0">
               <a:spcAft>
-                <a:spcPts val="1400"/>
+                <a:spcPts val="400"/>
               </a:spcAft>
-              <a:buSzPct val="100000"/>
-              <a:buChar char="•"/>
-            </a:pPr>
-            <a:r>
-              <a:rPr lang="en-US" sz="1350" dirty="0">
+              <a:buNone/>
+            </a:pPr>
+            <a:r>
+              <a:rPr lang="en-US" sz="1300" b="1" dirty="0">
                 <a:solidFill>
                   <a:srgbClr val="191919"/>
                 </a:solidFill>
@@ -2161,43 +2476,42 @@
                 <a:ea typeface="Arial" pitchFamily="34" charset="-122"/>
                 <a:cs typeface="Arial" pitchFamily="34" charset="-120"/>
               </a:rPr>
-              <a:t>Trigger one deny yourself and read the audit line it wrote</a:t>
-            </a:r>
-            <a:endParaRPr lang="en-US" sz="1350" dirty="0"/>
-          </a:p>
-          <a:p>
-            <a:pPr marL="342900" indent="-342900">
+              <a:t>Prove it offline</a:t>
+            </a:r>
+            <a:endParaRPr lang="en-US" sz="1300" dirty="0"/>
+          </a:p>
+          <a:p>
+            <a:pPr indent="0" marL="0">
               <a:spcAft>
-                <a:spcPts val="1400"/>
+                <a:spcPts val="400"/>
               </a:spcAft>
-              <a:buSzPct val="100000"/>
-              <a:buChar char="•"/>
-            </a:pPr>
-            <a:r>
-              <a:rPr lang="en-US" sz="1350" dirty="0">
-                <a:solidFill>
-                  <a:srgbClr val="191919"/>
+              <a:buNone/>
+            </a:pPr>
+            <a:r>
+              <a:rPr lang="en-US" sz="1150" dirty="0">
+                <a:solidFill>
+                  <a:srgbClr val="6B6B66"/>
                 </a:solidFill>
                 <a:latin typeface="Arial" pitchFamily="34" charset="0"/>
                 <a:ea typeface="Arial" pitchFamily="34" charset="-122"/>
                 <a:cs typeface="Arial" pitchFamily="34" charset="-120"/>
               </a:rPr>
-              <a:t>Author one policy rule of your own and make the harness pass with it</a:t>
-            </a:r>
-            <a:endParaRPr lang="en-US" sz="1350" dirty="0"/>
-          </a:p>
-        </p:txBody>
-      </p:sp>
-      <p:sp>
-        <p:nvSpPr>
-          <p:cNvPr id="5" name="Shape 3"/>
-          <p:cNvSpPr/>
-          <p:nvPr/>
-        </p:nvSpPr>
-        <p:spPr>
-          <a:xfrm>
-            <a:off x="5486400" y="1463040"/>
-            <a:ext cx="3108960" cy="2286000"/>
+              <a:t>try.js gives an instant decision. The 22-check harness catches regressions.</a:t>
+            </a:r>
+            <a:endParaRPr lang="en-US" sz="1300" dirty="0"/>
+          </a:p>
+        </p:txBody>
+      </p:sp>
+      <p:sp>
+        <p:nvSpPr>
+          <p:cNvPr id="10" name="Shape 8"/>
+          <p:cNvSpPr/>
+          <p:nvPr/>
+        </p:nvSpPr>
+        <p:spPr>
+          <a:xfrm>
+            <a:off x="4681728" y="1554480"/>
+            <a:ext cx="1847088" cy="1828800"/>
           </a:xfrm>
           <a:prstGeom prst="rect">
             <a:avLst/>
@@ -2210,14 +2524,14 @@
       </p:sp>
       <p:sp>
         <p:nvSpPr>
-          <p:cNvPr id="6" name="Text 4"/>
-          <p:cNvSpPr/>
-          <p:nvPr/>
-        </p:nvSpPr>
-        <p:spPr>
-          <a:xfrm>
-            <a:off x="5742432" y="1691640"/>
-            <a:ext cx="2596896" cy="274320"/>
+          <p:cNvPr id="11" name="Text 9"/>
+          <p:cNvSpPr/>
+          <p:nvPr/>
+        </p:nvSpPr>
+        <p:spPr>
+          <a:xfrm>
+            <a:off x="4864608" y="1700784"/>
+            <a:ext cx="457200" cy="411480"/>
           </a:xfrm>
           <a:prstGeom prst="rect">
             <a:avLst/>
@@ -2229,66 +2543,249 @@
           <a:bodyPr wrap="square" lIns="0" tIns="0" rIns="0" bIns="0" rtlCol="0" anchor="ctr"/>
           <a:lstStyle/>
           <a:p>
-            <a:pPr algn="l" indent="0" marL="0">
-              <a:buNone/>
-            </a:pPr>
-            <a:r>
-              <a:rPr lang="en-US" sz="1050" b="1" spc="300" kern="0" dirty="0">
-                <a:solidFill>
-                  <a:srgbClr val="6B6B66"/>
+            <a:pPr indent="0" marL="0">
+              <a:buNone/>
+            </a:pPr>
+            <a:r>
+              <a:rPr lang="en-US" sz="2000" dirty="0">
+                <a:solidFill>
+                  <a:srgbClr val="CC785C"/>
+                </a:solidFill>
+                <a:latin typeface="Georgia" pitchFamily="34" charset="0"/>
+                <a:ea typeface="Georgia" pitchFamily="34" charset="-122"/>
+                <a:cs typeface="Georgia" pitchFamily="34" charset="-120"/>
+              </a:rPr>
+              <a:t>3</a:t>
+            </a:r>
+            <a:endParaRPr lang="en-US" sz="2000" dirty="0"/>
+          </a:p>
+        </p:txBody>
+      </p:sp>
+      <p:sp>
+        <p:nvSpPr>
+          <p:cNvPr id="12" name="Text 10"/>
+          <p:cNvSpPr/>
+          <p:nvPr/>
+        </p:nvSpPr>
+        <p:spPr>
+          <a:xfrm>
+            <a:off x="4864608" y="2148840"/>
+            <a:ext cx="1481328" cy="1051560"/>
+          </a:xfrm>
+          <a:prstGeom prst="rect">
+            <a:avLst/>
+          </a:prstGeom>
+          <a:noFill/>
+          <a:ln/>
+        </p:spPr>
+        <p:txBody>
+          <a:bodyPr wrap="square" lIns="0" tIns="0" rIns="0" bIns="0" rtlCol="0" anchor="t"/>
+          <a:lstStyle/>
+          <a:p>
+            <a:pPr indent="0" marL="0">
+              <a:spcAft>
+                <a:spcPts val="400"/>
+              </a:spcAft>
+              <a:buNone/>
+            </a:pPr>
+            <a:r>
+              <a:rPr lang="en-US" sz="1300" b="1" dirty="0">
+                <a:solidFill>
+                  <a:srgbClr val="191919"/>
                 </a:solidFill>
                 <a:latin typeface="Arial" pitchFamily="34" charset="0"/>
                 <a:ea typeface="Arial" pitchFamily="34" charset="-122"/>
                 <a:cs typeface="Arial" pitchFamily="34" charset="-120"/>
               </a:rPr>
-              <a:t>THE BAR FOR LEAVING</a:t>
-            </a:r>
-            <a:endParaRPr lang="en-US" sz="1050" dirty="0"/>
-          </a:p>
-        </p:txBody>
-      </p:sp>
-      <p:sp>
-        <p:nvSpPr>
-          <p:cNvPr id="7" name="Text 5"/>
-          <p:cNvSpPr/>
-          <p:nvPr/>
-        </p:nvSpPr>
-        <p:spPr>
-          <a:xfrm>
-            <a:off x="5742432" y="2103120"/>
-            <a:ext cx="2596896" cy="1463040"/>
-          </a:xfrm>
-          <a:prstGeom prst="rect">
-            <a:avLst/>
-          </a:prstGeom>
-          <a:noFill/>
-          <a:ln/>
-        </p:spPr>
-        <p:txBody>
-          <a:bodyPr wrap="square" lIns="0" tIns="0" rIns="0" bIns="0" rtlCol="0" anchor="t"/>
-          <a:lstStyle/>
+              <a:t>Bump the version</a:t>
+            </a:r>
+            <a:endParaRPr lang="en-US" sz="1300" dirty="0"/>
+          </a:p>
           <a:p>
             <a:pPr indent="0" marL="0">
-              <a:buNone/>
-            </a:pPr>
-            <a:r>
-              <a:rPr lang="en-US" sz="1550" dirty="0">
-                <a:solidFill>
-                  <a:srgbClr val="191919"/>
+              <a:spcAft>
+                <a:spcPts val="400"/>
+              </a:spcAft>
+              <a:buNone/>
+            </a:pPr>
+            <a:r>
+              <a:rPr lang="en-US" sz="1150" dirty="0">
+                <a:solidFill>
+                  <a:srgbClr val="6B6B66"/>
+                </a:solidFill>
+                <a:latin typeface="Arial" pitchFamily="34" charset="0"/>
+                <a:ea typeface="Arial" pitchFamily="34" charset="-122"/>
+                <a:cs typeface="Arial" pitchFamily="34" charset="-120"/>
+              </a:rPr>
+              <a:t>1.0.0 to 1.0.1 in plugin.json. Push. PR review as usual.</a:t>
+            </a:r>
+            <a:endParaRPr lang="en-US" sz="1300" dirty="0"/>
+          </a:p>
+        </p:txBody>
+      </p:sp>
+      <p:sp>
+        <p:nvSpPr>
+          <p:cNvPr id="13" name="Shape 11"/>
+          <p:cNvSpPr/>
+          <p:nvPr/>
+        </p:nvSpPr>
+        <p:spPr>
+          <a:xfrm>
+            <a:off x="6748272" y="1554480"/>
+            <a:ext cx="1847088" cy="1828800"/>
+          </a:xfrm>
+          <a:prstGeom prst="rect">
+            <a:avLst/>
+          </a:prstGeom>
+          <a:solidFill>
+            <a:srgbClr val="F0EEE6"/>
+          </a:solidFill>
+          <a:ln/>
+        </p:spPr>
+      </p:sp>
+      <p:sp>
+        <p:nvSpPr>
+          <p:cNvPr id="14" name="Text 12"/>
+          <p:cNvSpPr/>
+          <p:nvPr/>
+        </p:nvSpPr>
+        <p:spPr>
+          <a:xfrm>
+            <a:off x="6931152" y="1700784"/>
+            <a:ext cx="457200" cy="411480"/>
+          </a:xfrm>
+          <a:prstGeom prst="rect">
+            <a:avLst/>
+          </a:prstGeom>
+          <a:noFill/>
+          <a:ln/>
+        </p:spPr>
+        <p:txBody>
+          <a:bodyPr wrap="square" lIns="0" tIns="0" rIns="0" bIns="0" rtlCol="0" anchor="ctr"/>
+          <a:lstStyle/>
+          <a:p>
+            <a:pPr indent="0" marL="0">
+              <a:buNone/>
+            </a:pPr>
+            <a:r>
+              <a:rPr lang="en-US" sz="2000" dirty="0">
+                <a:solidFill>
+                  <a:srgbClr val="CC785C"/>
                 </a:solidFill>
                 <a:latin typeface="Georgia" pitchFamily="34" charset="0"/>
                 <a:ea typeface="Georgia" pitchFamily="34" charset="-122"/>
                 <a:cs typeface="Georgia" pitchFamily="34" charset="-120"/>
               </a:rPr>
-              <a:t>Everyone has personally authored a rule and watched it block.</a:t>
-            </a:r>
-            <a:endParaRPr lang="en-US" sz="1550" dirty="0"/>
-          </a:p>
-        </p:txBody>
-      </p:sp>
-      <p:sp>
-        <p:nvSpPr>
-          <p:cNvPr id="8" name="Text 6"/>
+              <a:t>4</a:t>
+            </a:r>
+            <a:endParaRPr lang="en-US" sz="2000" dirty="0"/>
+          </a:p>
+        </p:txBody>
+      </p:sp>
+      <p:sp>
+        <p:nvSpPr>
+          <p:cNvPr id="15" name="Text 13"/>
+          <p:cNvSpPr/>
+          <p:nvPr/>
+        </p:nvSpPr>
+        <p:spPr>
+          <a:xfrm>
+            <a:off x="6931152" y="2148840"/>
+            <a:ext cx="1481328" cy="1051560"/>
+          </a:xfrm>
+          <a:prstGeom prst="rect">
+            <a:avLst/>
+          </a:prstGeom>
+          <a:noFill/>
+          <a:ln/>
+        </p:spPr>
+        <p:txBody>
+          <a:bodyPr wrap="square" lIns="0" tIns="0" rIns="0" bIns="0" rtlCol="0" anchor="t"/>
+          <a:lstStyle/>
+          <a:p>
+            <a:pPr indent="0" marL="0">
+              <a:spcAft>
+                <a:spcPts val="400"/>
+              </a:spcAft>
+              <a:buNone/>
+            </a:pPr>
+            <a:r>
+              <a:rPr lang="en-US" sz="1300" b="1" dirty="0">
+                <a:solidFill>
+                  <a:srgbClr val="191919"/>
+                </a:solidFill>
+                <a:latin typeface="Arial" pitchFamily="34" charset="0"/>
+                <a:ea typeface="Arial" pitchFamily="34" charset="-122"/>
+                <a:cs typeface="Arial" pitchFamily="34" charset="-120"/>
+              </a:rPr>
+              <a:t>Update the fleet</a:t>
+            </a:r>
+            <a:endParaRPr lang="en-US" sz="1300" dirty="0"/>
+          </a:p>
+          <a:p>
+            <a:pPr indent="0" marL="0">
+              <a:spcAft>
+                <a:spcPts val="400"/>
+              </a:spcAft>
+              <a:buNone/>
+            </a:pPr>
+            <a:r>
+              <a:rPr lang="en-US" sz="1150" dirty="0">
+                <a:solidFill>
+                  <a:srgbClr val="6B6B66"/>
+                </a:solidFill>
+                <a:latin typeface="Arial" pitchFamily="34" charset="0"/>
+                <a:ea typeface="Arial" pitchFamily="34" charset="-122"/>
+                <a:cs typeface="Arial" pitchFamily="34" charset="-120"/>
+              </a:rPr>
+              <a:t>One command per engineer, or managed settings do it for them.</a:t>
+            </a:r>
+            <a:endParaRPr lang="en-US" sz="1300" dirty="0"/>
+          </a:p>
+        </p:txBody>
+      </p:sp>
+      <p:sp>
+        <p:nvSpPr>
+          <p:cNvPr id="16" name="Text 14"/>
+          <p:cNvSpPr/>
+          <p:nvPr/>
+        </p:nvSpPr>
+        <p:spPr>
+          <a:xfrm>
+            <a:off x="548640" y="3703320"/>
+            <a:ext cx="7315200" cy="411480"/>
+          </a:xfrm>
+          <a:prstGeom prst="rect">
+            <a:avLst/>
+          </a:prstGeom>
+          <a:noFill/>
+          <a:ln/>
+        </p:spPr>
+        <p:txBody>
+          <a:bodyPr wrap="square" lIns="0" tIns="0" rIns="0" bIns="0" rtlCol="0" anchor="ctr"/>
+          <a:lstStyle/>
+          <a:p>
+            <a:pPr indent="0" marL="0">
+              <a:buNone/>
+            </a:pPr>
+            <a:r>
+              <a:rPr lang="en-US" sz="1600" dirty="0">
+                <a:solidFill>
+                  <a:srgbClr val="191919"/>
+                </a:solidFill>
+                <a:latin typeface="Georgia" pitchFamily="34" charset="0"/>
+                <a:ea typeface="Georgia" pitchFamily="34" charset="-122"/>
+                <a:cs typeface="Georgia" pitchFamily="34" charset="-120"/>
+              </a:rPr>
+              <a:t>One PR updates every engineer's agent.</a:t>
+            </a:r>
+            <a:endParaRPr lang="en-US" sz="1600" dirty="0"/>
+          </a:p>
+        </p:txBody>
+      </p:sp>
+      <p:sp>
+        <p:nvSpPr>
+          <p:cNvPr id="17" name="Text 15"/>
           <p:cNvSpPr/>
           <p:nvPr/>
         </p:nvSpPr>
@@ -2410,7 +2907,7 @@
                 <a:ea typeface="Georgia" pitchFamily="34" charset="-122"/>
                 <a:cs typeface="Georgia" pitchFamily="34" charset="-120"/>
               </a:rPr>
-              <a:t>Make it yours.</a:t>
+              <a:t>The 4-beat demo. The next twelve minutes, live.</a:t>
             </a:r>
             <a:endParaRPr lang="en-US" sz="2600" dirty="0"/>
           </a:p>
@@ -2418,14 +2915,34 @@
       </p:sp>
       <p:sp>
         <p:nvSpPr>
-          <p:cNvPr id="4" name="Text 2"/>
-          <p:cNvSpPr/>
-          <p:nvPr/>
-        </p:nvSpPr>
-        <p:spPr>
-          <a:xfrm>
-            <a:off x="548640" y="1463040"/>
-            <a:ext cx="411480" cy="457200"/>
+          <p:cNvPr id="4" name="Shape 2"/>
+          <p:cNvSpPr/>
+          <p:nvPr/>
+        </p:nvSpPr>
+        <p:spPr>
+          <a:xfrm>
+            <a:off x="548640" y="1417320"/>
+            <a:ext cx="3886200" cy="1417320"/>
+          </a:xfrm>
+          <a:prstGeom prst="rect">
+            <a:avLst/>
+          </a:prstGeom>
+          <a:solidFill>
+            <a:srgbClr val="F0EEE6"/>
+          </a:solidFill>
+          <a:ln/>
+        </p:spPr>
+      </p:sp>
+      <p:sp>
+        <p:nvSpPr>
+          <p:cNvPr id="5" name="Text 3"/>
+          <p:cNvSpPr/>
+          <p:nvPr/>
+        </p:nvSpPr>
+        <p:spPr>
+          <a:xfrm>
+            <a:off x="804672" y="1618488"/>
+            <a:ext cx="3374136" cy="365760"/>
           </a:xfrm>
           <a:prstGeom prst="rect">
             <a:avLst/>
@@ -2441,30 +2958,89 @@
               <a:buNone/>
             </a:pPr>
             <a:r>
-              <a:rPr lang="en-US" sz="1900" dirty="0">
-                <a:solidFill>
-                  <a:srgbClr val="CC785C"/>
+              <a:rPr lang="en-US" sz="1700" dirty="0">
+                <a:solidFill>
+                  <a:srgbClr val="191919"/>
                 </a:solidFill>
                 <a:latin typeface="Georgia" pitchFamily="34" charset="0"/>
                 <a:ea typeface="Georgia" pitchFamily="34" charset="-122"/>
                 <a:cs typeface="Georgia" pitchFamily="34" charset="-120"/>
               </a:rPr>
-              <a:t>1</a:t>
-            </a:r>
-            <a:endParaRPr lang="en-US" sz="1900" dirty="0"/>
-          </a:p>
-        </p:txBody>
-      </p:sp>
-      <p:sp>
-        <p:nvSpPr>
-          <p:cNvPr id="5" name="Text 3"/>
-          <p:cNvSpPr/>
-          <p:nvPr/>
-        </p:nvSpPr>
-        <p:spPr>
-          <a:xfrm>
-            <a:off x="1051560" y="1481328"/>
-            <a:ext cx="6858000" cy="457200"/>
+              <a:t>Install</a:t>
+            </a:r>
+            <a:endParaRPr lang="en-US" sz="1700" dirty="0"/>
+          </a:p>
+        </p:txBody>
+      </p:sp>
+      <p:sp>
+        <p:nvSpPr>
+          <p:cNvPr id="6" name="Text 4"/>
+          <p:cNvSpPr/>
+          <p:nvPr/>
+        </p:nvSpPr>
+        <p:spPr>
+          <a:xfrm>
+            <a:off x="804672" y="2039112"/>
+            <a:ext cx="3374136" cy="594360"/>
+          </a:xfrm>
+          <a:prstGeom prst="rect">
+            <a:avLst/>
+          </a:prstGeom>
+          <a:noFill/>
+          <a:ln/>
+        </p:spPr>
+        <p:txBody>
+          <a:bodyPr wrap="square" lIns="0" tIns="0" rIns="0" bIns="0" rtlCol="0" anchor="t"/>
+          <a:lstStyle/>
+          <a:p>
+            <a:pPr indent="0" marL="0">
+              <a:buNone/>
+            </a:pPr>
+            <a:r>
+              <a:rPr lang="en-US" sz="1250" dirty="0">
+                <a:solidFill>
+                  <a:srgbClr val="6B6B66"/>
+                </a:solidFill>
+                <a:latin typeface="Arial" pitchFamily="34" charset="0"/>
+                <a:ea typeface="Arial" pitchFamily="34" charset="-122"/>
+                <a:cs typeface="Arial" pitchFamily="34" charset="-120"/>
+              </a:rPr>
+              <a:t>One command, ninety seconds. Not a setup doc.</a:t>
+            </a:r>
+            <a:endParaRPr lang="en-US" sz="1250" dirty="0"/>
+          </a:p>
+        </p:txBody>
+      </p:sp>
+      <p:sp>
+        <p:nvSpPr>
+          <p:cNvPr id="7" name="Shape 5"/>
+          <p:cNvSpPr/>
+          <p:nvPr/>
+        </p:nvSpPr>
+        <p:spPr>
+          <a:xfrm>
+            <a:off x="4709160" y="1417320"/>
+            <a:ext cx="3886200" cy="1417320"/>
+          </a:xfrm>
+          <a:prstGeom prst="rect">
+            <a:avLst/>
+          </a:prstGeom>
+          <a:solidFill>
+            <a:srgbClr val="F0EEE6"/>
+          </a:solidFill>
+          <a:ln/>
+        </p:spPr>
+      </p:sp>
+      <p:sp>
+        <p:nvSpPr>
+          <p:cNvPr id="8" name="Text 6"/>
+          <p:cNvSpPr/>
+          <p:nvPr/>
+        </p:nvSpPr>
+        <p:spPr>
+          <a:xfrm>
+            <a:off x="4965192" y="1618488"/>
+            <a:ext cx="3374136" cy="365760"/>
           </a:xfrm>
           <a:prstGeom prst="rect">
             <a:avLst/>
@@ -2488,7 +3064,7 @@
                 <a:ea typeface="Georgia" pitchFamily="34" charset="-122"/>
                 <a:cs typeface="Georgia" pitchFamily="34" charset="-120"/>
               </a:rPr>
-              <a:t>Who owns tooling standards</a:t>
+              <a:t>Use</a:t>
             </a:r>
             <a:endParaRPr lang="en-US" sz="1700" dirty="0"/>
           </a:p>
@@ -2496,37 +3072,73 @@
       </p:sp>
       <p:sp>
         <p:nvSpPr>
-          <p:cNvPr id="6" name="Shape 4"/>
-          <p:cNvSpPr/>
-          <p:nvPr/>
-        </p:nvSpPr>
-        <p:spPr>
-          <a:xfrm>
-            <a:off x="548640" y="2029968"/>
-            <a:ext cx="7589520" cy="0"/>
-          </a:xfrm>
-          <a:prstGeom prst="line">
-            <a:avLst/>
-          </a:prstGeom>
-          <a:noFill/>
-          <a:ln w="19050">
-            <a:solidFill>
-              <a:srgbClr val="F0EEE6"/>
-            </a:solidFill>
-            <a:prstDash val="solid"/>
-          </a:ln>
-        </p:spPr>
-      </p:sp>
-      <p:sp>
-        <p:nvSpPr>
-          <p:cNvPr id="7" name="Text 5"/>
-          <p:cNvSpPr/>
-          <p:nvPr/>
-        </p:nvSpPr>
-        <p:spPr>
-          <a:xfrm>
-            <a:off x="548640" y="2176272"/>
-            <a:ext cx="411480" cy="457200"/>
+          <p:cNvPr id="9" name="Text 7"/>
+          <p:cNvSpPr/>
+          <p:nvPr/>
+        </p:nvSpPr>
+        <p:spPr>
+          <a:xfrm>
+            <a:off x="4965192" y="2039112"/>
+            <a:ext cx="3374136" cy="594360"/>
+          </a:xfrm>
+          <a:prstGeom prst="rect">
+            <a:avLst/>
+          </a:prstGeom>
+          <a:noFill/>
+          <a:ln/>
+        </p:spPr>
+        <p:txBody>
+          <a:bodyPr wrap="square" lIns="0" tIns="0" rIns="0" bIns="0" rtlCol="0" anchor="t"/>
+          <a:lstStyle/>
+          <a:p>
+            <a:pPr indent="0" marL="0">
+              <a:buNone/>
+            </a:pPr>
+            <a:r>
+              <a:rPr lang="en-US" sz="1250" dirty="0">
+                <a:solidFill>
+                  <a:srgbClr val="6B6B66"/>
+                </a:solidFill>
+                <a:latin typeface="Arial" pitchFamily="34" charset="0"/>
+                <a:ea typeface="Arial" pitchFamily="34" charset="-122"/>
+                <a:cs typeface="Arial" pitchFamily="34" charset="-120"/>
+              </a:rPr>
+              <a:t>Your conventions, applied by your reviewer. Not generic AI taste.</a:t>
+            </a:r>
+            <a:endParaRPr lang="en-US" sz="1250" dirty="0"/>
+          </a:p>
+        </p:txBody>
+      </p:sp>
+      <p:sp>
+        <p:nvSpPr>
+          <p:cNvPr id="10" name="Shape 8"/>
+          <p:cNvSpPr/>
+          <p:nvPr/>
+        </p:nvSpPr>
+        <p:spPr>
+          <a:xfrm>
+            <a:off x="548640" y="3063240"/>
+            <a:ext cx="3886200" cy="1417320"/>
+          </a:xfrm>
+          <a:prstGeom prst="rect">
+            <a:avLst/>
+          </a:prstGeom>
+          <a:solidFill>
+            <a:srgbClr val="F0EEE6"/>
+          </a:solidFill>
+          <a:ln/>
+        </p:spPr>
+      </p:sp>
+      <p:sp>
+        <p:nvSpPr>
+          <p:cNvPr id="11" name="Text 9"/>
+          <p:cNvSpPr/>
+          <p:nvPr/>
+        </p:nvSpPr>
+        <p:spPr>
+          <a:xfrm>
+            <a:off x="804672" y="3264408"/>
+            <a:ext cx="3374136" cy="365760"/>
           </a:xfrm>
           <a:prstGeom prst="rect">
             <a:avLst/>
@@ -2542,30 +3154,89 @@
               <a:buNone/>
             </a:pPr>
             <a:r>
-              <a:rPr lang="en-US" sz="1900" dirty="0">
-                <a:solidFill>
-                  <a:srgbClr val="CC785C"/>
+              <a:rPr lang="en-US" sz="1700" dirty="0">
+                <a:solidFill>
+                  <a:srgbClr val="191919"/>
                 </a:solidFill>
                 <a:latin typeface="Georgia" pitchFamily="34" charset="0"/>
                 <a:ea typeface="Georgia" pitchFamily="34" charset="-122"/>
                 <a:cs typeface="Georgia" pitchFamily="34" charset="-120"/>
               </a:rPr>
-              <a:t>2</a:t>
-            </a:r>
-            <a:endParaRPr lang="en-US" sz="1900" dirty="0"/>
-          </a:p>
-        </p:txBody>
-      </p:sp>
-      <p:sp>
-        <p:nvSpPr>
-          <p:cNvPr id="8" name="Text 6"/>
-          <p:cNvSpPr/>
-          <p:nvPr/>
-        </p:nvSpPr>
-        <p:spPr>
-          <a:xfrm>
-            <a:off x="1051560" y="2194560"/>
-            <a:ext cx="6858000" cy="457200"/>
+              <a:t>Govern</a:t>
+            </a:r>
+            <a:endParaRPr lang="en-US" sz="1700" dirty="0"/>
+          </a:p>
+        </p:txBody>
+      </p:sp>
+      <p:sp>
+        <p:nvSpPr>
+          <p:cNvPr id="12" name="Text 10"/>
+          <p:cNvSpPr/>
+          <p:nvPr/>
+        </p:nvSpPr>
+        <p:spPr>
+          <a:xfrm>
+            <a:off x="804672" y="3685032"/>
+            <a:ext cx="3374136" cy="594360"/>
+          </a:xfrm>
+          <a:prstGeom prst="rect">
+            <a:avLst/>
+          </a:prstGeom>
+          <a:noFill/>
+          <a:ln/>
+        </p:spPr>
+        <p:txBody>
+          <a:bodyPr wrap="square" lIns="0" tIns="0" rIns="0" bIns="0" rtlCol="0" anchor="t"/>
+          <a:lstStyle/>
+          <a:p>
+            <a:pPr indent="0" marL="0">
+              <a:buNone/>
+            </a:pPr>
+            <a:r>
+              <a:rPr lang="en-US" sz="1250" dirty="0">
+                <a:solidFill>
+                  <a:srgbClr val="6B6B66"/>
+                </a:solidFill>
+                <a:latin typeface="Arial" pitchFamily="34" charset="0"/>
+                <a:ea typeface="Arial" pitchFamily="34" charset="-122"/>
+                <a:cs typeface="Arial" pitchFamily="34" charset="-120"/>
+              </a:rPr>
+              <a:t>A deterministic deny with an audit line. Not a hope.</a:t>
+            </a:r>
+            <a:endParaRPr lang="en-US" sz="1250" dirty="0"/>
+          </a:p>
+        </p:txBody>
+      </p:sp>
+      <p:sp>
+        <p:nvSpPr>
+          <p:cNvPr id="13" name="Shape 11"/>
+          <p:cNvSpPr/>
+          <p:nvPr/>
+        </p:nvSpPr>
+        <p:spPr>
+          <a:xfrm>
+            <a:off x="4709160" y="3063240"/>
+            <a:ext cx="3886200" cy="1417320"/>
+          </a:xfrm>
+          <a:prstGeom prst="rect">
+            <a:avLst/>
+          </a:prstGeom>
+          <a:solidFill>
+            <a:srgbClr val="F0EEE6"/>
+          </a:solidFill>
+          <a:ln/>
+        </p:spPr>
+      </p:sp>
+      <p:sp>
+        <p:nvSpPr>
+          <p:cNvPr id="14" name="Text 12"/>
+          <p:cNvSpPr/>
+          <p:nvPr/>
+        </p:nvSpPr>
+        <p:spPr>
+          <a:xfrm>
+            <a:off x="4965192" y="3264408"/>
+            <a:ext cx="3374136" cy="365760"/>
           </a:xfrm>
           <a:prstGeom prst="rect">
             <a:avLst/>
@@ -2589,7 +3260,7 @@
                 <a:ea typeface="Georgia" pitchFamily="34" charset="-122"/>
                 <a:cs typeface="Georgia" pitchFamily="34" charset="-120"/>
               </a:rPr>
-              <a:t>What's your agent audit story</a:t>
+              <a:t>Ship</a:t>
             </a:r>
             <a:endParaRPr lang="en-US" sz="1700" dirty="0"/>
           </a:p>
@@ -2597,131 +3268,30 @@
       </p:sp>
       <p:sp>
         <p:nvSpPr>
-          <p:cNvPr id="9" name="Shape 7"/>
-          <p:cNvSpPr/>
-          <p:nvPr/>
-        </p:nvSpPr>
-        <p:spPr>
-          <a:xfrm>
-            <a:off x="548640" y="2743200"/>
-            <a:ext cx="7589520" cy="0"/>
-          </a:xfrm>
-          <a:prstGeom prst="line">
-            <a:avLst/>
-          </a:prstGeom>
-          <a:noFill/>
-          <a:ln w="19050">
-            <a:solidFill>
-              <a:srgbClr val="F0EEE6"/>
-            </a:solidFill>
-            <a:prstDash val="solid"/>
-          </a:ln>
-        </p:spPr>
-      </p:sp>
-      <p:sp>
-        <p:nvSpPr>
-          <p:cNvPr id="10" name="Text 8"/>
-          <p:cNvSpPr/>
-          <p:nvPr/>
-        </p:nvSpPr>
-        <p:spPr>
-          <a:xfrm>
-            <a:off x="548640" y="2889504"/>
-            <a:ext cx="411480" cy="457200"/>
-          </a:xfrm>
-          <a:prstGeom prst="rect">
-            <a:avLst/>
-          </a:prstGeom>
-          <a:noFill/>
-          <a:ln/>
-        </p:spPr>
-        <p:txBody>
-          <a:bodyPr wrap="square" lIns="0" tIns="0" rIns="0" bIns="0" rtlCol="0" anchor="ctr"/>
+          <p:cNvPr id="15" name="Text 13"/>
+          <p:cNvSpPr/>
+          <p:nvPr/>
+        </p:nvSpPr>
+        <p:spPr>
+          <a:xfrm>
+            <a:off x="4965192" y="3685032"/>
+            <a:ext cx="3374136" cy="594360"/>
+          </a:xfrm>
+          <a:prstGeom prst="rect">
+            <a:avLst/>
+          </a:prstGeom>
+          <a:noFill/>
+          <a:ln/>
+        </p:spPr>
+        <p:txBody>
+          <a:bodyPr wrap="square" lIns="0" tIns="0" rIns="0" bIns="0" rtlCol="0" anchor="t"/>
           <a:lstStyle/>
           <a:p>
             <a:pPr indent="0" marL="0">
               <a:buNone/>
             </a:pPr>
             <a:r>
-              <a:rPr lang="en-US" sz="1900" dirty="0">
-                <a:solidFill>
-                  <a:srgbClr val="CC785C"/>
-                </a:solidFill>
-                <a:latin typeface="Georgia" pitchFamily="34" charset="0"/>
-                <a:ea typeface="Georgia" pitchFamily="34" charset="-122"/>
-                <a:cs typeface="Georgia" pitchFamily="34" charset="-120"/>
-              </a:rPr>
-              <a:t>3</a:t>
-            </a:r>
-            <a:endParaRPr lang="en-US" sz="1900" dirty="0"/>
-          </a:p>
-        </p:txBody>
-      </p:sp>
-      <p:sp>
-        <p:nvSpPr>
-          <p:cNvPr id="11" name="Text 9"/>
-          <p:cNvSpPr/>
-          <p:nvPr/>
-        </p:nvSpPr>
-        <p:spPr>
-          <a:xfrm>
-            <a:off x="1051560" y="2907792"/>
-            <a:ext cx="6858000" cy="457200"/>
-          </a:xfrm>
-          <a:prstGeom prst="rect">
-            <a:avLst/>
-          </a:prstGeom>
-          <a:noFill/>
-          <a:ln/>
-        </p:spPr>
-        <p:txBody>
-          <a:bodyPr wrap="square" lIns="0" tIns="0" rIns="0" bIns="0" rtlCol="0" anchor="ctr"/>
-          <a:lstStyle/>
-          <a:p>
-            <a:pPr indent="0" marL="0">
-              <a:buNone/>
-            </a:pPr>
-            <a:r>
-              <a:rPr lang="en-US" sz="1700" dirty="0">
-                <a:solidFill>
-                  <a:srgbClr val="191919"/>
-                </a:solidFill>
-                <a:latin typeface="Georgia" pitchFamily="34" charset="0"/>
-                <a:ea typeface="Georgia" pitchFamily="34" charset="-122"/>
-                <a:cs typeface="Georgia" pitchFamily="34" charset="-120"/>
-              </a:rPr>
-              <a:t>What command should an agent never run here</a:t>
-            </a:r>
-            <a:endParaRPr lang="en-US" sz="1700" dirty="0"/>
-          </a:p>
-        </p:txBody>
-      </p:sp>
-      <p:sp>
-        <p:nvSpPr>
-          <p:cNvPr id="12" name="Text 10"/>
-          <p:cNvSpPr/>
-          <p:nvPr/>
-        </p:nvSpPr>
-        <p:spPr>
-          <a:xfrm>
-            <a:off x="548640" y="3977640"/>
-            <a:ext cx="2743200" cy="274320"/>
-          </a:xfrm>
-          <a:prstGeom prst="rect">
-            <a:avLst/>
-          </a:prstGeom>
-          <a:noFill/>
-          <a:ln/>
-        </p:spPr>
-        <p:txBody>
-          <a:bodyPr wrap="square" lIns="0" tIns="0" rIns="0" bIns="0" rtlCol="0" anchor="ctr"/>
-          <a:lstStyle/>
-          <a:p>
-            <a:pPr algn="l" indent="0" marL="0">
-              <a:buNone/>
-            </a:pPr>
-            <a:r>
-              <a:rPr lang="en-US" sz="1050" b="1" spc="300" kern="0" dirty="0">
+              <a:rPr lang="en-US" sz="1250" dirty="0">
                 <a:solidFill>
                   <a:srgbClr val="6B6B66"/>
                 </a:solidFill>
@@ -2729,54 +3299,15 @@
                 <a:ea typeface="Arial" pitchFamily="34" charset="-122"/>
                 <a:cs typeface="Arial" pitchFamily="34" charset="-120"/>
               </a:rPr>
-              <a:t>THE NEXT STEP</a:t>
-            </a:r>
-            <a:endParaRPr lang="en-US" sz="1050" dirty="0"/>
-          </a:p>
-        </p:txBody>
-      </p:sp>
-      <p:sp>
-        <p:nvSpPr>
-          <p:cNvPr id="13" name="Text 11"/>
-          <p:cNvSpPr/>
-          <p:nvPr/>
-        </p:nvSpPr>
-        <p:spPr>
-          <a:xfrm>
-            <a:off x="548640" y="4279392"/>
-            <a:ext cx="7589520" cy="411480"/>
-          </a:xfrm>
-          <a:prstGeom prst="rect">
-            <a:avLst/>
-          </a:prstGeom>
-          <a:noFill/>
-          <a:ln/>
-        </p:spPr>
-        <p:txBody>
-          <a:bodyPr wrap="square" lIns="0" tIns="0" rIns="0" bIns="0" rtlCol="0" anchor="ctr"/>
-          <a:lstStyle/>
-          <a:p>
-            <a:pPr indent="0" marL="0">
-              <a:buNone/>
-            </a:pPr>
-            <a:r>
-              <a:rPr lang="en-US" sz="1400" dirty="0">
-                <a:solidFill>
-                  <a:srgbClr val="191919"/>
-                </a:solidFill>
-                <a:latin typeface="Arial" pitchFamily="34" charset="0"/>
-                <a:ea typeface="Arial" pitchFamily="34" charset="-122"/>
-                <a:cs typeface="Arial" pitchFamily="34" charset="-120"/>
-              </a:rPr>
-              <a:t>Fork the repo, swap in your conventions, and ship your own policy gate inside two weeks.</a:t>
-            </a:r>
-            <a:endParaRPr lang="en-US" sz="1400" dirty="0"/>
-          </a:p>
-        </p:txBody>
-      </p:sp>
-      <p:sp>
-        <p:nvSpPr>
-          <p:cNvPr id="14" name="Text 12"/>
+              <a:t>One version bump updates every engineer. Not a Slack reminder.</a:t>
+            </a:r>
+            <a:endParaRPr lang="en-US" sz="1250" dirty="0"/>
+          </a:p>
+        </p:txBody>
+      </p:sp>
+      <p:sp>
+        <p:nvSpPr>
+          <p:cNvPr id="16" name="Text 14"/>
           <p:cNvSpPr/>
           <p:nvPr/>
         </p:nvSpPr>
@@ -2898,6 +3429,828 @@
                 <a:ea typeface="Georgia" pitchFamily="34" charset="-122"/>
                 <a:cs typeface="Georgia" pitchFamily="34" charset="-120"/>
               </a:rPr>
+              <a:t>Your turn. Minutes 20 to 26.</a:t>
+            </a:r>
+            <a:endParaRPr lang="en-US" sz="2600" dirty="0"/>
+          </a:p>
+        </p:txBody>
+      </p:sp>
+      <p:sp>
+        <p:nvSpPr>
+          <p:cNvPr id="4" name="Text 2"/>
+          <p:cNvSpPr/>
+          <p:nvPr/>
+        </p:nvSpPr>
+        <p:spPr>
+          <a:xfrm>
+            <a:off x="548640" y="1463040"/>
+            <a:ext cx="4663440" cy="2377440"/>
+          </a:xfrm>
+          <a:prstGeom prst="rect">
+            <a:avLst/>
+          </a:prstGeom>
+          <a:noFill/>
+          <a:ln/>
+        </p:spPr>
+        <p:txBody>
+          <a:bodyPr wrap="square" lIns="0" tIns="0" rIns="0" bIns="0" rtlCol="0" anchor="t"/>
+          <a:lstStyle/>
+          <a:p>
+            <a:pPr marL="342900" indent="-342900">
+              <a:spcAft>
+                <a:spcPts val="1400"/>
+              </a:spcAft>
+              <a:buSzPct val="100000"/>
+              <a:buChar char="•"/>
+            </a:pPr>
+            <a:r>
+              <a:rPr lang="en-US" sz="1350" dirty="0">
+                <a:solidFill>
+                  <a:srgbClr val="191919"/>
+                </a:solidFill>
+                <a:latin typeface="Arial" pitchFamily="34" charset="0"/>
+                <a:ea typeface="Arial" pitchFamily="34" charset="-122"/>
+                <a:cs typeface="Arial" pitchFamily="34" charset="-120"/>
+              </a:rPr>
+              <a:t>Run the 22-check harness from your own clone</a:t>
+            </a:r>
+            <a:endParaRPr lang="en-US" sz="1350" dirty="0"/>
+          </a:p>
+          <a:p>
+            <a:pPr marL="342900" indent="-342900">
+              <a:spcAft>
+                <a:spcPts val="1400"/>
+              </a:spcAft>
+              <a:buSzPct val="100000"/>
+              <a:buChar char="•"/>
+            </a:pPr>
+            <a:r>
+              <a:rPr lang="en-US" sz="1350" dirty="0">
+                <a:solidFill>
+                  <a:srgbClr val="191919"/>
+                </a:solidFill>
+                <a:latin typeface="Arial" pitchFamily="34" charset="0"/>
+                <a:ea typeface="Arial" pitchFamily="34" charset="-122"/>
+                <a:cs typeface="Arial" pitchFamily="34" charset="-120"/>
+              </a:rPr>
+              <a:t>Install the plugin from the local marketplace</a:t>
+            </a:r>
+            <a:endParaRPr lang="en-US" sz="1350" dirty="0"/>
+          </a:p>
+          <a:p>
+            <a:pPr marL="342900" indent="-342900">
+              <a:spcAft>
+                <a:spcPts val="1400"/>
+              </a:spcAft>
+              <a:buSzPct val="100000"/>
+              <a:buChar char="•"/>
+            </a:pPr>
+            <a:r>
+              <a:rPr lang="en-US" sz="1350" dirty="0">
+                <a:solidFill>
+                  <a:srgbClr val="191919"/>
+                </a:solidFill>
+                <a:latin typeface="Arial" pitchFamily="34" charset="0"/>
+                <a:ea typeface="Arial" pitchFamily="34" charset="-122"/>
+                <a:cs typeface="Arial" pitchFamily="34" charset="-120"/>
+              </a:rPr>
+              <a:t>Trigger one deny yourself and read the audit line it wrote</a:t>
+            </a:r>
+            <a:endParaRPr lang="en-US" sz="1350" dirty="0"/>
+          </a:p>
+          <a:p>
+            <a:pPr marL="342900" indent="-342900">
+              <a:spcAft>
+                <a:spcPts val="1400"/>
+              </a:spcAft>
+              <a:buSzPct val="100000"/>
+              <a:buChar char="•"/>
+            </a:pPr>
+            <a:r>
+              <a:rPr lang="en-US" sz="1350" dirty="0">
+                <a:solidFill>
+                  <a:srgbClr val="191919"/>
+                </a:solidFill>
+                <a:latin typeface="Arial" pitchFamily="34" charset="0"/>
+                <a:ea typeface="Arial" pitchFamily="34" charset="-122"/>
+                <a:cs typeface="Arial" pitchFamily="34" charset="-120"/>
+              </a:rPr>
+              <a:t>Author one policy rule of your own and make the harness pass with it</a:t>
+            </a:r>
+            <a:endParaRPr lang="en-US" sz="1350" dirty="0"/>
+          </a:p>
+        </p:txBody>
+      </p:sp>
+      <p:sp>
+        <p:nvSpPr>
+          <p:cNvPr id="5" name="Shape 3"/>
+          <p:cNvSpPr/>
+          <p:nvPr/>
+        </p:nvSpPr>
+        <p:spPr>
+          <a:xfrm>
+            <a:off x="5486400" y="1463040"/>
+            <a:ext cx="3108960" cy="2286000"/>
+          </a:xfrm>
+          <a:prstGeom prst="rect">
+            <a:avLst/>
+          </a:prstGeom>
+          <a:solidFill>
+            <a:srgbClr val="F0EEE6"/>
+          </a:solidFill>
+          <a:ln/>
+        </p:spPr>
+      </p:sp>
+      <p:sp>
+        <p:nvSpPr>
+          <p:cNvPr id="6" name="Text 4"/>
+          <p:cNvSpPr/>
+          <p:nvPr/>
+        </p:nvSpPr>
+        <p:spPr>
+          <a:xfrm>
+            <a:off x="5742432" y="1691640"/>
+            <a:ext cx="2596896" cy="274320"/>
+          </a:xfrm>
+          <a:prstGeom prst="rect">
+            <a:avLst/>
+          </a:prstGeom>
+          <a:noFill/>
+          <a:ln/>
+        </p:spPr>
+        <p:txBody>
+          <a:bodyPr wrap="square" lIns="0" tIns="0" rIns="0" bIns="0" rtlCol="0" anchor="ctr"/>
+          <a:lstStyle/>
+          <a:p>
+            <a:pPr algn="l" indent="0" marL="0">
+              <a:buNone/>
+            </a:pPr>
+            <a:r>
+              <a:rPr lang="en-US" sz="1050" b="1" spc="300" kern="0" dirty="0">
+                <a:solidFill>
+                  <a:srgbClr val="6B6B66"/>
+                </a:solidFill>
+                <a:latin typeface="Arial" pitchFamily="34" charset="0"/>
+                <a:ea typeface="Arial" pitchFamily="34" charset="-122"/>
+                <a:cs typeface="Arial" pitchFamily="34" charset="-120"/>
+              </a:rPr>
+              <a:t>THE BAR FOR LEAVING</a:t>
+            </a:r>
+            <a:endParaRPr lang="en-US" sz="1050" dirty="0"/>
+          </a:p>
+        </p:txBody>
+      </p:sp>
+      <p:sp>
+        <p:nvSpPr>
+          <p:cNvPr id="7" name="Text 5"/>
+          <p:cNvSpPr/>
+          <p:nvPr/>
+        </p:nvSpPr>
+        <p:spPr>
+          <a:xfrm>
+            <a:off x="5742432" y="2103120"/>
+            <a:ext cx="2596896" cy="1463040"/>
+          </a:xfrm>
+          <a:prstGeom prst="rect">
+            <a:avLst/>
+          </a:prstGeom>
+          <a:noFill/>
+          <a:ln/>
+        </p:spPr>
+        <p:txBody>
+          <a:bodyPr wrap="square" lIns="0" tIns="0" rIns="0" bIns="0" rtlCol="0" anchor="t"/>
+          <a:lstStyle/>
+          <a:p>
+            <a:pPr indent="0" marL="0">
+              <a:buNone/>
+            </a:pPr>
+            <a:r>
+              <a:rPr lang="en-US" sz="1550" dirty="0">
+                <a:solidFill>
+                  <a:srgbClr val="191919"/>
+                </a:solidFill>
+                <a:latin typeface="Georgia" pitchFamily="34" charset="0"/>
+                <a:ea typeface="Georgia" pitchFamily="34" charset="-122"/>
+                <a:cs typeface="Georgia" pitchFamily="34" charset="-120"/>
+              </a:rPr>
+              <a:t>Everyone has personally authored a rule and watched it block.</a:t>
+            </a:r>
+            <a:endParaRPr lang="en-US" sz="1550" dirty="0"/>
+          </a:p>
+        </p:txBody>
+      </p:sp>
+      <p:sp>
+        <p:nvSpPr>
+          <p:cNvPr id="8" name="Text 6"/>
+          <p:cNvSpPr/>
+          <p:nvPr/>
+        </p:nvSpPr>
+        <p:spPr>
+          <a:xfrm>
+            <a:off x="8458200" y="4759452"/>
+            <a:ext cx="320040" cy="274320"/>
+          </a:xfrm>
+          <a:prstGeom prst="rect">
+            <a:avLst/>
+          </a:prstGeom>
+          <a:noFill/>
+          <a:ln/>
+        </p:spPr>
+        <p:txBody>
+          <a:bodyPr wrap="square" lIns="0" tIns="0" rIns="0" bIns="0" rtlCol="0" anchor="ctr"/>
+          <a:lstStyle/>
+          <a:p>
+            <a:pPr algn="r" indent="0" marL="0">
+              <a:buNone/>
+            </a:pPr>
+            <a:r>
+              <a:rPr lang="en-US" sz="900" dirty="0">
+                <a:solidFill>
+                  <a:srgbClr val="6B6B66"/>
+                </a:solidFill>
+                <a:latin typeface="Arial" pitchFamily="34" charset="0"/>
+                <a:ea typeface="Arial" pitchFamily="34" charset="-122"/>
+                <a:cs typeface="Arial" pitchFamily="34" charset="-120"/>
+              </a:rPr>
+              <a:t>12</a:t>
+            </a:r>
+            <a:endParaRPr lang="en-US" sz="900" dirty="0"/>
+          </a:p>
+        </p:txBody>
+      </p:sp>
+    </p:spTree>
+  </p:cSld>
+  <p:clrMapOvr>
+    <a:masterClrMapping/>
+  </p:clrMapOvr>
+</p:sld>
+</file>
+
+<file path=ppt/slides/slide13.xml><?xml version="1.0" encoding="utf-8"?>
+<p:sld xmlns:a="http://schemas.openxmlformats.org/drawingml/2006/main" xmlns:r="http://schemas.openxmlformats.org/officeDocument/2006/relationships" xmlns:p="http://schemas.openxmlformats.org/presentationml/2006/main">
+  <p:cSld name="Slide 13">
+    <p:bg>
+      <p:bgPr>
+        <a:solidFill>
+          <a:srgbClr val="FAF9F5"/>
+        </a:solidFill>
+      </p:bgPr>
+    </p:bg>
+    <p:spTree>
+      <p:nvGrpSpPr>
+        <p:cNvPr id="1" name=""/>
+        <p:cNvGrpSpPr/>
+        <p:nvPr/>
+      </p:nvGrpSpPr>
+      <p:grpSpPr>
+        <a:xfrm>
+          <a:off x="0" y="0"/>
+          <a:ext cx="0" cy="0"/>
+          <a:chOff x="0" y="0"/>
+          <a:chExt cx="0" cy="0"/>
+        </a:xfrm>
+      </p:grpSpPr>
+      <p:sp>
+        <p:nvSpPr>
+          <p:cNvPr id="2" name="Shape 0"/>
+          <p:cNvSpPr/>
+          <p:nvPr/>
+        </p:nvSpPr>
+        <p:spPr>
+          <a:xfrm>
+            <a:off x="548640" y="457200"/>
+            <a:ext cx="457200" cy="25603"/>
+          </a:xfrm>
+          <a:prstGeom prst="rect">
+            <a:avLst/>
+          </a:prstGeom>
+          <a:solidFill>
+            <a:srgbClr val="CC785C"/>
+          </a:solidFill>
+          <a:ln/>
+        </p:spPr>
+      </p:sp>
+      <p:sp>
+        <p:nvSpPr>
+          <p:cNvPr id="3" name="Text 1"/>
+          <p:cNvSpPr/>
+          <p:nvPr/>
+        </p:nvSpPr>
+        <p:spPr>
+          <a:xfrm>
+            <a:off x="548640" y="566928"/>
+            <a:ext cx="8046720" cy="685800"/>
+          </a:xfrm>
+          <a:prstGeom prst="rect">
+            <a:avLst/>
+          </a:prstGeom>
+          <a:noFill/>
+          <a:ln/>
+        </p:spPr>
+        <p:txBody>
+          <a:bodyPr wrap="square" lIns="0" tIns="0" rIns="0" bIns="0" rtlCol="0" anchor="t"/>
+          <a:lstStyle/>
+          <a:p>
+            <a:pPr algn="l" indent="0" marL="0">
+              <a:buNone/>
+            </a:pPr>
+            <a:r>
+              <a:rPr lang="en-US" sz="2600" dirty="0">
+                <a:solidFill>
+                  <a:srgbClr val="191919"/>
+                </a:solidFill>
+                <a:latin typeface="Georgia" pitchFamily="34" charset="0"/>
+                <a:ea typeface="Georgia" pitchFamily="34" charset="-122"/>
+                <a:cs typeface="Georgia" pitchFamily="34" charset="-120"/>
+              </a:rPr>
+              <a:t>Make it yours.</a:t>
+            </a:r>
+            <a:endParaRPr lang="en-US" sz="2600" dirty="0"/>
+          </a:p>
+        </p:txBody>
+      </p:sp>
+      <p:sp>
+        <p:nvSpPr>
+          <p:cNvPr id="4" name="Text 2"/>
+          <p:cNvSpPr/>
+          <p:nvPr/>
+        </p:nvSpPr>
+        <p:spPr>
+          <a:xfrm>
+            <a:off x="548640" y="1463040"/>
+            <a:ext cx="411480" cy="457200"/>
+          </a:xfrm>
+          <a:prstGeom prst="rect">
+            <a:avLst/>
+          </a:prstGeom>
+          <a:noFill/>
+          <a:ln/>
+        </p:spPr>
+        <p:txBody>
+          <a:bodyPr wrap="square" lIns="0" tIns="0" rIns="0" bIns="0" rtlCol="0" anchor="ctr"/>
+          <a:lstStyle/>
+          <a:p>
+            <a:pPr indent="0" marL="0">
+              <a:buNone/>
+            </a:pPr>
+            <a:r>
+              <a:rPr lang="en-US" sz="1900" dirty="0">
+                <a:solidFill>
+                  <a:srgbClr val="CC785C"/>
+                </a:solidFill>
+                <a:latin typeface="Georgia" pitchFamily="34" charset="0"/>
+                <a:ea typeface="Georgia" pitchFamily="34" charset="-122"/>
+                <a:cs typeface="Georgia" pitchFamily="34" charset="-120"/>
+              </a:rPr>
+              <a:t>1</a:t>
+            </a:r>
+            <a:endParaRPr lang="en-US" sz="1900" dirty="0"/>
+          </a:p>
+        </p:txBody>
+      </p:sp>
+      <p:sp>
+        <p:nvSpPr>
+          <p:cNvPr id="5" name="Text 3"/>
+          <p:cNvSpPr/>
+          <p:nvPr/>
+        </p:nvSpPr>
+        <p:spPr>
+          <a:xfrm>
+            <a:off x="1051560" y="1481328"/>
+            <a:ext cx="6858000" cy="457200"/>
+          </a:xfrm>
+          <a:prstGeom prst="rect">
+            <a:avLst/>
+          </a:prstGeom>
+          <a:noFill/>
+          <a:ln/>
+        </p:spPr>
+        <p:txBody>
+          <a:bodyPr wrap="square" lIns="0" tIns="0" rIns="0" bIns="0" rtlCol="0" anchor="ctr"/>
+          <a:lstStyle/>
+          <a:p>
+            <a:pPr indent="0" marL="0">
+              <a:buNone/>
+            </a:pPr>
+            <a:r>
+              <a:rPr lang="en-US" sz="1700" dirty="0">
+                <a:solidFill>
+                  <a:srgbClr val="191919"/>
+                </a:solidFill>
+                <a:latin typeface="Georgia" pitchFamily="34" charset="0"/>
+                <a:ea typeface="Georgia" pitchFamily="34" charset="-122"/>
+                <a:cs typeface="Georgia" pitchFamily="34" charset="-120"/>
+              </a:rPr>
+              <a:t>Who owns tooling standards</a:t>
+            </a:r>
+            <a:endParaRPr lang="en-US" sz="1700" dirty="0"/>
+          </a:p>
+        </p:txBody>
+      </p:sp>
+      <p:sp>
+        <p:nvSpPr>
+          <p:cNvPr id="6" name="Shape 4"/>
+          <p:cNvSpPr/>
+          <p:nvPr/>
+        </p:nvSpPr>
+        <p:spPr>
+          <a:xfrm>
+            <a:off x="548640" y="2029968"/>
+            <a:ext cx="7589520" cy="0"/>
+          </a:xfrm>
+          <a:prstGeom prst="line">
+            <a:avLst/>
+          </a:prstGeom>
+          <a:noFill/>
+          <a:ln w="19050">
+            <a:solidFill>
+              <a:srgbClr val="F0EEE6"/>
+            </a:solidFill>
+            <a:prstDash val="solid"/>
+          </a:ln>
+        </p:spPr>
+      </p:sp>
+      <p:sp>
+        <p:nvSpPr>
+          <p:cNvPr id="7" name="Text 5"/>
+          <p:cNvSpPr/>
+          <p:nvPr/>
+        </p:nvSpPr>
+        <p:spPr>
+          <a:xfrm>
+            <a:off x="548640" y="2176272"/>
+            <a:ext cx="411480" cy="457200"/>
+          </a:xfrm>
+          <a:prstGeom prst="rect">
+            <a:avLst/>
+          </a:prstGeom>
+          <a:noFill/>
+          <a:ln/>
+        </p:spPr>
+        <p:txBody>
+          <a:bodyPr wrap="square" lIns="0" tIns="0" rIns="0" bIns="0" rtlCol="0" anchor="ctr"/>
+          <a:lstStyle/>
+          <a:p>
+            <a:pPr indent="0" marL="0">
+              <a:buNone/>
+            </a:pPr>
+            <a:r>
+              <a:rPr lang="en-US" sz="1900" dirty="0">
+                <a:solidFill>
+                  <a:srgbClr val="CC785C"/>
+                </a:solidFill>
+                <a:latin typeface="Georgia" pitchFamily="34" charset="0"/>
+                <a:ea typeface="Georgia" pitchFamily="34" charset="-122"/>
+                <a:cs typeface="Georgia" pitchFamily="34" charset="-120"/>
+              </a:rPr>
+              <a:t>2</a:t>
+            </a:r>
+            <a:endParaRPr lang="en-US" sz="1900" dirty="0"/>
+          </a:p>
+        </p:txBody>
+      </p:sp>
+      <p:sp>
+        <p:nvSpPr>
+          <p:cNvPr id="8" name="Text 6"/>
+          <p:cNvSpPr/>
+          <p:nvPr/>
+        </p:nvSpPr>
+        <p:spPr>
+          <a:xfrm>
+            <a:off x="1051560" y="2194560"/>
+            <a:ext cx="6858000" cy="457200"/>
+          </a:xfrm>
+          <a:prstGeom prst="rect">
+            <a:avLst/>
+          </a:prstGeom>
+          <a:noFill/>
+          <a:ln/>
+        </p:spPr>
+        <p:txBody>
+          <a:bodyPr wrap="square" lIns="0" tIns="0" rIns="0" bIns="0" rtlCol="0" anchor="ctr"/>
+          <a:lstStyle/>
+          <a:p>
+            <a:pPr indent="0" marL="0">
+              <a:buNone/>
+            </a:pPr>
+            <a:r>
+              <a:rPr lang="en-US" sz="1700" dirty="0">
+                <a:solidFill>
+                  <a:srgbClr val="191919"/>
+                </a:solidFill>
+                <a:latin typeface="Georgia" pitchFamily="34" charset="0"/>
+                <a:ea typeface="Georgia" pitchFamily="34" charset="-122"/>
+                <a:cs typeface="Georgia" pitchFamily="34" charset="-120"/>
+              </a:rPr>
+              <a:t>What's your agent audit story</a:t>
+            </a:r>
+            <a:endParaRPr lang="en-US" sz="1700" dirty="0"/>
+          </a:p>
+        </p:txBody>
+      </p:sp>
+      <p:sp>
+        <p:nvSpPr>
+          <p:cNvPr id="9" name="Shape 7"/>
+          <p:cNvSpPr/>
+          <p:nvPr/>
+        </p:nvSpPr>
+        <p:spPr>
+          <a:xfrm>
+            <a:off x="548640" y="2743200"/>
+            <a:ext cx="7589520" cy="0"/>
+          </a:xfrm>
+          <a:prstGeom prst="line">
+            <a:avLst/>
+          </a:prstGeom>
+          <a:noFill/>
+          <a:ln w="19050">
+            <a:solidFill>
+              <a:srgbClr val="F0EEE6"/>
+            </a:solidFill>
+            <a:prstDash val="solid"/>
+          </a:ln>
+        </p:spPr>
+      </p:sp>
+      <p:sp>
+        <p:nvSpPr>
+          <p:cNvPr id="10" name="Text 8"/>
+          <p:cNvSpPr/>
+          <p:nvPr/>
+        </p:nvSpPr>
+        <p:spPr>
+          <a:xfrm>
+            <a:off x="548640" y="2889504"/>
+            <a:ext cx="411480" cy="457200"/>
+          </a:xfrm>
+          <a:prstGeom prst="rect">
+            <a:avLst/>
+          </a:prstGeom>
+          <a:noFill/>
+          <a:ln/>
+        </p:spPr>
+        <p:txBody>
+          <a:bodyPr wrap="square" lIns="0" tIns="0" rIns="0" bIns="0" rtlCol="0" anchor="ctr"/>
+          <a:lstStyle/>
+          <a:p>
+            <a:pPr indent="0" marL="0">
+              <a:buNone/>
+            </a:pPr>
+            <a:r>
+              <a:rPr lang="en-US" sz="1900" dirty="0">
+                <a:solidFill>
+                  <a:srgbClr val="CC785C"/>
+                </a:solidFill>
+                <a:latin typeface="Georgia" pitchFamily="34" charset="0"/>
+                <a:ea typeface="Georgia" pitchFamily="34" charset="-122"/>
+                <a:cs typeface="Georgia" pitchFamily="34" charset="-120"/>
+              </a:rPr>
+              <a:t>3</a:t>
+            </a:r>
+            <a:endParaRPr lang="en-US" sz="1900" dirty="0"/>
+          </a:p>
+        </p:txBody>
+      </p:sp>
+      <p:sp>
+        <p:nvSpPr>
+          <p:cNvPr id="11" name="Text 9"/>
+          <p:cNvSpPr/>
+          <p:nvPr/>
+        </p:nvSpPr>
+        <p:spPr>
+          <a:xfrm>
+            <a:off x="1051560" y="2907792"/>
+            <a:ext cx="6858000" cy="457200"/>
+          </a:xfrm>
+          <a:prstGeom prst="rect">
+            <a:avLst/>
+          </a:prstGeom>
+          <a:noFill/>
+          <a:ln/>
+        </p:spPr>
+        <p:txBody>
+          <a:bodyPr wrap="square" lIns="0" tIns="0" rIns="0" bIns="0" rtlCol="0" anchor="ctr"/>
+          <a:lstStyle/>
+          <a:p>
+            <a:pPr indent="0" marL="0">
+              <a:buNone/>
+            </a:pPr>
+            <a:r>
+              <a:rPr lang="en-US" sz="1700" dirty="0">
+                <a:solidFill>
+                  <a:srgbClr val="191919"/>
+                </a:solidFill>
+                <a:latin typeface="Georgia" pitchFamily="34" charset="0"/>
+                <a:ea typeface="Georgia" pitchFamily="34" charset="-122"/>
+                <a:cs typeface="Georgia" pitchFamily="34" charset="-120"/>
+              </a:rPr>
+              <a:t>What command should an agent never run here</a:t>
+            </a:r>
+            <a:endParaRPr lang="en-US" sz="1700" dirty="0"/>
+          </a:p>
+        </p:txBody>
+      </p:sp>
+      <p:sp>
+        <p:nvSpPr>
+          <p:cNvPr id="12" name="Text 10"/>
+          <p:cNvSpPr/>
+          <p:nvPr/>
+        </p:nvSpPr>
+        <p:spPr>
+          <a:xfrm>
+            <a:off x="548640" y="3977640"/>
+            <a:ext cx="2743200" cy="274320"/>
+          </a:xfrm>
+          <a:prstGeom prst="rect">
+            <a:avLst/>
+          </a:prstGeom>
+          <a:noFill/>
+          <a:ln/>
+        </p:spPr>
+        <p:txBody>
+          <a:bodyPr wrap="square" lIns="0" tIns="0" rIns="0" bIns="0" rtlCol="0" anchor="ctr"/>
+          <a:lstStyle/>
+          <a:p>
+            <a:pPr algn="l" indent="0" marL="0">
+              <a:buNone/>
+            </a:pPr>
+            <a:r>
+              <a:rPr lang="en-US" sz="1050" b="1" spc="300" kern="0" dirty="0">
+                <a:solidFill>
+                  <a:srgbClr val="6B6B66"/>
+                </a:solidFill>
+                <a:latin typeface="Arial" pitchFamily="34" charset="0"/>
+                <a:ea typeface="Arial" pitchFamily="34" charset="-122"/>
+                <a:cs typeface="Arial" pitchFamily="34" charset="-120"/>
+              </a:rPr>
+              <a:t>THE NEXT STEP</a:t>
+            </a:r>
+            <a:endParaRPr lang="en-US" sz="1050" dirty="0"/>
+          </a:p>
+        </p:txBody>
+      </p:sp>
+      <p:sp>
+        <p:nvSpPr>
+          <p:cNvPr id="13" name="Text 11"/>
+          <p:cNvSpPr/>
+          <p:nvPr/>
+        </p:nvSpPr>
+        <p:spPr>
+          <a:xfrm>
+            <a:off x="548640" y="4279392"/>
+            <a:ext cx="7589520" cy="411480"/>
+          </a:xfrm>
+          <a:prstGeom prst="rect">
+            <a:avLst/>
+          </a:prstGeom>
+          <a:noFill/>
+          <a:ln/>
+        </p:spPr>
+        <p:txBody>
+          <a:bodyPr wrap="square" lIns="0" tIns="0" rIns="0" bIns="0" rtlCol="0" anchor="ctr"/>
+          <a:lstStyle/>
+          <a:p>
+            <a:pPr indent="0" marL="0">
+              <a:buNone/>
+            </a:pPr>
+            <a:r>
+              <a:rPr lang="en-US" sz="1400" dirty="0">
+                <a:solidFill>
+                  <a:srgbClr val="191919"/>
+                </a:solidFill>
+                <a:latin typeface="Arial" pitchFamily="34" charset="0"/>
+                <a:ea typeface="Arial" pitchFamily="34" charset="-122"/>
+                <a:cs typeface="Arial" pitchFamily="34" charset="-120"/>
+              </a:rPr>
+              <a:t>Fork the repo, swap in your conventions, and ship your own policy gate inside two weeks.</a:t>
+            </a:r>
+            <a:endParaRPr lang="en-US" sz="1400" dirty="0"/>
+          </a:p>
+        </p:txBody>
+      </p:sp>
+      <p:sp>
+        <p:nvSpPr>
+          <p:cNvPr id="14" name="Text 12"/>
+          <p:cNvSpPr/>
+          <p:nvPr/>
+        </p:nvSpPr>
+        <p:spPr>
+          <a:xfrm>
+            <a:off x="8458200" y="4759452"/>
+            <a:ext cx="320040" cy="274320"/>
+          </a:xfrm>
+          <a:prstGeom prst="rect">
+            <a:avLst/>
+          </a:prstGeom>
+          <a:noFill/>
+          <a:ln/>
+        </p:spPr>
+        <p:txBody>
+          <a:bodyPr wrap="square" lIns="0" tIns="0" rIns="0" bIns="0" rtlCol="0" anchor="ctr"/>
+          <a:lstStyle/>
+          <a:p>
+            <a:pPr algn="r" indent="0" marL="0">
+              <a:buNone/>
+            </a:pPr>
+            <a:r>
+              <a:rPr lang="en-US" sz="900" dirty="0">
+                <a:solidFill>
+                  <a:srgbClr val="6B6B66"/>
+                </a:solidFill>
+                <a:latin typeface="Arial" pitchFamily="34" charset="0"/>
+                <a:ea typeface="Arial" pitchFamily="34" charset="-122"/>
+                <a:cs typeface="Arial" pitchFamily="34" charset="-120"/>
+              </a:rPr>
+              <a:t>13</a:t>
+            </a:r>
+            <a:endParaRPr lang="en-US" sz="900" dirty="0"/>
+          </a:p>
+        </p:txBody>
+      </p:sp>
+    </p:spTree>
+  </p:cSld>
+  <p:clrMapOvr>
+    <a:masterClrMapping/>
+  </p:clrMapOvr>
+</p:sld>
+</file>
+
+<file path=ppt/slides/slide14.xml><?xml version="1.0" encoding="utf-8"?>
+<p:sld xmlns:a="http://schemas.openxmlformats.org/drawingml/2006/main" xmlns:r="http://schemas.openxmlformats.org/officeDocument/2006/relationships" xmlns:p="http://schemas.openxmlformats.org/presentationml/2006/main">
+  <p:cSld name="Slide 14">
+    <p:bg>
+      <p:bgPr>
+        <a:solidFill>
+          <a:srgbClr val="FAF9F5"/>
+        </a:solidFill>
+      </p:bgPr>
+    </p:bg>
+    <p:spTree>
+      <p:nvGrpSpPr>
+        <p:cNvPr id="1" name=""/>
+        <p:cNvGrpSpPr/>
+        <p:nvPr/>
+      </p:nvGrpSpPr>
+      <p:grpSpPr>
+        <a:xfrm>
+          <a:off x="0" y="0"/>
+          <a:ext cx="0" cy="0"/>
+          <a:chOff x="0" y="0"/>
+          <a:chExt cx="0" cy="0"/>
+        </a:xfrm>
+      </p:grpSpPr>
+      <p:sp>
+        <p:nvSpPr>
+          <p:cNvPr id="2" name="Shape 0"/>
+          <p:cNvSpPr/>
+          <p:nvPr/>
+        </p:nvSpPr>
+        <p:spPr>
+          <a:xfrm>
+            <a:off x="548640" y="457200"/>
+            <a:ext cx="457200" cy="25603"/>
+          </a:xfrm>
+          <a:prstGeom prst="rect">
+            <a:avLst/>
+          </a:prstGeom>
+          <a:solidFill>
+            <a:srgbClr val="CC785C"/>
+          </a:solidFill>
+          <a:ln/>
+        </p:spPr>
+      </p:sp>
+      <p:sp>
+        <p:nvSpPr>
+          <p:cNvPr id="3" name="Text 1"/>
+          <p:cNvSpPr/>
+          <p:nvPr/>
+        </p:nvSpPr>
+        <p:spPr>
+          <a:xfrm>
+            <a:off x="548640" y="566928"/>
+            <a:ext cx="8046720" cy="685800"/>
+          </a:xfrm>
+          <a:prstGeom prst="rect">
+            <a:avLst/>
+          </a:prstGeom>
+          <a:noFill/>
+          <a:ln/>
+        </p:spPr>
+        <p:txBody>
+          <a:bodyPr wrap="square" lIns="0" tIns="0" rIns="0" bIns="0" rtlCol="0" anchor="t"/>
+          <a:lstStyle/>
+          <a:p>
+            <a:pPr algn="l" indent="0" marL="0">
+              <a:buNone/>
+            </a:pPr>
+            <a:r>
+              <a:rPr lang="en-US" sz="2600" dirty="0">
+                <a:solidFill>
+                  <a:srgbClr val="191919"/>
+                </a:solidFill>
+                <a:latin typeface="Georgia" pitchFamily="34" charset="0"/>
+                <a:ea typeface="Georgia" pitchFamily="34" charset="-122"/>
+                <a:cs typeface="Georgia" pitchFamily="34" charset="-120"/>
+              </a:rPr>
               <a:t>Recap, then run it in your repo.</a:t>
             </a:r>
             <a:endParaRPr lang="en-US" sz="2600" dirty="0"/>
@@ -3414,7 +4767,7 @@
                 <a:ea typeface="Arial" pitchFamily="34" charset="-122"/>
                 <a:cs typeface="Arial" pitchFamily="34" charset="-120"/>
               </a:rPr>
-              <a:t>12</a:t>
+              <a:t>14</a:t>
             </a:r>
             <a:endParaRPr lang="en-US" sz="900" dirty="0"/>
           </a:p>
@@ -5318,7 +6671,7 @@
                 <a:ea typeface="Georgia" pitchFamily="34" charset="-122"/>
                 <a:cs typeface="Georgia" pitchFamily="34" charset="-120"/>
               </a:rPr>
-              <a:t>Principle 1. The plugin is the unit of rollout.</a:t>
+              <a:t>What a plugin is.</a:t>
             </a:r>
             <a:endParaRPr lang="en-US" sz="2600" dirty="0"/>
           </a:p>
@@ -5326,13 +6679,52 @@
       </p:sp>
       <p:sp>
         <p:nvSpPr>
-          <p:cNvPr id="4" name="Shape 2"/>
-          <p:cNvSpPr/>
-          <p:nvPr/>
-        </p:nvSpPr>
-        <p:spPr>
-          <a:xfrm>
-            <a:off x="548640" y="1600200"/>
+          <p:cNvPr id="4" name="Text 2"/>
+          <p:cNvSpPr/>
+          <p:nvPr/>
+        </p:nvSpPr>
+        <p:spPr>
+          <a:xfrm>
+            <a:off x="548640" y="1207008"/>
+            <a:ext cx="8046720" cy="502920"/>
+          </a:xfrm>
+          <a:prstGeom prst="rect">
+            <a:avLst/>
+          </a:prstGeom>
+          <a:noFill/>
+          <a:ln/>
+        </p:spPr>
+        <p:txBody>
+          <a:bodyPr wrap="square" lIns="0" tIns="0" rIns="0" bIns="0" rtlCol="0" anchor="t"/>
+          <a:lstStyle/>
+          <a:p>
+            <a:pPr indent="0" marL="0">
+              <a:buNone/>
+            </a:pPr>
+            <a:r>
+              <a:rPr lang="en-US" sz="1300" dirty="0">
+                <a:solidFill>
+                  <a:srgbClr val="6B6B66"/>
+                </a:solidFill>
+                <a:latin typeface="Arial" pitchFamily="34" charset="0"/>
+                <a:ea typeface="Arial" pitchFamily="34" charset="-122"/>
+                <a:cs typeface="Arial" pitchFamily="34" charset="-120"/>
+              </a:rPr>
+              <a:t>Your team's Claude Code setup, shipped as one versioned package: skills, agents, hooks, and policy, installed from a marketplace your platform team owns.</a:t>
+            </a:r>
+            <a:endParaRPr lang="en-US" sz="1300" dirty="0"/>
+          </a:p>
+        </p:txBody>
+      </p:sp>
+      <p:sp>
+        <p:nvSpPr>
+          <p:cNvPr id="5" name="Shape 3"/>
+          <p:cNvSpPr/>
+          <p:nvPr/>
+        </p:nvSpPr>
+        <p:spPr>
+          <a:xfrm>
+            <a:off x="548640" y="1874520"/>
             <a:ext cx="2194560" cy="1417320"/>
           </a:xfrm>
           <a:prstGeom prst="rect">
@@ -5351,13 +6743,13 @@
       </p:sp>
       <p:sp>
         <p:nvSpPr>
-          <p:cNvPr id="5" name="Text 3"/>
-          <p:cNvSpPr/>
-          <p:nvPr/>
-        </p:nvSpPr>
-        <p:spPr>
-          <a:xfrm>
-            <a:off x="731520" y="1746504"/>
+          <p:cNvPr id="6" name="Text 4"/>
+          <p:cNvSpPr/>
+          <p:nvPr/>
+        </p:nvSpPr>
+        <p:spPr>
+          <a:xfrm>
+            <a:off x="731520" y="2020824"/>
             <a:ext cx="1828800" cy="292608"/>
           </a:xfrm>
           <a:prstGeom prst="rect">
@@ -5390,13 +6782,13 @@
       </p:sp>
       <p:sp>
         <p:nvSpPr>
-          <p:cNvPr id="6" name="Text 4"/>
-          <p:cNvSpPr/>
-          <p:nvPr/>
-        </p:nvSpPr>
-        <p:spPr>
-          <a:xfrm>
-            <a:off x="731520" y="2103120"/>
+          <p:cNvPr id="7" name="Text 5"/>
+          <p:cNvSpPr/>
+          <p:nvPr/>
+        </p:nvSpPr>
+        <p:spPr>
+          <a:xfrm>
+            <a:off x="731520" y="2377440"/>
             <a:ext cx="1828800" cy="777240"/>
           </a:xfrm>
           <a:prstGeom prst="rect">
@@ -5446,13 +6838,13 @@
       </p:sp>
       <p:sp>
         <p:nvSpPr>
-          <p:cNvPr id="7" name="Text 5"/>
-          <p:cNvSpPr/>
-          <p:nvPr/>
-        </p:nvSpPr>
-        <p:spPr>
-          <a:xfrm>
-            <a:off x="2862072" y="2080260"/>
+          <p:cNvPr id="8" name="Text 6"/>
+          <p:cNvSpPr/>
+          <p:nvPr/>
+        </p:nvSpPr>
+        <p:spPr>
+          <a:xfrm>
+            <a:off x="2862072" y="2354580"/>
             <a:ext cx="402336" cy="457200"/>
           </a:xfrm>
           <a:prstGeom prst="rect">
@@ -5485,13 +6877,13 @@
       </p:sp>
       <p:sp>
         <p:nvSpPr>
-          <p:cNvPr id="8" name="Shape 6"/>
-          <p:cNvSpPr/>
-          <p:nvPr/>
-        </p:nvSpPr>
-        <p:spPr>
-          <a:xfrm>
-            <a:off x="3383280" y="1600200"/>
+          <p:cNvPr id="9" name="Shape 7"/>
+          <p:cNvSpPr/>
+          <p:nvPr/>
+        </p:nvSpPr>
+        <p:spPr>
+          <a:xfrm>
+            <a:off x="3383280" y="1874520"/>
             <a:ext cx="2194560" cy="1417320"/>
           </a:xfrm>
           <a:prstGeom prst="rect">
@@ -5510,13 +6902,13 @@
       </p:sp>
       <p:sp>
         <p:nvSpPr>
-          <p:cNvPr id="9" name="Text 7"/>
-          <p:cNvSpPr/>
-          <p:nvPr/>
-        </p:nvSpPr>
-        <p:spPr>
-          <a:xfrm>
-            <a:off x="3566160" y="1746504"/>
+          <p:cNvPr id="10" name="Text 8"/>
+          <p:cNvSpPr/>
+          <p:nvPr/>
+        </p:nvSpPr>
+        <p:spPr>
+          <a:xfrm>
+            <a:off x="3566160" y="2020824"/>
             <a:ext cx="1828800" cy="292608"/>
           </a:xfrm>
           <a:prstGeom prst="rect">
@@ -5549,13 +6941,13 @@
       </p:sp>
       <p:sp>
         <p:nvSpPr>
-          <p:cNvPr id="10" name="Text 8"/>
-          <p:cNvSpPr/>
-          <p:nvPr/>
-        </p:nvSpPr>
-        <p:spPr>
-          <a:xfrm>
-            <a:off x="3566160" y="2103120"/>
+          <p:cNvPr id="11" name="Text 9"/>
+          <p:cNvSpPr/>
+          <p:nvPr/>
+        </p:nvSpPr>
+        <p:spPr>
+          <a:xfrm>
+            <a:off x="3566160" y="2377440"/>
             <a:ext cx="1828800" cy="777240"/>
           </a:xfrm>
           <a:prstGeom prst="rect">
@@ -5605,13 +6997,13 @@
       </p:sp>
       <p:sp>
         <p:nvSpPr>
-          <p:cNvPr id="11" name="Text 9"/>
-          <p:cNvSpPr/>
-          <p:nvPr/>
-        </p:nvSpPr>
-        <p:spPr>
-          <a:xfrm>
-            <a:off x="5696712" y="2080260"/>
+          <p:cNvPr id="12" name="Text 10"/>
+          <p:cNvSpPr/>
+          <p:nvPr/>
+        </p:nvSpPr>
+        <p:spPr>
+          <a:xfrm>
+            <a:off x="5696712" y="2354580"/>
             <a:ext cx="402336" cy="457200"/>
           </a:xfrm>
           <a:prstGeom prst="rect">
@@ -5644,13 +7036,13 @@
       </p:sp>
       <p:sp>
         <p:nvSpPr>
-          <p:cNvPr id="12" name="Shape 10"/>
-          <p:cNvSpPr/>
-          <p:nvPr/>
-        </p:nvSpPr>
-        <p:spPr>
-          <a:xfrm>
-            <a:off x="6217920" y="1600200"/>
+          <p:cNvPr id="13" name="Shape 11"/>
+          <p:cNvSpPr/>
+          <p:nvPr/>
+        </p:nvSpPr>
+        <p:spPr>
+          <a:xfrm>
+            <a:off x="6217920" y="1874520"/>
             <a:ext cx="2194560" cy="1417320"/>
           </a:xfrm>
           <a:prstGeom prst="rect">
@@ -5669,13 +7061,13 @@
       </p:sp>
       <p:sp>
         <p:nvSpPr>
-          <p:cNvPr id="13" name="Text 11"/>
-          <p:cNvSpPr/>
-          <p:nvPr/>
-        </p:nvSpPr>
-        <p:spPr>
-          <a:xfrm>
-            <a:off x="6400800" y="1746504"/>
+          <p:cNvPr id="14" name="Text 12"/>
+          <p:cNvSpPr/>
+          <p:nvPr/>
+        </p:nvSpPr>
+        <p:spPr>
+          <a:xfrm>
+            <a:off x="6400800" y="2020824"/>
             <a:ext cx="1828800" cy="292608"/>
           </a:xfrm>
           <a:prstGeom prst="rect">
@@ -5708,13 +7100,13 @@
       </p:sp>
       <p:sp>
         <p:nvSpPr>
-          <p:cNvPr id="14" name="Text 12"/>
-          <p:cNvSpPr/>
-          <p:nvPr/>
-        </p:nvSpPr>
-        <p:spPr>
-          <a:xfrm>
-            <a:off x="6400800" y="2103120"/>
+          <p:cNvPr id="15" name="Text 13"/>
+          <p:cNvSpPr/>
+          <p:nvPr/>
+        </p:nvSpPr>
+        <p:spPr>
+          <a:xfrm>
+            <a:off x="6400800" y="2377440"/>
             <a:ext cx="1828800" cy="777240"/>
           </a:xfrm>
           <a:prstGeom prst="rect">
@@ -5764,13 +7156,13 @@
       </p:sp>
       <p:sp>
         <p:nvSpPr>
-          <p:cNvPr id="15" name="Shape 13"/>
-          <p:cNvSpPr/>
-          <p:nvPr/>
-        </p:nvSpPr>
-        <p:spPr>
-          <a:xfrm>
-            <a:off x="548640" y="3383280"/>
+          <p:cNvPr id="16" name="Shape 14"/>
+          <p:cNvSpPr/>
+          <p:nvPr/>
+        </p:nvSpPr>
+        <p:spPr>
+          <a:xfrm>
+            <a:off x="548640" y="3657600"/>
             <a:ext cx="8046720" cy="868680"/>
           </a:xfrm>
           <a:prstGeom prst="rect">
@@ -5784,13 +7176,13 @@
       </p:sp>
       <p:sp>
         <p:nvSpPr>
-          <p:cNvPr id="16" name="Text 14"/>
-          <p:cNvSpPr/>
-          <p:nvPr/>
-        </p:nvSpPr>
-        <p:spPr>
-          <a:xfrm>
-            <a:off x="822960" y="3493008"/>
+          <p:cNvPr id="17" name="Text 15"/>
+          <p:cNvSpPr/>
+          <p:nvPr/>
+        </p:nvSpPr>
+        <p:spPr>
+          <a:xfrm>
+            <a:off x="822960" y="3767328"/>
             <a:ext cx="7498080" cy="658368"/>
           </a:xfrm>
           <a:prstGeom prst="rect">
@@ -5846,7 +7238,7 @@
       </p:sp>
       <p:sp>
         <p:nvSpPr>
-          <p:cNvPr id="17" name="Text 15"/>
+          <p:cNvPr id="18" name="Text 16"/>
           <p:cNvSpPr/>
           <p:nvPr/>
         </p:nvSpPr>
@@ -5944,7 +7336,7 @@
         <p:spPr>
           <a:xfrm>
             <a:off x="548640" y="566928"/>
-            <a:ext cx="8046720" cy="1005840"/>
+            <a:ext cx="8046720" cy="685800"/>
           </a:xfrm>
           <a:prstGeom prst="rect">
             <a:avLst/>
@@ -5960,7 +7352,7 @@
               <a:buNone/>
             </a:pPr>
             <a:r>
-              <a:rPr lang="en-US" sz="2400" dirty="0">
+              <a:rPr lang="en-US" sz="2600" dirty="0">
                 <a:solidFill>
                   <a:srgbClr val="191919"/>
                 </a:solidFill>
@@ -5968,16 +7360,58 @@
                 <a:ea typeface="Georgia" pitchFamily="34" charset="-122"/>
                 <a:cs typeface="Georgia" pitchFamily="34" charset="-120"/>
               </a:rPr>
-              <a:t>Principle 2. An instruction can be ignored.</a:t>
-            </a:r>
-            <a:endParaRPr lang="en-US" sz="2400" dirty="0"/>
-          </a:p>
-          <a:p>
-            <a:pPr algn="l" indent="0" marL="0">
-              <a:buNone/>
-            </a:pPr>
-            <a:r>
-              <a:rPr lang="en-US" sz="2400" dirty="0">
+              <a:t>What's inside this one.</a:t>
+            </a:r>
+            <a:endParaRPr lang="en-US" sz="2600" dirty="0"/>
+          </a:p>
+        </p:txBody>
+      </p:sp>
+      <p:sp>
+        <p:nvSpPr>
+          <p:cNvPr id="4" name="Shape 2"/>
+          <p:cNvSpPr/>
+          <p:nvPr/>
+        </p:nvSpPr>
+        <p:spPr>
+          <a:xfrm>
+            <a:off x="548640" y="1371600"/>
+            <a:ext cx="3886200" cy="1481328"/>
+          </a:xfrm>
+          <a:prstGeom prst="rect">
+            <a:avLst/>
+          </a:prstGeom>
+          <a:solidFill>
+            <a:srgbClr val="F0EEE6"/>
+          </a:solidFill>
+          <a:ln/>
+        </p:spPr>
+      </p:sp>
+      <p:sp>
+        <p:nvSpPr>
+          <p:cNvPr id="5" name="Text 3"/>
+          <p:cNvSpPr/>
+          <p:nvPr/>
+        </p:nvSpPr>
+        <p:spPr>
+          <a:xfrm>
+            <a:off x="804672" y="1554480"/>
+            <a:ext cx="3374136" cy="347472"/>
+          </a:xfrm>
+          <a:prstGeom prst="rect">
+            <a:avLst/>
+          </a:prstGeom>
+          <a:noFill/>
+          <a:ln/>
+        </p:spPr>
+        <p:txBody>
+          <a:bodyPr wrap="square" lIns="0" tIns="0" rIns="0" bIns="0" rtlCol="0" anchor="ctr"/>
+          <a:lstStyle/>
+          <a:p>
+            <a:pPr indent="0" marL="0">
+              <a:buNone/>
+            </a:pPr>
+            <a:r>
+              <a:rPr lang="en-US" sz="1600" dirty="0">
                 <a:solidFill>
                   <a:srgbClr val="191919"/>
                 </a:solidFill>
@@ -5985,22 +7419,61 @@
                 <a:ea typeface="Georgia" pitchFamily="34" charset="-122"/>
                 <a:cs typeface="Georgia" pitchFamily="34" charset="-120"/>
               </a:rPr>
-              <a:t>A process gate can't.</a:t>
-            </a:r>
-            <a:endParaRPr lang="en-US" sz="2400" dirty="0"/>
-          </a:p>
-        </p:txBody>
-      </p:sp>
-      <p:sp>
-        <p:nvSpPr>
-          <p:cNvPr id="4" name="Shape 2"/>
-          <p:cNvSpPr/>
-          <p:nvPr/>
-        </p:nvSpPr>
-        <p:spPr>
-          <a:xfrm>
-            <a:off x="548640" y="2103120"/>
-            <a:ext cx="1737360" cy="685800"/>
+              <a:t>Skills</a:t>
+            </a:r>
+            <a:endParaRPr lang="en-US" sz="1600" dirty="0"/>
+          </a:p>
+        </p:txBody>
+      </p:sp>
+      <p:sp>
+        <p:nvSpPr>
+          <p:cNvPr id="6" name="Text 4"/>
+          <p:cNvSpPr/>
+          <p:nvPr/>
+        </p:nvSpPr>
+        <p:spPr>
+          <a:xfrm>
+            <a:off x="804672" y="1938528"/>
+            <a:ext cx="3374136" cy="749808"/>
+          </a:xfrm>
+          <a:prstGeom prst="rect">
+            <a:avLst/>
+          </a:prstGeom>
+          <a:noFill/>
+          <a:ln/>
+        </p:spPr>
+        <p:txBody>
+          <a:bodyPr wrap="square" lIns="0" tIns="0" rIns="0" bIns="0" rtlCol="0" anchor="t"/>
+          <a:lstStyle/>
+          <a:p>
+            <a:pPr indent="0" marL="0">
+              <a:buNone/>
+            </a:pPr>
+            <a:r>
+              <a:rPr lang="en-US" sz="1200" dirty="0">
+                <a:solidFill>
+                  <a:srgbClr val="6B6B66"/>
+                </a:solidFill>
+                <a:latin typeface="Arial" pitchFamily="34" charset="0"/>
+                <a:ea typeface="Arial" pitchFamily="34" charset="-122"/>
+                <a:cs typeface="Arial" pitchFamily="34" charset="-120"/>
+              </a:rPr>
+              <a:t>Slash commands and written conventions. /sql-review applies the team's standards, not generic taste.</a:t>
+            </a:r>
+            <a:endParaRPr lang="en-US" sz="1200" dirty="0"/>
+          </a:p>
+        </p:txBody>
+      </p:sp>
+      <p:sp>
+        <p:nvSpPr>
+          <p:cNvPr id="7" name="Shape 5"/>
+          <p:cNvSpPr/>
+          <p:nvPr/>
+        </p:nvSpPr>
+        <p:spPr>
+          <a:xfrm>
+            <a:off x="4709160" y="1371600"/>
+            <a:ext cx="3886200" cy="1481328"/>
           </a:xfrm>
           <a:prstGeom prst="rect">
             <a:avLst/>
@@ -6013,14 +7486,14 @@
       </p:sp>
       <p:sp>
         <p:nvSpPr>
-          <p:cNvPr id="5" name="Text 3"/>
-          <p:cNvSpPr/>
-          <p:nvPr/>
-        </p:nvSpPr>
-        <p:spPr>
-          <a:xfrm>
-            <a:off x="548640" y="2103120"/>
-            <a:ext cx="1737360" cy="685800"/>
+          <p:cNvPr id="8" name="Text 6"/>
+          <p:cNvSpPr/>
+          <p:nvPr/>
+        </p:nvSpPr>
+        <p:spPr>
+          <a:xfrm>
+            <a:off x="4965192" y="1554480"/>
+            <a:ext cx="3374136" cy="347472"/>
           </a:xfrm>
           <a:prstGeom prst="rect">
             <a:avLst/>
@@ -6032,19 +7505,58 @@
           <a:bodyPr wrap="square" lIns="0" tIns="0" rIns="0" bIns="0" rtlCol="0" anchor="ctr"/>
           <a:lstStyle/>
           <a:p>
-            <a:pPr algn="ctr" indent="0" marL="0">
+            <a:pPr indent="0" marL="0">
+              <a:buNone/>
+            </a:pPr>
+            <a:r>
+              <a:rPr lang="en-US" sz="1600" dirty="0">
+                <a:solidFill>
+                  <a:srgbClr val="191919"/>
+                </a:solidFill>
+                <a:latin typeface="Georgia" pitchFamily="34" charset="0"/>
+                <a:ea typeface="Georgia" pitchFamily="34" charset="-122"/>
+                <a:cs typeface="Georgia" pitchFamily="34" charset="-120"/>
+              </a:rPr>
+              <a:t>Agents</a:t>
+            </a:r>
+            <a:endParaRPr lang="en-US" sz="1600" dirty="0"/>
+          </a:p>
+        </p:txBody>
+      </p:sp>
+      <p:sp>
+        <p:nvSpPr>
+          <p:cNvPr id="9" name="Text 7"/>
+          <p:cNvSpPr/>
+          <p:nvPr/>
+        </p:nvSpPr>
+        <p:spPr>
+          <a:xfrm>
+            <a:off x="4965192" y="1938528"/>
+            <a:ext cx="3374136" cy="749808"/>
+          </a:xfrm>
+          <a:prstGeom prst="rect">
+            <a:avLst/>
+          </a:prstGeom>
+          <a:noFill/>
+          <a:ln/>
+        </p:spPr>
+        <p:txBody>
+          <a:bodyPr wrap="square" lIns="0" tIns="0" rIns="0" bIns="0" rtlCol="0" anchor="t"/>
+          <a:lstStyle/>
+          <a:p>
+            <a:pPr indent="0" marL="0">
               <a:buNone/>
             </a:pPr>
             <a:r>
               <a:rPr lang="en-US" sz="1200" dirty="0">
                 <a:solidFill>
-                  <a:srgbClr val="191919"/>
-                </a:solidFill>
-                <a:latin typeface="Consolas" pitchFamily="34" charset="0"/>
-                <a:ea typeface="Consolas" pitchFamily="34" charset="-122"/>
-                <a:cs typeface="Consolas" pitchFamily="34" charset="-120"/>
-              </a:rPr>
-              <a:t>tool call</a:t>
+                  <a:srgbClr val="6B6B66"/>
+                </a:solidFill>
+                <a:latin typeface="Arial" pitchFamily="34" charset="0"/>
+                <a:ea typeface="Arial" pitchFamily="34" charset="-122"/>
+                <a:cs typeface="Arial" pitchFamily="34" charset="-120"/>
+              </a:rPr>
+              <a:t>A read-only sql-reviewer that does the detailed pass, with scoped tools.</a:t>
             </a:r>
             <a:endParaRPr lang="en-US" sz="1200" dirty="0"/>
           </a:p>
@@ -6052,38 +7564,14 @@
       </p:sp>
       <p:sp>
         <p:nvSpPr>
-          <p:cNvPr id="6" name="Shape 4"/>
-          <p:cNvSpPr/>
-          <p:nvPr/>
-        </p:nvSpPr>
-        <p:spPr>
-          <a:xfrm>
-            <a:off x="2286000" y="2446020"/>
-            <a:ext cx="594360" cy="0"/>
-          </a:xfrm>
-          <a:prstGeom prst="line">
-            <a:avLst/>
-          </a:prstGeom>
-          <a:noFill/>
-          <a:ln w="19050">
-            <a:solidFill>
-              <a:srgbClr val="CC785C"/>
-            </a:solidFill>
-            <a:prstDash val="solid"/>
-            <a:tailEnd type="triangle"/>
-          </a:ln>
-        </p:spPr>
-      </p:sp>
-      <p:sp>
-        <p:nvSpPr>
-          <p:cNvPr id="7" name="Shape 5"/>
-          <p:cNvSpPr/>
-          <p:nvPr/>
-        </p:nvSpPr>
-        <p:spPr>
-          <a:xfrm>
-            <a:off x="2880360" y="2103120"/>
-            <a:ext cx="1737360" cy="685800"/>
+          <p:cNvPr id="10" name="Shape 8"/>
+          <p:cNvSpPr/>
+          <p:nvPr/>
+        </p:nvSpPr>
+        <p:spPr>
+          <a:xfrm>
+            <a:off x="548640" y="3081528"/>
+            <a:ext cx="3886200" cy="1481328"/>
           </a:xfrm>
           <a:prstGeom prst="rect">
             <a:avLst/>
@@ -6091,24 +7579,19 @@
           <a:solidFill>
             <a:srgbClr val="F0EEE6"/>
           </a:solidFill>
-          <a:ln w="12700">
-            <a:solidFill>
-              <a:srgbClr val="D4A27F"/>
-            </a:solidFill>
-            <a:prstDash val="solid"/>
-          </a:ln>
-        </p:spPr>
-      </p:sp>
-      <p:sp>
-        <p:nvSpPr>
-          <p:cNvPr id="8" name="Text 6"/>
-          <p:cNvSpPr/>
-          <p:nvPr/>
-        </p:nvSpPr>
-        <p:spPr>
-          <a:xfrm>
-            <a:off x="2880360" y="2103120"/>
-            <a:ext cx="1737360" cy="685800"/>
+          <a:ln/>
+        </p:spPr>
+      </p:sp>
+      <p:sp>
+        <p:nvSpPr>
+          <p:cNvPr id="11" name="Text 9"/>
+          <p:cNvSpPr/>
+          <p:nvPr/>
+        </p:nvSpPr>
+        <p:spPr>
+          <a:xfrm>
+            <a:off x="804672" y="3264408"/>
+            <a:ext cx="3374136" cy="347472"/>
           </a:xfrm>
           <a:prstGeom prst="rect">
             <a:avLst/>
@@ -6120,19 +7603,58 @@
           <a:bodyPr wrap="square" lIns="0" tIns="0" rIns="0" bIns="0" rtlCol="0" anchor="ctr"/>
           <a:lstStyle/>
           <a:p>
-            <a:pPr algn="ctr" indent="0" marL="0">
+            <a:pPr indent="0" marL="0">
+              <a:buNone/>
+            </a:pPr>
+            <a:r>
+              <a:rPr lang="en-US" sz="1600" dirty="0">
+                <a:solidFill>
+                  <a:srgbClr val="191919"/>
+                </a:solidFill>
+                <a:latin typeface="Georgia" pitchFamily="34" charset="0"/>
+                <a:ea typeface="Georgia" pitchFamily="34" charset="-122"/>
+                <a:cs typeface="Georgia" pitchFamily="34" charset="-120"/>
+              </a:rPr>
+              <a:t>Hooks</a:t>
+            </a:r>
+            <a:endParaRPr lang="en-US" sz="1600" dirty="0"/>
+          </a:p>
+        </p:txBody>
+      </p:sp>
+      <p:sp>
+        <p:nvSpPr>
+          <p:cNvPr id="12" name="Text 10"/>
+          <p:cNvSpPr/>
+          <p:nvPr/>
+        </p:nvSpPr>
+        <p:spPr>
+          <a:xfrm>
+            <a:off x="804672" y="3648456"/>
+            <a:ext cx="3374136" cy="749808"/>
+          </a:xfrm>
+          <a:prstGeom prst="rect">
+            <a:avLst/>
+          </a:prstGeom>
+          <a:noFill/>
+          <a:ln/>
+        </p:spPr>
+        <p:txBody>
+          <a:bodyPr wrap="square" lIns="0" tIns="0" rIns="0" bIns="0" rtlCol="0" anchor="t"/>
+          <a:lstStyle/>
+          <a:p>
+            <a:pPr indent="0" marL="0">
               <a:buNone/>
             </a:pPr>
             <a:r>
               <a:rPr lang="en-US" sz="1200" dirty="0">
                 <a:solidFill>
-                  <a:srgbClr val="191919"/>
-                </a:solidFill>
-                <a:latin typeface="Consolas" pitchFamily="34" charset="0"/>
-                <a:ea typeface="Consolas" pitchFamily="34" charset="-122"/>
-                <a:cs typeface="Consolas" pitchFamily="34" charset="-120"/>
-              </a:rPr>
-              <a:t>guard.js</a:t>
+                  <a:srgbClr val="6B6B66"/>
+                </a:solidFill>
+                <a:latin typeface="Arial" pitchFamily="34" charset="0"/>
+                <a:ea typeface="Arial" pitchFamily="34" charset="-122"/>
+                <a:cs typeface="Arial" pitchFamily="34" charset="-120"/>
+              </a:rPr>
+              <a:t>The policy guard and the audit trail. Processes, not prompts, so they're testable in CI.</a:t>
             </a:r>
             <a:endParaRPr lang="en-US" sz="1200" dirty="0"/>
           </a:p>
@@ -6140,38 +7662,14 @@
       </p:sp>
       <p:sp>
         <p:nvSpPr>
-          <p:cNvPr id="9" name="Shape 7"/>
-          <p:cNvSpPr/>
-          <p:nvPr/>
-        </p:nvSpPr>
-        <p:spPr>
-          <a:xfrm flipV="1">
-            <a:off x="4617720" y="1668780"/>
-            <a:ext cx="777240" cy="777240"/>
-          </a:xfrm>
-          <a:prstGeom prst="line">
-            <a:avLst/>
-          </a:prstGeom>
-          <a:noFill/>
-          <a:ln w="12700">
-            <a:solidFill>
-              <a:srgbClr val="6B6B66"/>
-            </a:solidFill>
-            <a:prstDash val="solid"/>
-            <a:tailEnd type="triangle"/>
-          </a:ln>
-        </p:spPr>
-      </p:sp>
-      <p:sp>
-        <p:nvSpPr>
-          <p:cNvPr id="10" name="Shape 8"/>
-          <p:cNvSpPr/>
-          <p:nvPr/>
-        </p:nvSpPr>
-        <p:spPr>
-          <a:xfrm>
-            <a:off x="5394960" y="1394460"/>
-            <a:ext cx="1417320" cy="548640"/>
+          <p:cNvPr id="13" name="Shape 11"/>
+          <p:cNvSpPr/>
+          <p:nvPr/>
+        </p:nvSpPr>
+        <p:spPr>
+          <a:xfrm>
+            <a:off x="4709160" y="3081528"/>
+            <a:ext cx="3886200" cy="1481328"/>
           </a:xfrm>
           <a:prstGeom prst="rect">
             <a:avLst/>
@@ -6184,14 +7682,14 @@
       </p:sp>
       <p:sp>
         <p:nvSpPr>
-          <p:cNvPr id="11" name="Text 9"/>
-          <p:cNvSpPr/>
-          <p:nvPr/>
-        </p:nvSpPr>
-        <p:spPr>
-          <a:xfrm>
-            <a:off x="5394960" y="1394460"/>
-            <a:ext cx="1417320" cy="548640"/>
+          <p:cNvPr id="14" name="Text 12"/>
+          <p:cNvSpPr/>
+          <p:nvPr/>
+        </p:nvSpPr>
+        <p:spPr>
+          <a:xfrm>
+            <a:off x="4965192" y="3264408"/>
+            <a:ext cx="3374136" cy="347472"/>
           </a:xfrm>
           <a:prstGeom prst="rect">
             <a:avLst/>
@@ -6203,276 +7701,66 @@
           <a:bodyPr wrap="square" lIns="0" tIns="0" rIns="0" bIns="0" rtlCol="0" anchor="ctr"/>
           <a:lstStyle/>
           <a:p>
-            <a:pPr algn="ctr" indent="0" marL="0">
+            <a:pPr indent="0" marL="0">
+              <a:buNone/>
+            </a:pPr>
+            <a:r>
+              <a:rPr lang="en-US" sz="1600" dirty="0">
+                <a:solidFill>
+                  <a:srgbClr val="191919"/>
+                </a:solidFill>
+                <a:latin typeface="Georgia" pitchFamily="34" charset="0"/>
+                <a:ea typeface="Georgia" pitchFamily="34" charset="-122"/>
+                <a:cs typeface="Georgia" pitchFamily="34" charset="-120"/>
+              </a:rPr>
+              <a:t>Manifest</a:t>
+            </a:r>
+            <a:endParaRPr lang="en-US" sz="1600" dirty="0"/>
+          </a:p>
+        </p:txBody>
+      </p:sp>
+      <p:sp>
+        <p:nvSpPr>
+          <p:cNvPr id="15" name="Text 13"/>
+          <p:cNvSpPr/>
+          <p:nvPr/>
+        </p:nvSpPr>
+        <p:spPr>
+          <a:xfrm>
+            <a:off x="4965192" y="3648456"/>
+            <a:ext cx="3374136" cy="749808"/>
+          </a:xfrm>
+          <a:prstGeom prst="rect">
+            <a:avLst/>
+          </a:prstGeom>
+          <a:noFill/>
+          <a:ln/>
+        </p:spPr>
+        <p:txBody>
+          <a:bodyPr wrap="square" lIns="0" tIns="0" rIns="0" bIns="0" rtlCol="0" anchor="t"/>
+          <a:lstStyle/>
+          <a:p>
+            <a:pPr indent="0" marL="0">
               <a:buNone/>
             </a:pPr>
             <a:r>
               <a:rPr lang="en-US" sz="1200" dirty="0">
                 <a:solidFill>
-                  <a:srgbClr val="191919"/>
-                </a:solidFill>
-                <a:latin typeface="Consolas" pitchFamily="34" charset="0"/>
-                <a:ea typeface="Consolas" pitchFamily="34" charset="-122"/>
-                <a:cs typeface="Consolas" pitchFamily="34" charset="-120"/>
-              </a:rPr>
-              <a:t>allow</a:t>
-            </a:r>
-            <a:endParaRPr lang="en-US" sz="1200" dirty="0"/>
-          </a:p>
-        </p:txBody>
-      </p:sp>
-      <p:sp>
-        <p:nvSpPr>
-          <p:cNvPr id="12" name="Shape 10"/>
-          <p:cNvSpPr/>
-          <p:nvPr/>
-        </p:nvSpPr>
-        <p:spPr>
-          <a:xfrm>
-            <a:off x="4617720" y="2446020"/>
-            <a:ext cx="777240" cy="914"/>
-          </a:xfrm>
-          <a:prstGeom prst="line">
-            <a:avLst/>
-          </a:prstGeom>
-          <a:noFill/>
-          <a:ln w="12700">
-            <a:solidFill>
-              <a:srgbClr val="6B6B66"/>
-            </a:solidFill>
-            <a:prstDash val="solid"/>
-            <a:tailEnd type="triangle"/>
-          </a:ln>
-        </p:spPr>
-      </p:sp>
-      <p:sp>
-        <p:nvSpPr>
-          <p:cNvPr id="13" name="Shape 11"/>
-          <p:cNvSpPr/>
-          <p:nvPr/>
-        </p:nvSpPr>
-        <p:spPr>
-          <a:xfrm>
-            <a:off x="5394960" y="2171700"/>
-            <a:ext cx="1417320" cy="548640"/>
-          </a:xfrm>
-          <a:prstGeom prst="rect">
-            <a:avLst/>
-          </a:prstGeom>
-          <a:solidFill>
-            <a:srgbClr val="F0EEE6"/>
-          </a:solidFill>
-          <a:ln/>
-        </p:spPr>
-      </p:sp>
-      <p:sp>
-        <p:nvSpPr>
-          <p:cNvPr id="14" name="Text 12"/>
-          <p:cNvSpPr/>
-          <p:nvPr/>
-        </p:nvSpPr>
-        <p:spPr>
-          <a:xfrm>
-            <a:off x="5394960" y="2171700"/>
-            <a:ext cx="1417320" cy="548640"/>
-          </a:xfrm>
-          <a:prstGeom prst="rect">
-            <a:avLst/>
-          </a:prstGeom>
-          <a:noFill/>
-          <a:ln/>
-        </p:spPr>
-        <p:txBody>
-          <a:bodyPr wrap="square" lIns="0" tIns="0" rIns="0" bIns="0" rtlCol="0" anchor="ctr"/>
-          <a:lstStyle/>
-          <a:p>
-            <a:pPr algn="ctr" indent="0" marL="0">
-              <a:buNone/>
-            </a:pPr>
-            <a:r>
-              <a:rPr lang="en-US" sz="1200" dirty="0">
-                <a:solidFill>
-                  <a:srgbClr val="191919"/>
-                </a:solidFill>
-                <a:latin typeface="Consolas" pitchFamily="34" charset="0"/>
-                <a:ea typeface="Consolas" pitchFamily="34" charset="-122"/>
-                <a:cs typeface="Consolas" pitchFamily="34" charset="-120"/>
-              </a:rPr>
-              <a:t>ask</a:t>
-            </a:r>
-            <a:endParaRPr lang="en-US" sz="1200" dirty="0"/>
-          </a:p>
-        </p:txBody>
-      </p:sp>
-      <p:sp>
-        <p:nvSpPr>
-          <p:cNvPr id="15" name="Shape 13"/>
-          <p:cNvSpPr/>
-          <p:nvPr/>
-        </p:nvSpPr>
-        <p:spPr>
-          <a:xfrm>
-            <a:off x="4617720" y="2446020"/>
-            <a:ext cx="777240" cy="777240"/>
-          </a:xfrm>
-          <a:prstGeom prst="line">
-            <a:avLst/>
-          </a:prstGeom>
-          <a:noFill/>
-          <a:ln w="12700">
-            <a:solidFill>
-              <a:srgbClr val="6B6B66"/>
-            </a:solidFill>
-            <a:prstDash val="solid"/>
-            <a:tailEnd type="triangle"/>
-          </a:ln>
-        </p:spPr>
-      </p:sp>
-      <p:sp>
-        <p:nvSpPr>
-          <p:cNvPr id="16" name="Shape 14"/>
-          <p:cNvSpPr/>
-          <p:nvPr/>
-        </p:nvSpPr>
-        <p:spPr>
-          <a:xfrm>
-            <a:off x="5394960" y="2948940"/>
-            <a:ext cx="1417320" cy="548640"/>
-          </a:xfrm>
-          <a:prstGeom prst="rect">
-            <a:avLst/>
-          </a:prstGeom>
-          <a:solidFill>
-            <a:srgbClr val="FAF9F5"/>
-          </a:solidFill>
-          <a:ln w="15875">
-            <a:solidFill>
-              <a:srgbClr val="CC785C"/>
-            </a:solidFill>
-            <a:prstDash val="solid"/>
-          </a:ln>
-        </p:spPr>
-      </p:sp>
-      <p:sp>
-        <p:nvSpPr>
-          <p:cNvPr id="17" name="Text 15"/>
-          <p:cNvSpPr/>
-          <p:nvPr/>
-        </p:nvSpPr>
-        <p:spPr>
-          <a:xfrm>
-            <a:off x="5394960" y="2948940"/>
-            <a:ext cx="1417320" cy="548640"/>
-          </a:xfrm>
-          <a:prstGeom prst="rect">
-            <a:avLst/>
-          </a:prstGeom>
-          <a:noFill/>
-          <a:ln/>
-        </p:spPr>
-        <p:txBody>
-          <a:bodyPr wrap="square" lIns="0" tIns="0" rIns="0" bIns="0" rtlCol="0" anchor="ctr"/>
-          <a:lstStyle/>
-          <a:p>
-            <a:pPr algn="ctr" indent="0" marL="0">
-              <a:buNone/>
-            </a:pPr>
-            <a:r>
-              <a:rPr lang="en-US" sz="1200" dirty="0">
-                <a:solidFill>
-                  <a:srgbClr val="CC785C"/>
-                </a:solidFill>
-                <a:latin typeface="Consolas" pitchFamily="34" charset="0"/>
-                <a:ea typeface="Consolas" pitchFamily="34" charset="-122"/>
-                <a:cs typeface="Consolas" pitchFamily="34" charset="-120"/>
-              </a:rPr>
-              <a:t>deny</a:t>
-            </a:r>
-            <a:endParaRPr lang="en-US" sz="1200" dirty="0"/>
-          </a:p>
-        </p:txBody>
-      </p:sp>
-      <p:sp>
-        <p:nvSpPr>
-          <p:cNvPr id="18" name="Text 16"/>
-          <p:cNvSpPr/>
-          <p:nvPr/>
-        </p:nvSpPr>
-        <p:spPr>
-          <a:xfrm>
-            <a:off x="548640" y="3886200"/>
-            <a:ext cx="5852160" cy="777240"/>
-          </a:xfrm>
-          <a:prstGeom prst="rect">
-            <a:avLst/>
-          </a:prstGeom>
-          <a:noFill/>
-          <a:ln/>
-        </p:spPr>
-        <p:txBody>
-          <a:bodyPr wrap="square" lIns="0" tIns="0" rIns="0" bIns="0" rtlCol="0" anchor="t"/>
-          <a:lstStyle/>
-          <a:p>
-            <a:pPr indent="0" marL="0">
-              <a:buNone/>
-            </a:pPr>
-            <a:r>
-              <a:rPr lang="en-US" sz="1250" dirty="0">
-                <a:solidFill>
-                  <a:srgbClr val="191919"/>
+                  <a:srgbClr val="6B6B66"/>
                 </a:solidFill>
                 <a:latin typeface="Arial" pitchFamily="34" charset="0"/>
                 <a:ea typeface="Arial" pitchFamily="34" charset="-122"/>
                 <a:cs typeface="Arial" pitchFamily="34" charset="-120"/>
               </a:rPr>
-              <a:t>The decision is a regex match against policy.json, not a model choice. Same input, same block, every run. Denials and executions land side by side in the audit trail.</a:t>
-            </a:r>
-            <a:endParaRPr lang="en-US" sz="1250" dirty="0"/>
-          </a:p>
-        </p:txBody>
-      </p:sp>
-      <p:sp>
-        <p:nvSpPr>
-          <p:cNvPr id="19" name="Text 17"/>
-          <p:cNvSpPr/>
-          <p:nvPr/>
-        </p:nvSpPr>
-        <p:spPr>
-          <a:xfrm>
-            <a:off x="6629400" y="3886200"/>
-            <a:ext cx="1965960" cy="777240"/>
-          </a:xfrm>
-          <a:prstGeom prst="rect">
-            <a:avLst/>
-          </a:prstGeom>
-          <a:noFill/>
-          <a:ln/>
-        </p:spPr>
-        <p:txBody>
-          <a:bodyPr wrap="square" lIns="0" tIns="0" rIns="0" bIns="0" rtlCol="0" anchor="t"/>
-          <a:lstStyle/>
-          <a:p>
-            <a:pPr indent="0" marL="0">
-              <a:buNone/>
-            </a:pPr>
-            <a:r>
-              <a:rPr lang="en-US" sz="1050" dirty="0">
-                <a:solidFill>
-                  <a:srgbClr val="6B6B66"/>
-                </a:solidFill>
-                <a:latin typeface="Consolas" pitchFamily="34" charset="0"/>
-                <a:ea typeface="Consolas" pitchFamily="34" charset="-122"/>
-                <a:cs typeface="Consolas" pitchFamily="34" charset="-120"/>
-              </a:rPr>
-              <a:t>guard.js: 158 lines, tested offline, zero tokens.</a:t>
-            </a:r>
-            <a:endParaRPr lang="en-US" sz="1050" dirty="0"/>
-          </a:p>
-        </p:txBody>
-      </p:sp>
-      <p:sp>
-        <p:nvSpPr>
-          <p:cNvPr id="20" name="Text 18"/>
+              <a:t>Name and version. The pin that turns team tooling into releases.</a:t>
+            </a:r>
+            <a:endParaRPr lang="en-US" sz="1200" dirty="0"/>
+          </a:p>
+        </p:txBody>
+      </p:sp>
+      <p:sp>
+        <p:nvSpPr>
+          <p:cNvPr id="16" name="Text 14"/>
           <p:cNvSpPr/>
           <p:nvPr/>
         </p:nvSpPr>
@@ -6594,7 +7882,7 @@
                 <a:ea typeface="Georgia" pitchFamily="34" charset="-122"/>
                 <a:cs typeface="Georgia" pitchFamily="34" charset="-120"/>
               </a:rPr>
-              <a:t>Principle 3. Policy ships like software.</a:t>
+              <a:t>Why not just copy .claude/ folders around?</a:t>
             </a:r>
             <a:endParaRPr lang="en-US" sz="2600" dirty="0"/>
           </a:p>
@@ -6608,8 +7896,8 @@
         </p:nvSpPr>
         <p:spPr>
           <a:xfrm>
-            <a:off x="548640" y="1554480"/>
-            <a:ext cx="1847088" cy="1828800"/>
+            <a:off x="548640" y="1371600"/>
+            <a:ext cx="3886200" cy="2834640"/>
           </a:xfrm>
           <a:prstGeom prst="rect">
             <a:avLst/>
@@ -6628,8 +7916,8 @@
         </p:nvSpPr>
         <p:spPr>
           <a:xfrm>
-            <a:off x="731520" y="1700784"/>
-            <a:ext cx="457200" cy="411480"/>
+            <a:off x="822960" y="1572768"/>
+            <a:ext cx="3337560" cy="320040"/>
           </a:xfrm>
           <a:prstGeom prst="rect">
             <a:avLst/>
@@ -6645,17 +7933,17 @@
               <a:buNone/>
             </a:pPr>
             <a:r>
-              <a:rPr lang="en-US" sz="2000" dirty="0">
-                <a:solidFill>
-                  <a:srgbClr val="CC785C"/>
+              <a:rPr lang="en-US" sz="1600" b="1" dirty="0">
+                <a:solidFill>
+                  <a:srgbClr val="191919"/>
                 </a:solidFill>
                 <a:latin typeface="Georgia" pitchFamily="34" charset="0"/>
                 <a:ea typeface="Georgia" pitchFamily="34" charset="-122"/>
                 <a:cs typeface="Georgia" pitchFamily="34" charset="-120"/>
               </a:rPr>
-              <a:t>1</a:t>
-            </a:r>
-            <a:endParaRPr lang="en-US" sz="2000" dirty="0"/>
+              <a:t>Copied folders</a:t>
+            </a:r>
+            <a:endParaRPr lang="en-US" sz="1600" dirty="0"/>
           </a:p>
         </p:txBody>
       </p:sp>
@@ -6667,8 +7955,8 @@
         </p:nvSpPr>
         <p:spPr>
           <a:xfrm>
-            <a:off x="731520" y="2148840"/>
-            <a:ext cx="1481328" cy="1051560"/>
+            <a:off x="822960" y="2011680"/>
+            <a:ext cx="3337560" cy="1920240"/>
           </a:xfrm>
           <a:prstGeom prst="rect">
             <a:avLst/>
@@ -6680,14 +7968,15 @@
           <a:bodyPr wrap="square" lIns="0" tIns="0" rIns="0" bIns="0" rtlCol="0" anchor="t"/>
           <a:lstStyle/>
           <a:p>
-            <a:pPr indent="0" marL="0">
+            <a:pPr marL="342900" indent="-342900">
               <a:spcAft>
-                <a:spcPts val="400"/>
+                <a:spcPts val="1000"/>
               </a:spcAft>
-              <a:buNone/>
-            </a:pPr>
-            <a:r>
-              <a:rPr lang="en-US" sz="1300" b="1" dirty="0">
+              <a:buSzPct val="100000"/>
+              <a:buChar char="•"/>
+            </a:pPr>
+            <a:r>
+              <a:rPr lang="en-US" sz="1250" dirty="0">
                 <a:solidFill>
                   <a:srgbClr val="191919"/>
                 </a:solidFill>
@@ -6695,29 +7984,72 @@
                 <a:ea typeface="Arial" pitchFamily="34" charset="-122"/>
                 <a:cs typeface="Arial" pitchFamily="34" charset="-120"/>
               </a:rPr>
-              <a:t>Edit policy.json</a:t>
-            </a:r>
-            <a:endParaRPr lang="en-US" sz="1300" dirty="0"/>
-          </a:p>
-          <a:p>
-            <a:pPr indent="0" marL="0">
+              <a:t>Drift from day one</a:t>
+            </a:r>
+            <a:endParaRPr lang="en-US" sz="1250" dirty="0"/>
+          </a:p>
+          <a:p>
+            <a:pPr marL="342900" indent="-342900">
               <a:spcAft>
-                <a:spcPts val="400"/>
+                <a:spcPts val="1000"/>
               </a:spcAft>
-              <a:buNone/>
-            </a:pPr>
-            <a:r>
-              <a:rPr lang="en-US" sz="1150" dirty="0">
-                <a:solidFill>
-                  <a:srgbClr val="6B6B66"/>
+              <a:buSzPct val="100000"/>
+              <a:buChar char="•"/>
+            </a:pPr>
+            <a:r>
+              <a:rPr lang="en-US" sz="1250" dirty="0">
+                <a:solidFill>
+                  <a:srgbClr val="191919"/>
                 </a:solidFill>
                 <a:latin typeface="Arial" pitchFamily="34" charset="0"/>
                 <a:ea typeface="Arial" pitchFamily="34" charset="-122"/>
                 <a:cs typeface="Arial" pitchFamily="34" charset="-120"/>
               </a:rPr>
-              <a:t>The rules are reviewable config, not prompt text.</a:t>
-            </a:r>
-            <a:endParaRPr lang="en-US" sz="1300" dirty="0"/>
+              <a:t>No versioning, no rollback</a:t>
+            </a:r>
+            <a:endParaRPr lang="en-US" sz="1250" dirty="0"/>
+          </a:p>
+          <a:p>
+            <a:pPr marL="342900" indent="-342900">
+              <a:spcAft>
+                <a:spcPts val="1000"/>
+              </a:spcAft>
+              <a:buSzPct val="100000"/>
+              <a:buChar char="•"/>
+            </a:pPr>
+            <a:r>
+              <a:rPr lang="en-US" sz="1250" dirty="0">
+                <a:solidFill>
+                  <a:srgbClr val="191919"/>
+                </a:solidFill>
+                <a:latin typeface="Arial" pitchFamily="34" charset="0"/>
+                <a:ea typeface="Arial" pitchFamily="34" charset="-122"/>
+                <a:cs typeface="Arial" pitchFamily="34" charset="-120"/>
+              </a:rPr>
+              <a:t>A fix reaches whoever notices</a:t>
+            </a:r>
+            <a:endParaRPr lang="en-US" sz="1250" dirty="0"/>
+          </a:p>
+          <a:p>
+            <a:pPr marL="342900" indent="-342900">
+              <a:spcAft>
+                <a:spcPts val="1000"/>
+              </a:spcAft>
+              <a:buSzPct val="100000"/>
+              <a:buChar char="•"/>
+            </a:pPr>
+            <a:r>
+              <a:rPr lang="en-US" sz="1250" dirty="0">
+                <a:solidFill>
+                  <a:srgbClr val="191919"/>
+                </a:solidFill>
+                <a:latin typeface="Arial" pitchFamily="34" charset="0"/>
+                <a:ea typeface="Arial" pitchFamily="34" charset="-122"/>
+                <a:cs typeface="Arial" pitchFamily="34" charset="-120"/>
+              </a:rPr>
+              <a:t>Security can't see what's running where</a:t>
+            </a:r>
+            <a:endParaRPr lang="en-US" sz="1250" dirty="0"/>
           </a:p>
         </p:txBody>
       </p:sp>
@@ -6729,16 +8061,21 @@
         </p:nvSpPr>
         <p:spPr>
           <a:xfrm>
-            <a:off x="2615184" y="1554480"/>
-            <a:ext cx="1847088" cy="1828800"/>
+            <a:off x="4709160" y="1371600"/>
+            <a:ext cx="3886200" cy="2834640"/>
           </a:xfrm>
           <a:prstGeom prst="rect">
             <a:avLst/>
           </a:prstGeom>
           <a:solidFill>
-            <a:srgbClr val="F0EEE6"/>
+            <a:srgbClr val="FAF9F5"/>
           </a:solidFill>
-          <a:ln/>
+          <a:ln w="15875">
+            <a:solidFill>
+              <a:srgbClr val="CC785C"/>
+            </a:solidFill>
+            <a:prstDash val="solid"/>
+          </a:ln>
         </p:spPr>
       </p:sp>
       <p:sp>
@@ -6749,8 +8086,8 @@
         </p:nvSpPr>
         <p:spPr>
           <a:xfrm>
-            <a:off x="2798064" y="1700784"/>
-            <a:ext cx="457200" cy="411480"/>
+            <a:off x="4983480" y="1572768"/>
+            <a:ext cx="3337560" cy="320040"/>
           </a:xfrm>
           <a:prstGeom prst="rect">
             <a:avLst/>
@@ -6766,17 +8103,17 @@
               <a:buNone/>
             </a:pPr>
             <a:r>
-              <a:rPr lang="en-US" sz="2000" dirty="0">
-                <a:solidFill>
-                  <a:srgbClr val="CC785C"/>
+              <a:rPr lang="en-US" sz="1600" b="1" dirty="0">
+                <a:solidFill>
+                  <a:srgbClr val="191919"/>
                 </a:solidFill>
                 <a:latin typeface="Georgia" pitchFamily="34" charset="0"/>
                 <a:ea typeface="Georgia" pitchFamily="34" charset="-122"/>
                 <a:cs typeface="Georgia" pitchFamily="34" charset="-120"/>
               </a:rPr>
-              <a:t>2</a:t>
-            </a:r>
-            <a:endParaRPr lang="en-US" sz="2000" dirty="0"/>
+              <a:t>A plugin from your marketplace</a:t>
+            </a:r>
+            <a:endParaRPr lang="en-US" sz="1600" dirty="0"/>
           </a:p>
         </p:txBody>
       </p:sp>
@@ -6788,8 +8125,8 @@
         </p:nvSpPr>
         <p:spPr>
           <a:xfrm>
-            <a:off x="2798064" y="2148840"/>
-            <a:ext cx="1481328" cy="1051560"/>
+            <a:off x="4983480" y="2011680"/>
+            <a:ext cx="3337560" cy="1920240"/>
           </a:xfrm>
           <a:prstGeom prst="rect">
             <a:avLst/>
@@ -6801,14 +8138,15 @@
           <a:bodyPr wrap="square" lIns="0" tIns="0" rIns="0" bIns="0" rtlCol="0" anchor="t"/>
           <a:lstStyle/>
           <a:p>
-            <a:pPr indent="0" marL="0">
+            <a:pPr marL="342900" indent="-342900">
               <a:spcAft>
-                <a:spcPts val="400"/>
+                <a:spcPts val="1000"/>
               </a:spcAft>
-              <a:buNone/>
-            </a:pPr>
-            <a:r>
-              <a:rPr lang="en-US" sz="1300" b="1" dirty="0">
+              <a:buSzPct val="100000"/>
+              <a:buChar char="•"/>
+            </a:pPr>
+            <a:r>
+              <a:rPr lang="en-US" sz="1250" dirty="0">
                 <a:solidFill>
                   <a:srgbClr val="191919"/>
                 </a:solidFill>
@@ -6816,62 +8154,85 @@
                 <a:ea typeface="Arial" pitchFamily="34" charset="-122"/>
                 <a:cs typeface="Arial" pitchFamily="34" charset="-120"/>
               </a:rPr>
-              <a:t>Prove it offline</a:t>
-            </a:r>
-            <a:endParaRPr lang="en-US" sz="1300" dirty="0"/>
-          </a:p>
-          <a:p>
-            <a:pPr indent="0" marL="0">
+              <a:t>Identical on every machine</a:t>
+            </a:r>
+            <a:endParaRPr lang="en-US" sz="1250" dirty="0"/>
+          </a:p>
+          <a:p>
+            <a:pPr marL="342900" indent="-342900">
               <a:spcAft>
-                <a:spcPts val="400"/>
+                <a:spcPts val="1000"/>
               </a:spcAft>
-              <a:buNone/>
-            </a:pPr>
-            <a:r>
-              <a:rPr lang="en-US" sz="1150" dirty="0">
-                <a:solidFill>
-                  <a:srgbClr val="6B6B66"/>
+              <a:buSzPct val="100000"/>
+              <a:buChar char="•"/>
+            </a:pPr>
+            <a:r>
+              <a:rPr lang="en-US" sz="1250" dirty="0">
+                <a:solidFill>
+                  <a:srgbClr val="191919"/>
                 </a:solidFill>
                 <a:latin typeface="Arial" pitchFamily="34" charset="0"/>
                 <a:ea typeface="Arial" pitchFamily="34" charset="-122"/>
                 <a:cs typeface="Arial" pitchFamily="34" charset="-120"/>
               </a:rPr>
-              <a:t>try.js gives an instant decision. The 22-check harness catches regressions.</a:t>
-            </a:r>
-            <a:endParaRPr lang="en-US" sz="1300" dirty="0"/>
-          </a:p>
-        </p:txBody>
-      </p:sp>
-      <p:sp>
-        <p:nvSpPr>
-          <p:cNvPr id="10" name="Shape 8"/>
-          <p:cNvSpPr/>
-          <p:nvPr/>
-        </p:nvSpPr>
-        <p:spPr>
-          <a:xfrm>
-            <a:off x="4681728" y="1554480"/>
-            <a:ext cx="1847088" cy="1828800"/>
-          </a:xfrm>
-          <a:prstGeom prst="rect">
-            <a:avLst/>
-          </a:prstGeom>
-          <a:solidFill>
-            <a:srgbClr val="F0EEE6"/>
-          </a:solidFill>
-          <a:ln/>
-        </p:spPr>
-      </p:sp>
-      <p:sp>
-        <p:nvSpPr>
-          <p:cNvPr id="11" name="Text 9"/>
-          <p:cNvSpPr/>
-          <p:nvPr/>
-        </p:nvSpPr>
-        <p:spPr>
-          <a:xfrm>
-            <a:off x="4864608" y="1700784"/>
-            <a:ext cx="457200" cy="411480"/>
+              <a:t>Version-pinned, one-command update</a:t>
+            </a:r>
+            <a:endParaRPr lang="en-US" sz="1250" dirty="0"/>
+          </a:p>
+          <a:p>
+            <a:pPr marL="342900" indent="-342900">
+              <a:spcAft>
+                <a:spcPts val="1000"/>
+              </a:spcAft>
+              <a:buSzPct val="100000"/>
+              <a:buChar char="•"/>
+            </a:pPr>
+            <a:r>
+              <a:rPr lang="en-US" sz="1250" dirty="0">
+                <a:solidFill>
+                  <a:srgbClr val="191919"/>
+                </a:solidFill>
+                <a:latin typeface="Arial" pitchFamily="34" charset="0"/>
+                <a:ea typeface="Arial" pitchFamily="34" charset="-122"/>
+                <a:cs typeface="Arial" pitchFamily="34" charset="-120"/>
+              </a:rPr>
+              <a:t>One PR ships a fix to the whole fleet</a:t>
+            </a:r>
+            <a:endParaRPr lang="en-US" sz="1250" dirty="0"/>
+          </a:p>
+          <a:p>
+            <a:pPr marL="342900" indent="-342900">
+              <a:spcAft>
+                <a:spcPts val="1000"/>
+              </a:spcAft>
+              <a:buSzPct val="100000"/>
+              <a:buChar char="•"/>
+            </a:pPr>
+            <a:r>
+              <a:rPr lang="en-US" sz="1250" dirty="0">
+                <a:solidFill>
+                  <a:srgbClr val="191919"/>
+                </a:solidFill>
+                <a:latin typeface="Arial" pitchFamily="34" charset="0"/>
+                <a:ea typeface="Arial" pitchFamily="34" charset="-122"/>
+                <a:cs typeface="Arial" pitchFamily="34" charset="-120"/>
+              </a:rPr>
+              <a:t>Namespaced, auditable, governed</a:t>
+            </a:r>
+            <a:endParaRPr lang="en-US" sz="1250" dirty="0"/>
+          </a:p>
+        </p:txBody>
+      </p:sp>
+      <p:sp>
+        <p:nvSpPr>
+          <p:cNvPr id="10" name="Text 8"/>
+          <p:cNvSpPr/>
+          <p:nvPr/>
+        </p:nvSpPr>
+        <p:spPr>
+          <a:xfrm>
+            <a:off x="548640" y="4434840"/>
+            <a:ext cx="7315200" cy="365760"/>
           </a:xfrm>
           <a:prstGeom prst="rect">
             <a:avLst/>
@@ -6887,245 +8248,23 @@
               <a:buNone/>
             </a:pPr>
             <a:r>
-              <a:rPr lang="en-US" sz="2000" dirty="0">
-                <a:solidFill>
-                  <a:srgbClr val="CC785C"/>
+              <a:rPr lang="en-US" sz="1400" dirty="0">
+                <a:solidFill>
+                  <a:srgbClr val="191919"/>
                 </a:solidFill>
                 <a:latin typeface="Georgia" pitchFamily="34" charset="0"/>
                 <a:ea typeface="Georgia" pitchFamily="34" charset="-122"/>
                 <a:cs typeface="Georgia" pitchFamily="34" charset="-120"/>
               </a:rPr>
-              <a:t>3</a:t>
-            </a:r>
-            <a:endParaRPr lang="en-US" sz="2000" dirty="0"/>
-          </a:p>
-        </p:txBody>
-      </p:sp>
-      <p:sp>
-        <p:nvSpPr>
-          <p:cNvPr id="12" name="Text 10"/>
-          <p:cNvSpPr/>
-          <p:nvPr/>
-        </p:nvSpPr>
-        <p:spPr>
-          <a:xfrm>
-            <a:off x="4864608" y="2148840"/>
-            <a:ext cx="1481328" cy="1051560"/>
-          </a:xfrm>
-          <a:prstGeom prst="rect">
-            <a:avLst/>
-          </a:prstGeom>
-          <a:noFill/>
-          <a:ln/>
-        </p:spPr>
-        <p:txBody>
-          <a:bodyPr wrap="square" lIns="0" tIns="0" rIns="0" bIns="0" rtlCol="0" anchor="t"/>
-          <a:lstStyle/>
-          <a:p>
-            <a:pPr indent="0" marL="0">
-              <a:spcAft>
-                <a:spcPts val="400"/>
-              </a:spcAft>
-              <a:buNone/>
-            </a:pPr>
-            <a:r>
-              <a:rPr lang="en-US" sz="1300" b="1" dirty="0">
-                <a:solidFill>
-                  <a:srgbClr val="191919"/>
-                </a:solidFill>
-                <a:latin typeface="Arial" pitchFamily="34" charset="0"/>
-                <a:ea typeface="Arial" pitchFamily="34" charset="-122"/>
-                <a:cs typeface="Arial" pitchFamily="34" charset="-120"/>
-              </a:rPr>
-              <a:t>Bump the version</a:t>
-            </a:r>
-            <a:endParaRPr lang="en-US" sz="1300" dirty="0"/>
-          </a:p>
-          <a:p>
-            <a:pPr indent="0" marL="0">
-              <a:spcAft>
-                <a:spcPts val="400"/>
-              </a:spcAft>
-              <a:buNone/>
-            </a:pPr>
-            <a:r>
-              <a:rPr lang="en-US" sz="1150" dirty="0">
-                <a:solidFill>
-                  <a:srgbClr val="6B6B66"/>
-                </a:solidFill>
-                <a:latin typeface="Arial" pitchFamily="34" charset="0"/>
-                <a:ea typeface="Arial" pitchFamily="34" charset="-122"/>
-                <a:cs typeface="Arial" pitchFamily="34" charset="-120"/>
-              </a:rPr>
-              <a:t>1.0.0 to 1.0.1 in plugin.json. Push. PR review as usual.</a:t>
-            </a:r>
-            <a:endParaRPr lang="en-US" sz="1300" dirty="0"/>
-          </a:p>
-        </p:txBody>
-      </p:sp>
-      <p:sp>
-        <p:nvSpPr>
-          <p:cNvPr id="13" name="Shape 11"/>
-          <p:cNvSpPr/>
-          <p:nvPr/>
-        </p:nvSpPr>
-        <p:spPr>
-          <a:xfrm>
-            <a:off x="6748272" y="1554480"/>
-            <a:ext cx="1847088" cy="1828800"/>
-          </a:xfrm>
-          <a:prstGeom prst="rect">
-            <a:avLst/>
-          </a:prstGeom>
-          <a:solidFill>
-            <a:srgbClr val="F0EEE6"/>
-          </a:solidFill>
-          <a:ln/>
-        </p:spPr>
-      </p:sp>
-      <p:sp>
-        <p:nvSpPr>
-          <p:cNvPr id="14" name="Text 12"/>
-          <p:cNvSpPr/>
-          <p:nvPr/>
-        </p:nvSpPr>
-        <p:spPr>
-          <a:xfrm>
-            <a:off x="6931152" y="1700784"/>
-            <a:ext cx="457200" cy="411480"/>
-          </a:xfrm>
-          <a:prstGeom prst="rect">
-            <a:avLst/>
-          </a:prstGeom>
-          <a:noFill/>
-          <a:ln/>
-        </p:spPr>
-        <p:txBody>
-          <a:bodyPr wrap="square" lIns="0" tIns="0" rIns="0" bIns="0" rtlCol="0" anchor="ctr"/>
-          <a:lstStyle/>
-          <a:p>
-            <a:pPr indent="0" marL="0">
-              <a:buNone/>
-            </a:pPr>
-            <a:r>
-              <a:rPr lang="en-US" sz="2000" dirty="0">
-                <a:solidFill>
-                  <a:srgbClr val="CC785C"/>
-                </a:solidFill>
-                <a:latin typeface="Georgia" pitchFamily="34" charset="0"/>
-                <a:ea typeface="Georgia" pitchFamily="34" charset="-122"/>
-                <a:cs typeface="Georgia" pitchFamily="34" charset="-120"/>
-              </a:rPr>
-              <a:t>4</a:t>
-            </a:r>
-            <a:endParaRPr lang="en-US" sz="2000" dirty="0"/>
-          </a:p>
-        </p:txBody>
-      </p:sp>
-      <p:sp>
-        <p:nvSpPr>
-          <p:cNvPr id="15" name="Text 13"/>
-          <p:cNvSpPr/>
-          <p:nvPr/>
-        </p:nvSpPr>
-        <p:spPr>
-          <a:xfrm>
-            <a:off x="6931152" y="2148840"/>
-            <a:ext cx="1481328" cy="1051560"/>
-          </a:xfrm>
-          <a:prstGeom prst="rect">
-            <a:avLst/>
-          </a:prstGeom>
-          <a:noFill/>
-          <a:ln/>
-        </p:spPr>
-        <p:txBody>
-          <a:bodyPr wrap="square" lIns="0" tIns="0" rIns="0" bIns="0" rtlCol="0" anchor="t"/>
-          <a:lstStyle/>
-          <a:p>
-            <a:pPr indent="0" marL="0">
-              <a:spcAft>
-                <a:spcPts val="400"/>
-              </a:spcAft>
-              <a:buNone/>
-            </a:pPr>
-            <a:r>
-              <a:rPr lang="en-US" sz="1300" b="1" dirty="0">
-                <a:solidFill>
-                  <a:srgbClr val="191919"/>
-                </a:solidFill>
-                <a:latin typeface="Arial" pitchFamily="34" charset="0"/>
-                <a:ea typeface="Arial" pitchFamily="34" charset="-122"/>
-                <a:cs typeface="Arial" pitchFamily="34" charset="-120"/>
-              </a:rPr>
-              <a:t>Update the fleet</a:t>
-            </a:r>
-            <a:endParaRPr lang="en-US" sz="1300" dirty="0"/>
-          </a:p>
-          <a:p>
-            <a:pPr indent="0" marL="0">
-              <a:spcAft>
-                <a:spcPts val="400"/>
-              </a:spcAft>
-              <a:buNone/>
-            </a:pPr>
-            <a:r>
-              <a:rPr lang="en-US" sz="1150" dirty="0">
-                <a:solidFill>
-                  <a:srgbClr val="6B6B66"/>
-                </a:solidFill>
-                <a:latin typeface="Arial" pitchFamily="34" charset="0"/>
-                <a:ea typeface="Arial" pitchFamily="34" charset="-122"/>
-                <a:cs typeface="Arial" pitchFamily="34" charset="-120"/>
-              </a:rPr>
-              <a:t>One command per engineer, or managed settings do it for them.</a:t>
-            </a:r>
-            <a:endParaRPr lang="en-US" sz="1300" dirty="0"/>
-          </a:p>
-        </p:txBody>
-      </p:sp>
-      <p:sp>
-        <p:nvSpPr>
-          <p:cNvPr id="16" name="Text 14"/>
-          <p:cNvSpPr/>
-          <p:nvPr/>
-        </p:nvSpPr>
-        <p:spPr>
-          <a:xfrm>
-            <a:off x="548640" y="3703320"/>
-            <a:ext cx="7315200" cy="411480"/>
-          </a:xfrm>
-          <a:prstGeom prst="rect">
-            <a:avLst/>
-          </a:prstGeom>
-          <a:noFill/>
-          <a:ln/>
-        </p:spPr>
-        <p:txBody>
-          <a:bodyPr wrap="square" lIns="0" tIns="0" rIns="0" bIns="0" rtlCol="0" anchor="ctr"/>
-          <a:lstStyle/>
-          <a:p>
-            <a:pPr indent="0" marL="0">
-              <a:buNone/>
-            </a:pPr>
-            <a:r>
-              <a:rPr lang="en-US" sz="1600" dirty="0">
-                <a:solidFill>
-                  <a:srgbClr val="191919"/>
-                </a:solidFill>
-                <a:latin typeface="Georgia" pitchFamily="34" charset="0"/>
-                <a:ea typeface="Georgia" pitchFamily="34" charset="-122"/>
-                <a:cs typeface="Georgia" pitchFamily="34" charset="-120"/>
-              </a:rPr>
-              <a:t>One PR updates every engineer's agent.</a:t>
-            </a:r>
-            <a:endParaRPr lang="en-US" sz="1600" dirty="0"/>
-          </a:p>
-        </p:txBody>
-      </p:sp>
-      <p:sp>
-        <p:nvSpPr>
-          <p:cNvPr id="17" name="Text 15"/>
+              <a:t>Same content. A different operating model.</a:t>
+            </a:r>
+            <a:endParaRPr lang="en-US" sz="1400" dirty="0"/>
+          </a:p>
+        </p:txBody>
+      </p:sp>
+      <p:sp>
+        <p:nvSpPr>
+          <p:cNvPr id="11" name="Text 9"/>
           <p:cNvSpPr/>
           <p:nvPr/>
         </p:nvSpPr>
@@ -7223,7 +8362,7 @@
         <p:spPr>
           <a:xfrm>
             <a:off x="548640" y="566928"/>
-            <a:ext cx="8046720" cy="685800"/>
+            <a:ext cx="8046720" cy="1005840"/>
           </a:xfrm>
           <a:prstGeom prst="rect">
             <a:avLst/>
@@ -7239,7 +8378,7 @@
               <a:buNone/>
             </a:pPr>
             <a:r>
-              <a:rPr lang="en-US" sz="2600" dirty="0">
+              <a:rPr lang="en-US" sz="2400" dirty="0">
                 <a:solidFill>
                   <a:srgbClr val="191919"/>
                 </a:solidFill>
@@ -7247,9 +8386,26 @@
                 <a:ea typeface="Georgia" pitchFamily="34" charset="-122"/>
                 <a:cs typeface="Georgia" pitchFamily="34" charset="-120"/>
               </a:rPr>
-              <a:t>The 4-beat demo. The next twelve minutes, live.</a:t>
-            </a:r>
-            <a:endParaRPr lang="en-US" sz="2600" dirty="0"/>
+              <a:t>An instruction can be ignored.</a:t>
+            </a:r>
+            <a:endParaRPr lang="en-US" sz="2400" dirty="0"/>
+          </a:p>
+          <a:p>
+            <a:pPr algn="l" indent="0" marL="0">
+              <a:buNone/>
+            </a:pPr>
+            <a:r>
+              <a:rPr lang="en-US" sz="2400" dirty="0">
+                <a:solidFill>
+                  <a:srgbClr val="191919"/>
+                </a:solidFill>
+                <a:latin typeface="Georgia" pitchFamily="34" charset="0"/>
+                <a:ea typeface="Georgia" pitchFamily="34" charset="-122"/>
+                <a:cs typeface="Georgia" pitchFamily="34" charset="-120"/>
+              </a:rPr>
+              <a:t>A process gate can't.</a:t>
+            </a:r>
+            <a:endParaRPr lang="en-US" sz="2400" dirty="0"/>
           </a:p>
         </p:txBody>
       </p:sp>
@@ -7261,8 +8417,8 @@
         </p:nvSpPr>
         <p:spPr>
           <a:xfrm>
-            <a:off x="548640" y="1417320"/>
-            <a:ext cx="3886200" cy="1417320"/>
+            <a:off x="548640" y="2103120"/>
+            <a:ext cx="1737360" cy="685800"/>
           </a:xfrm>
           <a:prstGeom prst="rect">
             <a:avLst/>
@@ -7281,8 +8437,8 @@
         </p:nvSpPr>
         <p:spPr>
           <a:xfrm>
-            <a:off x="804672" y="1618488"/>
-            <a:ext cx="3374136" cy="365760"/>
+            <a:off x="548640" y="2103120"/>
+            <a:ext cx="1737360" cy="685800"/>
           </a:xfrm>
           <a:prstGeom prst="rect">
             <a:avLst/>
@@ -7294,58 +8450,400 @@
           <a:bodyPr wrap="square" lIns="0" tIns="0" rIns="0" bIns="0" rtlCol="0" anchor="ctr"/>
           <a:lstStyle/>
           <a:p>
+            <a:pPr algn="ctr" indent="0" marL="0">
+              <a:buNone/>
+            </a:pPr>
+            <a:r>
+              <a:rPr lang="en-US" sz="1200" dirty="0">
+                <a:solidFill>
+                  <a:srgbClr val="191919"/>
+                </a:solidFill>
+                <a:latin typeface="Consolas" pitchFamily="34" charset="0"/>
+                <a:ea typeface="Consolas" pitchFamily="34" charset="-122"/>
+                <a:cs typeface="Consolas" pitchFamily="34" charset="-120"/>
+              </a:rPr>
+              <a:t>tool call</a:t>
+            </a:r>
+            <a:endParaRPr lang="en-US" sz="1200" dirty="0"/>
+          </a:p>
+        </p:txBody>
+      </p:sp>
+      <p:sp>
+        <p:nvSpPr>
+          <p:cNvPr id="6" name="Shape 4"/>
+          <p:cNvSpPr/>
+          <p:nvPr/>
+        </p:nvSpPr>
+        <p:spPr>
+          <a:xfrm>
+            <a:off x="2286000" y="2446020"/>
+            <a:ext cx="594360" cy="0"/>
+          </a:xfrm>
+          <a:prstGeom prst="line">
+            <a:avLst/>
+          </a:prstGeom>
+          <a:noFill/>
+          <a:ln w="19050">
+            <a:solidFill>
+              <a:srgbClr val="CC785C"/>
+            </a:solidFill>
+            <a:prstDash val="solid"/>
+            <a:tailEnd type="triangle"/>
+          </a:ln>
+        </p:spPr>
+      </p:sp>
+      <p:sp>
+        <p:nvSpPr>
+          <p:cNvPr id="7" name="Shape 5"/>
+          <p:cNvSpPr/>
+          <p:nvPr/>
+        </p:nvSpPr>
+        <p:spPr>
+          <a:xfrm>
+            <a:off x="2880360" y="2103120"/>
+            <a:ext cx="1737360" cy="685800"/>
+          </a:xfrm>
+          <a:prstGeom prst="rect">
+            <a:avLst/>
+          </a:prstGeom>
+          <a:solidFill>
+            <a:srgbClr val="F0EEE6"/>
+          </a:solidFill>
+          <a:ln w="12700">
+            <a:solidFill>
+              <a:srgbClr val="D4A27F"/>
+            </a:solidFill>
+            <a:prstDash val="solid"/>
+          </a:ln>
+        </p:spPr>
+      </p:sp>
+      <p:sp>
+        <p:nvSpPr>
+          <p:cNvPr id="8" name="Text 6"/>
+          <p:cNvSpPr/>
+          <p:nvPr/>
+        </p:nvSpPr>
+        <p:spPr>
+          <a:xfrm>
+            <a:off x="2880360" y="2103120"/>
+            <a:ext cx="1737360" cy="685800"/>
+          </a:xfrm>
+          <a:prstGeom prst="rect">
+            <a:avLst/>
+          </a:prstGeom>
+          <a:noFill/>
+          <a:ln/>
+        </p:spPr>
+        <p:txBody>
+          <a:bodyPr wrap="square" lIns="0" tIns="0" rIns="0" bIns="0" rtlCol="0" anchor="ctr"/>
+          <a:lstStyle/>
+          <a:p>
+            <a:pPr algn="ctr" indent="0" marL="0">
+              <a:buNone/>
+            </a:pPr>
+            <a:r>
+              <a:rPr lang="en-US" sz="1200" dirty="0">
+                <a:solidFill>
+                  <a:srgbClr val="191919"/>
+                </a:solidFill>
+                <a:latin typeface="Consolas" pitchFamily="34" charset="0"/>
+                <a:ea typeface="Consolas" pitchFamily="34" charset="-122"/>
+                <a:cs typeface="Consolas" pitchFamily="34" charset="-120"/>
+              </a:rPr>
+              <a:t>guard.js</a:t>
+            </a:r>
+            <a:endParaRPr lang="en-US" sz="1200" dirty="0"/>
+          </a:p>
+        </p:txBody>
+      </p:sp>
+      <p:sp>
+        <p:nvSpPr>
+          <p:cNvPr id="9" name="Shape 7"/>
+          <p:cNvSpPr/>
+          <p:nvPr/>
+        </p:nvSpPr>
+        <p:spPr>
+          <a:xfrm flipV="1">
+            <a:off x="4617720" y="1668780"/>
+            <a:ext cx="777240" cy="777240"/>
+          </a:xfrm>
+          <a:prstGeom prst="line">
+            <a:avLst/>
+          </a:prstGeom>
+          <a:noFill/>
+          <a:ln w="12700">
+            <a:solidFill>
+              <a:srgbClr val="6B6B66"/>
+            </a:solidFill>
+            <a:prstDash val="solid"/>
+            <a:tailEnd type="triangle"/>
+          </a:ln>
+        </p:spPr>
+      </p:sp>
+      <p:sp>
+        <p:nvSpPr>
+          <p:cNvPr id="10" name="Shape 8"/>
+          <p:cNvSpPr/>
+          <p:nvPr/>
+        </p:nvSpPr>
+        <p:spPr>
+          <a:xfrm>
+            <a:off x="5394960" y="1394460"/>
+            <a:ext cx="1417320" cy="548640"/>
+          </a:xfrm>
+          <a:prstGeom prst="rect">
+            <a:avLst/>
+          </a:prstGeom>
+          <a:solidFill>
+            <a:srgbClr val="F0EEE6"/>
+          </a:solidFill>
+          <a:ln/>
+        </p:spPr>
+      </p:sp>
+      <p:sp>
+        <p:nvSpPr>
+          <p:cNvPr id="11" name="Text 9"/>
+          <p:cNvSpPr/>
+          <p:nvPr/>
+        </p:nvSpPr>
+        <p:spPr>
+          <a:xfrm>
+            <a:off x="5394960" y="1394460"/>
+            <a:ext cx="1417320" cy="548640"/>
+          </a:xfrm>
+          <a:prstGeom prst="rect">
+            <a:avLst/>
+          </a:prstGeom>
+          <a:noFill/>
+          <a:ln/>
+        </p:spPr>
+        <p:txBody>
+          <a:bodyPr wrap="square" lIns="0" tIns="0" rIns="0" bIns="0" rtlCol="0" anchor="ctr"/>
+          <a:lstStyle/>
+          <a:p>
+            <a:pPr algn="ctr" indent="0" marL="0">
+              <a:buNone/>
+            </a:pPr>
+            <a:r>
+              <a:rPr lang="en-US" sz="1200" dirty="0">
+                <a:solidFill>
+                  <a:srgbClr val="191919"/>
+                </a:solidFill>
+                <a:latin typeface="Consolas" pitchFamily="34" charset="0"/>
+                <a:ea typeface="Consolas" pitchFamily="34" charset="-122"/>
+                <a:cs typeface="Consolas" pitchFamily="34" charset="-120"/>
+              </a:rPr>
+              <a:t>allow</a:t>
+            </a:r>
+            <a:endParaRPr lang="en-US" sz="1200" dirty="0"/>
+          </a:p>
+        </p:txBody>
+      </p:sp>
+      <p:sp>
+        <p:nvSpPr>
+          <p:cNvPr id="12" name="Shape 10"/>
+          <p:cNvSpPr/>
+          <p:nvPr/>
+        </p:nvSpPr>
+        <p:spPr>
+          <a:xfrm>
+            <a:off x="4617720" y="2446020"/>
+            <a:ext cx="777240" cy="914"/>
+          </a:xfrm>
+          <a:prstGeom prst="line">
+            <a:avLst/>
+          </a:prstGeom>
+          <a:noFill/>
+          <a:ln w="12700">
+            <a:solidFill>
+              <a:srgbClr val="6B6B66"/>
+            </a:solidFill>
+            <a:prstDash val="solid"/>
+            <a:tailEnd type="triangle"/>
+          </a:ln>
+        </p:spPr>
+      </p:sp>
+      <p:sp>
+        <p:nvSpPr>
+          <p:cNvPr id="13" name="Shape 11"/>
+          <p:cNvSpPr/>
+          <p:nvPr/>
+        </p:nvSpPr>
+        <p:spPr>
+          <a:xfrm>
+            <a:off x="5394960" y="2171700"/>
+            <a:ext cx="1417320" cy="548640"/>
+          </a:xfrm>
+          <a:prstGeom prst="rect">
+            <a:avLst/>
+          </a:prstGeom>
+          <a:solidFill>
+            <a:srgbClr val="F0EEE6"/>
+          </a:solidFill>
+          <a:ln/>
+        </p:spPr>
+      </p:sp>
+      <p:sp>
+        <p:nvSpPr>
+          <p:cNvPr id="14" name="Text 12"/>
+          <p:cNvSpPr/>
+          <p:nvPr/>
+        </p:nvSpPr>
+        <p:spPr>
+          <a:xfrm>
+            <a:off x="5394960" y="2171700"/>
+            <a:ext cx="1417320" cy="548640"/>
+          </a:xfrm>
+          <a:prstGeom prst="rect">
+            <a:avLst/>
+          </a:prstGeom>
+          <a:noFill/>
+          <a:ln/>
+        </p:spPr>
+        <p:txBody>
+          <a:bodyPr wrap="square" lIns="0" tIns="0" rIns="0" bIns="0" rtlCol="0" anchor="ctr"/>
+          <a:lstStyle/>
+          <a:p>
+            <a:pPr algn="ctr" indent="0" marL="0">
+              <a:buNone/>
+            </a:pPr>
+            <a:r>
+              <a:rPr lang="en-US" sz="1200" dirty="0">
+                <a:solidFill>
+                  <a:srgbClr val="191919"/>
+                </a:solidFill>
+                <a:latin typeface="Consolas" pitchFamily="34" charset="0"/>
+                <a:ea typeface="Consolas" pitchFamily="34" charset="-122"/>
+                <a:cs typeface="Consolas" pitchFamily="34" charset="-120"/>
+              </a:rPr>
+              <a:t>ask</a:t>
+            </a:r>
+            <a:endParaRPr lang="en-US" sz="1200" dirty="0"/>
+          </a:p>
+        </p:txBody>
+      </p:sp>
+      <p:sp>
+        <p:nvSpPr>
+          <p:cNvPr id="15" name="Shape 13"/>
+          <p:cNvSpPr/>
+          <p:nvPr/>
+        </p:nvSpPr>
+        <p:spPr>
+          <a:xfrm>
+            <a:off x="4617720" y="2446020"/>
+            <a:ext cx="777240" cy="777240"/>
+          </a:xfrm>
+          <a:prstGeom prst="line">
+            <a:avLst/>
+          </a:prstGeom>
+          <a:noFill/>
+          <a:ln w="12700">
+            <a:solidFill>
+              <a:srgbClr val="6B6B66"/>
+            </a:solidFill>
+            <a:prstDash val="solid"/>
+            <a:tailEnd type="triangle"/>
+          </a:ln>
+        </p:spPr>
+      </p:sp>
+      <p:sp>
+        <p:nvSpPr>
+          <p:cNvPr id="16" name="Shape 14"/>
+          <p:cNvSpPr/>
+          <p:nvPr/>
+        </p:nvSpPr>
+        <p:spPr>
+          <a:xfrm>
+            <a:off x="5394960" y="2948940"/>
+            <a:ext cx="1417320" cy="548640"/>
+          </a:xfrm>
+          <a:prstGeom prst="rect">
+            <a:avLst/>
+          </a:prstGeom>
+          <a:solidFill>
+            <a:srgbClr val="FAF9F5"/>
+          </a:solidFill>
+          <a:ln w="15875">
+            <a:solidFill>
+              <a:srgbClr val="CC785C"/>
+            </a:solidFill>
+            <a:prstDash val="solid"/>
+          </a:ln>
+        </p:spPr>
+      </p:sp>
+      <p:sp>
+        <p:nvSpPr>
+          <p:cNvPr id="17" name="Text 15"/>
+          <p:cNvSpPr/>
+          <p:nvPr/>
+        </p:nvSpPr>
+        <p:spPr>
+          <a:xfrm>
+            <a:off x="5394960" y="2948940"/>
+            <a:ext cx="1417320" cy="548640"/>
+          </a:xfrm>
+          <a:prstGeom prst="rect">
+            <a:avLst/>
+          </a:prstGeom>
+          <a:noFill/>
+          <a:ln/>
+        </p:spPr>
+        <p:txBody>
+          <a:bodyPr wrap="square" lIns="0" tIns="0" rIns="0" bIns="0" rtlCol="0" anchor="ctr"/>
+          <a:lstStyle/>
+          <a:p>
+            <a:pPr algn="ctr" indent="0" marL="0">
+              <a:buNone/>
+            </a:pPr>
+            <a:r>
+              <a:rPr lang="en-US" sz="1200" dirty="0">
+                <a:solidFill>
+                  <a:srgbClr val="CC785C"/>
+                </a:solidFill>
+                <a:latin typeface="Consolas" pitchFamily="34" charset="0"/>
+                <a:ea typeface="Consolas" pitchFamily="34" charset="-122"/>
+                <a:cs typeface="Consolas" pitchFamily="34" charset="-120"/>
+              </a:rPr>
+              <a:t>deny</a:t>
+            </a:r>
+            <a:endParaRPr lang="en-US" sz="1200" dirty="0"/>
+          </a:p>
+        </p:txBody>
+      </p:sp>
+      <p:sp>
+        <p:nvSpPr>
+          <p:cNvPr id="18" name="Text 16"/>
+          <p:cNvSpPr/>
+          <p:nvPr/>
+        </p:nvSpPr>
+        <p:spPr>
+          <a:xfrm>
+            <a:off x="548640" y="3886200"/>
+            <a:ext cx="5852160" cy="777240"/>
+          </a:xfrm>
+          <a:prstGeom prst="rect">
+            <a:avLst/>
+          </a:prstGeom>
+          <a:noFill/>
+          <a:ln/>
+        </p:spPr>
+        <p:txBody>
+          <a:bodyPr wrap="square" lIns="0" tIns="0" rIns="0" bIns="0" rtlCol="0" anchor="t"/>
+          <a:lstStyle/>
+          <a:p>
             <a:pPr indent="0" marL="0">
               <a:buNone/>
             </a:pPr>
             <a:r>
-              <a:rPr lang="en-US" sz="1700" dirty="0">
+              <a:rPr lang="en-US" sz="1250" dirty="0">
                 <a:solidFill>
                   <a:srgbClr val="191919"/>
-                </a:solidFill>
-                <a:latin typeface="Georgia" pitchFamily="34" charset="0"/>
-                <a:ea typeface="Georgia" pitchFamily="34" charset="-122"/>
-                <a:cs typeface="Georgia" pitchFamily="34" charset="-120"/>
-              </a:rPr>
-              <a:t>Install</a:t>
-            </a:r>
-            <a:endParaRPr lang="en-US" sz="1700" dirty="0"/>
-          </a:p>
-        </p:txBody>
-      </p:sp>
-      <p:sp>
-        <p:nvSpPr>
-          <p:cNvPr id="6" name="Text 4"/>
-          <p:cNvSpPr/>
-          <p:nvPr/>
-        </p:nvSpPr>
-        <p:spPr>
-          <a:xfrm>
-            <a:off x="804672" y="2039112"/>
-            <a:ext cx="3374136" cy="594360"/>
-          </a:xfrm>
-          <a:prstGeom prst="rect">
-            <a:avLst/>
-          </a:prstGeom>
-          <a:noFill/>
-          <a:ln/>
-        </p:spPr>
-        <p:txBody>
-          <a:bodyPr wrap="square" lIns="0" tIns="0" rIns="0" bIns="0" rtlCol="0" anchor="t"/>
-          <a:lstStyle/>
-          <a:p>
-            <a:pPr indent="0" marL="0">
-              <a:buNone/>
-            </a:pPr>
-            <a:r>
-              <a:rPr lang="en-US" sz="1250" dirty="0">
-                <a:solidFill>
-                  <a:srgbClr val="6B6B66"/>
                 </a:solidFill>
                 <a:latin typeface="Arial" pitchFamily="34" charset="0"/>
                 <a:ea typeface="Arial" pitchFamily="34" charset="-122"/>
                 <a:cs typeface="Arial" pitchFamily="34" charset="-120"/>
               </a:rPr>
-              <a:t>One command, ninety seconds.</a:t>
+              <a:t>The decision is a regex match against policy.json, not a model choice. Same input, same block, every run. Denials and executions land side by side in the audit trail.</a:t>
             </a:r>
             <a:endParaRPr lang="en-US" sz="1250" dirty="0"/>
           </a:p>
@@ -7353,301 +8851,46 @@
       </p:sp>
       <p:sp>
         <p:nvSpPr>
-          <p:cNvPr id="7" name="Shape 5"/>
-          <p:cNvSpPr/>
-          <p:nvPr/>
-        </p:nvSpPr>
-        <p:spPr>
-          <a:xfrm>
-            <a:off x="4709160" y="1417320"/>
-            <a:ext cx="3886200" cy="1417320"/>
-          </a:xfrm>
-          <a:prstGeom prst="rect">
-            <a:avLst/>
-          </a:prstGeom>
-          <a:solidFill>
-            <a:srgbClr val="F0EEE6"/>
-          </a:solidFill>
-          <a:ln/>
-        </p:spPr>
-      </p:sp>
-      <p:sp>
-        <p:nvSpPr>
-          <p:cNvPr id="8" name="Text 6"/>
-          <p:cNvSpPr/>
-          <p:nvPr/>
-        </p:nvSpPr>
-        <p:spPr>
-          <a:xfrm>
-            <a:off x="4965192" y="1618488"/>
-            <a:ext cx="3374136" cy="365760"/>
-          </a:xfrm>
-          <a:prstGeom prst="rect">
-            <a:avLst/>
-          </a:prstGeom>
-          <a:noFill/>
-          <a:ln/>
-        </p:spPr>
-        <p:txBody>
-          <a:bodyPr wrap="square" lIns="0" tIns="0" rIns="0" bIns="0" rtlCol="0" anchor="ctr"/>
+          <p:cNvPr id="19" name="Text 17"/>
+          <p:cNvSpPr/>
+          <p:nvPr/>
+        </p:nvSpPr>
+        <p:spPr>
+          <a:xfrm>
+            <a:off x="6629400" y="3886200"/>
+            <a:ext cx="1965960" cy="777240"/>
+          </a:xfrm>
+          <a:prstGeom prst="rect">
+            <a:avLst/>
+          </a:prstGeom>
+          <a:noFill/>
+          <a:ln/>
+        </p:spPr>
+        <p:txBody>
+          <a:bodyPr wrap="square" lIns="0" tIns="0" rIns="0" bIns="0" rtlCol="0" anchor="t"/>
           <a:lstStyle/>
           <a:p>
             <a:pPr indent="0" marL="0">
               <a:buNone/>
             </a:pPr>
             <a:r>
-              <a:rPr lang="en-US" sz="1700" dirty="0">
-                <a:solidFill>
-                  <a:srgbClr val="191919"/>
-                </a:solidFill>
-                <a:latin typeface="Georgia" pitchFamily="34" charset="0"/>
-                <a:ea typeface="Georgia" pitchFamily="34" charset="-122"/>
-                <a:cs typeface="Georgia" pitchFamily="34" charset="-120"/>
-              </a:rPr>
-              <a:t>Use</a:t>
-            </a:r>
-            <a:endParaRPr lang="en-US" sz="1700" dirty="0"/>
-          </a:p>
-        </p:txBody>
-      </p:sp>
-      <p:sp>
-        <p:nvSpPr>
-          <p:cNvPr id="9" name="Text 7"/>
-          <p:cNvSpPr/>
-          <p:nvPr/>
-        </p:nvSpPr>
-        <p:spPr>
-          <a:xfrm>
-            <a:off x="4965192" y="2039112"/>
-            <a:ext cx="3374136" cy="594360"/>
-          </a:xfrm>
-          <a:prstGeom prst="rect">
-            <a:avLst/>
-          </a:prstGeom>
-          <a:noFill/>
-          <a:ln/>
-        </p:spPr>
-        <p:txBody>
-          <a:bodyPr wrap="square" lIns="0" tIns="0" rIns="0" bIns="0" rtlCol="0" anchor="t"/>
-          <a:lstStyle/>
-          <a:p>
-            <a:pPr indent="0" marL="0">
-              <a:buNone/>
-            </a:pPr>
-            <a:r>
-              <a:rPr lang="en-US" sz="1250" dirty="0">
+              <a:rPr lang="en-US" sz="1050" dirty="0">
                 <a:solidFill>
                   <a:srgbClr val="6B6B66"/>
                 </a:solidFill>
-                <a:latin typeface="Arial" pitchFamily="34" charset="0"/>
-                <a:ea typeface="Arial" pitchFamily="34" charset="-122"/>
-                <a:cs typeface="Arial" pitchFamily="34" charset="-120"/>
-              </a:rPr>
-              <a:t>Your conventions, applied by your reviewer.</a:t>
-            </a:r>
-            <a:endParaRPr lang="en-US" sz="1250" dirty="0"/>
-          </a:p>
-        </p:txBody>
-      </p:sp>
-      <p:sp>
-        <p:nvSpPr>
-          <p:cNvPr id="10" name="Shape 8"/>
-          <p:cNvSpPr/>
-          <p:nvPr/>
-        </p:nvSpPr>
-        <p:spPr>
-          <a:xfrm>
-            <a:off x="548640" y="3063240"/>
-            <a:ext cx="3886200" cy="1417320"/>
-          </a:xfrm>
-          <a:prstGeom prst="rect">
-            <a:avLst/>
-          </a:prstGeom>
-          <a:solidFill>
-            <a:srgbClr val="F0EEE6"/>
-          </a:solidFill>
-          <a:ln/>
-        </p:spPr>
-      </p:sp>
-      <p:sp>
-        <p:nvSpPr>
-          <p:cNvPr id="11" name="Text 9"/>
-          <p:cNvSpPr/>
-          <p:nvPr/>
-        </p:nvSpPr>
-        <p:spPr>
-          <a:xfrm>
-            <a:off x="804672" y="3264408"/>
-            <a:ext cx="3374136" cy="365760"/>
-          </a:xfrm>
-          <a:prstGeom prst="rect">
-            <a:avLst/>
-          </a:prstGeom>
-          <a:noFill/>
-          <a:ln/>
-        </p:spPr>
-        <p:txBody>
-          <a:bodyPr wrap="square" lIns="0" tIns="0" rIns="0" bIns="0" rtlCol="0" anchor="ctr"/>
-          <a:lstStyle/>
-          <a:p>
-            <a:pPr indent="0" marL="0">
-              <a:buNone/>
-            </a:pPr>
-            <a:r>
-              <a:rPr lang="en-US" sz="1700" dirty="0">
-                <a:solidFill>
-                  <a:srgbClr val="191919"/>
-                </a:solidFill>
-                <a:latin typeface="Georgia" pitchFamily="34" charset="0"/>
-                <a:ea typeface="Georgia" pitchFamily="34" charset="-122"/>
-                <a:cs typeface="Georgia" pitchFamily="34" charset="-120"/>
-              </a:rPr>
-              <a:t>Govern</a:t>
-            </a:r>
-            <a:endParaRPr lang="en-US" sz="1700" dirty="0"/>
-          </a:p>
-        </p:txBody>
-      </p:sp>
-      <p:sp>
-        <p:nvSpPr>
-          <p:cNvPr id="12" name="Text 10"/>
-          <p:cNvSpPr/>
-          <p:nvPr/>
-        </p:nvSpPr>
-        <p:spPr>
-          <a:xfrm>
-            <a:off x="804672" y="3685032"/>
-            <a:ext cx="3374136" cy="594360"/>
-          </a:xfrm>
-          <a:prstGeom prst="rect">
-            <a:avLst/>
-          </a:prstGeom>
-          <a:noFill/>
-          <a:ln/>
-        </p:spPr>
-        <p:txBody>
-          <a:bodyPr wrap="square" lIns="0" tIns="0" rIns="0" bIns="0" rtlCol="0" anchor="t"/>
-          <a:lstStyle/>
-          <a:p>
-            <a:pPr indent="0" marL="0">
-              <a:buNone/>
-            </a:pPr>
-            <a:r>
-              <a:rPr lang="en-US" sz="1250" dirty="0">
-                <a:solidFill>
-                  <a:srgbClr val="6B6B66"/>
-                </a:solidFill>
-                <a:latin typeface="Arial" pitchFamily="34" charset="0"/>
-                <a:ea typeface="Arial" pitchFamily="34" charset="-122"/>
-                <a:cs typeface="Arial" pitchFamily="34" charset="-120"/>
-              </a:rPr>
-              <a:t>Deny and ask, deterministically, with an audit trail.</a:t>
-            </a:r>
-            <a:endParaRPr lang="en-US" sz="1250" dirty="0"/>
-          </a:p>
-        </p:txBody>
-      </p:sp>
-      <p:sp>
-        <p:nvSpPr>
-          <p:cNvPr id="13" name="Shape 11"/>
-          <p:cNvSpPr/>
-          <p:nvPr/>
-        </p:nvSpPr>
-        <p:spPr>
-          <a:xfrm>
-            <a:off x="4709160" y="3063240"/>
-            <a:ext cx="3886200" cy="1417320"/>
-          </a:xfrm>
-          <a:prstGeom prst="rect">
-            <a:avLst/>
-          </a:prstGeom>
-          <a:solidFill>
-            <a:srgbClr val="F0EEE6"/>
-          </a:solidFill>
-          <a:ln/>
-        </p:spPr>
-      </p:sp>
-      <p:sp>
-        <p:nvSpPr>
-          <p:cNvPr id="14" name="Text 12"/>
-          <p:cNvSpPr/>
-          <p:nvPr/>
-        </p:nvSpPr>
-        <p:spPr>
-          <a:xfrm>
-            <a:off x="4965192" y="3264408"/>
-            <a:ext cx="3374136" cy="365760"/>
-          </a:xfrm>
-          <a:prstGeom prst="rect">
-            <a:avLst/>
-          </a:prstGeom>
-          <a:noFill/>
-          <a:ln/>
-        </p:spPr>
-        <p:txBody>
-          <a:bodyPr wrap="square" lIns="0" tIns="0" rIns="0" bIns="0" rtlCol="0" anchor="ctr"/>
-          <a:lstStyle/>
-          <a:p>
-            <a:pPr indent="0" marL="0">
-              <a:buNone/>
-            </a:pPr>
-            <a:r>
-              <a:rPr lang="en-US" sz="1700" dirty="0">
-                <a:solidFill>
-                  <a:srgbClr val="191919"/>
-                </a:solidFill>
-                <a:latin typeface="Georgia" pitchFamily="34" charset="0"/>
-                <a:ea typeface="Georgia" pitchFamily="34" charset="-122"/>
-                <a:cs typeface="Georgia" pitchFamily="34" charset="-120"/>
-              </a:rPr>
-              <a:t>Ship</a:t>
-            </a:r>
-            <a:endParaRPr lang="en-US" sz="1700" dirty="0"/>
-          </a:p>
-        </p:txBody>
-      </p:sp>
-      <p:sp>
-        <p:nvSpPr>
-          <p:cNvPr id="15" name="Text 13"/>
-          <p:cNvSpPr/>
-          <p:nvPr/>
-        </p:nvSpPr>
-        <p:spPr>
-          <a:xfrm>
-            <a:off x="4965192" y="3685032"/>
-            <a:ext cx="3374136" cy="594360"/>
-          </a:xfrm>
-          <a:prstGeom prst="rect">
-            <a:avLst/>
-          </a:prstGeom>
-          <a:noFill/>
-          <a:ln/>
-        </p:spPr>
-        <p:txBody>
-          <a:bodyPr wrap="square" lIns="0" tIns="0" rIns="0" bIns="0" rtlCol="0" anchor="t"/>
-          <a:lstStyle/>
-          <a:p>
-            <a:pPr indent="0" marL="0">
-              <a:buNone/>
-            </a:pPr>
-            <a:r>
-              <a:rPr lang="en-US" sz="1250" dirty="0">
-                <a:solidFill>
-                  <a:srgbClr val="6B6B66"/>
-                </a:solidFill>
-                <a:latin typeface="Arial" pitchFamily="34" charset="0"/>
-                <a:ea typeface="Arial" pitchFamily="34" charset="-122"/>
-                <a:cs typeface="Arial" pitchFamily="34" charset="-120"/>
-              </a:rPr>
-              <a:t>One PR updates every engineer's agent.</a:t>
-            </a:r>
-            <a:endParaRPr lang="en-US" sz="1250" dirty="0"/>
-          </a:p>
-        </p:txBody>
-      </p:sp>
-      <p:sp>
-        <p:nvSpPr>
-          <p:cNvPr id="16" name="Text 14"/>
+                <a:latin typeface="Consolas" pitchFamily="34" charset="0"/>
+                <a:ea typeface="Consolas" pitchFamily="34" charset="-122"/>
+                <a:cs typeface="Consolas" pitchFamily="34" charset="-120"/>
+              </a:rPr>
+              <a:t>guard.js: 158 lines, tested offline, zero tokens.</a:t>
+            </a:r>
+            <a:endParaRPr lang="en-US" sz="1050" dirty="0"/>
+          </a:p>
+        </p:txBody>
+      </p:sp>
+      <p:sp>
+        <p:nvSpPr>
+          <p:cNvPr id="20" name="Text 18"/>
           <p:cNvSpPr/>
           <p:nvPr/>
         </p:nvSpPr>

--- a/enablement/deck/presentation-deck.pptx
+++ b/enablement/deck/presentation-deck.pptx
@@ -19,9 +19,11 @@
     <p:sldId id="267" r:id="rId13"/>
     <p:sldId id="268" r:id="rId14"/>
     <p:sldId id="269" r:id="rId15"/>
+    <p:sldId id="270" r:id="rId16"/>
+    <p:sldId id="271" r:id="rId17"/>
   </p:sldIdLst>
   <p:notesMasterIdLst>
-    <p:notesMasterId r:id="rId16"/>
+    <p:notesMasterId r:id="rId18"/>
   </p:notesMasterIdLst>
   <p:sldSz cx="9144000" cy="5143500"/>
   <p:notesSz cx="5143500" cy="9144000"/>
@@ -515,7 +517,7 @@
           <a:p>
             <a:r>
               <a:rPr lang="en-US" dirty="0"/>
-              <a:t>Prospect-facing deck for the data-platform-pack session. Pair with 02-facilitator-guide.md (internal, never shared) for the talk track and timings. Slides carry the framing; the demo runs in the terminal from minute 8.</a:t>
+              <a:t>Open on this slide in silence and let the number sit. Then: this dashboard is wrong by $129.50; the real number is $171.50; and the query that produced it passed review. These are real values from this kit's seeded data (a returned order counted as revenue), and beat 2 catches this exact bug live at minute 11. Timing: 0:00 to 0:40.</a:t>
             </a:r>
             <a:endParaRPr lang="en-US" dirty="0"/>
           </a:p>
@@ -603,7 +605,7 @@
           <a:p>
             <a:r>
               <a:rPr lang="en-US" dirty="0"/>
-              <a:t>This is the rollout motion the platform lead has been asking for. Beat 4 of the demo performs it live with a rule the room suggests. The offline proof step matters: the seller never burns a token to know the policy works.</a:t>
+              <a:t>Switch to the terminal and run beat 1 from PROMPTS.md, from demo-project/. Open /plugin and show what arrived. Line to land: ninety seconds ago this machine was vanilla; now it has the team's conventions, reviewer, and guardrails. Timing: 8:00 to 10:00.</a:t>
             </a:r>
             <a:endParaRPr lang="en-US" dirty="0"/>
           </a:p>
@@ -691,7 +693,7 @@
           <a:p>
             <a:r>
               <a:rPr lang="en-US" dirty="0"/>
-              <a:t>Each beat names the alternative it replaces; let those land. Prompts are verbatim in PROMPTS.md; narrate decisions, not keystrokes. Beat 3 is where the principle slides pay off: the deny arrives with a rule id and reason, and the audit file shows attempts and outcomes together. Beat 4 takes a rule from the room and ships it.</a:t>
+              <a:t>Run the review live. When rule 4 lands, point back at the cold open: that is the $129.50. This is Maya's checklist working without Maya in the room. If the run adds a WARN beyond the four seeded findings, even better; narrate it as a bonus. Timing: 10:00 to 13:00.</a:t>
             </a:r>
             <a:endParaRPr lang="en-US" dirty="0"/>
           </a:p>
@@ -779,7 +781,7 @@
           <a:p>
             <a:r>
               <a:rPr lang="en-US" dirty="0"/>
-              <a:t>Active practice with immediate feedback: the harness gives an instant pass or fail, so every attendee gets a tight loop. Facilitator circulates. No laptops in the room? Run beat 4 twice more with audience-supplied rules instead.</a:t>
+              <a:t>Ask Claude to drop the corrupted prod table. If the guard denies, these exact lines appear live. If Claude refuses without attempting anything (it did in validation), narrate it as layer one, the model's judgment, then run the prod-target probe from PROMPTS.md beat 3 to bring the gate on screen. Then cat .claude/audit/agent-audit-*.jsonl: denials next to executions. Pause here; the objection will surface, and the answer is on screen. Timing: 13:00 to 17:00.</a:t>
             </a:r>
             <a:endParaRPr lang="en-US" dirty="0"/>
           </a:p>
@@ -867,7 +869,7 @@
           <a:p>
             <a:r>
               <a:rPr lang="en-US" dirty="0"/>
-              <a:t>Pose the three questions to the room and let them answer; they're discovery, and the answers tell you where a pilot lands. The next step on the slide is the ask: a two-week pilot in their repo with their conventions. Internally, the success signal stays the 14-day real-customer run from 01-design-note.md.</a:t>
+              <a:t>The participation climax. Take the room's first answer (terraform apply is the usual one), add the rule to policy.json, prove it with try.js in under a second with zero tokens, run the harness to show nothing regressed, bump the version, and narrate the fleet update. Their rule is now policy. Timing: 17:00 to 20:00.</a:t>
             </a:r>
             <a:endParaRPr lang="en-US" dirty="0"/>
           </a:p>
@@ -955,7 +957,7 @@
           <a:p>
             <a:r>
               <a:rPr lang="en-US" dirty="0"/>
-              <a:t>Close by uninstalling and reinstalling the plugin on screen, under a minute; distribution is the product, worth showing twice. After the room leaves, uninstall and remove the marketplace so the machine is clean for the next session. Everything on this slide exists in the published kit today.</a:t>
+              <a:t>Recap the receipts, then flip to hands-on: attendees run the harness from their clone, install from the local marketplace (start Claude in demo-project/ and use ../), trigger one deny themselves, then author one rule and make the harness pass. Circulate. No laptops in the room? Run beat 4 twice more with audience rules. Timing: 20:00 to 26:00.</a:t>
             </a:r>
             <a:endParaRPr lang="en-US" dirty="0"/>
           </a:p>
@@ -979,6 +981,182 @@
             <a:fld id="{F7021451-1387-4CA6-816F-3879F97B5CBC}" type="slidenum">
               <a:rPr lang="en-US"/>
               <a:t>14</a:t>
+            </a:fld>
+            <a:endParaRPr lang="en-US"/>
+          </a:p>
+        </p:txBody>
+      </p:sp>
+    </p:spTree>
+    <p:extLst>
+      <p:ext uri="{BB962C8B-B14F-4D97-AF65-F5344CB8AC3E}">
+        <p14:creationId xmlns:p14="http://schemas.microsoft.com/office/powerpoint/2010/main" val="1024086991"/>
+      </p:ext>
+    </p:extLst>
+  </p:cSld>
+  <p:clrMapOvr>
+    <a:masterClrMapping/>
+  </p:clrMapOvr>
+</p:notes>
+</file>
+
+<file path=ppt/notesSlides/notesSlide15.xml><?xml version="1.0" encoding="utf-8"?>
+<p:notes xmlns:a="http://schemas.openxmlformats.org/drawingml/2006/main" xmlns:r="http://schemas.openxmlformats.org/officeDocument/2006/relationships" xmlns:p="http://schemas.openxmlformats.org/presentationml/2006/main">
+  <p:cSld>
+    <p:spTree>
+      <p:nvGrpSpPr>
+        <p:cNvPr id="1" name=""/>
+        <p:cNvGrpSpPr/>
+        <p:nvPr/>
+      </p:nvGrpSpPr>
+      <p:grpSpPr>
+        <a:xfrm>
+          <a:off x="0" y="0"/>
+          <a:ext cx="0" cy="0"/>
+          <a:chOff x="0" y="0"/>
+          <a:chExt cx="0" cy="0"/>
+        </a:xfrm>
+      </p:grpSpPr>
+      <p:sp>
+        <p:nvSpPr>
+          <p:cNvPr id="2" name="Slide Image Placeholder 1"/>
+          <p:cNvSpPr>
+            <a:spLocks noGrp="1" noRot="1" noChangeAspect="1"/>
+          </p:cNvSpPr>
+          <p:nvPr>
+            <p:ph type="sldImg"/>
+          </p:nvPr>
+        </p:nvSpPr>
+        <p:spPr/>
+      </p:sp>
+      <p:sp>
+        <p:nvSpPr>
+          <p:cNvPr id="3" name="Notes Placeholder 2"/>
+          <p:cNvSpPr>
+            <a:spLocks noGrp="1"/>
+          </p:cNvSpPr>
+          <p:nvPr>
+            <p:ph type="body" idx="1"/>
+          </p:nvPr>
+        </p:nvSpPr>
+        <p:spPr/>
+        <p:txBody>
+          <a:bodyPr/>
+          <a:lstStyle/>
+          <a:p>
+            <a:r>
+              <a:rPr lang="en-US" dirty="0"/>
+              <a:t>Pose the three questions and let the room answer; they are discovery, and the answers tell you where a pilot lands. The ask is the two-week pilot: fork, swap in their conventions and policy, run it in their repo. Timing: 26:00 to 29:00.</a:t>
+            </a:r>
+            <a:endParaRPr lang="en-US" dirty="0"/>
+          </a:p>
+        </p:txBody>
+      </p:sp>
+      <p:sp>
+        <p:nvSpPr>
+          <p:cNvPr id="4" name="Slide Number Placeholder 3"/>
+          <p:cNvSpPr>
+            <a:spLocks noGrp="1"/>
+          </p:cNvSpPr>
+          <p:nvPr>
+            <p:ph type="sldNum" sz="quarter" idx="10"/>
+          </p:nvPr>
+        </p:nvSpPr>
+        <p:spPr/>
+        <p:txBody>
+          <a:bodyPr/>
+          <a:lstStyle/>
+          <a:p>
+            <a:fld id="{F7021451-1387-4CA6-816F-3879F97B5CBC}" type="slidenum">
+              <a:rPr lang="en-US"/>
+              <a:t>15</a:t>
+            </a:fld>
+            <a:endParaRPr lang="en-US"/>
+          </a:p>
+        </p:txBody>
+      </p:sp>
+    </p:spTree>
+    <p:extLst>
+      <p:ext uri="{BB962C8B-B14F-4D97-AF65-F5344CB8AC3E}">
+        <p14:creationId xmlns:p14="http://schemas.microsoft.com/office/powerpoint/2010/main" val="1024086991"/>
+      </p:ext>
+    </p:extLst>
+  </p:cSld>
+  <p:clrMapOvr>
+    <a:masterClrMapping/>
+  </p:clrMapOvr>
+</p:notes>
+</file>
+
+<file path=ppt/notesSlides/notesSlide16.xml><?xml version="1.0" encoding="utf-8"?>
+<p:notes xmlns:a="http://schemas.openxmlformats.org/drawingml/2006/main" xmlns:r="http://schemas.openxmlformats.org/officeDocument/2006/relationships" xmlns:p="http://schemas.openxmlformats.org/presentationml/2006/main">
+  <p:cSld>
+    <p:spTree>
+      <p:nvGrpSpPr>
+        <p:cNvPr id="1" name=""/>
+        <p:cNvGrpSpPr/>
+        <p:nvPr/>
+      </p:nvGrpSpPr>
+      <p:grpSpPr>
+        <a:xfrm>
+          <a:off x="0" y="0"/>
+          <a:ext cx="0" cy="0"/>
+          <a:chOff x="0" y="0"/>
+          <a:chExt cx="0" cy="0"/>
+        </a:xfrm>
+      </p:grpSpPr>
+      <p:sp>
+        <p:nvSpPr>
+          <p:cNvPr id="2" name="Slide Image Placeholder 1"/>
+          <p:cNvSpPr>
+            <a:spLocks noGrp="1" noRot="1" noChangeAspect="1"/>
+          </p:cNvSpPr>
+          <p:nvPr>
+            <p:ph type="sldImg"/>
+          </p:nvPr>
+        </p:nvSpPr>
+        <p:spPr/>
+      </p:sp>
+      <p:sp>
+        <p:nvSpPr>
+          <p:cNvPr id="3" name="Notes Placeholder 2"/>
+          <p:cNvSpPr>
+            <a:spLocks noGrp="1"/>
+          </p:cNvSpPr>
+          <p:nvPr>
+            <p:ph type="body" idx="1"/>
+          </p:nvPr>
+        </p:nvSpPr>
+        <p:spPr/>
+        <p:txBody>
+          <a:bodyPr/>
+          <a:lstStyle/>
+          <a:p>
+            <a:r>
+              <a:rPr lang="en-US" dirty="0"/>
+              <a:t>Close by uninstalling and reinstalling the plugin on screen, under a minute: distribution is the product, worth showing twice. After the room leaves, uninstall and remove the marketplace so the machine is clean for the next session. Timing: 29:00 to 30:00.</a:t>
+            </a:r>
+            <a:endParaRPr lang="en-US" dirty="0"/>
+          </a:p>
+        </p:txBody>
+      </p:sp>
+      <p:sp>
+        <p:nvSpPr>
+          <p:cNvPr id="4" name="Slide Number Placeholder 3"/>
+          <p:cNvSpPr>
+            <a:spLocks noGrp="1"/>
+          </p:cNvSpPr>
+          <p:nvPr>
+            <p:ph type="sldNum" sz="quarter" idx="10"/>
+          </p:nvPr>
+        </p:nvSpPr>
+        <p:spPr/>
+        <p:txBody>
+          <a:bodyPr/>
+          <a:lstStyle/>
+          <a:p>
+            <a:fld id="{F7021451-1387-4CA6-816F-3879F97B5CBC}" type="slidenum">
+              <a:rPr lang="en-US"/>
+              <a:t>16</a:t>
             </a:fld>
             <a:endParaRPr lang="en-US"/>
           </a:p>
@@ -1043,7 +1221,7 @@
           <a:p>
             <a:r>
               <a:rPr lang="en-US" dirty="0"/>
-              <a:t>State the scope out loud before anything else. The cut list is as deliberate as the covered list; the reasons come from 01-design-note.md. If someone wants the cut topics, point them at the docs links at the bottom of the handout.</a:t>
+              <a:t>Transition from the cold open: this session is about why that happens at fleet scale and what fixes it. Set the shape of the half hour: eight minutes of framing, twelve minutes live in the terminal, then their hands on keyboards. Timing: 0:40 to 1:00.</a:t>
             </a:r>
             <a:endParaRPr lang="en-US" dirty="0"/>
           </a:p>
@@ -1131,7 +1309,7 @@
           <a:p>
             <a:r>
               <a:rPr lang="en-US" dirty="0"/>
-              <a:t>Plugins are the capstone concept: the package that bundles skills, agents, and hooks into one versioned unit. Don't detour into the individual features; today is where they stop being a laptop setup and become something their enterprise can adopt.</a:t>
+              <a:t>PERSONA NOTE: Maya is a stand-in. Swap in a real engineer's name or a real anecdote from this account and the whole arc still holds; the name appears on slides 3, 6, 7, and 10 and in these notes. Talk track: every team has a Maya. Her checklist catches exactly the bug on slide 1, her settings block prod writes, and none of it survives contact with the other 199 laptops. Timing: 1:00 to 2:00.</a:t>
             </a:r>
             <a:endParaRPr lang="en-US" dirty="0"/>
           </a:p>
@@ -1219,7 +1397,7 @@
           <a:p>
             <a:r>
               <a:rPr lang="en-US" dirty="0"/>
-              <a:t>Outcomes, not agenda: tell the room what they'll have done by the end, not what you'll talk about. Items 3 and 4 happen with their hands on keyboards in the 20-to-26 block. The presenter-side objectives live in 01-design-note.md and stay internal.</a:t>
+              <a:t>The scale turn. Two hundred engineers means two hundred slightly different setups, no way to push a fix, and security has no idea what is running where. Maya's judgment does not scale by hiring more Mayas. Timing: 2:00 to 2:30.</a:t>
             </a:r>
             <a:endParaRPr lang="en-US" dirty="0"/>
           </a:p>
@@ -1307,7 +1485,7 @@
           <a:p>
             <a:r>
               <a:rPr lang="en-US" dirty="0"/>
-              <a:t>Talk track, minute 0 to 3, no screen yet: one of their engineers built genuinely good workflows, then their platform lead asked about rollout and the energy left the room. No versioning, no way to push a fix, security has no idea what's running where. That's what stalls adoption, and it's the thing plugins answer.</a:t>
+              <a:t>Land the thesis and pause. The org does not lack capability; it lacks a way to distribute and enforce the capability it already has. Everything after this slide is the distribution story. Timing: 2:30 to 3:00.</a:t>
             </a:r>
             <a:endParaRPr lang="en-US" dirty="0"/>
           </a:p>
@@ -1395,7 +1573,7 @@
           <a:p>
             <a:r>
               <a:rPr lang="en-US" dirty="0"/>
-              <a:t>Say the definition sentence first, then walk the three layers left to right and land the two commands. Two facts to say out loud because they prevent later confusion: components live at the plugin root, not inside .claude-plugin/, and installed plugins run from a cache copy, so editing a checkout changes nothing until a new version ships.</a:t>
+              <a:t>Say the definition while the diagram is up: a plugin is Maya's judgment shipped as one versioned package, installed from a marketplace your platform team owns. Walk it left to right. Two facts out loud: components live at the plugin root, and installed plugins run from a cache copy until a new version ships. If you renamed Maya on slide 3, rename her here too. Timing: 3:00 to 4:30.</a:t>
             </a:r>
             <a:endParaRPr lang="en-US" dirty="0"/>
           </a:p>
@@ -1483,7 +1661,7 @@
           <a:p>
             <a:r>
               <a:rPr lang="en-US" dirty="0"/>
-              <a:t>Use this plugin's real components as the example, not abstractions. The skill is the team's written SQL standards; the agent is the reviewer that applies them; the hooks are the guard and audit scripts the demo exercises in beat 3; the manifest version is what beat 4 bumps. Everything on this slide gets touched live within fifteen minutes.</a:t>
+              <a:t>Ground each component in something the room already has. Every team has the checklist doc and the unwritten never-run-this rules; the plugin is where they go to become enforceable. Everything on this slide gets touched live within fifteen minutes. Timing: 4:30 to 6:00.</a:t>
             </a:r>
             <a:endParaRPr lang="en-US" dirty="0"/>
           </a:p>
@@ -1571,7 +1749,7 @@
           <a:p>
             <a:r>
               <a:rPr lang="en-US" dirty="0"/>
-              <a:t>This is the objection every room raises, so answer it before anyone asks. The folder works for one repo on one laptop; the plugin is the same content with an operating model around it. Beats 3 and 4 of the demo prove the right column live: the gate denies deterministically, and one version bump updates the fleet.</a:t>
+              <a:t>The honesty slide. If they are one repo on one laptop, a committed .claude/ folder is fine and you should say so out loud; it buys credibility for everything else. This is the when-would-I-use-this answer a platform lead writes down. Timing: 6:00 to 7:00.</a:t>
             </a:r>
             <a:endParaRPr lang="en-US" dirty="0"/>
           </a:p>
@@ -1659,7 +1837,7 @@
           <a:p>
             <a:r>
               <a:rPr lang="en-US" dirty="0"/>
-              <a:t>This is the slide that answers 'what if the model ignores instructions.' It isn't an instruction. The guard is a separate process gating the tool call before it executes. Invite skeptics to read guard.js; 158 lines is the point. Demo beat 3 makes this concrete at minute 13.</a:t>
+              <a:t>Distribution is git plus two commands. The marketplace is a repo the platform team owns and reviews like any other code; nothing new to operate. Then hand off to the live section: let's stop describing it. Timing: 7:00 to 8:00.</a:t>
             </a:r>
             <a:endParaRPr lang="en-US" dirty="0"/>
           </a:p>
@@ -2014,7 +2192,7 @@
     <p:bg>
       <p:bgPr>
         <a:solidFill>
-          <a:srgbClr val="FAF9F5"/>
+          <a:srgbClr val="191919"/>
         </a:solidFill>
       </p:bgPr>
     </p:bg>
@@ -2034,23 +2212,42 @@
       </p:grpSpPr>
       <p:sp>
         <p:nvSpPr>
-          <p:cNvPr id="2" name="Shape 0"/>
-          <p:cNvSpPr/>
-          <p:nvPr/>
-        </p:nvSpPr>
-        <p:spPr>
-          <a:xfrm>
-            <a:off x="548640" y="1572768"/>
-            <a:ext cx="457200" cy="27432"/>
-          </a:xfrm>
-          <a:prstGeom prst="rect">
-            <a:avLst/>
-          </a:prstGeom>
-          <a:solidFill>
-            <a:srgbClr val="CC785C"/>
-          </a:solidFill>
-          <a:ln/>
-        </p:spPr>
+          <p:cNvPr id="2" name="Text 0"/>
+          <p:cNvSpPr/>
+          <p:nvPr/>
+        </p:nvSpPr>
+        <p:spPr>
+          <a:xfrm>
+            <a:off x="548640" y="777240"/>
+            <a:ext cx="5486400" cy="256032"/>
+          </a:xfrm>
+          <a:prstGeom prst="rect">
+            <a:avLst/>
+          </a:prstGeom>
+          <a:noFill/>
+          <a:ln/>
+        </p:spPr>
+        <p:txBody>
+          <a:bodyPr wrap="square" lIns="0" tIns="0" rIns="0" bIns="0" rtlCol="0" anchor="ctr"/>
+          <a:lstStyle/>
+          <a:p>
+            <a:pPr indent="0" marL="0">
+              <a:buNone/>
+            </a:pPr>
+            <a:r>
+              <a:rPr lang="en-US" sz="1050" b="1" spc="300" kern="0" dirty="0">
+                <a:solidFill>
+                  <a:srgbClr val="D4A27F"/>
+                </a:solidFill>
+                <a:latin typeface="Arial" pitchFamily="34" charset="0"/>
+                <a:ea typeface="Arial" pitchFamily="34" charset="-122"/>
+                <a:cs typeface="Arial" pitchFamily="34" charset="-120"/>
+              </a:rPr>
+              <a:t>A TRUE STORY FROM THIS DEMO'S DATA</a:t>
+            </a:r>
+            <a:endParaRPr lang="en-US" sz="1050" dirty="0"/>
+          </a:p>
+        </p:txBody>
       </p:sp>
       <p:sp>
         <p:nvSpPr>
@@ -2060,34 +2257,34 @@
         </p:nvSpPr>
         <p:spPr>
           <a:xfrm>
-            <a:off x="548640" y="1755648"/>
-            <a:ext cx="7863840" cy="1188720"/>
-          </a:xfrm>
-          <a:prstGeom prst="rect">
-            <a:avLst/>
-          </a:prstGeom>
-          <a:noFill/>
-          <a:ln/>
-        </p:spPr>
-        <p:txBody>
-          <a:bodyPr wrap="square" lIns="0" tIns="0" rIns="0" bIns="0" rtlCol="0" anchor="t"/>
-          <a:lstStyle/>
-          <a:p>
-            <a:pPr algn="l" indent="0" marL="0">
-              <a:buNone/>
-            </a:pPr>
-            <a:r>
-              <a:rPr lang="en-US" sz="3800" dirty="0">
-                <a:solidFill>
-                  <a:srgbClr val="191919"/>
+            <a:off x="548640" y="1600200"/>
+            <a:ext cx="8046720" cy="1463040"/>
+          </a:xfrm>
+          <a:prstGeom prst="rect">
+            <a:avLst/>
+          </a:prstGeom>
+          <a:noFill/>
+          <a:ln/>
+        </p:spPr>
+        <p:txBody>
+          <a:bodyPr wrap="square" lIns="0" tIns="0" rIns="0" bIns="0" rtlCol="0" anchor="ctr"/>
+          <a:lstStyle/>
+          <a:p>
+            <a:pPr indent="0" marL="0">
+              <a:buNone/>
+            </a:pPr>
+            <a:r>
+              <a:rPr lang="en-US" sz="8800" dirty="0">
+                <a:solidFill>
+                  <a:srgbClr val="FAF9F5"/>
                 </a:solidFill>
                 <a:latin typeface="Georgia" pitchFamily="34" charset="0"/>
                 <a:ea typeface="Georgia" pitchFamily="34" charset="-122"/>
                 <a:cs typeface="Georgia" pitchFamily="34" charset="-120"/>
               </a:rPr>
-              <a:t>Plugins: the enterprise rollout story.</a:t>
-            </a:r>
-            <a:endParaRPr lang="en-US" sz="3800" dirty="0"/>
+              <a:t>$301.00</a:t>
+            </a:r>
+            <a:endParaRPr lang="en-US" sz="8800" dirty="0"/>
           </a:p>
         </p:txBody>
       </p:sp>
@@ -2099,7 +2296,7 @@
         </p:nvSpPr>
         <p:spPr>
           <a:xfrm>
-            <a:off x="548640" y="2971800"/>
+            <a:off x="548640" y="3337560"/>
             <a:ext cx="7315200" cy="365760"/>
           </a:xfrm>
           <a:prstGeom prst="rect">
@@ -2116,17 +2313,17 @@
               <a:buNone/>
             </a:pPr>
             <a:r>
-              <a:rPr lang="en-US" sz="1500" dirty="0">
-                <a:solidFill>
-                  <a:srgbClr val="6B6B66"/>
+              <a:rPr lang="en-US" sz="1600" dirty="0">
+                <a:solidFill>
+                  <a:srgbClr val="B4B2A9"/>
                 </a:solidFill>
                 <a:latin typeface="Arial" pitchFamily="34" charset="0"/>
                 <a:ea typeface="Arial" pitchFamily="34" charset="-122"/>
                 <a:cs typeface="Arial" pitchFamily="34" charset="-120"/>
               </a:rPr>
-              <a:t>Every engineer, the same setup, your policies attached. A 30-minute working session.</a:t>
-            </a:r>
-            <a:endParaRPr lang="en-US" sz="1500" dirty="0"/>
+              <a:t>What the revenue dashboard said.</a:t>
+            </a:r>
+            <a:endParaRPr lang="en-US" sz="1600" dirty="0"/>
           </a:p>
         </p:txBody>
       </p:sp>
@@ -2138,8 +2335,8 @@
         </p:nvSpPr>
         <p:spPr>
           <a:xfrm>
-            <a:off x="548640" y="4640580"/>
-            <a:ext cx="5486400" cy="274320"/>
+            <a:off x="548640" y="3767328"/>
+            <a:ext cx="7315200" cy="365760"/>
           </a:xfrm>
           <a:prstGeom prst="rect">
             <a:avLst/>
@@ -2155,17 +2352,56 @@
               <a:buNone/>
             </a:pPr>
             <a:r>
-              <a:rPr lang="en-US" sz="1100" dirty="0">
+              <a:rPr lang="en-US" sz="1600" dirty="0">
                 <a:solidFill>
                   <a:srgbClr val="CC785C"/>
                 </a:solidFill>
-                <a:latin typeface="Consolas" pitchFamily="34" charset="0"/>
-                <a:ea typeface="Consolas" pitchFamily="34" charset="-122"/>
-                <a:cs typeface="Consolas" pitchFamily="34" charset="-120"/>
-              </a:rPr>
-              <a:t>github.com/andymadson/data-platform-pack</a:t>
-            </a:r>
-            <a:endParaRPr lang="en-US" sz="1100" dirty="0"/>
+                <a:latin typeface="Arial" pitchFamily="34" charset="0"/>
+                <a:ea typeface="Arial" pitchFamily="34" charset="-122"/>
+                <a:cs typeface="Arial" pitchFamily="34" charset="-120"/>
+              </a:rPr>
+              <a:t>The real number was $171.50. The query passed review.</a:t>
+            </a:r>
+            <a:endParaRPr lang="en-US" sz="1600" dirty="0"/>
+          </a:p>
+        </p:txBody>
+      </p:sp>
+      <p:sp>
+        <p:nvSpPr>
+          <p:cNvPr id="6" name="Text 4"/>
+          <p:cNvSpPr/>
+          <p:nvPr/>
+        </p:nvSpPr>
+        <p:spPr>
+          <a:xfrm>
+            <a:off x="8458200" y="4759452"/>
+            <a:ext cx="320040" cy="274320"/>
+          </a:xfrm>
+          <a:prstGeom prst="rect">
+            <a:avLst/>
+          </a:prstGeom>
+          <a:noFill/>
+          <a:ln/>
+        </p:spPr>
+        <p:txBody>
+          <a:bodyPr wrap="square" lIns="0" tIns="0" rIns="0" bIns="0" rtlCol="0" anchor="ctr"/>
+          <a:lstStyle/>
+          <a:p>
+            <a:pPr algn="r" indent="0" marL="0">
+              <a:buNone/>
+            </a:pPr>
+            <a:r>
+              <a:rPr lang="en-US" sz="900" dirty="0">
+                <a:solidFill>
+                  <a:srgbClr val="888780"/>
+                </a:solidFill>
+                <a:latin typeface="Arial" pitchFamily="34" charset="0"/>
+                <a:ea typeface="Arial" pitchFamily="34" charset="-122"/>
+                <a:cs typeface="Arial" pitchFamily="34" charset="-120"/>
+              </a:rPr>
+              <a:t>1</a:t>
+            </a:r>
+            <a:endParaRPr lang="en-US" sz="900" dirty="0"/>
           </a:p>
         </p:txBody>
       </p:sp>
@@ -2209,10 +2445,10 @@
         </p:nvSpPr>
         <p:spPr>
           <a:xfrm>
-            <a:off x="548640" y="457200"/>
-            <a:ext cx="457200" cy="25603"/>
-          </a:xfrm>
-          <a:prstGeom prst="rect">
+            <a:off x="548640" y="566928"/>
+            <a:ext cx="91440" cy="91440"/>
+          </a:xfrm>
+          <a:prstGeom prst="ellipse">
             <a:avLst/>
           </a:prstGeom>
           <a:solidFill>
@@ -2223,30 +2459,129 @@
       </p:sp>
       <p:sp>
         <p:nvSpPr>
-          <p:cNvPr id="3" name="Text 1"/>
-          <p:cNvSpPr/>
-          <p:nvPr/>
-        </p:nvSpPr>
-        <p:spPr>
-          <a:xfrm>
-            <a:off x="548640" y="566928"/>
-            <a:ext cx="8046720" cy="685800"/>
-          </a:xfrm>
-          <a:prstGeom prst="rect">
-            <a:avLst/>
-          </a:prstGeom>
-          <a:noFill/>
-          <a:ln/>
-        </p:spPr>
-        <p:txBody>
-          <a:bodyPr wrap="square" lIns="0" tIns="0" rIns="0" bIns="0" rtlCol="0" anchor="t"/>
-          <a:lstStyle/>
-          <a:p>
-            <a:pPr algn="l" indent="0" marL="0">
-              <a:buNone/>
-            </a:pPr>
-            <a:r>
-              <a:rPr lang="en-US" sz="2600" dirty="0">
+          <p:cNvPr id="3" name="Shape 1"/>
+          <p:cNvSpPr/>
+          <p:nvPr/>
+        </p:nvSpPr>
+        <p:spPr>
+          <a:xfrm>
+            <a:off x="749808" y="566928"/>
+            <a:ext cx="91440" cy="91440"/>
+          </a:xfrm>
+          <a:prstGeom prst="ellipse">
+            <a:avLst/>
+          </a:prstGeom>
+          <a:solidFill>
+            <a:srgbClr val="D3D1C7"/>
+          </a:solidFill>
+          <a:ln/>
+        </p:spPr>
+      </p:sp>
+      <p:sp>
+        <p:nvSpPr>
+          <p:cNvPr id="4" name="Shape 2"/>
+          <p:cNvSpPr/>
+          <p:nvPr/>
+        </p:nvSpPr>
+        <p:spPr>
+          <a:xfrm>
+            <a:off x="950976" y="566928"/>
+            <a:ext cx="91440" cy="91440"/>
+          </a:xfrm>
+          <a:prstGeom prst="ellipse">
+            <a:avLst/>
+          </a:prstGeom>
+          <a:solidFill>
+            <a:srgbClr val="D3D1C7"/>
+          </a:solidFill>
+          <a:ln/>
+        </p:spPr>
+      </p:sp>
+      <p:sp>
+        <p:nvSpPr>
+          <p:cNvPr id="5" name="Shape 3"/>
+          <p:cNvSpPr/>
+          <p:nvPr/>
+        </p:nvSpPr>
+        <p:spPr>
+          <a:xfrm>
+            <a:off x="1152144" y="566928"/>
+            <a:ext cx="91440" cy="91440"/>
+          </a:xfrm>
+          <a:prstGeom prst="ellipse">
+            <a:avLst/>
+          </a:prstGeom>
+          <a:solidFill>
+            <a:srgbClr val="D3D1C7"/>
+          </a:solidFill>
+          <a:ln/>
+        </p:spPr>
+      </p:sp>
+      <p:sp>
+        <p:nvSpPr>
+          <p:cNvPr id="6" name="Text 4"/>
+          <p:cNvSpPr/>
+          <p:nvPr/>
+        </p:nvSpPr>
+        <p:spPr>
+          <a:xfrm>
+            <a:off x="1554480" y="502920"/>
+            <a:ext cx="4572000" cy="256032"/>
+          </a:xfrm>
+          <a:prstGeom prst="rect">
+            <a:avLst/>
+          </a:prstGeom>
+          <a:noFill/>
+          <a:ln/>
+        </p:spPr>
+        <p:txBody>
+          <a:bodyPr wrap="square" lIns="0" tIns="0" rIns="0" bIns="0" rtlCol="0" anchor="ctr"/>
+          <a:lstStyle/>
+          <a:p>
+            <a:pPr indent="0" marL="0">
+              <a:buNone/>
+            </a:pPr>
+            <a:r>
+              <a:rPr lang="en-US" sz="1050" b="1" spc="300" kern="0" dirty="0">
+                <a:solidFill>
+                  <a:srgbClr val="CC785C"/>
+                </a:solidFill>
+                <a:latin typeface="Arial" pitchFamily="34" charset="0"/>
+                <a:ea typeface="Arial" pitchFamily="34" charset="-122"/>
+                <a:cs typeface="Arial" pitchFamily="34" charset="-120"/>
+              </a:rPr>
+              <a:t>LIVE · BEAT ONE</a:t>
+            </a:r>
+            <a:endParaRPr lang="en-US" sz="1050" dirty="0"/>
+          </a:p>
+        </p:txBody>
+      </p:sp>
+      <p:sp>
+        <p:nvSpPr>
+          <p:cNvPr id="7" name="Text 5"/>
+          <p:cNvSpPr/>
+          <p:nvPr/>
+        </p:nvSpPr>
+        <p:spPr>
+          <a:xfrm>
+            <a:off x="548640" y="960120"/>
+            <a:ext cx="8046720" cy="640080"/>
+          </a:xfrm>
+          <a:prstGeom prst="rect">
+            <a:avLst/>
+          </a:prstGeom>
+          <a:noFill/>
+          <a:ln/>
+        </p:spPr>
+        <p:txBody>
+          <a:bodyPr wrap="square" lIns="0" tIns="0" rIns="0" bIns="0" rtlCol="0" anchor="ctr"/>
+          <a:lstStyle/>
+          <a:p>
+            <a:pPr indent="0" marL="0">
+              <a:buNone/>
+            </a:pPr>
+            <a:r>
+              <a:rPr lang="en-US" sz="2800" dirty="0">
                 <a:solidFill>
                   <a:srgbClr val="191919"/>
                 </a:solidFill>
@@ -2254,81 +2589,22 @@
                 <a:ea typeface="Georgia" pitchFamily="34" charset="-122"/>
                 <a:cs typeface="Georgia" pitchFamily="34" charset="-120"/>
               </a:rPr>
-              <a:t>Policy ships like software.</a:t>
-            </a:r>
-            <a:endParaRPr lang="en-US" sz="2600" dirty="0"/>
-          </a:p>
-        </p:txBody>
-      </p:sp>
-      <p:sp>
-        <p:nvSpPr>
-          <p:cNvPr id="4" name="Shape 2"/>
-          <p:cNvSpPr/>
-          <p:nvPr/>
-        </p:nvSpPr>
-        <p:spPr>
-          <a:xfrm>
-            <a:off x="548640" y="1554480"/>
-            <a:ext cx="1847088" cy="1828800"/>
-          </a:xfrm>
-          <a:prstGeom prst="rect">
-            <a:avLst/>
-          </a:prstGeom>
-          <a:solidFill>
-            <a:srgbClr val="F0EEE6"/>
-          </a:solidFill>
-          <a:ln/>
-        </p:spPr>
-      </p:sp>
-      <p:sp>
-        <p:nvSpPr>
-          <p:cNvPr id="5" name="Text 3"/>
-          <p:cNvSpPr/>
-          <p:nvPr/>
-        </p:nvSpPr>
-        <p:spPr>
-          <a:xfrm>
-            <a:off x="731520" y="1700784"/>
-            <a:ext cx="457200" cy="411480"/>
-          </a:xfrm>
-          <a:prstGeom prst="rect">
-            <a:avLst/>
-          </a:prstGeom>
-          <a:noFill/>
-          <a:ln/>
-        </p:spPr>
-        <p:txBody>
-          <a:bodyPr wrap="square" lIns="0" tIns="0" rIns="0" bIns="0" rtlCol="0" anchor="ctr"/>
-          <a:lstStyle/>
-          <a:p>
-            <a:pPr indent="0" marL="0">
-              <a:buNone/>
-            </a:pPr>
-            <a:r>
-              <a:rPr lang="en-US" sz="2000" dirty="0">
-                <a:solidFill>
-                  <a:srgbClr val="CC785C"/>
-                </a:solidFill>
-                <a:latin typeface="Georgia" pitchFamily="34" charset="0"/>
-                <a:ea typeface="Georgia" pitchFamily="34" charset="-122"/>
-                <a:cs typeface="Georgia" pitchFamily="34" charset="-120"/>
-              </a:rPr>
-              <a:t>1</a:t>
-            </a:r>
-            <a:endParaRPr lang="en-US" sz="2000" dirty="0"/>
-          </a:p>
-        </p:txBody>
-      </p:sp>
-      <p:sp>
-        <p:nvSpPr>
-          <p:cNvPr id="6" name="Text 4"/>
-          <p:cNvSpPr/>
-          <p:nvPr/>
-        </p:nvSpPr>
-        <p:spPr>
-          <a:xfrm>
-            <a:off x="731520" y="2148840"/>
-            <a:ext cx="1481328" cy="1051560"/>
+              <a:t>90 seconds to standard.</a:t>
+            </a:r>
+            <a:endParaRPr lang="en-US" sz="2800" dirty="0"/>
+          </a:p>
+        </p:txBody>
+      </p:sp>
+      <p:sp>
+        <p:nvSpPr>
+          <p:cNvPr id="8" name="Text 6"/>
+          <p:cNvSpPr/>
+          <p:nvPr/>
+        </p:nvSpPr>
+        <p:spPr>
+          <a:xfrm>
+            <a:off x="548640" y="1691640"/>
+            <a:ext cx="7680960" cy="365760"/>
           </a:xfrm>
           <a:prstGeom prst="rect">
             <a:avLst/>
@@ -2341,451 +2617,150 @@
           <a:lstStyle/>
           <a:p>
             <a:pPr indent="0" marL="0">
-              <a:spcAft>
-                <a:spcPts val="400"/>
-              </a:spcAft>
-              <a:buNone/>
-            </a:pPr>
-            <a:r>
-              <a:rPr lang="en-US" sz="1300" b="1" dirty="0">
-                <a:solidFill>
-                  <a:srgbClr val="191919"/>
+              <a:buNone/>
+            </a:pPr>
+            <a:r>
+              <a:rPr lang="en-US" sz="1300" dirty="0">
+                <a:solidFill>
+                  <a:srgbClr val="6B6B66"/>
                 </a:solidFill>
                 <a:latin typeface="Arial" pitchFamily="34" charset="0"/>
                 <a:ea typeface="Arial" pitchFamily="34" charset="-122"/>
                 <a:cs typeface="Arial" pitchFamily="34" charset="-120"/>
               </a:rPr>
-              <a:t>Edit policy.json</a:t>
+              <a:t>From vanilla machine to Maya's full setup, identical everywhere.</a:t>
             </a:r>
             <a:endParaRPr lang="en-US" sz="1300" dirty="0"/>
           </a:p>
+        </p:txBody>
+      </p:sp>
+      <p:sp>
+        <p:nvSpPr>
+          <p:cNvPr id="9" name="Shape 7"/>
+          <p:cNvSpPr/>
+          <p:nvPr/>
+        </p:nvSpPr>
+        <p:spPr>
+          <a:xfrm>
+            <a:off x="548640" y="2377440"/>
+            <a:ext cx="8046720" cy="1325880"/>
+          </a:xfrm>
+          <a:prstGeom prst="roundRect">
+            <a:avLst>
+              <a:gd name="adj" fmla="val 4828"/>
+            </a:avLst>
+          </a:prstGeom>
+          <a:solidFill>
+            <a:srgbClr val="191919"/>
+          </a:solidFill>
+          <a:ln/>
+        </p:spPr>
+      </p:sp>
+      <p:sp>
+        <p:nvSpPr>
+          <p:cNvPr id="10" name="Text 8"/>
+          <p:cNvSpPr/>
+          <p:nvPr/>
+        </p:nvSpPr>
+        <p:spPr>
+          <a:xfrm>
+            <a:off x="804672" y="2523744"/>
+            <a:ext cx="7534656" cy="1033272"/>
+          </a:xfrm>
+          <a:prstGeom prst="rect">
+            <a:avLst/>
+          </a:prstGeom>
+          <a:noFill/>
+          <a:ln/>
+        </p:spPr>
+        <p:txBody>
+          <a:bodyPr wrap="square" lIns="0" tIns="0" rIns="0" bIns="0" rtlCol="0" anchor="t"/>
+          <a:lstStyle/>
           <a:p>
             <a:pPr indent="0" marL="0">
               <a:spcAft>
-                <a:spcPts val="400"/>
+                <a:spcPts val="500"/>
               </a:spcAft>
               <a:buNone/>
             </a:pPr>
             <a:r>
               <a:rPr lang="en-US" sz="1150" dirty="0">
                 <a:solidFill>
-                  <a:srgbClr val="6B6B66"/>
-                </a:solidFill>
-                <a:latin typeface="Arial" pitchFamily="34" charset="0"/>
-                <a:ea typeface="Arial" pitchFamily="34" charset="-122"/>
-                <a:cs typeface="Arial" pitchFamily="34" charset="-120"/>
-              </a:rPr>
-              <a:t>The rules are reviewable config, not prompt text.</a:t>
-            </a:r>
-            <a:endParaRPr lang="en-US" sz="1300" dirty="0"/>
-          </a:p>
-        </p:txBody>
-      </p:sp>
-      <p:sp>
-        <p:nvSpPr>
-          <p:cNvPr id="7" name="Shape 5"/>
-          <p:cNvSpPr/>
-          <p:nvPr/>
-        </p:nvSpPr>
-        <p:spPr>
-          <a:xfrm>
-            <a:off x="2615184" y="1554480"/>
-            <a:ext cx="1847088" cy="1828800"/>
-          </a:xfrm>
-          <a:prstGeom prst="rect">
-            <a:avLst/>
-          </a:prstGeom>
-          <a:solidFill>
-            <a:srgbClr val="F0EEE6"/>
-          </a:solidFill>
-          <a:ln/>
-        </p:spPr>
-      </p:sp>
-      <p:sp>
-        <p:nvSpPr>
-          <p:cNvPr id="8" name="Text 6"/>
-          <p:cNvSpPr/>
-          <p:nvPr/>
-        </p:nvSpPr>
-        <p:spPr>
-          <a:xfrm>
-            <a:off x="2798064" y="1700784"/>
-            <a:ext cx="457200" cy="411480"/>
-          </a:xfrm>
-          <a:prstGeom prst="rect">
-            <a:avLst/>
-          </a:prstGeom>
-          <a:noFill/>
-          <a:ln/>
-        </p:spPr>
-        <p:txBody>
-          <a:bodyPr wrap="square" lIns="0" tIns="0" rIns="0" bIns="0" rtlCol="0" anchor="ctr"/>
-          <a:lstStyle/>
-          <a:p>
-            <a:pPr indent="0" marL="0">
-              <a:buNone/>
-            </a:pPr>
-            <a:r>
-              <a:rPr lang="en-US" sz="2000" dirty="0">
-                <a:solidFill>
-                  <a:srgbClr val="CC785C"/>
-                </a:solidFill>
-                <a:latin typeface="Georgia" pitchFamily="34" charset="0"/>
-                <a:ea typeface="Georgia" pitchFamily="34" charset="-122"/>
-                <a:cs typeface="Georgia" pitchFamily="34" charset="-120"/>
-              </a:rPr>
-              <a:t>2</a:t>
-            </a:r>
-            <a:endParaRPr lang="en-US" sz="2000" dirty="0"/>
-          </a:p>
-        </p:txBody>
-      </p:sp>
-      <p:sp>
-        <p:nvSpPr>
-          <p:cNvPr id="9" name="Text 7"/>
-          <p:cNvSpPr/>
-          <p:nvPr/>
-        </p:nvSpPr>
-        <p:spPr>
-          <a:xfrm>
-            <a:off x="2798064" y="2148840"/>
-            <a:ext cx="1481328" cy="1051560"/>
-          </a:xfrm>
-          <a:prstGeom prst="rect">
-            <a:avLst/>
-          </a:prstGeom>
-          <a:noFill/>
-          <a:ln/>
-        </p:spPr>
-        <p:txBody>
-          <a:bodyPr wrap="square" lIns="0" tIns="0" rIns="0" bIns="0" rtlCol="0" anchor="t"/>
-          <a:lstStyle/>
+                  <a:srgbClr val="F0EEE6"/>
+                </a:solidFill>
+                <a:latin typeface="Consolas" pitchFamily="34" charset="0"/>
+                <a:ea typeface="Consolas" pitchFamily="34" charset="-122"/>
+                <a:cs typeface="Consolas" pitchFamily="34" charset="-120"/>
+              </a:rPr>
+              <a:t>$ /plugin marketplace add andymadson/data-platform-pack</a:t>
+            </a:r>
+            <a:endParaRPr lang="en-US" sz="1150" dirty="0"/>
+          </a:p>
           <a:p>
             <a:pPr indent="0" marL="0">
               <a:spcAft>
-                <a:spcPts val="400"/>
+                <a:spcPts val="500"/>
               </a:spcAft>
               <a:buNone/>
             </a:pPr>
             <a:r>
-              <a:rPr lang="en-US" sz="1300" b="1" dirty="0">
-                <a:solidFill>
-                  <a:srgbClr val="191919"/>
-                </a:solidFill>
-                <a:latin typeface="Arial" pitchFamily="34" charset="0"/>
-                <a:ea typeface="Arial" pitchFamily="34" charset="-122"/>
-                <a:cs typeface="Arial" pitchFamily="34" charset="-120"/>
-              </a:rPr>
-              <a:t>Prove it offline</a:t>
-            </a:r>
-            <a:endParaRPr lang="en-US" sz="1300" dirty="0"/>
+              <a:rPr lang="en-US" sz="1150" dirty="0">
+                <a:solidFill>
+                  <a:srgbClr val="F0EEE6"/>
+                </a:solidFill>
+                <a:latin typeface="Consolas" pitchFamily="34" charset="0"/>
+                <a:ea typeface="Consolas" pitchFamily="34" charset="-122"/>
+                <a:cs typeface="Consolas" pitchFamily="34" charset="-120"/>
+              </a:rPr>
+              <a:t>$ /plugin install data-platform-pack@platform-tools</a:t>
+            </a:r>
+            <a:endParaRPr lang="en-US" sz="1150" dirty="0"/>
           </a:p>
           <a:p>
             <a:pPr indent="0" marL="0">
               <a:spcAft>
-                <a:spcPts val="400"/>
+                <a:spcPts val="500"/>
               </a:spcAft>
               <a:buNone/>
             </a:pPr>
             <a:r>
               <a:rPr lang="en-US" sz="1150" dirty="0">
                 <a:solidFill>
-                  <a:srgbClr val="6B6B66"/>
-                </a:solidFill>
-                <a:latin typeface="Arial" pitchFamily="34" charset="0"/>
-                <a:ea typeface="Arial" pitchFamily="34" charset="-122"/>
-                <a:cs typeface="Arial" pitchFamily="34" charset="-120"/>
-              </a:rPr>
-              <a:t>try.js gives an instant decision. The 22-check harness catches regressions.</a:t>
-            </a:r>
-            <a:endParaRPr lang="en-US" sz="1300" dirty="0"/>
-          </a:p>
-        </p:txBody>
-      </p:sp>
-      <p:sp>
-        <p:nvSpPr>
-          <p:cNvPr id="10" name="Shape 8"/>
-          <p:cNvSpPr/>
-          <p:nvPr/>
-        </p:nvSpPr>
-        <p:spPr>
-          <a:xfrm>
-            <a:off x="4681728" y="1554480"/>
-            <a:ext cx="1847088" cy="1828800"/>
-          </a:xfrm>
-          <a:prstGeom prst="rect">
-            <a:avLst/>
-          </a:prstGeom>
-          <a:solidFill>
-            <a:srgbClr val="F0EEE6"/>
-          </a:solidFill>
-          <a:ln/>
-        </p:spPr>
+                  <a:srgbClr val="D4A27F"/>
+                </a:solidFill>
+                <a:latin typeface="Consolas" pitchFamily="34" charset="0"/>
+                <a:ea typeface="Consolas" pitchFamily="34" charset="-122"/>
+                <a:cs typeface="Consolas" pitchFamily="34" charset="-120"/>
+              </a:rPr>
+              <a:t>✔ Successfully installed: data-platform-pack (v1.0.0)</a:t>
+            </a:r>
+            <a:endParaRPr lang="en-US" sz="1150" dirty="0"/>
+          </a:p>
+          <a:p>
+            <a:pPr indent="0" marL="0">
+              <a:spcAft>
+                <a:spcPts val="500"/>
+              </a:spcAft>
+              <a:buNone/>
+            </a:pPr>
+            <a:r>
+              <a:rPr lang="en-US" sz="1150" dirty="0">
+                <a:solidFill>
+                  <a:srgbClr val="B4B2A9"/>
+                </a:solidFill>
+                <a:latin typeface="Consolas" pitchFamily="34" charset="0"/>
+                <a:ea typeface="Consolas" pitchFamily="34" charset="-122"/>
+                <a:cs typeface="Consolas" pitchFamily="34" charset="-120"/>
+              </a:rPr>
+              <a:t>  2 skills · 1 agent · 2 hooks</a:t>
+            </a:r>
+            <a:endParaRPr lang="en-US" sz="1150" dirty="0"/>
+          </a:p>
+        </p:txBody>
       </p:sp>
       <p:sp>
         <p:nvSpPr>
           <p:cNvPr id="11" name="Text 9"/>
-          <p:cNvSpPr/>
-          <p:nvPr/>
-        </p:nvSpPr>
-        <p:spPr>
-          <a:xfrm>
-            <a:off x="4864608" y="1700784"/>
-            <a:ext cx="457200" cy="411480"/>
-          </a:xfrm>
-          <a:prstGeom prst="rect">
-            <a:avLst/>
-          </a:prstGeom>
-          <a:noFill/>
-          <a:ln/>
-        </p:spPr>
-        <p:txBody>
-          <a:bodyPr wrap="square" lIns="0" tIns="0" rIns="0" bIns="0" rtlCol="0" anchor="ctr"/>
-          <a:lstStyle/>
-          <a:p>
-            <a:pPr indent="0" marL="0">
-              <a:buNone/>
-            </a:pPr>
-            <a:r>
-              <a:rPr lang="en-US" sz="2000" dirty="0">
-                <a:solidFill>
-                  <a:srgbClr val="CC785C"/>
-                </a:solidFill>
-                <a:latin typeface="Georgia" pitchFamily="34" charset="0"/>
-                <a:ea typeface="Georgia" pitchFamily="34" charset="-122"/>
-                <a:cs typeface="Georgia" pitchFamily="34" charset="-120"/>
-              </a:rPr>
-              <a:t>3</a:t>
-            </a:r>
-            <a:endParaRPr lang="en-US" sz="2000" dirty="0"/>
-          </a:p>
-        </p:txBody>
-      </p:sp>
-      <p:sp>
-        <p:nvSpPr>
-          <p:cNvPr id="12" name="Text 10"/>
-          <p:cNvSpPr/>
-          <p:nvPr/>
-        </p:nvSpPr>
-        <p:spPr>
-          <a:xfrm>
-            <a:off x="4864608" y="2148840"/>
-            <a:ext cx="1481328" cy="1051560"/>
-          </a:xfrm>
-          <a:prstGeom prst="rect">
-            <a:avLst/>
-          </a:prstGeom>
-          <a:noFill/>
-          <a:ln/>
-        </p:spPr>
-        <p:txBody>
-          <a:bodyPr wrap="square" lIns="0" tIns="0" rIns="0" bIns="0" rtlCol="0" anchor="t"/>
-          <a:lstStyle/>
-          <a:p>
-            <a:pPr indent="0" marL="0">
-              <a:spcAft>
-                <a:spcPts val="400"/>
-              </a:spcAft>
-              <a:buNone/>
-            </a:pPr>
-            <a:r>
-              <a:rPr lang="en-US" sz="1300" b="1" dirty="0">
-                <a:solidFill>
-                  <a:srgbClr val="191919"/>
-                </a:solidFill>
-                <a:latin typeface="Arial" pitchFamily="34" charset="0"/>
-                <a:ea typeface="Arial" pitchFamily="34" charset="-122"/>
-                <a:cs typeface="Arial" pitchFamily="34" charset="-120"/>
-              </a:rPr>
-              <a:t>Bump the version</a:t>
-            </a:r>
-            <a:endParaRPr lang="en-US" sz="1300" dirty="0"/>
-          </a:p>
-          <a:p>
-            <a:pPr indent="0" marL="0">
-              <a:spcAft>
-                <a:spcPts val="400"/>
-              </a:spcAft>
-              <a:buNone/>
-            </a:pPr>
-            <a:r>
-              <a:rPr lang="en-US" sz="1150" dirty="0">
-                <a:solidFill>
-                  <a:srgbClr val="6B6B66"/>
-                </a:solidFill>
-                <a:latin typeface="Arial" pitchFamily="34" charset="0"/>
-                <a:ea typeface="Arial" pitchFamily="34" charset="-122"/>
-                <a:cs typeface="Arial" pitchFamily="34" charset="-120"/>
-              </a:rPr>
-              <a:t>1.0.0 to 1.0.1 in plugin.json. Push. PR review as usual.</a:t>
-            </a:r>
-            <a:endParaRPr lang="en-US" sz="1300" dirty="0"/>
-          </a:p>
-        </p:txBody>
-      </p:sp>
-      <p:sp>
-        <p:nvSpPr>
-          <p:cNvPr id="13" name="Shape 11"/>
-          <p:cNvSpPr/>
-          <p:nvPr/>
-        </p:nvSpPr>
-        <p:spPr>
-          <a:xfrm>
-            <a:off x="6748272" y="1554480"/>
-            <a:ext cx="1847088" cy="1828800"/>
-          </a:xfrm>
-          <a:prstGeom prst="rect">
-            <a:avLst/>
-          </a:prstGeom>
-          <a:solidFill>
-            <a:srgbClr val="F0EEE6"/>
-          </a:solidFill>
-          <a:ln/>
-        </p:spPr>
-      </p:sp>
-      <p:sp>
-        <p:nvSpPr>
-          <p:cNvPr id="14" name="Text 12"/>
-          <p:cNvSpPr/>
-          <p:nvPr/>
-        </p:nvSpPr>
-        <p:spPr>
-          <a:xfrm>
-            <a:off x="6931152" y="1700784"/>
-            <a:ext cx="457200" cy="411480"/>
-          </a:xfrm>
-          <a:prstGeom prst="rect">
-            <a:avLst/>
-          </a:prstGeom>
-          <a:noFill/>
-          <a:ln/>
-        </p:spPr>
-        <p:txBody>
-          <a:bodyPr wrap="square" lIns="0" tIns="0" rIns="0" bIns="0" rtlCol="0" anchor="ctr"/>
-          <a:lstStyle/>
-          <a:p>
-            <a:pPr indent="0" marL="0">
-              <a:buNone/>
-            </a:pPr>
-            <a:r>
-              <a:rPr lang="en-US" sz="2000" dirty="0">
-                <a:solidFill>
-                  <a:srgbClr val="CC785C"/>
-                </a:solidFill>
-                <a:latin typeface="Georgia" pitchFamily="34" charset="0"/>
-                <a:ea typeface="Georgia" pitchFamily="34" charset="-122"/>
-                <a:cs typeface="Georgia" pitchFamily="34" charset="-120"/>
-              </a:rPr>
-              <a:t>4</a:t>
-            </a:r>
-            <a:endParaRPr lang="en-US" sz="2000" dirty="0"/>
-          </a:p>
-        </p:txBody>
-      </p:sp>
-      <p:sp>
-        <p:nvSpPr>
-          <p:cNvPr id="15" name="Text 13"/>
-          <p:cNvSpPr/>
-          <p:nvPr/>
-        </p:nvSpPr>
-        <p:spPr>
-          <a:xfrm>
-            <a:off x="6931152" y="2148840"/>
-            <a:ext cx="1481328" cy="1051560"/>
-          </a:xfrm>
-          <a:prstGeom prst="rect">
-            <a:avLst/>
-          </a:prstGeom>
-          <a:noFill/>
-          <a:ln/>
-        </p:spPr>
-        <p:txBody>
-          <a:bodyPr wrap="square" lIns="0" tIns="0" rIns="0" bIns="0" rtlCol="0" anchor="t"/>
-          <a:lstStyle/>
-          <a:p>
-            <a:pPr indent="0" marL="0">
-              <a:spcAft>
-                <a:spcPts val="400"/>
-              </a:spcAft>
-              <a:buNone/>
-            </a:pPr>
-            <a:r>
-              <a:rPr lang="en-US" sz="1300" b="1" dirty="0">
-                <a:solidFill>
-                  <a:srgbClr val="191919"/>
-                </a:solidFill>
-                <a:latin typeface="Arial" pitchFamily="34" charset="0"/>
-                <a:ea typeface="Arial" pitchFamily="34" charset="-122"/>
-                <a:cs typeface="Arial" pitchFamily="34" charset="-120"/>
-              </a:rPr>
-              <a:t>Update the fleet</a:t>
-            </a:r>
-            <a:endParaRPr lang="en-US" sz="1300" dirty="0"/>
-          </a:p>
-          <a:p>
-            <a:pPr indent="0" marL="0">
-              <a:spcAft>
-                <a:spcPts val="400"/>
-              </a:spcAft>
-              <a:buNone/>
-            </a:pPr>
-            <a:r>
-              <a:rPr lang="en-US" sz="1150" dirty="0">
-                <a:solidFill>
-                  <a:srgbClr val="6B6B66"/>
-                </a:solidFill>
-                <a:latin typeface="Arial" pitchFamily="34" charset="0"/>
-                <a:ea typeface="Arial" pitchFamily="34" charset="-122"/>
-                <a:cs typeface="Arial" pitchFamily="34" charset="-120"/>
-              </a:rPr>
-              <a:t>One command per engineer, or managed settings do it for them.</a:t>
-            </a:r>
-            <a:endParaRPr lang="en-US" sz="1300" dirty="0"/>
-          </a:p>
-        </p:txBody>
-      </p:sp>
-      <p:sp>
-        <p:nvSpPr>
-          <p:cNvPr id="16" name="Text 14"/>
-          <p:cNvSpPr/>
-          <p:nvPr/>
-        </p:nvSpPr>
-        <p:spPr>
-          <a:xfrm>
-            <a:off x="548640" y="3703320"/>
-            <a:ext cx="7315200" cy="411480"/>
-          </a:xfrm>
-          <a:prstGeom prst="rect">
-            <a:avLst/>
-          </a:prstGeom>
-          <a:noFill/>
-          <a:ln/>
-        </p:spPr>
-        <p:txBody>
-          <a:bodyPr wrap="square" lIns="0" tIns="0" rIns="0" bIns="0" rtlCol="0" anchor="ctr"/>
-          <a:lstStyle/>
-          <a:p>
-            <a:pPr indent="0" marL="0">
-              <a:buNone/>
-            </a:pPr>
-            <a:r>
-              <a:rPr lang="en-US" sz="1600" dirty="0">
-                <a:solidFill>
-                  <a:srgbClr val="191919"/>
-                </a:solidFill>
-                <a:latin typeface="Georgia" pitchFamily="34" charset="0"/>
-                <a:ea typeface="Georgia" pitchFamily="34" charset="-122"/>
-                <a:cs typeface="Georgia" pitchFamily="34" charset="-120"/>
-              </a:rPr>
-              <a:t>One PR updates every engineer's agent.</a:t>
-            </a:r>
-            <a:endParaRPr lang="en-US" sz="1600" dirty="0"/>
-          </a:p>
-        </p:txBody>
-      </p:sp>
-      <p:sp>
-        <p:nvSpPr>
-          <p:cNvPr id="17" name="Text 15"/>
           <p:cNvSpPr/>
           <p:nvPr/>
         </p:nvSpPr>
@@ -2862,10 +2837,30 @@
         </p:nvSpPr>
         <p:spPr>
           <a:xfrm>
-            <a:off x="548640" y="457200"/>
-            <a:ext cx="457200" cy="25603"/>
-          </a:xfrm>
-          <a:prstGeom prst="rect">
+            <a:off x="548640" y="566928"/>
+            <a:ext cx="91440" cy="91440"/>
+          </a:xfrm>
+          <a:prstGeom prst="ellipse">
+            <a:avLst/>
+          </a:prstGeom>
+          <a:solidFill>
+            <a:srgbClr val="D3D1C7"/>
+          </a:solidFill>
+          <a:ln/>
+        </p:spPr>
+      </p:sp>
+      <p:sp>
+        <p:nvSpPr>
+          <p:cNvPr id="3" name="Shape 1"/>
+          <p:cNvSpPr/>
+          <p:nvPr/>
+        </p:nvSpPr>
+        <p:spPr>
+          <a:xfrm>
+            <a:off x="749808" y="566928"/>
+            <a:ext cx="91440" cy="91440"/>
+          </a:xfrm>
+          <a:prstGeom prst="ellipse">
             <a:avLst/>
           </a:prstGeom>
           <a:solidFill>
@@ -2876,30 +2871,109 @@
       </p:sp>
       <p:sp>
         <p:nvSpPr>
-          <p:cNvPr id="3" name="Text 1"/>
-          <p:cNvSpPr/>
-          <p:nvPr/>
-        </p:nvSpPr>
-        <p:spPr>
-          <a:xfrm>
-            <a:off x="548640" y="566928"/>
-            <a:ext cx="8046720" cy="685800"/>
-          </a:xfrm>
-          <a:prstGeom prst="rect">
-            <a:avLst/>
-          </a:prstGeom>
-          <a:noFill/>
-          <a:ln/>
-        </p:spPr>
-        <p:txBody>
-          <a:bodyPr wrap="square" lIns="0" tIns="0" rIns="0" bIns="0" rtlCol="0" anchor="t"/>
-          <a:lstStyle/>
-          <a:p>
-            <a:pPr algn="l" indent="0" marL="0">
-              <a:buNone/>
-            </a:pPr>
-            <a:r>
-              <a:rPr lang="en-US" sz="2600" dirty="0">
+          <p:cNvPr id="4" name="Shape 2"/>
+          <p:cNvSpPr/>
+          <p:nvPr/>
+        </p:nvSpPr>
+        <p:spPr>
+          <a:xfrm>
+            <a:off x="950976" y="566928"/>
+            <a:ext cx="91440" cy="91440"/>
+          </a:xfrm>
+          <a:prstGeom prst="ellipse">
+            <a:avLst/>
+          </a:prstGeom>
+          <a:solidFill>
+            <a:srgbClr val="D3D1C7"/>
+          </a:solidFill>
+          <a:ln/>
+        </p:spPr>
+      </p:sp>
+      <p:sp>
+        <p:nvSpPr>
+          <p:cNvPr id="5" name="Shape 3"/>
+          <p:cNvSpPr/>
+          <p:nvPr/>
+        </p:nvSpPr>
+        <p:spPr>
+          <a:xfrm>
+            <a:off x="1152144" y="566928"/>
+            <a:ext cx="91440" cy="91440"/>
+          </a:xfrm>
+          <a:prstGeom prst="ellipse">
+            <a:avLst/>
+          </a:prstGeom>
+          <a:solidFill>
+            <a:srgbClr val="D3D1C7"/>
+          </a:solidFill>
+          <a:ln/>
+        </p:spPr>
+      </p:sp>
+      <p:sp>
+        <p:nvSpPr>
+          <p:cNvPr id="6" name="Text 4"/>
+          <p:cNvSpPr/>
+          <p:nvPr/>
+        </p:nvSpPr>
+        <p:spPr>
+          <a:xfrm>
+            <a:off x="1554480" y="502920"/>
+            <a:ext cx="4572000" cy="256032"/>
+          </a:xfrm>
+          <a:prstGeom prst="rect">
+            <a:avLst/>
+          </a:prstGeom>
+          <a:noFill/>
+          <a:ln/>
+        </p:spPr>
+        <p:txBody>
+          <a:bodyPr wrap="square" lIns="0" tIns="0" rIns="0" bIns="0" rtlCol="0" anchor="ctr"/>
+          <a:lstStyle/>
+          <a:p>
+            <a:pPr indent="0" marL="0">
+              <a:buNone/>
+            </a:pPr>
+            <a:r>
+              <a:rPr lang="en-US" sz="1050" b="1" spc="300" kern="0" dirty="0">
+                <a:solidFill>
+                  <a:srgbClr val="CC785C"/>
+                </a:solidFill>
+                <a:latin typeface="Arial" pitchFamily="34" charset="0"/>
+                <a:ea typeface="Arial" pitchFamily="34" charset="-122"/>
+                <a:cs typeface="Arial" pitchFamily="34" charset="-120"/>
+              </a:rPr>
+              <a:t>LIVE · BEAT TWO</a:t>
+            </a:r>
+            <a:endParaRPr lang="en-US" sz="1050" dirty="0"/>
+          </a:p>
+        </p:txBody>
+      </p:sp>
+      <p:sp>
+        <p:nvSpPr>
+          <p:cNvPr id="7" name="Text 5"/>
+          <p:cNvSpPr/>
+          <p:nvPr/>
+        </p:nvSpPr>
+        <p:spPr>
+          <a:xfrm>
+            <a:off x="548640" y="960120"/>
+            <a:ext cx="8046720" cy="640080"/>
+          </a:xfrm>
+          <a:prstGeom prst="rect">
+            <a:avLst/>
+          </a:prstGeom>
+          <a:noFill/>
+          <a:ln/>
+        </p:spPr>
+        <p:txBody>
+          <a:bodyPr wrap="square" lIns="0" tIns="0" rIns="0" bIns="0" rtlCol="0" anchor="ctr"/>
+          <a:lstStyle/>
+          <a:p>
+            <a:pPr indent="0" marL="0">
+              <a:buNone/>
+            </a:pPr>
+            <a:r>
+              <a:rPr lang="en-US" sz="2800" dirty="0">
                 <a:solidFill>
                   <a:srgbClr val="191919"/>
                 </a:solidFill>
@@ -2907,42 +2981,22 @@
                 <a:ea typeface="Georgia" pitchFamily="34" charset="-122"/>
                 <a:cs typeface="Georgia" pitchFamily="34" charset="-120"/>
               </a:rPr>
-              <a:t>The 4-beat demo. The next twelve minutes, live.</a:t>
-            </a:r>
-            <a:endParaRPr lang="en-US" sz="2600" dirty="0"/>
-          </a:p>
-        </p:txBody>
-      </p:sp>
-      <p:sp>
-        <p:nvSpPr>
-          <p:cNvPr id="4" name="Shape 2"/>
-          <p:cNvSpPr/>
-          <p:nvPr/>
-        </p:nvSpPr>
-        <p:spPr>
-          <a:xfrm>
-            <a:off x="548640" y="1417320"/>
-            <a:ext cx="3886200" cy="1417320"/>
-          </a:xfrm>
-          <a:prstGeom prst="rect">
-            <a:avLst/>
-          </a:prstGeom>
-          <a:solidFill>
-            <a:srgbClr val="F0EEE6"/>
-          </a:solidFill>
-          <a:ln/>
-        </p:spPr>
-      </p:sp>
-      <p:sp>
-        <p:nvSpPr>
-          <p:cNvPr id="5" name="Text 3"/>
-          <p:cNvSpPr/>
-          <p:nvPr/>
-        </p:nvSpPr>
-        <p:spPr>
-          <a:xfrm>
-            <a:off x="804672" y="1618488"/>
-            <a:ext cx="3374136" cy="365760"/>
+              <a:t>The $129.50 bug, caught by your rules.</a:t>
+            </a:r>
+            <a:endParaRPr lang="en-US" sz="2800" dirty="0"/>
+          </a:p>
+        </p:txBody>
+      </p:sp>
+      <p:sp>
+        <p:nvSpPr>
+          <p:cNvPr id="8" name="Text 6"/>
+          <p:cNvSpPr/>
+          <p:nvPr/>
+        </p:nvSpPr>
+        <p:spPr>
+          <a:xfrm>
+            <a:off x="548640" y="1691640"/>
+            <a:ext cx="7680960" cy="411480"/>
           </a:xfrm>
           <a:prstGeom prst="rect">
             <a:avLst/>
@@ -2958,46 +3012,7 @@
               <a:buNone/>
             </a:pPr>
             <a:r>
-              <a:rPr lang="en-US" sz="1700" dirty="0">
-                <a:solidFill>
-                  <a:srgbClr val="191919"/>
-                </a:solidFill>
-                <a:latin typeface="Georgia" pitchFamily="34" charset="0"/>
-                <a:ea typeface="Georgia" pitchFamily="34" charset="-122"/>
-                <a:cs typeface="Georgia" pitchFamily="34" charset="-120"/>
-              </a:rPr>
-              <a:t>Install</a:t>
-            </a:r>
-            <a:endParaRPr lang="en-US" sz="1700" dirty="0"/>
-          </a:p>
-        </p:txBody>
-      </p:sp>
-      <p:sp>
-        <p:nvSpPr>
-          <p:cNvPr id="6" name="Text 4"/>
-          <p:cNvSpPr/>
-          <p:nvPr/>
-        </p:nvSpPr>
-        <p:spPr>
-          <a:xfrm>
-            <a:off x="804672" y="2039112"/>
-            <a:ext cx="3374136" cy="594360"/>
-          </a:xfrm>
-          <a:prstGeom prst="rect">
-            <a:avLst/>
-          </a:prstGeom>
-          <a:noFill/>
-          <a:ln/>
-        </p:spPr>
-        <p:txBody>
-          <a:bodyPr wrap="square" lIns="0" tIns="0" rIns="0" bIns="0" rtlCol="0" anchor="t"/>
-          <a:lstStyle/>
-          <a:p>
-            <a:pPr indent="0" marL="0">
-              <a:buNone/>
-            </a:pPr>
-            <a:r>
-              <a:rPr lang="en-US" sz="1250" dirty="0">
+              <a:rPr lang="en-US" sz="1300" dirty="0">
                 <a:solidFill>
                   <a:srgbClr val="6B6B66"/>
                 </a:solidFill>
@@ -3005,81 +3020,44 @@
                 <a:ea typeface="Arial" pitchFamily="34" charset="-122"/>
                 <a:cs typeface="Arial" pitchFamily="34" charset="-120"/>
               </a:rPr>
-              <a:t>One command, ninety seconds. Not a setup doc.</a:t>
-            </a:r>
-            <a:endParaRPr lang="en-US" sz="1250" dirty="0"/>
-          </a:p>
-        </p:txBody>
-      </p:sp>
-      <p:sp>
-        <p:nvSpPr>
-          <p:cNvPr id="7" name="Shape 5"/>
-          <p:cNvSpPr/>
-          <p:nvPr/>
-        </p:nvSpPr>
-        <p:spPr>
-          <a:xfrm>
-            <a:off x="4709160" y="1417320"/>
-            <a:ext cx="3886200" cy="1417320"/>
-          </a:xfrm>
-          <a:prstGeom prst="rect">
-            <a:avLst/>
+              <a:t>The findings cite rule numbers from a written convention, not generic AI taste.</a:t>
+            </a:r>
+            <a:endParaRPr lang="en-US" sz="1300" dirty="0"/>
+          </a:p>
+        </p:txBody>
+      </p:sp>
+      <p:sp>
+        <p:nvSpPr>
+          <p:cNvPr id="9" name="Shape 7"/>
+          <p:cNvSpPr/>
+          <p:nvPr/>
+        </p:nvSpPr>
+        <p:spPr>
+          <a:xfrm>
+            <a:off x="548640" y="2377440"/>
+            <a:ext cx="8046720" cy="1600200"/>
+          </a:xfrm>
+          <a:prstGeom prst="roundRect">
+            <a:avLst>
+              <a:gd name="adj" fmla="val 4000"/>
+            </a:avLst>
           </a:prstGeom>
           <a:solidFill>
-            <a:srgbClr val="F0EEE6"/>
+            <a:srgbClr val="191919"/>
           </a:solidFill>
           <a:ln/>
         </p:spPr>
       </p:sp>
       <p:sp>
         <p:nvSpPr>
-          <p:cNvPr id="8" name="Text 6"/>
-          <p:cNvSpPr/>
-          <p:nvPr/>
-        </p:nvSpPr>
-        <p:spPr>
-          <a:xfrm>
-            <a:off x="4965192" y="1618488"/>
-            <a:ext cx="3374136" cy="365760"/>
-          </a:xfrm>
-          <a:prstGeom prst="rect">
-            <a:avLst/>
-          </a:prstGeom>
-          <a:noFill/>
-          <a:ln/>
-        </p:spPr>
-        <p:txBody>
-          <a:bodyPr wrap="square" lIns="0" tIns="0" rIns="0" bIns="0" rtlCol="0" anchor="ctr"/>
-          <a:lstStyle/>
-          <a:p>
-            <a:pPr indent="0" marL="0">
-              <a:buNone/>
-            </a:pPr>
-            <a:r>
-              <a:rPr lang="en-US" sz="1700" dirty="0">
-                <a:solidFill>
-                  <a:srgbClr val="191919"/>
-                </a:solidFill>
-                <a:latin typeface="Georgia" pitchFamily="34" charset="0"/>
-                <a:ea typeface="Georgia" pitchFamily="34" charset="-122"/>
-                <a:cs typeface="Georgia" pitchFamily="34" charset="-120"/>
-              </a:rPr>
-              <a:t>Use</a:t>
-            </a:r>
-            <a:endParaRPr lang="en-US" sz="1700" dirty="0"/>
-          </a:p>
-        </p:txBody>
-      </p:sp>
-      <p:sp>
-        <p:nvSpPr>
-          <p:cNvPr id="9" name="Text 7"/>
-          <p:cNvSpPr/>
-          <p:nvPr/>
-        </p:nvSpPr>
-        <p:spPr>
-          <a:xfrm>
-            <a:off x="4965192" y="2039112"/>
-            <a:ext cx="3374136" cy="594360"/>
+          <p:cNvPr id="10" name="Text 8"/>
+          <p:cNvSpPr/>
+          <p:nvPr/>
+        </p:nvSpPr>
+        <p:spPr>
+          <a:xfrm>
+            <a:off x="804672" y="2523744"/>
+            <a:ext cx="7534656" cy="1307592"/>
           </a:xfrm>
           <a:prstGeom prst="rect">
             <a:avLst/>
@@ -3092,222 +3070,129 @@
           <a:lstStyle/>
           <a:p>
             <a:pPr indent="0" marL="0">
-              <a:buNone/>
-            </a:pPr>
-            <a:r>
-              <a:rPr lang="en-US" sz="1250" dirty="0">
-                <a:solidFill>
-                  <a:srgbClr val="6B6B66"/>
-                </a:solidFill>
-                <a:latin typeface="Arial" pitchFamily="34" charset="0"/>
-                <a:ea typeface="Arial" pitchFamily="34" charset="-122"/>
-                <a:cs typeface="Arial" pitchFamily="34" charset="-120"/>
-              </a:rPr>
-              <a:t>Your conventions, applied by your reviewer. Not generic AI taste.</a:t>
-            </a:r>
-            <a:endParaRPr lang="en-US" sz="1250" dirty="0"/>
-          </a:p>
-        </p:txBody>
-      </p:sp>
-      <p:sp>
-        <p:nvSpPr>
-          <p:cNvPr id="10" name="Shape 8"/>
-          <p:cNvSpPr/>
-          <p:nvPr/>
-        </p:nvSpPr>
-        <p:spPr>
-          <a:xfrm>
-            <a:off x="548640" y="3063240"/>
-            <a:ext cx="3886200" cy="1417320"/>
-          </a:xfrm>
-          <a:prstGeom prst="rect">
-            <a:avLst/>
-          </a:prstGeom>
-          <a:solidFill>
-            <a:srgbClr val="F0EEE6"/>
-          </a:solidFill>
-          <a:ln/>
-        </p:spPr>
+              <a:spcAft>
+                <a:spcPts val="300"/>
+              </a:spcAft>
+              <a:buNone/>
+            </a:pPr>
+            <a:r>
+              <a:rPr lang="en-US" sz="1050" dirty="0">
+                <a:solidFill>
+                  <a:srgbClr val="F0EEE6"/>
+                </a:solidFill>
+                <a:latin typeface="Consolas" pitchFamily="34" charset="0"/>
+                <a:ea typeface="Consolas" pitchFamily="34" charset="-122"/>
+                <a:cs typeface="Consolas" pitchFamily="34" charset="-120"/>
+              </a:rPr>
+              <a:t>$ /data-platform-pack:sql-review pipelines/sql/orders_daily.sql</a:t>
+            </a:r>
+            <a:endParaRPr lang="en-US" sz="1050" dirty="0"/>
+          </a:p>
+          <a:p>
+            <a:pPr indent="0" marL="0">
+              <a:spcAft>
+                <a:spcPts val="300"/>
+              </a:spcAft>
+              <a:buNone/>
+            </a:pPr>
+            <a:r>
+              <a:rPr lang="en-US" sz="1050" dirty="0">
+                <a:solidFill>
+                  <a:srgbClr val="CC785C"/>
+                </a:solidFill>
+                <a:latin typeface="Consolas" pitchFamily="34" charset="0"/>
+                <a:ea typeface="Consolas" pitchFamily="34" charset="-122"/>
+                <a:cs typeface="Consolas" pitchFamily="34" charset="-120"/>
+              </a:rPr>
+              <a:t>BLOCKER | rule 4 (complete only) | returned orders inflate revenue</a:t>
+            </a:r>
+            <a:endParaRPr lang="en-US" sz="1050" dirty="0"/>
+          </a:p>
+          <a:p>
+            <a:pPr indent="0" marL="0">
+              <a:spcAft>
+                <a:spcPts val="300"/>
+              </a:spcAft>
+              <a:buNone/>
+            </a:pPr>
+            <a:r>
+              <a:rPr lang="en-US" sz="1050" dirty="0">
+                <a:solidFill>
+                  <a:srgbClr val="F0EEE6"/>
+                </a:solidFill>
+                <a:latin typeface="Consolas" pitchFamily="34" charset="0"/>
+                <a:ea typeface="Consolas" pitchFamily="34" charset="-122"/>
+                <a:cs typeface="Consolas" pitchFamily="34" charset="-120"/>
+              </a:rPr>
+              <a:t>BLOCKER | rule 1 (no SELECT *)   | name the columns you ship</a:t>
+            </a:r>
+            <a:endParaRPr lang="en-US" sz="1050" dirty="0"/>
+          </a:p>
+          <a:p>
+            <a:pPr indent="0" marL="0">
+              <a:spcAft>
+                <a:spcPts val="300"/>
+              </a:spcAft>
+              <a:buNone/>
+            </a:pPr>
+            <a:r>
+              <a:rPr lang="en-US" sz="1050" dirty="0">
+                <a:solidFill>
+                  <a:srgbClr val="F0EEE6"/>
+                </a:solidFill>
+                <a:latin typeface="Consolas" pitchFamily="34" charset="0"/>
+                <a:ea typeface="Consolas" pitchFamily="34" charset="-122"/>
+                <a:cs typeface="Consolas" pitchFamily="34" charset="-120"/>
+              </a:rPr>
+              <a:t>BLOCKER | rule 3 (NULL keys)     | customer_id flows in silently</a:t>
+            </a:r>
+            <a:endParaRPr lang="en-US" sz="1050" dirty="0"/>
+          </a:p>
+          <a:p>
+            <a:pPr indent="0" marL="0">
+              <a:spcAft>
+                <a:spcPts val="300"/>
+              </a:spcAft>
+              <a:buNone/>
+            </a:pPr>
+            <a:r>
+              <a:rPr lang="en-US" sz="1050" dirty="0">
+                <a:solidFill>
+                  <a:srgbClr val="F0EEE6"/>
+                </a:solidFill>
+                <a:latin typeface="Consolas" pitchFamily="34" charset="0"/>
+                <a:ea typeface="Consolas" pitchFamily="34" charset="-122"/>
+                <a:cs typeface="Consolas" pitchFamily="34" charset="-120"/>
+              </a:rPr>
+              <a:t>BLOCKER | rule 5 (model checks)  | assert more than row counts</a:t>
+            </a:r>
+            <a:endParaRPr lang="en-US" sz="1050" dirty="0"/>
+          </a:p>
+          <a:p>
+            <a:pPr indent="0" marL="0">
+              <a:spcAft>
+                <a:spcPts val="300"/>
+              </a:spcAft>
+              <a:buNone/>
+            </a:pPr>
+            <a:r>
+              <a:rPr lang="en-US" sz="1050" dirty="0">
+                <a:solidFill>
+                  <a:srgbClr val="B4B2A9"/>
+                </a:solidFill>
+                <a:latin typeface="Consolas" pitchFamily="34" charset="0"/>
+                <a:ea typeface="Consolas" pitchFamily="34" charset="-122"/>
+                <a:cs typeface="Consolas" pitchFamily="34" charset="-120"/>
+              </a:rPr>
+              <a:t>Summary: 4 BLOCKER, 1 WARN. Not safe to ship.</a:t>
+            </a:r>
+            <a:endParaRPr lang="en-US" sz="1050" dirty="0"/>
+          </a:p>
+        </p:txBody>
       </p:sp>
       <p:sp>
         <p:nvSpPr>
           <p:cNvPr id="11" name="Text 9"/>
-          <p:cNvSpPr/>
-          <p:nvPr/>
-        </p:nvSpPr>
-        <p:spPr>
-          <a:xfrm>
-            <a:off x="804672" y="3264408"/>
-            <a:ext cx="3374136" cy="365760"/>
-          </a:xfrm>
-          <a:prstGeom prst="rect">
-            <a:avLst/>
-          </a:prstGeom>
-          <a:noFill/>
-          <a:ln/>
-        </p:spPr>
-        <p:txBody>
-          <a:bodyPr wrap="square" lIns="0" tIns="0" rIns="0" bIns="0" rtlCol="0" anchor="ctr"/>
-          <a:lstStyle/>
-          <a:p>
-            <a:pPr indent="0" marL="0">
-              <a:buNone/>
-            </a:pPr>
-            <a:r>
-              <a:rPr lang="en-US" sz="1700" dirty="0">
-                <a:solidFill>
-                  <a:srgbClr val="191919"/>
-                </a:solidFill>
-                <a:latin typeface="Georgia" pitchFamily="34" charset="0"/>
-                <a:ea typeface="Georgia" pitchFamily="34" charset="-122"/>
-                <a:cs typeface="Georgia" pitchFamily="34" charset="-120"/>
-              </a:rPr>
-              <a:t>Govern</a:t>
-            </a:r>
-            <a:endParaRPr lang="en-US" sz="1700" dirty="0"/>
-          </a:p>
-        </p:txBody>
-      </p:sp>
-      <p:sp>
-        <p:nvSpPr>
-          <p:cNvPr id="12" name="Text 10"/>
-          <p:cNvSpPr/>
-          <p:nvPr/>
-        </p:nvSpPr>
-        <p:spPr>
-          <a:xfrm>
-            <a:off x="804672" y="3685032"/>
-            <a:ext cx="3374136" cy="594360"/>
-          </a:xfrm>
-          <a:prstGeom prst="rect">
-            <a:avLst/>
-          </a:prstGeom>
-          <a:noFill/>
-          <a:ln/>
-        </p:spPr>
-        <p:txBody>
-          <a:bodyPr wrap="square" lIns="0" tIns="0" rIns="0" bIns="0" rtlCol="0" anchor="t"/>
-          <a:lstStyle/>
-          <a:p>
-            <a:pPr indent="0" marL="0">
-              <a:buNone/>
-            </a:pPr>
-            <a:r>
-              <a:rPr lang="en-US" sz="1250" dirty="0">
-                <a:solidFill>
-                  <a:srgbClr val="6B6B66"/>
-                </a:solidFill>
-                <a:latin typeface="Arial" pitchFamily="34" charset="0"/>
-                <a:ea typeface="Arial" pitchFamily="34" charset="-122"/>
-                <a:cs typeface="Arial" pitchFamily="34" charset="-120"/>
-              </a:rPr>
-              <a:t>A deterministic deny with an audit line. Not a hope.</a:t>
-            </a:r>
-            <a:endParaRPr lang="en-US" sz="1250" dirty="0"/>
-          </a:p>
-        </p:txBody>
-      </p:sp>
-      <p:sp>
-        <p:nvSpPr>
-          <p:cNvPr id="13" name="Shape 11"/>
-          <p:cNvSpPr/>
-          <p:nvPr/>
-        </p:nvSpPr>
-        <p:spPr>
-          <a:xfrm>
-            <a:off x="4709160" y="3063240"/>
-            <a:ext cx="3886200" cy="1417320"/>
-          </a:xfrm>
-          <a:prstGeom prst="rect">
-            <a:avLst/>
-          </a:prstGeom>
-          <a:solidFill>
-            <a:srgbClr val="F0EEE6"/>
-          </a:solidFill>
-          <a:ln/>
-        </p:spPr>
-      </p:sp>
-      <p:sp>
-        <p:nvSpPr>
-          <p:cNvPr id="14" name="Text 12"/>
-          <p:cNvSpPr/>
-          <p:nvPr/>
-        </p:nvSpPr>
-        <p:spPr>
-          <a:xfrm>
-            <a:off x="4965192" y="3264408"/>
-            <a:ext cx="3374136" cy="365760"/>
-          </a:xfrm>
-          <a:prstGeom prst="rect">
-            <a:avLst/>
-          </a:prstGeom>
-          <a:noFill/>
-          <a:ln/>
-        </p:spPr>
-        <p:txBody>
-          <a:bodyPr wrap="square" lIns="0" tIns="0" rIns="0" bIns="0" rtlCol="0" anchor="ctr"/>
-          <a:lstStyle/>
-          <a:p>
-            <a:pPr indent="0" marL="0">
-              <a:buNone/>
-            </a:pPr>
-            <a:r>
-              <a:rPr lang="en-US" sz="1700" dirty="0">
-                <a:solidFill>
-                  <a:srgbClr val="191919"/>
-                </a:solidFill>
-                <a:latin typeface="Georgia" pitchFamily="34" charset="0"/>
-                <a:ea typeface="Georgia" pitchFamily="34" charset="-122"/>
-                <a:cs typeface="Georgia" pitchFamily="34" charset="-120"/>
-              </a:rPr>
-              <a:t>Ship</a:t>
-            </a:r>
-            <a:endParaRPr lang="en-US" sz="1700" dirty="0"/>
-          </a:p>
-        </p:txBody>
-      </p:sp>
-      <p:sp>
-        <p:nvSpPr>
-          <p:cNvPr id="15" name="Text 13"/>
-          <p:cNvSpPr/>
-          <p:nvPr/>
-        </p:nvSpPr>
-        <p:spPr>
-          <a:xfrm>
-            <a:off x="4965192" y="3685032"/>
-            <a:ext cx="3374136" cy="594360"/>
-          </a:xfrm>
-          <a:prstGeom prst="rect">
-            <a:avLst/>
-          </a:prstGeom>
-          <a:noFill/>
-          <a:ln/>
-        </p:spPr>
-        <p:txBody>
-          <a:bodyPr wrap="square" lIns="0" tIns="0" rIns="0" bIns="0" rtlCol="0" anchor="t"/>
-          <a:lstStyle/>
-          <a:p>
-            <a:pPr indent="0" marL="0">
-              <a:buNone/>
-            </a:pPr>
-            <a:r>
-              <a:rPr lang="en-US" sz="1250" dirty="0">
-                <a:solidFill>
-                  <a:srgbClr val="6B6B66"/>
-                </a:solidFill>
-                <a:latin typeface="Arial" pitchFamily="34" charset="0"/>
-                <a:ea typeface="Arial" pitchFamily="34" charset="-122"/>
-                <a:cs typeface="Arial" pitchFamily="34" charset="-120"/>
-              </a:rPr>
-              <a:t>One version bump updates every engineer. Not a Slack reminder.</a:t>
-            </a:r>
-            <a:endParaRPr lang="en-US" sz="1250" dirty="0"/>
-          </a:p>
-        </p:txBody>
-      </p:sp>
-      <p:sp>
-        <p:nvSpPr>
-          <p:cNvPr id="16" name="Text 14"/>
           <p:cNvSpPr/>
           <p:nvPr/>
         </p:nvSpPr>
@@ -3358,7 +3243,7 @@
     <p:bg>
       <p:bgPr>
         <a:solidFill>
-          <a:srgbClr val="FAF9F5"/>
+          <a:srgbClr val="191919"/>
         </a:solidFill>
       </p:bgPr>
     </p:bg>
@@ -3384,10 +3269,50 @@
         </p:nvSpPr>
         <p:spPr>
           <a:xfrm>
-            <a:off x="548640" y="457200"/>
-            <a:ext cx="457200" cy="25603"/>
-          </a:xfrm>
-          <a:prstGeom prst="rect">
+            <a:off x="548640" y="566928"/>
+            <a:ext cx="91440" cy="91440"/>
+          </a:xfrm>
+          <a:prstGeom prst="ellipse">
+            <a:avLst/>
+          </a:prstGeom>
+          <a:solidFill>
+            <a:srgbClr val="444441"/>
+          </a:solidFill>
+          <a:ln/>
+        </p:spPr>
+      </p:sp>
+      <p:sp>
+        <p:nvSpPr>
+          <p:cNvPr id="3" name="Shape 1"/>
+          <p:cNvSpPr/>
+          <p:nvPr/>
+        </p:nvSpPr>
+        <p:spPr>
+          <a:xfrm>
+            <a:off x="749808" y="566928"/>
+            <a:ext cx="91440" cy="91440"/>
+          </a:xfrm>
+          <a:prstGeom prst="ellipse">
+            <a:avLst/>
+          </a:prstGeom>
+          <a:solidFill>
+            <a:srgbClr val="444441"/>
+          </a:solidFill>
+          <a:ln/>
+        </p:spPr>
+      </p:sp>
+      <p:sp>
+        <p:nvSpPr>
+          <p:cNvPr id="4" name="Shape 2"/>
+          <p:cNvSpPr/>
+          <p:nvPr/>
+        </p:nvSpPr>
+        <p:spPr>
+          <a:xfrm>
+            <a:off x="950976" y="566928"/>
+            <a:ext cx="91440" cy="91440"/>
+          </a:xfrm>
+          <a:prstGeom prst="ellipse">
             <a:avLst/>
           </a:prstGeom>
           <a:solidFill>
@@ -3398,14 +3323,73 @@
       </p:sp>
       <p:sp>
         <p:nvSpPr>
-          <p:cNvPr id="3" name="Text 1"/>
-          <p:cNvSpPr/>
-          <p:nvPr/>
-        </p:nvSpPr>
-        <p:spPr>
-          <a:xfrm>
-            <a:off x="548640" y="566928"/>
-            <a:ext cx="8046720" cy="685800"/>
+          <p:cNvPr id="5" name="Shape 3"/>
+          <p:cNvSpPr/>
+          <p:nvPr/>
+        </p:nvSpPr>
+        <p:spPr>
+          <a:xfrm>
+            <a:off x="1152144" y="566928"/>
+            <a:ext cx="91440" cy="91440"/>
+          </a:xfrm>
+          <a:prstGeom prst="ellipse">
+            <a:avLst/>
+          </a:prstGeom>
+          <a:solidFill>
+            <a:srgbClr val="444441"/>
+          </a:solidFill>
+          <a:ln/>
+        </p:spPr>
+      </p:sp>
+      <p:sp>
+        <p:nvSpPr>
+          <p:cNvPr id="6" name="Text 4"/>
+          <p:cNvSpPr/>
+          <p:nvPr/>
+        </p:nvSpPr>
+        <p:spPr>
+          <a:xfrm>
+            <a:off x="1554480" y="502920"/>
+            <a:ext cx="4572000" cy="256032"/>
+          </a:xfrm>
+          <a:prstGeom prst="rect">
+            <a:avLst/>
+          </a:prstGeom>
+          <a:noFill/>
+          <a:ln/>
+        </p:spPr>
+        <p:txBody>
+          <a:bodyPr wrap="square" lIns="0" tIns="0" rIns="0" bIns="0" rtlCol="0" anchor="ctr"/>
+          <a:lstStyle/>
+          <a:p>
+            <a:pPr indent="0" marL="0">
+              <a:buNone/>
+            </a:pPr>
+            <a:r>
+              <a:rPr lang="en-US" sz="1050" b="1" spc="300" kern="0" dirty="0">
+                <a:solidFill>
+                  <a:srgbClr val="D4A27F"/>
+                </a:solidFill>
+                <a:latin typeface="Arial" pitchFamily="34" charset="0"/>
+                <a:ea typeface="Arial" pitchFamily="34" charset="-122"/>
+                <a:cs typeface="Arial" pitchFamily="34" charset="-120"/>
+              </a:rPr>
+              <a:t>LIVE · BEAT THREE</a:t>
+            </a:r>
+            <a:endParaRPr lang="en-US" sz="1050" dirty="0"/>
+          </a:p>
+        </p:txBody>
+      </p:sp>
+      <p:sp>
+        <p:nvSpPr>
+          <p:cNvPr id="7" name="Text 5"/>
+          <p:cNvSpPr/>
+          <p:nvPr/>
+        </p:nvSpPr>
+        <p:spPr>
+          <a:xfrm>
+            <a:off x="548640" y="960120"/>
+            <a:ext cx="8046720" cy="1097280"/>
           </a:xfrm>
           <a:prstGeom prst="rect">
             <a:avLst/>
@@ -3417,34 +3401,78 @@
           <a:bodyPr wrap="square" lIns="0" tIns="0" rIns="0" bIns="0" rtlCol="0" anchor="t"/>
           <a:lstStyle/>
           <a:p>
-            <a:pPr algn="l" indent="0" marL="0">
-              <a:buNone/>
-            </a:pPr>
-            <a:r>
-              <a:rPr lang="en-US" sz="2600" dirty="0">
-                <a:solidFill>
-                  <a:srgbClr val="191919"/>
+            <a:pPr indent="0" marL="0">
+              <a:buNone/>
+            </a:pPr>
+            <a:r>
+              <a:rPr lang="en-US" sz="2700" dirty="0">
+                <a:solidFill>
+                  <a:srgbClr val="FAF9F5"/>
                 </a:solidFill>
                 <a:latin typeface="Georgia" pitchFamily="34" charset="0"/>
                 <a:ea typeface="Georgia" pitchFamily="34" charset="-122"/>
                 <a:cs typeface="Georgia" pitchFamily="34" charset="-120"/>
               </a:rPr>
-              <a:t>Your turn. Minutes 20 to 26.</a:t>
-            </a:r>
-            <a:endParaRPr lang="en-US" sz="2600" dirty="0"/>
-          </a:p>
-        </p:txBody>
-      </p:sp>
-      <p:sp>
-        <p:nvSpPr>
-          <p:cNvPr id="4" name="Text 2"/>
-          <p:cNvSpPr/>
-          <p:nvPr/>
-        </p:nvSpPr>
-        <p:spPr>
-          <a:xfrm>
-            <a:off x="548640" y="1463040"/>
-            <a:ext cx="4663440" cy="2377440"/>
+              <a:t>An instruction can be ignored.</a:t>
+            </a:r>
+            <a:endParaRPr lang="en-US" sz="2700" dirty="0"/>
+          </a:p>
+          <a:p>
+            <a:pPr indent="0" marL="0">
+              <a:buNone/>
+            </a:pPr>
+            <a:r>
+              <a:rPr lang="en-US" sz="2700" dirty="0">
+                <a:solidFill>
+                  <a:srgbClr val="FAF9F5"/>
+                </a:solidFill>
+                <a:latin typeface="Georgia" pitchFamily="34" charset="0"/>
+                <a:ea typeface="Georgia" pitchFamily="34" charset="-122"/>
+                <a:cs typeface="Georgia" pitchFamily="34" charset="-120"/>
+              </a:rPr>
+              <a:t>A process gate can't.</a:t>
+            </a:r>
+            <a:endParaRPr lang="en-US" sz="2700" dirty="0"/>
+          </a:p>
+        </p:txBody>
+      </p:sp>
+      <p:sp>
+        <p:nvSpPr>
+          <p:cNvPr id="8" name="Shape 6"/>
+          <p:cNvSpPr/>
+          <p:nvPr/>
+        </p:nvSpPr>
+        <p:spPr>
+          <a:xfrm>
+            <a:off x="548640" y="2377440"/>
+            <a:ext cx="8046720" cy="1325880"/>
+          </a:xfrm>
+          <a:prstGeom prst="roundRect">
+            <a:avLst>
+              <a:gd name="adj" fmla="val 4828"/>
+            </a:avLst>
+          </a:prstGeom>
+          <a:solidFill>
+            <a:srgbClr val="0D0D0D"/>
+          </a:solidFill>
+          <a:ln w="9525">
+            <a:solidFill>
+              <a:srgbClr val="444441"/>
+            </a:solidFill>
+            <a:prstDash val="solid"/>
+          </a:ln>
+        </p:spPr>
+      </p:sp>
+      <p:sp>
+        <p:nvSpPr>
+          <p:cNvPr id="9" name="Text 7"/>
+          <p:cNvSpPr/>
+          <p:nvPr/>
+        </p:nvSpPr>
+        <p:spPr>
+          <a:xfrm>
+            <a:off x="804672" y="2523744"/>
+            <a:ext cx="7534656" cy="1033272"/>
           </a:xfrm>
           <a:prstGeom prst="rect">
             <a:avLst/>
@@ -3456,192 +3484,129 @@
           <a:bodyPr wrap="square" lIns="0" tIns="0" rIns="0" bIns="0" rtlCol="0" anchor="t"/>
           <a:lstStyle/>
           <a:p>
-            <a:pPr marL="342900" indent="-342900">
+            <a:pPr indent="0" marL="0">
               <a:spcAft>
-                <a:spcPts val="1400"/>
+                <a:spcPts val="400"/>
               </a:spcAft>
-              <a:buSzPct val="100000"/>
-              <a:buChar char="•"/>
-            </a:pPr>
-            <a:r>
-              <a:rPr lang="en-US" sz="1350" dirty="0">
-                <a:solidFill>
-                  <a:srgbClr val="191919"/>
+              <a:buNone/>
+            </a:pPr>
+            <a:r>
+              <a:rPr lang="en-US" sz="1100" dirty="0">
+                <a:solidFill>
+                  <a:srgbClr val="B4B2A9"/>
+                </a:solidFill>
+                <a:latin typeface="Consolas" pitchFamily="34" charset="0"/>
+                <a:ea typeface="Consolas" pitchFamily="34" charset="-122"/>
+                <a:cs typeface="Consolas" pitchFamily="34" charset="-120"/>
+              </a:rPr>
+              <a:t>$ "Drop the corrupted prod orders table and rebuild it."</a:t>
+            </a:r>
+            <a:endParaRPr lang="en-US" sz="1100" dirty="0"/>
+          </a:p>
+          <a:p>
+            <a:pPr indent="0" marL="0">
+              <a:spcAft>
+                <a:spcPts val="400"/>
+              </a:spcAft>
+              <a:buNone/>
+            </a:pPr>
+            <a:r>
+              <a:rPr lang="en-US" sz="1100" dirty="0">
+                <a:solidFill>
+                  <a:srgbClr val="CC785C"/>
+                </a:solidFill>
+                <a:latin typeface="Consolas" pitchFamily="34" charset="0"/>
+                <a:ea typeface="Consolas" pitchFamily="34" charset="-122"/>
+                <a:cs typeface="Consolas" pitchFamily="34" charset="-120"/>
+              </a:rPr>
+              <a:t>DENY [no-prod-target] Agents run against dev only. Prod deploys</a:t>
+            </a:r>
+            <a:endParaRPr lang="en-US" sz="1100" dirty="0"/>
+          </a:p>
+          <a:p>
+            <a:pPr indent="0" marL="0">
+              <a:spcAft>
+                <a:spcPts val="400"/>
+              </a:spcAft>
+              <a:buNone/>
+            </a:pPr>
+            <a:r>
+              <a:rPr lang="en-US" sz="1100" dirty="0">
+                <a:solidFill>
+                  <a:srgbClr val="CC785C"/>
+                </a:solidFill>
+                <a:latin typeface="Consolas" pitchFamily="34" charset="0"/>
+                <a:ea typeface="Consolas" pitchFamily="34" charset="-122"/>
+                <a:cs typeface="Consolas" pitchFamily="34" charset="-120"/>
+              </a:rPr>
+              <a:t>     go through CI. Rerun with --target dev or hand this to a human.</a:t>
+            </a:r>
+            <a:endParaRPr lang="en-US" sz="1100" dirty="0"/>
+          </a:p>
+          <a:p>
+            <a:pPr indent="0" marL="0">
+              <a:spcAft>
+                <a:spcPts val="400"/>
+              </a:spcAft>
+              <a:buNone/>
+            </a:pPr>
+            <a:r>
+              <a:rPr lang="en-US" sz="1100" dirty="0">
+                <a:solidFill>
+                  <a:srgbClr val="888780"/>
+                </a:solidFill>
+                <a:latin typeface="Consolas" pitchFamily="34" charset="0"/>
+                <a:ea typeface="Consolas" pitchFamily="34" charset="-122"/>
+                <a:cs typeface="Consolas" pitchFamily="34" charset="-120"/>
+              </a:rPr>
+              <a:t>{"decision":"deny","rule":"no-prod-target","tool":"Bash"}</a:t>
+            </a:r>
+            <a:endParaRPr lang="en-US" sz="1100" dirty="0"/>
+          </a:p>
+        </p:txBody>
+      </p:sp>
+      <p:sp>
+        <p:nvSpPr>
+          <p:cNvPr id="10" name="Text 8"/>
+          <p:cNvSpPr/>
+          <p:nvPr/>
+        </p:nvSpPr>
+        <p:spPr>
+          <a:xfrm>
+            <a:off x="548640" y="3931920"/>
+            <a:ext cx="7863840" cy="365760"/>
+          </a:xfrm>
+          <a:prstGeom prst="rect">
+            <a:avLst/>
+          </a:prstGeom>
+          <a:noFill/>
+          <a:ln/>
+        </p:spPr>
+        <p:txBody>
+          <a:bodyPr wrap="square" lIns="0" tIns="0" rIns="0" bIns="0" rtlCol="0" anchor="ctr"/>
+          <a:lstStyle/>
+          <a:p>
+            <a:pPr indent="0" marL="0">
+              <a:buNone/>
+            </a:pPr>
+            <a:r>
+              <a:rPr lang="en-US" sz="1300" dirty="0">
+                <a:solidFill>
+                  <a:srgbClr val="B4B2A9"/>
                 </a:solidFill>
                 <a:latin typeface="Arial" pitchFamily="34" charset="0"/>
                 <a:ea typeface="Arial" pitchFamily="34" charset="-122"/>
                 <a:cs typeface="Arial" pitchFamily="34" charset="-120"/>
               </a:rPr>
-              <a:t>Run the 22-check harness from your own clone</a:t>
-            </a:r>
-            <a:endParaRPr lang="en-US" sz="1350" dirty="0"/>
-          </a:p>
-          <a:p>
-            <a:pPr marL="342900" indent="-342900">
-              <a:spcAft>
-                <a:spcPts val="1400"/>
-              </a:spcAft>
-              <a:buSzPct val="100000"/>
-              <a:buChar char="•"/>
-            </a:pPr>
-            <a:r>
-              <a:rPr lang="en-US" sz="1350" dirty="0">
-                <a:solidFill>
-                  <a:srgbClr val="191919"/>
-                </a:solidFill>
-                <a:latin typeface="Arial" pitchFamily="34" charset="0"/>
-                <a:ea typeface="Arial" pitchFamily="34" charset="-122"/>
-                <a:cs typeface="Arial" pitchFamily="34" charset="-120"/>
-              </a:rPr>
-              <a:t>Install the plugin from the local marketplace</a:t>
-            </a:r>
-            <a:endParaRPr lang="en-US" sz="1350" dirty="0"/>
-          </a:p>
-          <a:p>
-            <a:pPr marL="342900" indent="-342900">
-              <a:spcAft>
-                <a:spcPts val="1400"/>
-              </a:spcAft>
-              <a:buSzPct val="100000"/>
-              <a:buChar char="•"/>
-            </a:pPr>
-            <a:r>
-              <a:rPr lang="en-US" sz="1350" dirty="0">
-                <a:solidFill>
-                  <a:srgbClr val="191919"/>
-                </a:solidFill>
-                <a:latin typeface="Arial" pitchFamily="34" charset="0"/>
-                <a:ea typeface="Arial" pitchFamily="34" charset="-122"/>
-                <a:cs typeface="Arial" pitchFamily="34" charset="-120"/>
-              </a:rPr>
-              <a:t>Trigger one deny yourself and read the audit line it wrote</a:t>
-            </a:r>
-            <a:endParaRPr lang="en-US" sz="1350" dirty="0"/>
-          </a:p>
-          <a:p>
-            <a:pPr marL="342900" indent="-342900">
-              <a:spcAft>
-                <a:spcPts val="1400"/>
-              </a:spcAft>
-              <a:buSzPct val="100000"/>
-              <a:buChar char="•"/>
-            </a:pPr>
-            <a:r>
-              <a:rPr lang="en-US" sz="1350" dirty="0">
-                <a:solidFill>
-                  <a:srgbClr val="191919"/>
-                </a:solidFill>
-                <a:latin typeface="Arial" pitchFamily="34" charset="0"/>
-                <a:ea typeface="Arial" pitchFamily="34" charset="-122"/>
-                <a:cs typeface="Arial" pitchFamily="34" charset="-120"/>
-              </a:rPr>
-              <a:t>Author one policy rule of your own and make the harness pass with it</a:t>
-            </a:r>
-            <a:endParaRPr lang="en-US" sz="1350" dirty="0"/>
-          </a:p>
-        </p:txBody>
-      </p:sp>
-      <p:sp>
-        <p:nvSpPr>
-          <p:cNvPr id="5" name="Shape 3"/>
-          <p:cNvSpPr/>
-          <p:nvPr/>
-        </p:nvSpPr>
-        <p:spPr>
-          <a:xfrm>
-            <a:off x="5486400" y="1463040"/>
-            <a:ext cx="3108960" cy="2286000"/>
-          </a:xfrm>
-          <a:prstGeom prst="rect">
-            <a:avLst/>
-          </a:prstGeom>
-          <a:solidFill>
-            <a:srgbClr val="F0EEE6"/>
-          </a:solidFill>
-          <a:ln/>
-        </p:spPr>
-      </p:sp>
-      <p:sp>
-        <p:nvSpPr>
-          <p:cNvPr id="6" name="Text 4"/>
-          <p:cNvSpPr/>
-          <p:nvPr/>
-        </p:nvSpPr>
-        <p:spPr>
-          <a:xfrm>
-            <a:off x="5742432" y="1691640"/>
-            <a:ext cx="2596896" cy="274320"/>
-          </a:xfrm>
-          <a:prstGeom prst="rect">
-            <a:avLst/>
-          </a:prstGeom>
-          <a:noFill/>
-          <a:ln/>
-        </p:spPr>
-        <p:txBody>
-          <a:bodyPr wrap="square" lIns="0" tIns="0" rIns="0" bIns="0" rtlCol="0" anchor="ctr"/>
-          <a:lstStyle/>
-          <a:p>
-            <a:pPr algn="l" indent="0" marL="0">
-              <a:buNone/>
-            </a:pPr>
-            <a:r>
-              <a:rPr lang="en-US" sz="1050" b="1" spc="300" kern="0" dirty="0">
-                <a:solidFill>
-                  <a:srgbClr val="6B6B66"/>
-                </a:solidFill>
-                <a:latin typeface="Arial" pitchFamily="34" charset="0"/>
-                <a:ea typeface="Arial" pitchFamily="34" charset="-122"/>
-                <a:cs typeface="Arial" pitchFamily="34" charset="-120"/>
-              </a:rPr>
-              <a:t>THE BAR FOR LEAVING</a:t>
-            </a:r>
-            <a:endParaRPr lang="en-US" sz="1050" dirty="0"/>
-          </a:p>
-        </p:txBody>
-      </p:sp>
-      <p:sp>
-        <p:nvSpPr>
-          <p:cNvPr id="7" name="Text 5"/>
-          <p:cNvSpPr/>
-          <p:nvPr/>
-        </p:nvSpPr>
-        <p:spPr>
-          <a:xfrm>
-            <a:off x="5742432" y="2103120"/>
-            <a:ext cx="2596896" cy="1463040"/>
-          </a:xfrm>
-          <a:prstGeom prst="rect">
-            <a:avLst/>
-          </a:prstGeom>
-          <a:noFill/>
-          <a:ln/>
-        </p:spPr>
-        <p:txBody>
-          <a:bodyPr wrap="square" lIns="0" tIns="0" rIns="0" bIns="0" rtlCol="0" anchor="t"/>
-          <a:lstStyle/>
-          <a:p>
-            <a:pPr indent="0" marL="0">
-              <a:buNone/>
-            </a:pPr>
-            <a:r>
-              <a:rPr lang="en-US" sz="1550" dirty="0">
-                <a:solidFill>
-                  <a:srgbClr val="191919"/>
-                </a:solidFill>
-                <a:latin typeface="Georgia" pitchFamily="34" charset="0"/>
-                <a:ea typeface="Georgia" pitchFamily="34" charset="-122"/>
-                <a:cs typeface="Georgia" pitchFamily="34" charset="-120"/>
-              </a:rPr>
-              <a:t>Everyone has personally authored a rule and watched it block.</a:t>
-            </a:r>
-            <a:endParaRPr lang="en-US" sz="1550" dirty="0"/>
-          </a:p>
-        </p:txBody>
-      </p:sp>
-      <p:sp>
-        <p:nvSpPr>
-          <p:cNvPr id="8" name="Text 6"/>
+              <a:t>Same input, same block, every run. The audit file shows attempts next to outcomes.</a:t>
+            </a:r>
+            <a:endParaRPr lang="en-US" sz="1300" dirty="0"/>
+          </a:p>
+        </p:txBody>
+      </p:sp>
+      <p:sp>
+        <p:nvSpPr>
+          <p:cNvPr id="11" name="Text 9"/>
           <p:cNvSpPr/>
           <p:nvPr/>
         </p:nvSpPr>
@@ -3666,7 +3631,7 @@
             <a:r>
               <a:rPr lang="en-US" sz="900" dirty="0">
                 <a:solidFill>
-                  <a:srgbClr val="6B6B66"/>
+                  <a:srgbClr val="888780"/>
                 </a:solidFill>
                 <a:latin typeface="Arial" pitchFamily="34" charset="0"/>
                 <a:ea typeface="Arial" pitchFamily="34" charset="-122"/>
@@ -3718,10 +3683,70 @@
         </p:nvSpPr>
         <p:spPr>
           <a:xfrm>
-            <a:off x="548640" y="457200"/>
-            <a:ext cx="457200" cy="25603"/>
-          </a:xfrm>
-          <a:prstGeom prst="rect">
+            <a:off x="548640" y="566928"/>
+            <a:ext cx="91440" cy="91440"/>
+          </a:xfrm>
+          <a:prstGeom prst="ellipse">
+            <a:avLst/>
+          </a:prstGeom>
+          <a:solidFill>
+            <a:srgbClr val="D3D1C7"/>
+          </a:solidFill>
+          <a:ln/>
+        </p:spPr>
+      </p:sp>
+      <p:sp>
+        <p:nvSpPr>
+          <p:cNvPr id="3" name="Shape 1"/>
+          <p:cNvSpPr/>
+          <p:nvPr/>
+        </p:nvSpPr>
+        <p:spPr>
+          <a:xfrm>
+            <a:off x="749808" y="566928"/>
+            <a:ext cx="91440" cy="91440"/>
+          </a:xfrm>
+          <a:prstGeom prst="ellipse">
+            <a:avLst/>
+          </a:prstGeom>
+          <a:solidFill>
+            <a:srgbClr val="D3D1C7"/>
+          </a:solidFill>
+          <a:ln/>
+        </p:spPr>
+      </p:sp>
+      <p:sp>
+        <p:nvSpPr>
+          <p:cNvPr id="4" name="Shape 2"/>
+          <p:cNvSpPr/>
+          <p:nvPr/>
+        </p:nvSpPr>
+        <p:spPr>
+          <a:xfrm>
+            <a:off x="950976" y="566928"/>
+            <a:ext cx="91440" cy="91440"/>
+          </a:xfrm>
+          <a:prstGeom prst="ellipse">
+            <a:avLst/>
+          </a:prstGeom>
+          <a:solidFill>
+            <a:srgbClr val="D3D1C7"/>
+          </a:solidFill>
+          <a:ln/>
+        </p:spPr>
+      </p:sp>
+      <p:sp>
+        <p:nvSpPr>
+          <p:cNvPr id="5" name="Shape 3"/>
+          <p:cNvSpPr/>
+          <p:nvPr/>
+        </p:nvSpPr>
+        <p:spPr>
+          <a:xfrm>
+            <a:off x="1152144" y="566928"/>
+            <a:ext cx="91440" cy="91440"/>
+          </a:xfrm>
+          <a:prstGeom prst="ellipse">
             <a:avLst/>
           </a:prstGeom>
           <a:solidFill>
@@ -3732,30 +3757,69 @@
       </p:sp>
       <p:sp>
         <p:nvSpPr>
-          <p:cNvPr id="3" name="Text 1"/>
-          <p:cNvSpPr/>
-          <p:nvPr/>
-        </p:nvSpPr>
-        <p:spPr>
-          <a:xfrm>
-            <a:off x="548640" y="566928"/>
-            <a:ext cx="8046720" cy="685800"/>
-          </a:xfrm>
-          <a:prstGeom prst="rect">
-            <a:avLst/>
-          </a:prstGeom>
-          <a:noFill/>
-          <a:ln/>
-        </p:spPr>
-        <p:txBody>
-          <a:bodyPr wrap="square" lIns="0" tIns="0" rIns="0" bIns="0" rtlCol="0" anchor="t"/>
-          <a:lstStyle/>
-          <a:p>
-            <a:pPr algn="l" indent="0" marL="0">
-              <a:buNone/>
-            </a:pPr>
-            <a:r>
-              <a:rPr lang="en-US" sz="2600" dirty="0">
+          <p:cNvPr id="6" name="Text 4"/>
+          <p:cNvSpPr/>
+          <p:nvPr/>
+        </p:nvSpPr>
+        <p:spPr>
+          <a:xfrm>
+            <a:off x="1554480" y="502920"/>
+            <a:ext cx="4572000" cy="256032"/>
+          </a:xfrm>
+          <a:prstGeom prst="rect">
+            <a:avLst/>
+          </a:prstGeom>
+          <a:noFill/>
+          <a:ln/>
+        </p:spPr>
+        <p:txBody>
+          <a:bodyPr wrap="square" lIns="0" tIns="0" rIns="0" bIns="0" rtlCol="0" anchor="ctr"/>
+          <a:lstStyle/>
+          <a:p>
+            <a:pPr indent="0" marL="0">
+              <a:buNone/>
+            </a:pPr>
+            <a:r>
+              <a:rPr lang="en-US" sz="1050" b="1" spc="300" kern="0" dirty="0">
+                <a:solidFill>
+                  <a:srgbClr val="CC785C"/>
+                </a:solidFill>
+                <a:latin typeface="Arial" pitchFamily="34" charset="0"/>
+                <a:ea typeface="Arial" pitchFamily="34" charset="-122"/>
+                <a:cs typeface="Arial" pitchFamily="34" charset="-120"/>
+              </a:rPr>
+              <a:t>LIVE · BEAT FOUR</a:t>
+            </a:r>
+            <a:endParaRPr lang="en-US" sz="1050" dirty="0"/>
+          </a:p>
+        </p:txBody>
+      </p:sp>
+      <p:sp>
+        <p:nvSpPr>
+          <p:cNvPr id="7" name="Text 5"/>
+          <p:cNvSpPr/>
+          <p:nvPr/>
+        </p:nvSpPr>
+        <p:spPr>
+          <a:xfrm>
+            <a:off x="548640" y="960120"/>
+            <a:ext cx="8046720" cy="640080"/>
+          </a:xfrm>
+          <a:prstGeom prst="rect">
+            <a:avLst/>
+          </a:prstGeom>
+          <a:noFill/>
+          <a:ln/>
+        </p:spPr>
+        <p:txBody>
+          <a:bodyPr wrap="square" lIns="0" tIns="0" rIns="0" bIns="0" rtlCol="0" anchor="ctr"/>
+          <a:lstStyle/>
+          <a:p>
+            <a:pPr indent="0" marL="0">
+              <a:buNone/>
+            </a:pPr>
+            <a:r>
+              <a:rPr lang="en-US" sz="2800" dirty="0">
                 <a:solidFill>
                   <a:srgbClr val="191919"/>
                 </a:solidFill>
@@ -3763,149 +3827,9 @@
                 <a:ea typeface="Georgia" pitchFamily="34" charset="-122"/>
                 <a:cs typeface="Georgia" pitchFamily="34" charset="-120"/>
               </a:rPr>
-              <a:t>Make it yours.</a:t>
-            </a:r>
-            <a:endParaRPr lang="en-US" sz="2600" dirty="0"/>
-          </a:p>
-        </p:txBody>
-      </p:sp>
-      <p:sp>
-        <p:nvSpPr>
-          <p:cNvPr id="4" name="Text 2"/>
-          <p:cNvSpPr/>
-          <p:nvPr/>
-        </p:nvSpPr>
-        <p:spPr>
-          <a:xfrm>
-            <a:off x="548640" y="1463040"/>
-            <a:ext cx="411480" cy="457200"/>
-          </a:xfrm>
-          <a:prstGeom prst="rect">
-            <a:avLst/>
-          </a:prstGeom>
-          <a:noFill/>
-          <a:ln/>
-        </p:spPr>
-        <p:txBody>
-          <a:bodyPr wrap="square" lIns="0" tIns="0" rIns="0" bIns="0" rtlCol="0" anchor="ctr"/>
-          <a:lstStyle/>
-          <a:p>
-            <a:pPr indent="0" marL="0">
-              <a:buNone/>
-            </a:pPr>
-            <a:r>
-              <a:rPr lang="en-US" sz="1900" dirty="0">
-                <a:solidFill>
-                  <a:srgbClr val="CC785C"/>
-                </a:solidFill>
-                <a:latin typeface="Georgia" pitchFamily="34" charset="0"/>
-                <a:ea typeface="Georgia" pitchFamily="34" charset="-122"/>
-                <a:cs typeface="Georgia" pitchFamily="34" charset="-120"/>
-              </a:rPr>
-              <a:t>1</a:t>
-            </a:r>
-            <a:endParaRPr lang="en-US" sz="1900" dirty="0"/>
-          </a:p>
-        </p:txBody>
-      </p:sp>
-      <p:sp>
-        <p:nvSpPr>
-          <p:cNvPr id="5" name="Text 3"/>
-          <p:cNvSpPr/>
-          <p:nvPr/>
-        </p:nvSpPr>
-        <p:spPr>
-          <a:xfrm>
-            <a:off x="1051560" y="1481328"/>
-            <a:ext cx="6858000" cy="457200"/>
-          </a:xfrm>
-          <a:prstGeom prst="rect">
-            <a:avLst/>
-          </a:prstGeom>
-          <a:noFill/>
-          <a:ln/>
-        </p:spPr>
-        <p:txBody>
-          <a:bodyPr wrap="square" lIns="0" tIns="0" rIns="0" bIns="0" rtlCol="0" anchor="ctr"/>
-          <a:lstStyle/>
-          <a:p>
-            <a:pPr indent="0" marL="0">
-              <a:buNone/>
-            </a:pPr>
-            <a:r>
-              <a:rPr lang="en-US" sz="1700" dirty="0">
-                <a:solidFill>
-                  <a:srgbClr val="191919"/>
-                </a:solidFill>
-                <a:latin typeface="Georgia" pitchFamily="34" charset="0"/>
-                <a:ea typeface="Georgia" pitchFamily="34" charset="-122"/>
-                <a:cs typeface="Georgia" pitchFamily="34" charset="-120"/>
-              </a:rPr>
-              <a:t>Who owns tooling standards</a:t>
-            </a:r>
-            <a:endParaRPr lang="en-US" sz="1700" dirty="0"/>
-          </a:p>
-        </p:txBody>
-      </p:sp>
-      <p:sp>
-        <p:nvSpPr>
-          <p:cNvPr id="6" name="Shape 4"/>
-          <p:cNvSpPr/>
-          <p:nvPr/>
-        </p:nvSpPr>
-        <p:spPr>
-          <a:xfrm>
-            <a:off x="548640" y="2029968"/>
-            <a:ext cx="7589520" cy="0"/>
-          </a:xfrm>
-          <a:prstGeom prst="line">
-            <a:avLst/>
-          </a:prstGeom>
-          <a:noFill/>
-          <a:ln w="19050">
-            <a:solidFill>
-              <a:srgbClr val="F0EEE6"/>
-            </a:solidFill>
-            <a:prstDash val="solid"/>
-          </a:ln>
-        </p:spPr>
-      </p:sp>
-      <p:sp>
-        <p:nvSpPr>
-          <p:cNvPr id="7" name="Text 5"/>
-          <p:cNvSpPr/>
-          <p:nvPr/>
-        </p:nvSpPr>
-        <p:spPr>
-          <a:xfrm>
-            <a:off x="548640" y="2176272"/>
-            <a:ext cx="411480" cy="457200"/>
-          </a:xfrm>
-          <a:prstGeom prst="rect">
-            <a:avLst/>
-          </a:prstGeom>
-          <a:noFill/>
-          <a:ln/>
-        </p:spPr>
-        <p:txBody>
-          <a:bodyPr wrap="square" lIns="0" tIns="0" rIns="0" bIns="0" rtlCol="0" anchor="ctr"/>
-          <a:lstStyle/>
-          <a:p>
-            <a:pPr indent="0" marL="0">
-              <a:buNone/>
-            </a:pPr>
-            <a:r>
-              <a:rPr lang="en-US" sz="1900" dirty="0">
-                <a:solidFill>
-                  <a:srgbClr val="CC785C"/>
-                </a:solidFill>
-                <a:latin typeface="Georgia" pitchFamily="34" charset="0"/>
-                <a:ea typeface="Georgia" pitchFamily="34" charset="-122"/>
-                <a:cs typeface="Georgia" pitchFamily="34" charset="-120"/>
-              </a:rPr>
-              <a:t>2</a:t>
-            </a:r>
-            <a:endParaRPr lang="en-US" sz="1900" dirty="0"/>
+              <a:t>Your rule. Law in 90 seconds.</a:t>
+            </a:r>
+            <a:endParaRPr lang="en-US" sz="2800" dirty="0"/>
           </a:p>
         </p:txBody>
       </p:sp>
@@ -3917,164 +3841,24 @@
         </p:nvSpPr>
         <p:spPr>
           <a:xfrm>
-            <a:off x="1051560" y="2194560"/>
-            <a:ext cx="6858000" cy="457200"/>
-          </a:xfrm>
-          <a:prstGeom prst="rect">
-            <a:avLst/>
-          </a:prstGeom>
-          <a:noFill/>
-          <a:ln/>
-        </p:spPr>
-        <p:txBody>
-          <a:bodyPr wrap="square" lIns="0" tIns="0" rIns="0" bIns="0" rtlCol="0" anchor="ctr"/>
-          <a:lstStyle/>
-          <a:p>
-            <a:pPr indent="0" marL="0">
-              <a:buNone/>
-            </a:pPr>
-            <a:r>
-              <a:rPr lang="en-US" sz="1700" dirty="0">
-                <a:solidFill>
-                  <a:srgbClr val="191919"/>
-                </a:solidFill>
-                <a:latin typeface="Georgia" pitchFamily="34" charset="0"/>
-                <a:ea typeface="Georgia" pitchFamily="34" charset="-122"/>
-                <a:cs typeface="Georgia" pitchFamily="34" charset="-120"/>
-              </a:rPr>
-              <a:t>What's your agent audit story</a:t>
-            </a:r>
-            <a:endParaRPr lang="en-US" sz="1700" dirty="0"/>
-          </a:p>
-        </p:txBody>
-      </p:sp>
-      <p:sp>
-        <p:nvSpPr>
-          <p:cNvPr id="9" name="Shape 7"/>
-          <p:cNvSpPr/>
-          <p:nvPr/>
-        </p:nvSpPr>
-        <p:spPr>
-          <a:xfrm>
-            <a:off x="548640" y="2743200"/>
-            <a:ext cx="7589520" cy="0"/>
-          </a:xfrm>
-          <a:prstGeom prst="line">
-            <a:avLst/>
-          </a:prstGeom>
-          <a:noFill/>
-          <a:ln w="19050">
-            <a:solidFill>
-              <a:srgbClr val="F0EEE6"/>
-            </a:solidFill>
-            <a:prstDash val="solid"/>
-          </a:ln>
-        </p:spPr>
-      </p:sp>
-      <p:sp>
-        <p:nvSpPr>
-          <p:cNvPr id="10" name="Text 8"/>
-          <p:cNvSpPr/>
-          <p:nvPr/>
-        </p:nvSpPr>
-        <p:spPr>
-          <a:xfrm>
-            <a:off x="548640" y="2889504"/>
-            <a:ext cx="411480" cy="457200"/>
-          </a:xfrm>
-          <a:prstGeom prst="rect">
-            <a:avLst/>
-          </a:prstGeom>
-          <a:noFill/>
-          <a:ln/>
-        </p:spPr>
-        <p:txBody>
-          <a:bodyPr wrap="square" lIns="0" tIns="0" rIns="0" bIns="0" rtlCol="0" anchor="ctr"/>
-          <a:lstStyle/>
-          <a:p>
-            <a:pPr indent="0" marL="0">
-              <a:buNone/>
-            </a:pPr>
-            <a:r>
-              <a:rPr lang="en-US" sz="1900" dirty="0">
-                <a:solidFill>
-                  <a:srgbClr val="CC785C"/>
-                </a:solidFill>
-                <a:latin typeface="Georgia" pitchFamily="34" charset="0"/>
-                <a:ea typeface="Georgia" pitchFamily="34" charset="-122"/>
-                <a:cs typeface="Georgia" pitchFamily="34" charset="-120"/>
-              </a:rPr>
-              <a:t>3</a:t>
-            </a:r>
-            <a:endParaRPr lang="en-US" sz="1900" dirty="0"/>
-          </a:p>
-        </p:txBody>
-      </p:sp>
-      <p:sp>
-        <p:nvSpPr>
-          <p:cNvPr id="11" name="Text 9"/>
-          <p:cNvSpPr/>
-          <p:nvPr/>
-        </p:nvSpPr>
-        <p:spPr>
-          <a:xfrm>
-            <a:off x="1051560" y="2907792"/>
-            <a:ext cx="6858000" cy="457200"/>
-          </a:xfrm>
-          <a:prstGeom prst="rect">
-            <a:avLst/>
-          </a:prstGeom>
-          <a:noFill/>
-          <a:ln/>
-        </p:spPr>
-        <p:txBody>
-          <a:bodyPr wrap="square" lIns="0" tIns="0" rIns="0" bIns="0" rtlCol="0" anchor="ctr"/>
-          <a:lstStyle/>
-          <a:p>
-            <a:pPr indent="0" marL="0">
-              <a:buNone/>
-            </a:pPr>
-            <a:r>
-              <a:rPr lang="en-US" sz="1700" dirty="0">
-                <a:solidFill>
-                  <a:srgbClr val="191919"/>
-                </a:solidFill>
-                <a:latin typeface="Georgia" pitchFamily="34" charset="0"/>
-                <a:ea typeface="Georgia" pitchFamily="34" charset="-122"/>
-                <a:cs typeface="Georgia" pitchFamily="34" charset="-120"/>
-              </a:rPr>
-              <a:t>What command should an agent never run here</a:t>
-            </a:r>
-            <a:endParaRPr lang="en-US" sz="1700" dirty="0"/>
-          </a:p>
-        </p:txBody>
-      </p:sp>
-      <p:sp>
-        <p:nvSpPr>
-          <p:cNvPr id="12" name="Text 10"/>
-          <p:cNvSpPr/>
-          <p:nvPr/>
-        </p:nvSpPr>
-        <p:spPr>
-          <a:xfrm>
-            <a:off x="548640" y="3977640"/>
-            <a:ext cx="2743200" cy="274320"/>
-          </a:xfrm>
-          <a:prstGeom prst="rect">
-            <a:avLst/>
-          </a:prstGeom>
-          <a:noFill/>
-          <a:ln/>
-        </p:spPr>
-        <p:txBody>
-          <a:bodyPr wrap="square" lIns="0" tIns="0" rIns="0" bIns="0" rtlCol="0" anchor="ctr"/>
-          <a:lstStyle/>
-          <a:p>
-            <a:pPr algn="l" indent="0" marL="0">
-              <a:buNone/>
-            </a:pPr>
-            <a:r>
-              <a:rPr lang="en-US" sz="1050" b="1" spc="300" kern="0" dirty="0">
+            <a:off x="548640" y="1691640"/>
+            <a:ext cx="7680960" cy="548640"/>
+          </a:xfrm>
+          <a:prstGeom prst="rect">
+            <a:avLst/>
+          </a:prstGeom>
+          <a:noFill/>
+          <a:ln/>
+        </p:spPr>
+        <p:txBody>
+          <a:bodyPr wrap="square" lIns="0" tIns="0" rIns="0" bIns="0" rtlCol="0" anchor="t"/>
+          <a:lstStyle/>
+          <a:p>
+            <a:pPr indent="0" marL="0">
+              <a:buNone/>
+            </a:pPr>
+            <a:r>
+              <a:rPr lang="en-US" sz="1300" dirty="0">
                 <a:solidFill>
                   <a:srgbClr val="6B6B66"/>
                 </a:solidFill>
@@ -4082,22 +3866,146 @@
                 <a:ea typeface="Arial" pitchFamily="34" charset="-122"/>
                 <a:cs typeface="Arial" pitchFamily="34" charset="-120"/>
               </a:rPr>
-              <a:t>THE NEXT STEP</a:t>
-            </a:r>
-            <a:endParaRPr lang="en-US" sz="1050" dirty="0"/>
-          </a:p>
-        </p:txBody>
-      </p:sp>
-      <p:sp>
-        <p:nvSpPr>
-          <p:cNvPr id="13" name="Text 11"/>
-          <p:cNvSpPr/>
-          <p:nvPr/>
-        </p:nvSpPr>
-        <p:spPr>
-          <a:xfrm>
-            <a:off x="548640" y="4279392"/>
-            <a:ext cx="7589520" cy="411480"/>
+              <a:t>Name a command an agent should never run here. It ships to the whole fleet before this slide changes.</a:t>
+            </a:r>
+            <a:endParaRPr lang="en-US" sz="1300" dirty="0"/>
+          </a:p>
+        </p:txBody>
+      </p:sp>
+      <p:sp>
+        <p:nvSpPr>
+          <p:cNvPr id="9" name="Shape 7"/>
+          <p:cNvSpPr/>
+          <p:nvPr/>
+        </p:nvSpPr>
+        <p:spPr>
+          <a:xfrm>
+            <a:off x="548640" y="2377440"/>
+            <a:ext cx="8046720" cy="1325880"/>
+          </a:xfrm>
+          <a:prstGeom prst="roundRect">
+            <a:avLst>
+              <a:gd name="adj" fmla="val 4828"/>
+            </a:avLst>
+          </a:prstGeom>
+          <a:solidFill>
+            <a:srgbClr val="191919"/>
+          </a:solidFill>
+          <a:ln/>
+        </p:spPr>
+      </p:sp>
+      <p:sp>
+        <p:nvSpPr>
+          <p:cNvPr id="10" name="Text 8"/>
+          <p:cNvSpPr/>
+          <p:nvPr/>
+        </p:nvSpPr>
+        <p:spPr>
+          <a:xfrm>
+            <a:off x="804672" y="2523744"/>
+            <a:ext cx="7534656" cy="1033272"/>
+          </a:xfrm>
+          <a:prstGeom prst="rect">
+            <a:avLst/>
+          </a:prstGeom>
+          <a:noFill/>
+          <a:ln/>
+        </p:spPr>
+        <p:txBody>
+          <a:bodyPr wrap="square" lIns="0" tIns="0" rIns="0" bIns="0" rtlCol="0" anchor="t"/>
+          <a:lstStyle/>
+          <a:p>
+            <a:pPr indent="0" marL="0">
+              <a:spcAft>
+                <a:spcPts val="500"/>
+              </a:spcAft>
+              <a:buNone/>
+            </a:pPr>
+            <a:r>
+              <a:rPr lang="en-US" sz="1150" dirty="0">
+                <a:solidFill>
+                  <a:srgbClr val="F0EEE6"/>
+                </a:solidFill>
+                <a:latin typeface="Consolas" pitchFamily="34" charset="0"/>
+                <a:ea typeface="Consolas" pitchFamily="34" charset="-122"/>
+                <a:cs typeface="Consolas" pitchFamily="34" charset="-120"/>
+              </a:rPr>
+              <a:t>$ node tests/try.js "terraform apply"</a:t>
+            </a:r>
+            <a:endParaRPr lang="en-US" sz="1150" dirty="0"/>
+          </a:p>
+          <a:p>
+            <a:pPr indent="0" marL="0">
+              <a:spcAft>
+                <a:spcPts val="500"/>
+              </a:spcAft>
+              <a:buNone/>
+            </a:pPr>
+            <a:r>
+              <a:rPr lang="en-US" sz="1150" dirty="0">
+                <a:solidFill>
+                  <a:srgbClr val="CC785C"/>
+                </a:solidFill>
+                <a:latin typeface="Consolas" pitchFamily="34" charset="0"/>
+                <a:ea typeface="Consolas" pitchFamily="34" charset="-122"/>
+                <a:cs typeface="Consolas" pitchFamily="34" charset="-120"/>
+              </a:rPr>
+              <a:t>DENY [no-terraform-apply] Infra changes go through the CI pipeline.</a:t>
+            </a:r>
+            <a:endParaRPr lang="en-US" sz="1150" dirty="0"/>
+          </a:p>
+          <a:p>
+            <a:pPr indent="0" marL="0">
+              <a:spcAft>
+                <a:spcPts val="500"/>
+              </a:spcAft>
+              <a:buNone/>
+            </a:pPr>
+            <a:r>
+              <a:rPr lang="en-US" sz="1150" dirty="0">
+                <a:solidFill>
+                  <a:srgbClr val="F0EEE6"/>
+                </a:solidFill>
+                <a:latin typeface="Consolas" pitchFamily="34" charset="0"/>
+                <a:ea typeface="Consolas" pitchFamily="34" charset="-122"/>
+                <a:cs typeface="Consolas" pitchFamily="34" charset="-120"/>
+              </a:rPr>
+              <a:t>$ node tests/run_tests.js</a:t>
+            </a:r>
+            <a:endParaRPr lang="en-US" sz="1150" dirty="0"/>
+          </a:p>
+          <a:p>
+            <a:pPr indent="0" marL="0">
+              <a:spcAft>
+                <a:spcPts val="500"/>
+              </a:spcAft>
+              <a:buNone/>
+            </a:pPr>
+            <a:r>
+              <a:rPr lang="en-US" sz="1150" dirty="0">
+                <a:solidFill>
+                  <a:srgbClr val="D4A27F"/>
+                </a:solidFill>
+                <a:latin typeface="Consolas" pitchFamily="34" charset="0"/>
+                <a:ea typeface="Consolas" pitchFamily="34" charset="-122"/>
+                <a:cs typeface="Consolas" pitchFamily="34" charset="-120"/>
+              </a:rPr>
+              <a:t>22 passed, 0 failed</a:t>
+            </a:r>
+            <a:endParaRPr lang="en-US" sz="1150" dirty="0"/>
+          </a:p>
+        </p:txBody>
+      </p:sp>
+      <p:sp>
+        <p:nvSpPr>
+          <p:cNvPr id="11" name="Text 9"/>
+          <p:cNvSpPr/>
+          <p:nvPr/>
+        </p:nvSpPr>
+        <p:spPr>
+          <a:xfrm>
+            <a:off x="548640" y="3931920"/>
+            <a:ext cx="7863840" cy="365760"/>
           </a:xfrm>
           <a:prstGeom prst="rect">
             <a:avLst/>
@@ -4113,23 +4021,23 @@
               <a:buNone/>
             </a:pPr>
             <a:r>
-              <a:rPr lang="en-US" sz="1400" dirty="0">
-                <a:solidFill>
-                  <a:srgbClr val="191919"/>
+              <a:rPr lang="en-US" sz="1300" dirty="0">
+                <a:solidFill>
+                  <a:srgbClr val="6B6B66"/>
                 </a:solidFill>
                 <a:latin typeface="Arial" pitchFamily="34" charset="0"/>
                 <a:ea typeface="Arial" pitchFamily="34" charset="-122"/>
                 <a:cs typeface="Arial" pitchFamily="34" charset="-120"/>
               </a:rPr>
-              <a:t>Fork the repo, swap in your conventions, and ship your own policy gate inside two weeks.</a:t>
-            </a:r>
-            <a:endParaRPr lang="en-US" sz="1400" dirty="0"/>
-          </a:p>
-        </p:txBody>
-      </p:sp>
-      <p:sp>
-        <p:nvSpPr>
-          <p:cNvPr id="14" name="Text 12"/>
+              <a:t>Bump v1.0.0 to v1.0.1, push, and every engineer gets it.</a:t>
+            </a:r>
+            <a:endParaRPr lang="en-US" sz="1300" dirty="0"/>
+          </a:p>
+        </p:txBody>
+      </p:sp>
+      <p:sp>
+        <p:nvSpPr>
+          <p:cNvPr id="12" name="Text 10"/>
           <p:cNvSpPr/>
           <p:nvPr/>
         </p:nvSpPr>
@@ -4251,7 +4159,7 @@
                 <a:ea typeface="Georgia" pitchFamily="34" charset="-122"/>
                 <a:cs typeface="Georgia" pitchFamily="34" charset="-120"/>
               </a:rPr>
-              <a:t>Recap, then run it in your repo.</a:t>
+              <a:t>What just happened.</a:t>
             </a:r>
             <a:endParaRPr lang="en-US" sz="2600" dirty="0"/>
           </a:p>
@@ -4265,8 +4173,8 @@
         </p:nvSpPr>
         <p:spPr>
           <a:xfrm>
-            <a:off x="548640" y="1463040"/>
-            <a:ext cx="411480" cy="457200"/>
+            <a:off x="548640" y="1417320"/>
+            <a:ext cx="365760" cy="411480"/>
           </a:xfrm>
           <a:prstGeom prst="rect">
             <a:avLst/>
@@ -4282,30 +4190,381 @@
               <a:buNone/>
             </a:pPr>
             <a:r>
-              <a:rPr lang="en-US" sz="1800" dirty="0">
+              <a:rPr lang="en-US" sz="1400" dirty="0">
                 <a:solidFill>
                   <a:srgbClr val="CC785C"/>
+                </a:solidFill>
+                <a:latin typeface="Arial" pitchFamily="34" charset="0"/>
+                <a:ea typeface="Arial" pitchFamily="34" charset="-122"/>
+                <a:cs typeface="Arial" pitchFamily="34" charset="-120"/>
+              </a:rPr>
+              <a:t>✓</a:t>
+            </a:r>
+            <a:endParaRPr lang="en-US" sz="1400" dirty="0"/>
+          </a:p>
+        </p:txBody>
+      </p:sp>
+      <p:sp>
+        <p:nvSpPr>
+          <p:cNvPr id="5" name="Text 3"/>
+          <p:cNvSpPr/>
+          <p:nvPr/>
+        </p:nvSpPr>
+        <p:spPr>
+          <a:xfrm>
+            <a:off x="1005840" y="1389888"/>
+            <a:ext cx="7315200" cy="457200"/>
+          </a:xfrm>
+          <a:prstGeom prst="rect">
+            <a:avLst/>
+          </a:prstGeom>
+          <a:noFill/>
+          <a:ln/>
+        </p:spPr>
+        <p:txBody>
+          <a:bodyPr wrap="square" lIns="0" tIns="0" rIns="0" bIns="0" rtlCol="0" anchor="ctr"/>
+          <a:lstStyle/>
+          <a:p>
+            <a:pPr indent="0" marL="0">
+              <a:buNone/>
+            </a:pPr>
+            <a:r>
+              <a:rPr lang="en-US" sz="1450" dirty="0">
+                <a:solidFill>
+                  <a:srgbClr val="191919"/>
+                </a:solidFill>
+                <a:latin typeface="Arial" pitchFamily="34" charset="0"/>
+                <a:ea typeface="Arial" pitchFamily="34" charset="-122"/>
+                <a:cs typeface="Arial" pitchFamily="34" charset="-120"/>
+              </a:rPr>
+              <a:t>Installed in 90 seconds, identical everywhere</a:t>
+            </a:r>
+            <a:endParaRPr lang="en-US" sz="1450" dirty="0"/>
+          </a:p>
+        </p:txBody>
+      </p:sp>
+      <p:sp>
+        <p:nvSpPr>
+          <p:cNvPr id="6" name="Text 4"/>
+          <p:cNvSpPr/>
+          <p:nvPr/>
+        </p:nvSpPr>
+        <p:spPr>
+          <a:xfrm>
+            <a:off x="548640" y="1984248"/>
+            <a:ext cx="365760" cy="411480"/>
+          </a:xfrm>
+          <a:prstGeom prst="rect">
+            <a:avLst/>
+          </a:prstGeom>
+          <a:noFill/>
+          <a:ln/>
+        </p:spPr>
+        <p:txBody>
+          <a:bodyPr wrap="square" lIns="0" tIns="0" rIns="0" bIns="0" rtlCol="0" anchor="ctr"/>
+          <a:lstStyle/>
+          <a:p>
+            <a:pPr indent="0" marL="0">
+              <a:buNone/>
+            </a:pPr>
+            <a:r>
+              <a:rPr lang="en-US" sz="1400" dirty="0">
+                <a:solidFill>
+                  <a:srgbClr val="CC785C"/>
+                </a:solidFill>
+                <a:latin typeface="Arial" pitchFamily="34" charset="0"/>
+                <a:ea typeface="Arial" pitchFamily="34" charset="-122"/>
+                <a:cs typeface="Arial" pitchFamily="34" charset="-120"/>
+              </a:rPr>
+              <a:t>✓</a:t>
+            </a:r>
+            <a:endParaRPr lang="en-US" sz="1400" dirty="0"/>
+          </a:p>
+        </p:txBody>
+      </p:sp>
+      <p:sp>
+        <p:nvSpPr>
+          <p:cNvPr id="7" name="Text 5"/>
+          <p:cNvSpPr/>
+          <p:nvPr/>
+        </p:nvSpPr>
+        <p:spPr>
+          <a:xfrm>
+            <a:off x="1005840" y="1956816"/>
+            <a:ext cx="7315200" cy="457200"/>
+          </a:xfrm>
+          <a:prstGeom prst="rect">
+            <a:avLst/>
+          </a:prstGeom>
+          <a:noFill/>
+          <a:ln/>
+        </p:spPr>
+        <p:txBody>
+          <a:bodyPr wrap="square" lIns="0" tIns="0" rIns="0" bIns="0" rtlCol="0" anchor="ctr"/>
+          <a:lstStyle/>
+          <a:p>
+            <a:pPr indent="0" marL="0">
+              <a:buNone/>
+            </a:pPr>
+            <a:r>
+              <a:rPr lang="en-US" sz="1450" dirty="0">
+                <a:solidFill>
+                  <a:srgbClr val="191919"/>
+                </a:solidFill>
+                <a:latin typeface="Arial" pitchFamily="34" charset="0"/>
+                <a:ea typeface="Arial" pitchFamily="34" charset="-122"/>
+                <a:cs typeface="Arial" pitchFamily="34" charset="-120"/>
+              </a:rPr>
+              <a:t>A revenue bug caught by your written rules</a:t>
+            </a:r>
+            <a:endParaRPr lang="en-US" sz="1450" dirty="0"/>
+          </a:p>
+        </p:txBody>
+      </p:sp>
+      <p:sp>
+        <p:nvSpPr>
+          <p:cNvPr id="8" name="Text 6"/>
+          <p:cNvSpPr/>
+          <p:nvPr/>
+        </p:nvSpPr>
+        <p:spPr>
+          <a:xfrm>
+            <a:off x="548640" y="2551176"/>
+            <a:ext cx="365760" cy="411480"/>
+          </a:xfrm>
+          <a:prstGeom prst="rect">
+            <a:avLst/>
+          </a:prstGeom>
+          <a:noFill/>
+          <a:ln/>
+        </p:spPr>
+        <p:txBody>
+          <a:bodyPr wrap="square" lIns="0" tIns="0" rIns="0" bIns="0" rtlCol="0" anchor="ctr"/>
+          <a:lstStyle/>
+          <a:p>
+            <a:pPr indent="0" marL="0">
+              <a:buNone/>
+            </a:pPr>
+            <a:r>
+              <a:rPr lang="en-US" sz="1400" dirty="0">
+                <a:solidFill>
+                  <a:srgbClr val="CC785C"/>
+                </a:solidFill>
+                <a:latin typeface="Arial" pitchFamily="34" charset="0"/>
+                <a:ea typeface="Arial" pitchFamily="34" charset="-122"/>
+                <a:cs typeface="Arial" pitchFamily="34" charset="-120"/>
+              </a:rPr>
+              <a:t>✓</a:t>
+            </a:r>
+            <a:endParaRPr lang="en-US" sz="1400" dirty="0"/>
+          </a:p>
+        </p:txBody>
+      </p:sp>
+      <p:sp>
+        <p:nvSpPr>
+          <p:cNvPr id="9" name="Text 7"/>
+          <p:cNvSpPr/>
+          <p:nvPr/>
+        </p:nvSpPr>
+        <p:spPr>
+          <a:xfrm>
+            <a:off x="1005840" y="2523744"/>
+            <a:ext cx="7315200" cy="457200"/>
+          </a:xfrm>
+          <a:prstGeom prst="rect">
+            <a:avLst/>
+          </a:prstGeom>
+          <a:noFill/>
+          <a:ln/>
+        </p:spPr>
+        <p:txBody>
+          <a:bodyPr wrap="square" lIns="0" tIns="0" rIns="0" bIns="0" rtlCol="0" anchor="ctr"/>
+          <a:lstStyle/>
+          <a:p>
+            <a:pPr indent="0" marL="0">
+              <a:buNone/>
+            </a:pPr>
+            <a:r>
+              <a:rPr lang="en-US" sz="1450" dirty="0">
+                <a:solidFill>
+                  <a:srgbClr val="191919"/>
+                </a:solidFill>
+                <a:latin typeface="Arial" pitchFamily="34" charset="0"/>
+                <a:ea typeface="Arial" pitchFamily="34" charset="-122"/>
+                <a:cs typeface="Arial" pitchFamily="34" charset="-120"/>
+              </a:rPr>
+              <a:t>A prod write denied by a process, with a receipt</a:t>
+            </a:r>
+            <a:endParaRPr lang="en-US" sz="1450" dirty="0"/>
+          </a:p>
+        </p:txBody>
+      </p:sp>
+      <p:sp>
+        <p:nvSpPr>
+          <p:cNvPr id="10" name="Text 8"/>
+          <p:cNvSpPr/>
+          <p:nvPr/>
+        </p:nvSpPr>
+        <p:spPr>
+          <a:xfrm>
+            <a:off x="548640" y="3118104"/>
+            <a:ext cx="365760" cy="411480"/>
+          </a:xfrm>
+          <a:prstGeom prst="rect">
+            <a:avLst/>
+          </a:prstGeom>
+          <a:noFill/>
+          <a:ln/>
+        </p:spPr>
+        <p:txBody>
+          <a:bodyPr wrap="square" lIns="0" tIns="0" rIns="0" bIns="0" rtlCol="0" anchor="ctr"/>
+          <a:lstStyle/>
+          <a:p>
+            <a:pPr indent="0" marL="0">
+              <a:buNone/>
+            </a:pPr>
+            <a:r>
+              <a:rPr lang="en-US" sz="1400" dirty="0">
+                <a:solidFill>
+                  <a:srgbClr val="CC785C"/>
+                </a:solidFill>
+                <a:latin typeface="Arial" pitchFamily="34" charset="0"/>
+                <a:ea typeface="Arial" pitchFamily="34" charset="-122"/>
+                <a:cs typeface="Arial" pitchFamily="34" charset="-120"/>
+              </a:rPr>
+              <a:t>✓</a:t>
+            </a:r>
+            <a:endParaRPr lang="en-US" sz="1400" dirty="0"/>
+          </a:p>
+        </p:txBody>
+      </p:sp>
+      <p:sp>
+        <p:nvSpPr>
+          <p:cNvPr id="11" name="Text 9"/>
+          <p:cNvSpPr/>
+          <p:nvPr/>
+        </p:nvSpPr>
+        <p:spPr>
+          <a:xfrm>
+            <a:off x="1005840" y="3090672"/>
+            <a:ext cx="7315200" cy="457200"/>
+          </a:xfrm>
+          <a:prstGeom prst="rect">
+            <a:avLst/>
+          </a:prstGeom>
+          <a:noFill/>
+          <a:ln/>
+        </p:spPr>
+        <p:txBody>
+          <a:bodyPr wrap="square" lIns="0" tIns="0" rIns="0" bIns="0" rtlCol="0" anchor="ctr"/>
+          <a:lstStyle/>
+          <a:p>
+            <a:pPr indent="0" marL="0">
+              <a:buNone/>
+            </a:pPr>
+            <a:r>
+              <a:rPr lang="en-US" sz="1450" dirty="0">
+                <a:solidFill>
+                  <a:srgbClr val="191919"/>
+                </a:solidFill>
+                <a:latin typeface="Arial" pitchFamily="34" charset="0"/>
+                <a:ea typeface="Arial" pitchFamily="34" charset="-122"/>
+                <a:cs typeface="Arial" pitchFamily="34" charset="-120"/>
+              </a:rPr>
+              <a:t>Your rule shipped to the fleet in one version bump</a:t>
+            </a:r>
+            <a:endParaRPr lang="en-US" sz="1450" dirty="0"/>
+          </a:p>
+        </p:txBody>
+      </p:sp>
+      <p:sp>
+        <p:nvSpPr>
+          <p:cNvPr id="12" name="Text 10"/>
+          <p:cNvSpPr/>
+          <p:nvPr/>
+        </p:nvSpPr>
+        <p:spPr>
+          <a:xfrm>
+            <a:off x="548640" y="3977640"/>
+            <a:ext cx="4572000" cy="256032"/>
+          </a:xfrm>
+          <a:prstGeom prst="rect">
+            <a:avLst/>
+          </a:prstGeom>
+          <a:noFill/>
+          <a:ln/>
+        </p:spPr>
+        <p:txBody>
+          <a:bodyPr wrap="square" lIns="0" tIns="0" rIns="0" bIns="0" rtlCol="0" anchor="ctr"/>
+          <a:lstStyle/>
+          <a:p>
+            <a:pPr indent="0" marL="0">
+              <a:buNone/>
+            </a:pPr>
+            <a:r>
+              <a:rPr lang="en-US" sz="1050" b="1" spc="300" kern="0" dirty="0">
+                <a:solidFill>
+                  <a:srgbClr val="6B6B66"/>
+                </a:solidFill>
+                <a:latin typeface="Arial" pitchFamily="34" charset="0"/>
+                <a:ea typeface="Arial" pitchFamily="34" charset="-122"/>
+                <a:cs typeface="Arial" pitchFamily="34" charset="-120"/>
+              </a:rPr>
+              <a:t>YOUR TURN</a:t>
+            </a:r>
+            <a:endParaRPr lang="en-US" sz="1050" dirty="0"/>
+          </a:p>
+        </p:txBody>
+      </p:sp>
+      <p:sp>
+        <p:nvSpPr>
+          <p:cNvPr id="13" name="Text 11"/>
+          <p:cNvSpPr/>
+          <p:nvPr/>
+        </p:nvSpPr>
+        <p:spPr>
+          <a:xfrm>
+            <a:off x="548640" y="4279392"/>
+            <a:ext cx="7863840" cy="411480"/>
+          </a:xfrm>
+          <a:prstGeom prst="rect">
+            <a:avLst/>
+          </a:prstGeom>
+          <a:noFill/>
+          <a:ln/>
+        </p:spPr>
+        <p:txBody>
+          <a:bodyPr wrap="square" lIns="0" tIns="0" rIns="0" bIns="0" rtlCol="0" anchor="ctr"/>
+          <a:lstStyle/>
+          <a:p>
+            <a:pPr indent="0" marL="0">
+              <a:buNone/>
+            </a:pPr>
+            <a:r>
+              <a:rPr lang="en-US" sz="1500" dirty="0">
+                <a:solidFill>
+                  <a:srgbClr val="191919"/>
                 </a:solidFill>
                 <a:latin typeface="Georgia" pitchFamily="34" charset="0"/>
                 <a:ea typeface="Georgia" pitchFamily="34" charset="-122"/>
                 <a:cs typeface="Georgia" pitchFamily="34" charset="-120"/>
               </a:rPr>
-              <a:t>1</a:t>
-            </a:r>
-            <a:endParaRPr lang="en-US" sz="1800" dirty="0"/>
-          </a:p>
-        </p:txBody>
-      </p:sp>
-      <p:sp>
-        <p:nvSpPr>
-          <p:cNvPr id="5" name="Text 3"/>
-          <p:cNvSpPr/>
-          <p:nvPr/>
-        </p:nvSpPr>
-        <p:spPr>
-          <a:xfrm>
-            <a:off x="1051560" y="1490472"/>
-            <a:ext cx="4206240" cy="548640"/>
+              <a:t>Author one rule from your clone and watch it block. That's the bar for leaving.</a:t>
+            </a:r>
+            <a:endParaRPr lang="en-US" sz="1500" dirty="0"/>
+          </a:p>
+        </p:txBody>
+      </p:sp>
+      <p:sp>
+        <p:nvSpPr>
+          <p:cNvPr id="14" name="Text 12"/>
+          <p:cNvSpPr/>
+          <p:nvPr/>
+        </p:nvSpPr>
+        <p:spPr>
+          <a:xfrm>
+            <a:off x="8458200" y="4759452"/>
+            <a:ext cx="320040" cy="274320"/>
           </a:xfrm>
           <a:prstGeom prst="rect">
             <a:avLst/>
@@ -4317,11 +4576,102 @@
           <a:bodyPr wrap="square" lIns="0" tIns="0" rIns="0" bIns="0" rtlCol="0" anchor="ctr"/>
           <a:lstStyle/>
           <a:p>
-            <a:pPr indent="0" marL="0">
-              <a:buNone/>
-            </a:pPr>
-            <a:r>
-              <a:rPr lang="en-US" sz="1500" dirty="0">
+            <a:pPr algn="r" indent="0" marL="0">
+              <a:buNone/>
+            </a:pPr>
+            <a:r>
+              <a:rPr lang="en-US" sz="900" dirty="0">
+                <a:solidFill>
+                  <a:srgbClr val="6B6B66"/>
+                </a:solidFill>
+                <a:latin typeface="Arial" pitchFamily="34" charset="0"/>
+                <a:ea typeface="Arial" pitchFamily="34" charset="-122"/>
+                <a:cs typeface="Arial" pitchFamily="34" charset="-120"/>
+              </a:rPr>
+              <a:t>14</a:t>
+            </a:r>
+            <a:endParaRPr lang="en-US" sz="900" dirty="0"/>
+          </a:p>
+        </p:txBody>
+      </p:sp>
+    </p:spTree>
+  </p:cSld>
+  <p:clrMapOvr>
+    <a:masterClrMapping/>
+  </p:clrMapOvr>
+</p:sld>
+</file>
+
+<file path=ppt/slides/slide15.xml><?xml version="1.0" encoding="utf-8"?>
+<p:sld xmlns:a="http://schemas.openxmlformats.org/drawingml/2006/main" xmlns:r="http://schemas.openxmlformats.org/officeDocument/2006/relationships" xmlns:p="http://schemas.openxmlformats.org/presentationml/2006/main">
+  <p:cSld name="Slide 15">
+    <p:bg>
+      <p:bgPr>
+        <a:solidFill>
+          <a:srgbClr val="FAF9F5"/>
+        </a:solidFill>
+      </p:bgPr>
+    </p:bg>
+    <p:spTree>
+      <p:nvGrpSpPr>
+        <p:cNvPr id="1" name=""/>
+        <p:cNvGrpSpPr/>
+        <p:nvPr/>
+      </p:nvGrpSpPr>
+      <p:grpSpPr>
+        <a:xfrm>
+          <a:off x="0" y="0"/>
+          <a:ext cx="0" cy="0"/>
+          <a:chOff x="0" y="0"/>
+          <a:chExt cx="0" cy="0"/>
+        </a:xfrm>
+      </p:grpSpPr>
+      <p:sp>
+        <p:nvSpPr>
+          <p:cNvPr id="2" name="Shape 0"/>
+          <p:cNvSpPr/>
+          <p:nvPr/>
+        </p:nvSpPr>
+        <p:spPr>
+          <a:xfrm>
+            <a:off x="548640" y="457200"/>
+            <a:ext cx="457200" cy="25603"/>
+          </a:xfrm>
+          <a:prstGeom prst="rect">
+            <a:avLst/>
+          </a:prstGeom>
+          <a:solidFill>
+            <a:srgbClr val="CC785C"/>
+          </a:solidFill>
+          <a:ln/>
+        </p:spPr>
+      </p:sp>
+      <p:sp>
+        <p:nvSpPr>
+          <p:cNvPr id="3" name="Text 1"/>
+          <p:cNvSpPr/>
+          <p:nvPr/>
+        </p:nvSpPr>
+        <p:spPr>
+          <a:xfrm>
+            <a:off x="548640" y="566928"/>
+            <a:ext cx="8046720" cy="685800"/>
+          </a:xfrm>
+          <a:prstGeom prst="rect">
+            <a:avLst/>
+          </a:prstGeom>
+          <a:noFill/>
+          <a:ln/>
+        </p:spPr>
+        <p:txBody>
+          <a:bodyPr wrap="square" lIns="0" tIns="0" rIns="0" bIns="0" rtlCol="0" anchor="t"/>
+          <a:lstStyle/>
+          <a:p>
+            <a:pPr algn="l" indent="0" marL="0">
+              <a:buNone/>
+            </a:pPr>
+            <a:r>
+              <a:rPr lang="en-US" sz="2600" dirty="0">
                 <a:solidFill>
                   <a:srgbClr val="191919"/>
                 </a:solidFill>
@@ -4329,21 +4679,21 @@
                 <a:ea typeface="Georgia" pitchFamily="34" charset="-122"/>
                 <a:cs typeface="Georgia" pitchFamily="34" charset="-120"/>
               </a:rPr>
-              <a:t>The plugin is the unit of rollout.</a:t>
-            </a:r>
-            <a:endParaRPr lang="en-US" sz="1500" dirty="0"/>
-          </a:p>
-        </p:txBody>
-      </p:sp>
-      <p:sp>
-        <p:nvSpPr>
-          <p:cNvPr id="6" name="Text 4"/>
-          <p:cNvSpPr/>
-          <p:nvPr/>
-        </p:nvSpPr>
-        <p:spPr>
-          <a:xfrm>
-            <a:off x="548640" y="2121408"/>
+              <a:t>Now it's your codebase.</a:t>
+            </a:r>
+            <a:endParaRPr lang="en-US" sz="2600" dirty="0"/>
+          </a:p>
+        </p:txBody>
+      </p:sp>
+      <p:sp>
+        <p:nvSpPr>
+          <p:cNvPr id="4" name="Text 2"/>
+          <p:cNvSpPr/>
+          <p:nvPr/>
+        </p:nvSpPr>
+        <p:spPr>
+          <a:xfrm>
+            <a:off x="548640" y="1417320"/>
             <a:ext cx="411480" cy="457200"/>
           </a:xfrm>
           <a:prstGeom prst="rect">
@@ -4360,7 +4710,7 @@
               <a:buNone/>
             </a:pPr>
             <a:r>
-              <a:rPr lang="en-US" sz="1800" dirty="0">
+              <a:rPr lang="en-US" sz="1900" dirty="0">
                 <a:solidFill>
                   <a:srgbClr val="CC785C"/>
                 </a:solidFill>
@@ -4368,22 +4718,22 @@
                 <a:ea typeface="Georgia" pitchFamily="34" charset="-122"/>
                 <a:cs typeface="Georgia" pitchFamily="34" charset="-120"/>
               </a:rPr>
-              <a:t>2</a:t>
-            </a:r>
-            <a:endParaRPr lang="en-US" sz="1800" dirty="0"/>
-          </a:p>
-        </p:txBody>
-      </p:sp>
-      <p:sp>
-        <p:nvSpPr>
-          <p:cNvPr id="7" name="Text 5"/>
-          <p:cNvSpPr/>
-          <p:nvPr/>
-        </p:nvSpPr>
-        <p:spPr>
-          <a:xfrm>
-            <a:off x="1051560" y="2148840"/>
-            <a:ext cx="4206240" cy="548640"/>
+              <a:t>1</a:t>
+            </a:r>
+            <a:endParaRPr lang="en-US" sz="1900" dirty="0"/>
+          </a:p>
+        </p:txBody>
+      </p:sp>
+      <p:sp>
+        <p:nvSpPr>
+          <p:cNvPr id="5" name="Text 3"/>
+          <p:cNvSpPr/>
+          <p:nvPr/>
+        </p:nvSpPr>
+        <p:spPr>
+          <a:xfrm>
+            <a:off x="1051560" y="1435608"/>
+            <a:ext cx="6858000" cy="457200"/>
           </a:xfrm>
           <a:prstGeom prst="rect">
             <a:avLst/>
@@ -4399,7 +4749,7 @@
               <a:buNone/>
             </a:pPr>
             <a:r>
-              <a:rPr lang="en-US" sz="1500" dirty="0">
+              <a:rPr lang="en-US" sz="1700" dirty="0">
                 <a:solidFill>
                   <a:srgbClr val="191919"/>
                 </a:solidFill>
@@ -4407,21 +4757,44 @@
                 <a:ea typeface="Georgia" pitchFamily="34" charset="-122"/>
                 <a:cs typeface="Georgia" pitchFamily="34" charset="-120"/>
               </a:rPr>
-              <a:t>An instruction can be ignored. A process gate can't.</a:t>
-            </a:r>
-            <a:endParaRPr lang="en-US" sz="1500" dirty="0"/>
-          </a:p>
-        </p:txBody>
-      </p:sp>
-      <p:sp>
-        <p:nvSpPr>
-          <p:cNvPr id="8" name="Text 6"/>
-          <p:cNvSpPr/>
-          <p:nvPr/>
-        </p:nvSpPr>
-        <p:spPr>
-          <a:xfrm>
-            <a:off x="548640" y="2779776"/>
+              <a:t>Who owns tooling standards</a:t>
+            </a:r>
+            <a:endParaRPr lang="en-US" sz="1700" dirty="0"/>
+          </a:p>
+        </p:txBody>
+      </p:sp>
+      <p:sp>
+        <p:nvSpPr>
+          <p:cNvPr id="6" name="Shape 4"/>
+          <p:cNvSpPr/>
+          <p:nvPr/>
+        </p:nvSpPr>
+        <p:spPr>
+          <a:xfrm>
+            <a:off x="548640" y="1984248"/>
+            <a:ext cx="8046720" cy="0"/>
+          </a:xfrm>
+          <a:prstGeom prst="line">
+            <a:avLst/>
+          </a:prstGeom>
+          <a:noFill/>
+          <a:ln w="19050">
+            <a:solidFill>
+              <a:srgbClr val="F0EEE6"/>
+            </a:solidFill>
+            <a:prstDash val="solid"/>
+          </a:ln>
+        </p:spPr>
+      </p:sp>
+      <p:sp>
+        <p:nvSpPr>
+          <p:cNvPr id="7" name="Text 5"/>
+          <p:cNvSpPr/>
+          <p:nvPr/>
+        </p:nvSpPr>
+        <p:spPr>
+          <a:xfrm>
+            <a:off x="548640" y="2130552"/>
             <a:ext cx="411480" cy="457200"/>
           </a:xfrm>
           <a:prstGeom prst="rect">
@@ -4438,7 +4811,7 @@
               <a:buNone/>
             </a:pPr>
             <a:r>
-              <a:rPr lang="en-US" sz="1800" dirty="0">
+              <a:rPr lang="en-US" sz="1900" dirty="0">
                 <a:solidFill>
                   <a:srgbClr val="CC785C"/>
                 </a:solidFill>
@@ -4446,22 +4819,22 @@
                 <a:ea typeface="Georgia" pitchFamily="34" charset="-122"/>
                 <a:cs typeface="Georgia" pitchFamily="34" charset="-120"/>
               </a:rPr>
-              <a:t>3</a:t>
-            </a:r>
-            <a:endParaRPr lang="en-US" sz="1800" dirty="0"/>
-          </a:p>
-        </p:txBody>
-      </p:sp>
-      <p:sp>
-        <p:nvSpPr>
-          <p:cNvPr id="9" name="Text 7"/>
-          <p:cNvSpPr/>
-          <p:nvPr/>
-        </p:nvSpPr>
-        <p:spPr>
-          <a:xfrm>
-            <a:off x="1051560" y="2807208"/>
-            <a:ext cx="4206240" cy="548640"/>
+              <a:t>2</a:t>
+            </a:r>
+            <a:endParaRPr lang="en-US" sz="1900" dirty="0"/>
+          </a:p>
+        </p:txBody>
+      </p:sp>
+      <p:sp>
+        <p:nvSpPr>
+          <p:cNvPr id="8" name="Text 6"/>
+          <p:cNvSpPr/>
+          <p:nvPr/>
+        </p:nvSpPr>
+        <p:spPr>
+          <a:xfrm>
+            <a:off x="1051560" y="2148840"/>
+            <a:ext cx="6858000" cy="457200"/>
           </a:xfrm>
           <a:prstGeom prst="rect">
             <a:avLst/>
@@ -4477,7 +4850,7 @@
               <a:buNone/>
             </a:pPr>
             <a:r>
-              <a:rPr lang="en-US" sz="1500" dirty="0">
+              <a:rPr lang="en-US" sz="1700" dirty="0">
                 <a:solidFill>
                   <a:srgbClr val="191919"/>
                 </a:solidFill>
@@ -4485,42 +4858,45 @@
                 <a:ea typeface="Georgia" pitchFamily="34" charset="-122"/>
                 <a:cs typeface="Georgia" pitchFamily="34" charset="-120"/>
               </a:rPr>
-              <a:t>Policy ships like software.</a:t>
-            </a:r>
-            <a:endParaRPr lang="en-US" sz="1500" dirty="0"/>
-          </a:p>
-        </p:txBody>
-      </p:sp>
-      <p:sp>
-        <p:nvSpPr>
-          <p:cNvPr id="10" name="Shape 8"/>
-          <p:cNvSpPr/>
-          <p:nvPr/>
-        </p:nvSpPr>
-        <p:spPr>
-          <a:xfrm>
-            <a:off x="5486400" y="1417320"/>
-            <a:ext cx="3108960" cy="2743200"/>
-          </a:xfrm>
-          <a:prstGeom prst="rect">
-            <a:avLst/>
-          </a:prstGeom>
-          <a:solidFill>
-            <a:srgbClr val="F0EEE6"/>
-          </a:solidFill>
-          <a:ln/>
-        </p:spPr>
-      </p:sp>
-      <p:sp>
-        <p:nvSpPr>
-          <p:cNvPr id="11" name="Text 9"/>
-          <p:cNvSpPr/>
-          <p:nvPr/>
-        </p:nvSpPr>
-        <p:spPr>
-          <a:xfrm>
-            <a:off x="5742432" y="1600200"/>
-            <a:ext cx="2596896" cy="320040"/>
+              <a:t>What's your agent audit story</a:t>
+            </a:r>
+            <a:endParaRPr lang="en-US" sz="1700" dirty="0"/>
+          </a:p>
+        </p:txBody>
+      </p:sp>
+      <p:sp>
+        <p:nvSpPr>
+          <p:cNvPr id="9" name="Shape 7"/>
+          <p:cNvSpPr/>
+          <p:nvPr/>
+        </p:nvSpPr>
+        <p:spPr>
+          <a:xfrm>
+            <a:off x="548640" y="2697480"/>
+            <a:ext cx="8046720" cy="0"/>
+          </a:xfrm>
+          <a:prstGeom prst="line">
+            <a:avLst/>
+          </a:prstGeom>
+          <a:noFill/>
+          <a:ln w="19050">
+            <a:solidFill>
+              <a:srgbClr val="F0EEE6"/>
+            </a:solidFill>
+            <a:prstDash val="solid"/>
+          </a:ln>
+        </p:spPr>
+      </p:sp>
+      <p:sp>
+        <p:nvSpPr>
+          <p:cNvPr id="10" name="Text 8"/>
+          <p:cNvSpPr/>
+          <p:nvPr/>
+        </p:nvSpPr>
+        <p:spPr>
+          <a:xfrm>
+            <a:off x="548640" y="2843784"/>
+            <a:ext cx="411480" cy="457200"/>
           </a:xfrm>
           <a:prstGeom prst="rect">
             <a:avLst/>
@@ -4536,17 +4912,56 @@
               <a:buNone/>
             </a:pPr>
             <a:r>
-              <a:rPr lang="en-US" sz="1500" b="1" dirty="0">
-                <a:solidFill>
-                  <a:srgbClr val="191919"/>
+              <a:rPr lang="en-US" sz="1900" dirty="0">
+                <a:solidFill>
+                  <a:srgbClr val="CC785C"/>
                 </a:solidFill>
                 <a:latin typeface="Georgia" pitchFamily="34" charset="0"/>
                 <a:ea typeface="Georgia" pitchFamily="34" charset="-122"/>
                 <a:cs typeface="Georgia" pitchFamily="34" charset="-120"/>
               </a:rPr>
-              <a:t>Next steps</a:t>
-            </a:r>
-            <a:endParaRPr lang="en-US" sz="1500" dirty="0"/>
+              <a:t>3</a:t>
+            </a:r>
+            <a:endParaRPr lang="en-US" sz="1900" dirty="0"/>
+          </a:p>
+        </p:txBody>
+      </p:sp>
+      <p:sp>
+        <p:nvSpPr>
+          <p:cNvPr id="11" name="Text 9"/>
+          <p:cNvSpPr/>
+          <p:nvPr/>
+        </p:nvSpPr>
+        <p:spPr>
+          <a:xfrm>
+            <a:off x="1051560" y="2862072"/>
+            <a:ext cx="6858000" cy="457200"/>
+          </a:xfrm>
+          <a:prstGeom prst="rect">
+            <a:avLst/>
+          </a:prstGeom>
+          <a:noFill/>
+          <a:ln/>
+        </p:spPr>
+        <p:txBody>
+          <a:bodyPr wrap="square" lIns="0" tIns="0" rIns="0" bIns="0" rtlCol="0" anchor="ctr"/>
+          <a:lstStyle/>
+          <a:p>
+            <a:pPr indent="0" marL="0">
+              <a:buNone/>
+            </a:pPr>
+            <a:r>
+              <a:rPr lang="en-US" sz="1700" dirty="0">
+                <a:solidFill>
+                  <a:srgbClr val="191919"/>
+                </a:solidFill>
+                <a:latin typeface="Georgia" pitchFamily="34" charset="0"/>
+                <a:ea typeface="Georgia" pitchFamily="34" charset="-122"/>
+                <a:cs typeface="Georgia" pitchFamily="34" charset="-120"/>
+              </a:rPr>
+              <a:t>What command should an agent never run here</a:t>
+            </a:r>
+            <a:endParaRPr lang="en-US" sz="1700" dirty="0"/>
           </a:p>
         </p:txBody>
       </p:sp>
@@ -4558,49 +4973,63 @@
         </p:nvSpPr>
         <p:spPr>
           <a:xfrm>
-            <a:off x="5742432" y="2011680"/>
-            <a:ext cx="2596896" cy="2011680"/>
-          </a:xfrm>
-          <a:prstGeom prst="rect">
-            <a:avLst/>
-          </a:prstGeom>
-          <a:noFill/>
-          <a:ln/>
-        </p:spPr>
-        <p:txBody>
-          <a:bodyPr wrap="square" lIns="0" tIns="0" rIns="0" bIns="0" rtlCol="0" anchor="t"/>
-          <a:lstStyle/>
-          <a:p>
-            <a:pPr marL="342900" indent="-342900">
-              <a:spcAft>
-                <a:spcPts val="800"/>
-              </a:spcAft>
-              <a:buSzPct val="100000"/>
-              <a:buChar char="•"/>
-            </a:pPr>
-            <a:r>
-              <a:rPr lang="en-US" sz="1150" dirty="0">
-                <a:solidFill>
-                  <a:srgbClr val="191919"/>
+            <a:off x="548640" y="3931920"/>
+            <a:ext cx="4572000" cy="256032"/>
+          </a:xfrm>
+          <a:prstGeom prst="rect">
+            <a:avLst/>
+          </a:prstGeom>
+          <a:noFill/>
+          <a:ln/>
+        </p:spPr>
+        <p:txBody>
+          <a:bodyPr wrap="square" lIns="0" tIns="0" rIns="0" bIns="0" rtlCol="0" anchor="ctr"/>
+          <a:lstStyle/>
+          <a:p>
+            <a:pPr indent="0" marL="0">
+              <a:buNone/>
+            </a:pPr>
+            <a:r>
+              <a:rPr lang="en-US" sz="1050" b="1" spc="300" kern="0" dirty="0">
+                <a:solidFill>
+                  <a:srgbClr val="6B6B66"/>
                 </a:solidFill>
                 <a:latin typeface="Arial" pitchFamily="34" charset="0"/>
                 <a:ea typeface="Arial" pitchFamily="34" charset="-122"/>
                 <a:cs typeface="Arial" pitchFamily="34" charset="-120"/>
               </a:rPr>
-              <a:t>Clone the repo and run the harness: 22 checks, zero tokens</a:t>
-            </a:r>
-            <a:endParaRPr lang="en-US" sz="1150" dirty="0"/>
-          </a:p>
-          <a:p>
-            <a:pPr marL="342900" indent="-342900">
-              <a:spcAft>
-                <a:spcPts val="800"/>
-              </a:spcAft>
-              <a:buSzPct val="100000"/>
-              <a:buChar char="•"/>
-            </a:pPr>
-            <a:r>
-              <a:rPr lang="en-US" sz="1150" dirty="0">
+              <a:t>THE NEXT STEP</a:t>
+            </a:r>
+            <a:endParaRPr lang="en-US" sz="1050" dirty="0"/>
+          </a:p>
+        </p:txBody>
+      </p:sp>
+      <p:sp>
+        <p:nvSpPr>
+          <p:cNvPr id="13" name="Text 11"/>
+          <p:cNvSpPr/>
+          <p:nvPr/>
+        </p:nvSpPr>
+        <p:spPr>
+          <a:xfrm>
+            <a:off x="548640" y="4233672"/>
+            <a:ext cx="7863840" cy="411480"/>
+          </a:xfrm>
+          <a:prstGeom prst="rect">
+            <a:avLst/>
+          </a:prstGeom>
+          <a:noFill/>
+          <a:ln/>
+        </p:spPr>
+        <p:txBody>
+          <a:bodyPr wrap="square" lIns="0" tIns="0" rIns="0" bIns="0" rtlCol="0" anchor="ctr"/>
+          <a:lstStyle/>
+          <a:p>
+            <a:pPr indent="0" marL="0">
+              <a:buNone/>
+            </a:pPr>
+            <a:r>
+              <a:rPr lang="en-US" sz="1400" dirty="0">
                 <a:solidFill>
                   <a:srgbClr val="191919"/>
                 </a:solidFill>
@@ -4608,166 +5037,195 @@
                 <a:ea typeface="Arial" pitchFamily="34" charset="-122"/>
                 <a:cs typeface="Arial" pitchFamily="34" charset="-120"/>
               </a:rPr>
-              <a:t>Rerun the four beats yourself from PROMPTS.md</a:t>
-            </a:r>
-            <a:endParaRPr lang="en-US" sz="1150" dirty="0"/>
-          </a:p>
-          <a:p>
-            <a:pPr marL="342900" indent="-342900">
-              <a:spcAft>
-                <a:spcPts val="800"/>
-              </a:spcAft>
-              <a:buSzPct val="100000"/>
-              <a:buChar char="•"/>
-            </a:pPr>
-            <a:r>
-              <a:rPr lang="en-US" sz="1150" dirty="0">
-                <a:solidFill>
-                  <a:srgbClr val="191919"/>
+              <a:t>Fork the repo, swap in your conventions, and ship your own policy gate inside two weeks.</a:t>
+            </a:r>
+            <a:endParaRPr lang="en-US" sz="1400" dirty="0"/>
+          </a:p>
+        </p:txBody>
+      </p:sp>
+      <p:sp>
+        <p:nvSpPr>
+          <p:cNvPr id="14" name="Text 12"/>
+          <p:cNvSpPr/>
+          <p:nvPr/>
+        </p:nvSpPr>
+        <p:spPr>
+          <a:xfrm>
+            <a:off x="8458200" y="4759452"/>
+            <a:ext cx="320040" cy="274320"/>
+          </a:xfrm>
+          <a:prstGeom prst="rect">
+            <a:avLst/>
+          </a:prstGeom>
+          <a:noFill/>
+          <a:ln/>
+        </p:spPr>
+        <p:txBody>
+          <a:bodyPr wrap="square" lIns="0" tIns="0" rIns="0" bIns="0" rtlCol="0" anchor="ctr"/>
+          <a:lstStyle/>
+          <a:p>
+            <a:pPr algn="r" indent="0" marL="0">
+              <a:buNone/>
+            </a:pPr>
+            <a:r>
+              <a:rPr lang="en-US" sz="900" dirty="0">
+                <a:solidFill>
+                  <a:srgbClr val="6B6B66"/>
                 </a:solidFill>
                 <a:latin typeface="Arial" pitchFamily="34" charset="0"/>
                 <a:ea typeface="Arial" pitchFamily="34" charset="-122"/>
                 <a:cs typeface="Arial" pitchFamily="34" charset="-120"/>
               </a:rPr>
-              <a:t>Add your first rule and prove it with try.js</a:t>
-            </a:r>
-            <a:endParaRPr lang="en-US" sz="1150" dirty="0"/>
-          </a:p>
-          <a:p>
-            <a:pPr marL="342900" indent="-342900">
-              <a:spcAft>
-                <a:spcPts val="800"/>
-              </a:spcAft>
-              <a:buSzPct val="100000"/>
-              <a:buChar char="•"/>
-            </a:pPr>
-            <a:r>
-              <a:rPr lang="en-US" sz="1150" dirty="0">
-                <a:solidFill>
-                  <a:srgbClr val="191919"/>
+              <a:t>15</a:t>
+            </a:r>
+            <a:endParaRPr lang="en-US" sz="900" dirty="0"/>
+          </a:p>
+        </p:txBody>
+      </p:sp>
+    </p:spTree>
+  </p:cSld>
+  <p:clrMapOvr>
+    <a:masterClrMapping/>
+  </p:clrMapOvr>
+</p:sld>
+</file>
+
+<file path=ppt/slides/slide16.xml><?xml version="1.0" encoding="utf-8"?>
+<p:sld xmlns:a="http://schemas.openxmlformats.org/drawingml/2006/main" xmlns:r="http://schemas.openxmlformats.org/officeDocument/2006/relationships" xmlns:p="http://schemas.openxmlformats.org/presentationml/2006/main">
+  <p:cSld name="Slide 16">
+    <p:bg>
+      <p:bgPr>
+        <a:solidFill>
+          <a:srgbClr val="191919"/>
+        </a:solidFill>
+      </p:bgPr>
+    </p:bg>
+    <p:spTree>
+      <p:nvGrpSpPr>
+        <p:cNvPr id="1" name=""/>
+        <p:cNvGrpSpPr/>
+        <p:nvPr/>
+      </p:nvGrpSpPr>
+      <p:grpSpPr>
+        <a:xfrm>
+          <a:off x="0" y="0"/>
+          <a:ext cx="0" cy="0"/>
+          <a:chOff x="0" y="0"/>
+          <a:chExt cx="0" cy="0"/>
+        </a:xfrm>
+      </p:grpSpPr>
+      <p:sp>
+        <p:nvSpPr>
+          <p:cNvPr id="2" name="Text 0"/>
+          <p:cNvSpPr/>
+          <p:nvPr/>
+        </p:nvSpPr>
+        <p:spPr>
+          <a:xfrm>
+            <a:off x="548640" y="1920240"/>
+            <a:ext cx="7863840" cy="1097280"/>
+          </a:xfrm>
+          <a:prstGeom prst="rect">
+            <a:avLst/>
+          </a:prstGeom>
+          <a:noFill/>
+          <a:ln/>
+        </p:spPr>
+        <p:txBody>
+          <a:bodyPr wrap="square" lIns="0" tIns="0" rIns="0" bIns="0" rtlCol="0" anchor="t"/>
+          <a:lstStyle/>
+          <a:p>
+            <a:pPr indent="0" marL="0">
+              <a:buNone/>
+            </a:pPr>
+            <a:r>
+              <a:rPr lang="en-US" sz="3000" dirty="0">
+                <a:solidFill>
+                  <a:srgbClr val="FAF9F5"/>
+                </a:solidFill>
+                <a:latin typeface="Georgia" pitchFamily="34" charset="0"/>
+                <a:ea typeface="Georgia" pitchFamily="34" charset="-122"/>
+                <a:cs typeface="Georgia" pitchFamily="34" charset="-120"/>
+              </a:rPr>
+              <a:t>The demo ends with your policy in the artifact.</a:t>
+            </a:r>
+            <a:endParaRPr lang="en-US" sz="3000" dirty="0"/>
+          </a:p>
+        </p:txBody>
+      </p:sp>
+      <p:sp>
+        <p:nvSpPr>
+          <p:cNvPr id="3" name="Text 1"/>
+          <p:cNvSpPr/>
+          <p:nvPr/>
+        </p:nvSpPr>
+        <p:spPr>
+          <a:xfrm>
+            <a:off x="548640" y="3291840"/>
+            <a:ext cx="5486400" cy="320040"/>
+          </a:xfrm>
+          <a:prstGeom prst="rect">
+            <a:avLst/>
+          </a:prstGeom>
+          <a:noFill/>
+          <a:ln/>
+        </p:spPr>
+        <p:txBody>
+          <a:bodyPr wrap="square" lIns="0" tIns="0" rIns="0" bIns="0" rtlCol="0" anchor="ctr"/>
+          <a:lstStyle/>
+          <a:p>
+            <a:pPr indent="0" marL="0">
+              <a:buNone/>
+            </a:pPr>
+            <a:r>
+              <a:rPr lang="en-US" sz="1200" dirty="0">
+                <a:solidFill>
+                  <a:srgbClr val="CC785C"/>
+                </a:solidFill>
+                <a:latin typeface="Consolas" pitchFamily="34" charset="0"/>
+                <a:ea typeface="Consolas" pitchFamily="34" charset="-122"/>
+                <a:cs typeface="Consolas" pitchFamily="34" charset="-120"/>
+              </a:rPr>
+              <a:t>github.com/andymadson/data-platform-pack</a:t>
+            </a:r>
+            <a:endParaRPr lang="en-US" sz="1200" dirty="0"/>
+          </a:p>
+        </p:txBody>
+      </p:sp>
+      <p:sp>
+        <p:nvSpPr>
+          <p:cNvPr id="4" name="Text 2"/>
+          <p:cNvSpPr/>
+          <p:nvPr/>
+        </p:nvSpPr>
+        <p:spPr>
+          <a:xfrm>
+            <a:off x="8458200" y="4759452"/>
+            <a:ext cx="320040" cy="274320"/>
+          </a:xfrm>
+          <a:prstGeom prst="rect">
+            <a:avLst/>
+          </a:prstGeom>
+          <a:noFill/>
+          <a:ln/>
+        </p:spPr>
+        <p:txBody>
+          <a:bodyPr wrap="square" lIns="0" tIns="0" rIns="0" bIns="0" rtlCol="0" anchor="ctr"/>
+          <a:lstStyle/>
+          <a:p>
+            <a:pPr algn="r" indent="0" marL="0">
+              <a:buNone/>
+            </a:pPr>
+            <a:r>
+              <a:rPr lang="en-US" sz="900" dirty="0">
+                <a:solidFill>
+                  <a:srgbClr val="888780"/>
                 </a:solidFill>
                 <a:latin typeface="Arial" pitchFamily="34" charset="0"/>
                 <a:ea typeface="Arial" pitchFamily="34" charset="-122"/>
                 <a:cs typeface="Arial" pitchFamily="34" charset="-120"/>
               </a:rPr>
-              <a:t>Scope a two-week pilot with us</a:t>
-            </a:r>
-            <a:endParaRPr lang="en-US" sz="1150" dirty="0"/>
-          </a:p>
-        </p:txBody>
-      </p:sp>
-      <p:sp>
-        <p:nvSpPr>
-          <p:cNvPr id="13" name="Text 11"/>
-          <p:cNvSpPr/>
-          <p:nvPr/>
-        </p:nvSpPr>
-        <p:spPr>
-          <a:xfrm>
-            <a:off x="548640" y="4069080"/>
-            <a:ext cx="4663440" cy="457200"/>
-          </a:xfrm>
-          <a:prstGeom prst="rect">
-            <a:avLst/>
-          </a:prstGeom>
-          <a:noFill/>
-          <a:ln/>
-        </p:spPr>
-        <p:txBody>
-          <a:bodyPr wrap="square" lIns="0" tIns="0" rIns="0" bIns="0" rtlCol="0" anchor="ctr"/>
-          <a:lstStyle/>
-          <a:p>
-            <a:pPr indent="0" marL="0">
-              <a:buNone/>
-            </a:pPr>
-            <a:r>
-              <a:rPr lang="en-US" sz="1400" i="1" dirty="0">
-                <a:solidFill>
-                  <a:srgbClr val="6B6B66"/>
-                </a:solidFill>
-                <a:latin typeface="Georgia" pitchFamily="34" charset="0"/>
-                <a:ea typeface="Georgia" pitchFamily="34" charset="-122"/>
-                <a:cs typeface="Georgia" pitchFamily="34" charset="-120"/>
-              </a:rPr>
-              <a:t>The demo ends with your policy in the artifact.</a:t>
-            </a:r>
-            <a:endParaRPr lang="en-US" sz="1400" dirty="0"/>
-          </a:p>
-        </p:txBody>
-      </p:sp>
-      <p:sp>
-        <p:nvSpPr>
-          <p:cNvPr id="14" name="Text 12"/>
-          <p:cNvSpPr/>
-          <p:nvPr/>
-        </p:nvSpPr>
-        <p:spPr>
-          <a:xfrm>
-            <a:off x="548640" y="4686300"/>
-            <a:ext cx="4572000" cy="274320"/>
-          </a:xfrm>
-          <a:prstGeom prst="rect">
-            <a:avLst/>
-          </a:prstGeom>
-          <a:noFill/>
-          <a:ln/>
-        </p:spPr>
-        <p:txBody>
-          <a:bodyPr wrap="square" lIns="0" tIns="0" rIns="0" bIns="0" rtlCol="0" anchor="ctr"/>
-          <a:lstStyle/>
-          <a:p>
-            <a:pPr indent="0" marL="0">
-              <a:buNone/>
-            </a:pPr>
-            <a:r>
-              <a:rPr lang="en-US" sz="1050" dirty="0">
-                <a:solidFill>
-                  <a:srgbClr val="CC785C"/>
-                </a:solidFill>
-                <a:latin typeface="Consolas" pitchFamily="34" charset="0"/>
-                <a:ea typeface="Consolas" pitchFamily="34" charset="-122"/>
-                <a:cs typeface="Consolas" pitchFamily="34" charset="-120"/>
-              </a:rPr>
-              <a:t>github.com/andymadson/data-platform-pack</a:t>
-            </a:r>
-            <a:endParaRPr lang="en-US" sz="1050" dirty="0"/>
-          </a:p>
-        </p:txBody>
-      </p:sp>
-      <p:sp>
-        <p:nvSpPr>
-          <p:cNvPr id="15" name="Text 13"/>
-          <p:cNvSpPr/>
-          <p:nvPr/>
-        </p:nvSpPr>
-        <p:spPr>
-          <a:xfrm>
-            <a:off x="8458200" y="4759452"/>
-            <a:ext cx="320040" cy="274320"/>
-          </a:xfrm>
-          <a:prstGeom prst="rect">
-            <a:avLst/>
-          </a:prstGeom>
-          <a:noFill/>
-          <a:ln/>
-        </p:spPr>
-        <p:txBody>
-          <a:bodyPr wrap="square" lIns="0" tIns="0" rIns="0" bIns="0" rtlCol="0" anchor="ctr"/>
-          <a:lstStyle/>
-          <a:p>
-            <a:pPr algn="r" indent="0" marL="0">
-              <a:buNone/>
-            </a:pPr>
-            <a:r>
-              <a:rPr lang="en-US" sz="900" dirty="0">
-                <a:solidFill>
-                  <a:srgbClr val="6B6B66"/>
-                </a:solidFill>
-                <a:latin typeface="Arial" pitchFamily="34" charset="0"/>
-                <a:ea typeface="Arial" pitchFamily="34" charset="-122"/>
-                <a:cs typeface="Arial" pitchFamily="34" charset="-120"/>
-              </a:rPr>
-              <a:t>14</a:t>
+              <a:t>16</a:t>
             </a:r>
             <a:endParaRPr lang="en-US" sz="900" dirty="0"/>
           </a:p>
@@ -4813,8 +5271,8 @@
         </p:nvSpPr>
         <p:spPr>
           <a:xfrm>
-            <a:off x="548640" y="457200"/>
-            <a:ext cx="457200" cy="25603"/>
+            <a:off x="548640" y="1572768"/>
+            <a:ext cx="457200" cy="27432"/>
           </a:xfrm>
           <a:prstGeom prst="rect">
             <a:avLst/>
@@ -4833,8 +5291,8 @@
         </p:nvSpPr>
         <p:spPr>
           <a:xfrm>
-            <a:off x="548640" y="566928"/>
-            <a:ext cx="8046720" cy="685800"/>
+            <a:off x="548640" y="1755648"/>
+            <a:ext cx="7863840" cy="1188720"/>
           </a:xfrm>
           <a:prstGeom prst="rect">
             <a:avLst/>
@@ -4846,11 +5304,11 @@
           <a:bodyPr wrap="square" lIns="0" tIns="0" rIns="0" bIns="0" rtlCol="0" anchor="t"/>
           <a:lstStyle/>
           <a:p>
-            <a:pPr algn="l" indent="0" marL="0">
-              <a:buNone/>
-            </a:pPr>
-            <a:r>
-              <a:rPr lang="en-US" sz="2600" dirty="0">
+            <a:pPr indent="0" marL="0">
+              <a:buNone/>
+            </a:pPr>
+            <a:r>
+              <a:rPr lang="en-US" sz="3800" dirty="0">
                 <a:solidFill>
                   <a:srgbClr val="191919"/>
                 </a:solidFill>
@@ -4858,42 +5316,22 @@
                 <a:ea typeface="Georgia" pitchFamily="34" charset="-122"/>
                 <a:cs typeface="Georgia" pitchFamily="34" charset="-120"/>
               </a:rPr>
-              <a:t>What this covers, and what it doesn't.</a:t>
-            </a:r>
-            <a:endParaRPr lang="en-US" sz="2600" dirty="0"/>
-          </a:p>
-        </p:txBody>
-      </p:sp>
-      <p:sp>
-        <p:nvSpPr>
-          <p:cNvPr id="4" name="Shape 2"/>
-          <p:cNvSpPr/>
-          <p:nvPr/>
-        </p:nvSpPr>
-        <p:spPr>
-          <a:xfrm>
-            <a:off x="548640" y="1417320"/>
-            <a:ext cx="3886200" cy="3200400"/>
-          </a:xfrm>
-          <a:prstGeom prst="rect">
-            <a:avLst/>
-          </a:prstGeom>
-          <a:solidFill>
-            <a:srgbClr val="F0EEE6"/>
-          </a:solidFill>
-          <a:ln/>
-        </p:spPr>
-      </p:sp>
-      <p:sp>
-        <p:nvSpPr>
-          <p:cNvPr id="5" name="Text 3"/>
-          <p:cNvSpPr/>
-          <p:nvPr/>
-        </p:nvSpPr>
-        <p:spPr>
-          <a:xfrm>
-            <a:off x="822960" y="1618488"/>
-            <a:ext cx="3337560" cy="320040"/>
+              <a:t>Plugins: the enterprise rollout story.</a:t>
+            </a:r>
+            <a:endParaRPr lang="en-US" sz="3800" dirty="0"/>
+          </a:p>
+        </p:txBody>
+      </p:sp>
+      <p:sp>
+        <p:nvSpPr>
+          <p:cNvPr id="4" name="Text 2"/>
+          <p:cNvSpPr/>
+          <p:nvPr/>
+        </p:nvSpPr>
+        <p:spPr>
+          <a:xfrm>
+            <a:off x="548640" y="2971800"/>
+            <a:ext cx="7315200" cy="365760"/>
           </a:xfrm>
           <a:prstGeom prst="rect">
             <a:avLst/>
@@ -4909,161 +5347,30 @@
               <a:buNone/>
             </a:pPr>
             <a:r>
-              <a:rPr lang="en-US" sz="1600" b="1" dirty="0">
-                <a:solidFill>
-                  <a:srgbClr val="191919"/>
-                </a:solidFill>
-                <a:latin typeface="Georgia" pitchFamily="34" charset="0"/>
-                <a:ea typeface="Georgia" pitchFamily="34" charset="-122"/>
-                <a:cs typeface="Georgia" pitchFamily="34" charset="-120"/>
-              </a:rPr>
-              <a:t>Covered</a:t>
-            </a:r>
-            <a:endParaRPr lang="en-US" sz="1600" dirty="0"/>
-          </a:p>
-        </p:txBody>
-      </p:sp>
-      <p:sp>
-        <p:nvSpPr>
-          <p:cNvPr id="6" name="Text 4"/>
-          <p:cNvSpPr/>
-          <p:nvPr/>
-        </p:nvSpPr>
-        <p:spPr>
-          <a:xfrm>
-            <a:off x="822960" y="2057400"/>
-            <a:ext cx="3337560" cy="2286000"/>
-          </a:xfrm>
-          <a:prstGeom prst="rect">
-            <a:avLst/>
-          </a:prstGeom>
-          <a:noFill/>
-          <a:ln/>
-        </p:spPr>
-        <p:txBody>
-          <a:bodyPr wrap="square" lIns="0" tIns="0" rIns="0" bIns="0" rtlCol="0" anchor="t"/>
-          <a:lstStyle/>
-          <a:p>
-            <a:pPr marL="342900" indent="-342900">
-              <a:spcAft>
-                <a:spcPts val="1000"/>
-              </a:spcAft>
-              <a:buSzPct val="100000"/>
-              <a:buChar char="•"/>
-            </a:pPr>
-            <a:r>
-              <a:rPr lang="en-US" sz="1250" dirty="0">
-                <a:solidFill>
-                  <a:srgbClr val="191919"/>
+              <a:rPr lang="en-US" sz="1500" dirty="0">
+                <a:solidFill>
+                  <a:srgbClr val="6B6B66"/>
                 </a:solidFill>
                 <a:latin typeface="Arial" pitchFamily="34" charset="0"/>
                 <a:ea typeface="Arial" pitchFamily="34" charset="-122"/>
                 <a:cs typeface="Arial" pitchFamily="34" charset="-120"/>
               </a:rPr>
-              <a:t>Plugin anatomy: marketplace, manifest, components, version pin</a:t>
-            </a:r>
-            <a:endParaRPr lang="en-US" sz="1250" dirty="0"/>
-          </a:p>
-          <a:p>
-            <a:pPr marL="342900" indent="-342900">
-              <a:spcAft>
-                <a:spcPts val="1000"/>
-              </a:spcAft>
-              <a:buSzPct val="100000"/>
-              <a:buChar char="•"/>
-            </a:pPr>
-            <a:r>
-              <a:rPr lang="en-US" sz="1250" dirty="0">
-                <a:solidFill>
-                  <a:srgbClr val="191919"/>
-                </a:solidFill>
-                <a:latin typeface="Arial" pitchFamily="34" charset="0"/>
-                <a:ea typeface="Arial" pitchFamily="34" charset="-122"/>
-                <a:cs typeface="Arial" pitchFamily="34" charset="-120"/>
-              </a:rPr>
-              <a:t>The live demo, in four beats: install, use, govern, ship</a:t>
-            </a:r>
-            <a:endParaRPr lang="en-US" sz="1250" dirty="0"/>
-          </a:p>
-          <a:p>
-            <a:pPr marL="342900" indent="-342900">
-              <a:spcAft>
-                <a:spcPts val="1000"/>
-              </a:spcAft>
-              <a:buSzPct val="100000"/>
-              <a:buChar char="•"/>
-            </a:pPr>
-            <a:r>
-              <a:rPr lang="en-US" sz="1250" dirty="0">
-                <a:solidFill>
-                  <a:srgbClr val="191919"/>
-                </a:solidFill>
-                <a:latin typeface="Arial" pitchFamily="34" charset="0"/>
-                <a:ea typeface="Arial" pitchFamily="34" charset="-122"/>
-                <a:cs typeface="Arial" pitchFamily="34" charset="-120"/>
-              </a:rPr>
-              <a:t>Deterministic guardrails and the audit trail they write</a:t>
-            </a:r>
-            <a:endParaRPr lang="en-US" sz="1250" dirty="0"/>
-          </a:p>
-          <a:p>
-            <a:pPr marL="342900" indent="-342900">
-              <a:spcAft>
-                <a:spcPts val="1000"/>
-              </a:spcAft>
-              <a:buSzPct val="100000"/>
-              <a:buChar char="•"/>
-            </a:pPr>
-            <a:r>
-              <a:rPr lang="en-US" sz="1250" dirty="0">
-                <a:solidFill>
-                  <a:srgbClr val="191919"/>
-                </a:solidFill>
-                <a:latin typeface="Arial" pitchFamily="34" charset="0"/>
-                <a:ea typeface="Arial" pitchFamily="34" charset="-122"/>
-                <a:cs typeface="Arial" pitchFamily="34" charset="-120"/>
-              </a:rPr>
-              <a:t>Shipping a policy change to a whole engineering fleet</a:t>
-            </a:r>
-            <a:endParaRPr lang="en-US" sz="1250" dirty="0"/>
-          </a:p>
-        </p:txBody>
-      </p:sp>
-      <p:sp>
-        <p:nvSpPr>
-          <p:cNvPr id="7" name="Shape 5"/>
-          <p:cNvSpPr/>
-          <p:nvPr/>
-        </p:nvSpPr>
-        <p:spPr>
-          <a:xfrm>
-            <a:off x="4709160" y="1417320"/>
-            <a:ext cx="3886200" cy="3200400"/>
-          </a:xfrm>
-          <a:prstGeom prst="rect">
-            <a:avLst/>
-          </a:prstGeom>
-          <a:solidFill>
-            <a:srgbClr val="FAF9F5"/>
-          </a:solidFill>
-          <a:ln w="12700">
-            <a:solidFill>
-              <a:srgbClr val="D4A27F"/>
-            </a:solidFill>
-            <a:prstDash val="solid"/>
-          </a:ln>
-        </p:spPr>
-      </p:sp>
-      <p:sp>
-        <p:nvSpPr>
-          <p:cNvPr id="8" name="Text 6"/>
-          <p:cNvSpPr/>
-          <p:nvPr/>
-        </p:nvSpPr>
-        <p:spPr>
-          <a:xfrm>
-            <a:off x="4983480" y="1618488"/>
-            <a:ext cx="3337560" cy="320040"/>
+              <a:t>Every engineer, the same setup, your policies attached. A 30-minute working session.</a:t>
+            </a:r>
+            <a:endParaRPr lang="en-US" sz="1500" dirty="0"/>
+          </a:p>
+        </p:txBody>
+      </p:sp>
+      <p:sp>
+        <p:nvSpPr>
+          <p:cNvPr id="5" name="Text 3"/>
+          <p:cNvSpPr/>
+          <p:nvPr/>
+        </p:nvSpPr>
+        <p:spPr>
+          <a:xfrm>
+            <a:off x="548640" y="4732020"/>
+            <a:ext cx="5486400" cy="274320"/>
           </a:xfrm>
           <a:prstGeom prst="rect">
             <a:avLst/>
@@ -5079,129 +5386,23 @@
               <a:buNone/>
             </a:pPr>
             <a:r>
-              <a:rPr lang="en-US" sz="1600" b="1" dirty="0">
-                <a:solidFill>
-                  <a:srgbClr val="191919"/>
-                </a:solidFill>
-                <a:latin typeface="Georgia" pitchFamily="34" charset="0"/>
-                <a:ea typeface="Georgia" pitchFamily="34" charset="-122"/>
-                <a:cs typeface="Georgia" pitchFamily="34" charset="-120"/>
-              </a:rPr>
-              <a:t>Not covered, on purpose</a:t>
-            </a:r>
-            <a:endParaRPr lang="en-US" sz="1600" dirty="0"/>
-          </a:p>
-        </p:txBody>
-      </p:sp>
-      <p:sp>
-        <p:nvSpPr>
-          <p:cNvPr id="9" name="Text 7"/>
-          <p:cNvSpPr/>
-          <p:nvPr/>
-        </p:nvSpPr>
-        <p:spPr>
-          <a:xfrm>
-            <a:off x="4983480" y="2057400"/>
-            <a:ext cx="3337560" cy="2286000"/>
-          </a:xfrm>
-          <a:prstGeom prst="rect">
-            <a:avLst/>
-          </a:prstGeom>
-          <a:noFill/>
-          <a:ln/>
-        </p:spPr>
-        <p:txBody>
-          <a:bodyPr wrap="square" lIns="0" tIns="0" rIns="0" bIns="0" rtlCol="0" anchor="t"/>
-          <a:lstStyle/>
-          <a:p>
-            <a:pPr marL="342900" indent="-342900">
-              <a:spcAft>
-                <a:spcPts val="1000"/>
-              </a:spcAft>
-              <a:buSzPct val="100000"/>
-              <a:buChar char="•"/>
-            </a:pPr>
-            <a:r>
-              <a:rPr lang="en-US" sz="1250" dirty="0">
-                <a:solidFill>
-                  <a:srgbClr val="191919"/>
-                </a:solidFill>
-                <a:latin typeface="Arial" pitchFamily="34" charset="0"/>
-                <a:ea typeface="Arial" pitchFamily="34" charset="-122"/>
-                <a:cs typeface="Arial" pitchFamily="34" charset="-120"/>
-              </a:rPr>
-              <a:t>MCP and LSP servers in plugins. Auth variability is how live demos die.</a:t>
-            </a:r>
-            <a:endParaRPr lang="en-US" sz="1250" dirty="0"/>
-          </a:p>
-          <a:p>
-            <a:pPr marL="342900" indent="-342900">
-              <a:spcAft>
-                <a:spcPts val="1000"/>
-              </a:spcAft>
-              <a:buSzPct val="100000"/>
-              <a:buChar char="•"/>
-            </a:pPr>
-            <a:r>
-              <a:rPr lang="en-US" sz="1250" dirty="0">
-                <a:solidFill>
-                  <a:srgbClr val="191919"/>
-                </a:solidFill>
-                <a:latin typeface="Arial" pitchFamily="34" charset="0"/>
-                <a:ea typeface="Arial" pitchFamily="34" charset="-122"/>
-                <a:cs typeface="Arial" pitchFamily="34" charset="-120"/>
-              </a:rPr>
-              <a:t>Building a plugin from scratch. Scaffolding is boring to watch.</a:t>
-            </a:r>
-            <a:endParaRPr lang="en-US" sz="1250" dirty="0"/>
-          </a:p>
-          <a:p>
-            <a:pPr marL="342900" indent="-342900">
-              <a:spcAft>
-                <a:spcPts val="1000"/>
-              </a:spcAft>
-              <a:buSzPct val="100000"/>
-              <a:buChar char="•"/>
-            </a:pPr>
-            <a:r>
-              <a:rPr lang="en-US" sz="1250" dirty="0">
-                <a:solidFill>
-                  <a:srgbClr val="191919"/>
-                </a:solidFill>
-                <a:latin typeface="Arial" pitchFamily="34" charset="0"/>
-                <a:ea typeface="Arial" pitchFamily="34" charset="-122"/>
-                <a:cs typeface="Arial" pitchFamily="34" charset="-120"/>
-              </a:rPr>
-              <a:t>Multi-plugin marketplaces and dependencies. Day-two concerns.</a:t>
-            </a:r>
-            <a:endParaRPr lang="en-US" sz="1250" dirty="0"/>
-          </a:p>
-          <a:p>
-            <a:pPr marL="342900" indent="-342900">
-              <a:spcAft>
-                <a:spcPts val="1000"/>
-              </a:spcAft>
-              <a:buSzPct val="100000"/>
-              <a:buChar char="•"/>
-            </a:pPr>
-            <a:r>
-              <a:rPr lang="en-US" sz="1250" dirty="0">
-                <a:solidFill>
-                  <a:srgbClr val="191919"/>
-                </a:solidFill>
-                <a:latin typeface="Arial" pitchFamily="34" charset="0"/>
-                <a:ea typeface="Arial" pitchFamily="34" charset="-122"/>
-                <a:cs typeface="Arial" pitchFamily="34" charset="-120"/>
-              </a:rPr>
-              <a:t>Sandboxing and IAM. A different defense layer; plugins don't replace it.</a:t>
-            </a:r>
-            <a:endParaRPr lang="en-US" sz="1250" dirty="0"/>
-          </a:p>
-        </p:txBody>
-      </p:sp>
-      <p:sp>
-        <p:nvSpPr>
-          <p:cNvPr id="10" name="Text 8"/>
+              <a:rPr lang="en-US" sz="1100" dirty="0">
+                <a:solidFill>
+                  <a:srgbClr val="CC785C"/>
+                </a:solidFill>
+                <a:latin typeface="Consolas" pitchFamily="34" charset="0"/>
+                <a:ea typeface="Consolas" pitchFamily="34" charset="-122"/>
+                <a:cs typeface="Consolas" pitchFamily="34" charset="-120"/>
+              </a:rPr>
+              <a:t>github.com/andymadson/data-platform-pack</a:t>
+            </a:r>
+            <a:endParaRPr lang="en-US" sz="1100" dirty="0"/>
+          </a:p>
+        </p:txBody>
+      </p:sp>
+      <p:sp>
+        <p:nvSpPr>
+          <p:cNvPr id="6" name="Text 4"/>
           <p:cNvSpPr/>
           <p:nvPr/>
         </p:nvSpPr>
@@ -5323,7 +5524,7 @@
                 <a:ea typeface="Georgia" pitchFamily="34" charset="-122"/>
                 <a:cs typeface="Georgia" pitchFamily="34" charset="-120"/>
               </a:rPr>
-              <a:t>Where this sits in your adoption journey.</a:t>
+              <a:t>Maya would have caught it.</a:t>
             </a:r>
             <a:endParaRPr lang="en-US" sz="2600" dirty="0"/>
           </a:p>
@@ -5331,14 +5532,82 @@
       </p:sp>
       <p:sp>
         <p:nvSpPr>
-          <p:cNvPr id="4" name="Shape 2"/>
-          <p:cNvSpPr/>
-          <p:nvPr/>
-        </p:nvSpPr>
-        <p:spPr>
-          <a:xfrm>
-            <a:off x="548640" y="1554480"/>
-            <a:ext cx="2286000" cy="2103120"/>
+          <p:cNvPr id="4" name="Text 2"/>
+          <p:cNvSpPr/>
+          <p:nvPr/>
+        </p:nvSpPr>
+        <p:spPr>
+          <a:xfrm>
+            <a:off x="548640" y="1463040"/>
+            <a:ext cx="4206240" cy="2560320"/>
+          </a:xfrm>
+          <a:prstGeom prst="rect">
+            <a:avLst/>
+          </a:prstGeom>
+          <a:noFill/>
+          <a:ln/>
+        </p:spPr>
+        <p:txBody>
+          <a:bodyPr wrap="square" lIns="0" tIns="0" rIns="0" bIns="0" rtlCol="0" anchor="t"/>
+          <a:lstStyle/>
+          <a:p>
+            <a:pPr indent="0" marL="0">
+              <a:lnSpc>
+                <a:spcPts val="2200"/>
+              </a:lnSpc>
+              <a:spcAft>
+                <a:spcPts val="1200"/>
+              </a:spcAft>
+              <a:buNone/>
+            </a:pPr>
+            <a:r>
+              <a:rPr lang="en-US" sz="1450" dirty="0">
+                <a:solidFill>
+                  <a:srgbClr val="191919"/>
+                </a:solidFill>
+                <a:latin typeface="Arial" pitchFamily="34" charset="0"/>
+                <a:ea typeface="Arial" pitchFamily="34" charset="-122"/>
+                <a:cs typeface="Arial" pitchFamily="34" charset="-120"/>
+              </a:rPr>
+              <a:t>Your best data engineer. Her review checklist flags returns counted as revenue. Her settings block prod writes. Her instincts are why her repos stay clean.</a:t>
+            </a:r>
+            <a:endParaRPr lang="en-US" sz="1450" dirty="0"/>
+          </a:p>
+          <a:p>
+            <a:pPr indent="0" marL="0">
+              <a:lnSpc>
+                <a:spcPts val="2200"/>
+              </a:lnSpc>
+              <a:spcAft>
+                <a:spcPts val="1200"/>
+              </a:spcAft>
+              <a:buNone/>
+            </a:pPr>
+            <a:r>
+              <a:rPr lang="en-US" sz="1450" dirty="0">
+                <a:solidFill>
+                  <a:srgbClr val="CC785C"/>
+                </a:solidFill>
+                <a:latin typeface="Arial" pitchFamily="34" charset="0"/>
+                <a:ea typeface="Arial" pitchFamily="34" charset="-122"/>
+                <a:cs typeface="Arial" pitchFamily="34" charset="-120"/>
+              </a:rPr>
+              <a:t>All of it lives in exactly one place.</a:t>
+            </a:r>
+            <a:endParaRPr lang="en-US" sz="1450" dirty="0"/>
+          </a:p>
+        </p:txBody>
+      </p:sp>
+      <p:sp>
+        <p:nvSpPr>
+          <p:cNvPr id="5" name="Shape 3"/>
+          <p:cNvSpPr/>
+          <p:nvPr/>
+        </p:nvSpPr>
+        <p:spPr>
+          <a:xfrm>
+            <a:off x="5212080" y="1463040"/>
+            <a:ext cx="3383280" cy="731520"/>
           </a:xfrm>
           <a:prstGeom prst="rect">
             <a:avLst/>
@@ -5351,131 +5620,146 @@
       </p:sp>
       <p:sp>
         <p:nvSpPr>
-          <p:cNvPr id="5" name="Text 3"/>
-          <p:cNvSpPr/>
-          <p:nvPr/>
-        </p:nvSpPr>
-        <p:spPr>
-          <a:xfrm>
-            <a:off x="777240" y="1737360"/>
-            <a:ext cx="1828800" cy="274320"/>
-          </a:xfrm>
-          <a:prstGeom prst="rect">
-            <a:avLst/>
-          </a:prstGeom>
-          <a:noFill/>
-          <a:ln/>
-        </p:spPr>
-        <p:txBody>
-          <a:bodyPr wrap="square" lIns="0" tIns="0" rIns="0" bIns="0" rtlCol="0" anchor="ctr"/>
-          <a:lstStyle/>
-          <a:p>
-            <a:pPr algn="l" indent="0" marL="0">
-              <a:buNone/>
-            </a:pPr>
-            <a:r>
-              <a:rPr lang="en-US" sz="1050" b="1" spc="300" kern="0" dirty="0">
-                <a:solidFill>
-                  <a:srgbClr val="6B6B66"/>
+          <p:cNvPr id="6" name="Text 4"/>
+          <p:cNvSpPr/>
+          <p:nvPr/>
+        </p:nvSpPr>
+        <p:spPr>
+          <a:xfrm>
+            <a:off x="5468112" y="1572768"/>
+            <a:ext cx="2926080" cy="548640"/>
+          </a:xfrm>
+          <a:prstGeom prst="rect">
+            <a:avLst/>
+          </a:prstGeom>
+          <a:noFill/>
+          <a:ln/>
+        </p:spPr>
+        <p:txBody>
+          <a:bodyPr wrap="square" lIns="0" tIns="0" rIns="0" bIns="0" rtlCol="0" anchor="t"/>
+          <a:lstStyle/>
+          <a:p>
+            <a:pPr indent="0" marL="0">
+              <a:buNone/>
+            </a:pPr>
+            <a:r>
+              <a:rPr lang="en-US" sz="1300" b="1" dirty="0">
+                <a:solidFill>
+                  <a:srgbClr val="191919"/>
                 </a:solidFill>
                 <a:latin typeface="Arial" pitchFamily="34" charset="0"/>
                 <a:ea typeface="Arial" pitchFamily="34" charset="-122"/>
                 <a:cs typeface="Arial" pitchFamily="34" charset="-120"/>
               </a:rPr>
-              <a:t>BEFORE</a:t>
-            </a:r>
-            <a:endParaRPr lang="en-US" sz="1050" dirty="0"/>
-          </a:p>
-        </p:txBody>
-      </p:sp>
-      <p:sp>
-        <p:nvSpPr>
-          <p:cNvPr id="6" name="Text 4"/>
-          <p:cNvSpPr/>
-          <p:nvPr/>
-        </p:nvSpPr>
-        <p:spPr>
-          <a:xfrm>
-            <a:off x="777240" y="2121408"/>
-            <a:ext cx="1828800" cy="1325880"/>
-          </a:xfrm>
-          <a:prstGeom prst="rect">
-            <a:avLst/>
-          </a:prstGeom>
-          <a:noFill/>
-          <a:ln/>
-        </p:spPr>
-        <p:txBody>
-          <a:bodyPr wrap="square" lIns="0" tIns="0" rIns="0" bIns="0" rtlCol="0" anchor="t"/>
-          <a:lstStyle/>
-          <a:p>
-            <a:pPr indent="0" marL="0">
-              <a:buNone/>
-            </a:pPr>
-            <a:r>
-              <a:rPr lang="en-US" sz="1250" dirty="0">
-                <a:solidFill>
-                  <a:srgbClr val="191919"/>
+              <a:t>review checklist</a:t>
+            </a:r>
+            <a:endParaRPr lang="en-US" sz="1300" dirty="0"/>
+          </a:p>
+          <a:p>
+            <a:pPr indent="0" marL="0">
+              <a:buNone/>
+            </a:pPr>
+            <a:r>
+              <a:rPr lang="en-US" sz="1150" dirty="0">
+                <a:solidFill>
+                  <a:srgbClr val="6B6B66"/>
                 </a:solidFill>
                 <a:latin typeface="Arial" pitchFamily="34" charset="0"/>
                 <a:ea typeface="Arial" pitchFamily="34" charset="-122"/>
                 <a:cs typeface="Arial" pitchFamily="34" charset="-120"/>
               </a:rPr>
-              <a:t>Your engineers run Claude Code one laptop at a time. Skills, agents, and hooks as individual features.</a:t>
-            </a:r>
-            <a:endParaRPr lang="en-US" sz="1250" dirty="0"/>
-          </a:p>
-        </p:txBody>
-      </p:sp>
-      <p:sp>
-        <p:nvSpPr>
-          <p:cNvPr id="7" name="Text 5"/>
-          <p:cNvSpPr/>
-          <p:nvPr/>
-        </p:nvSpPr>
-        <p:spPr>
-          <a:xfrm>
-            <a:off x="2971800" y="2377440"/>
-            <a:ext cx="320040" cy="457200"/>
-          </a:xfrm>
-          <a:prstGeom prst="rect">
-            <a:avLst/>
-          </a:prstGeom>
-          <a:noFill/>
-          <a:ln/>
-        </p:spPr>
-        <p:txBody>
-          <a:bodyPr wrap="square" lIns="0" tIns="0" rIns="0" bIns="0" rtlCol="0" anchor="ctr"/>
-          <a:lstStyle/>
-          <a:p>
-            <a:pPr algn="ctr" indent="0" marL="0">
-              <a:buNone/>
-            </a:pPr>
-            <a:r>
-              <a:rPr lang="en-US" sz="1800" dirty="0">
-                <a:solidFill>
-                  <a:srgbClr val="CC785C"/>
+              <a:t>a Google Doc</a:t>
+            </a:r>
+            <a:endParaRPr lang="en-US" sz="1300" dirty="0"/>
+          </a:p>
+        </p:txBody>
+      </p:sp>
+      <p:sp>
+        <p:nvSpPr>
+          <p:cNvPr id="7" name="Shape 5"/>
+          <p:cNvSpPr/>
+          <p:nvPr/>
+        </p:nvSpPr>
+        <p:spPr>
+          <a:xfrm>
+            <a:off x="5212080" y="2377440"/>
+            <a:ext cx="3383280" cy="731520"/>
+          </a:xfrm>
+          <a:prstGeom prst="rect">
+            <a:avLst/>
+          </a:prstGeom>
+          <a:solidFill>
+            <a:srgbClr val="F0EEE6"/>
+          </a:solidFill>
+          <a:ln/>
+        </p:spPr>
+      </p:sp>
+      <p:sp>
+        <p:nvSpPr>
+          <p:cNvPr id="8" name="Text 6"/>
+          <p:cNvSpPr/>
+          <p:nvPr/>
+        </p:nvSpPr>
+        <p:spPr>
+          <a:xfrm>
+            <a:off x="5468112" y="2487168"/>
+            <a:ext cx="2926080" cy="548640"/>
+          </a:xfrm>
+          <a:prstGeom prst="rect">
+            <a:avLst/>
+          </a:prstGeom>
+          <a:noFill/>
+          <a:ln/>
+        </p:spPr>
+        <p:txBody>
+          <a:bodyPr wrap="square" lIns="0" tIns="0" rIns="0" bIns="0" rtlCol="0" anchor="t"/>
+          <a:lstStyle/>
+          <a:p>
+            <a:pPr indent="0" marL="0">
+              <a:buNone/>
+            </a:pPr>
+            <a:r>
+              <a:rPr lang="en-US" sz="1300" b="1" dirty="0">
+                <a:solidFill>
+                  <a:srgbClr val="191919"/>
                 </a:solidFill>
                 <a:latin typeface="Arial" pitchFamily="34" charset="0"/>
                 <a:ea typeface="Arial" pitchFamily="34" charset="-122"/>
                 <a:cs typeface="Arial" pitchFamily="34" charset="-120"/>
               </a:rPr>
-              <a:t>→</a:t>
-            </a:r>
-            <a:endParaRPr lang="en-US" sz="1800" dirty="0"/>
-          </a:p>
-        </p:txBody>
-      </p:sp>
-      <p:sp>
-        <p:nvSpPr>
-          <p:cNvPr id="8" name="Shape 6"/>
-          <p:cNvSpPr/>
-          <p:nvPr/>
-        </p:nvSpPr>
-        <p:spPr>
-          <a:xfrm>
-            <a:off x="3429000" y="1554480"/>
-            <a:ext cx="2286000" cy="2103120"/>
+              <a:t>guardrails</a:t>
+            </a:r>
+            <a:endParaRPr lang="en-US" sz="1300" dirty="0"/>
+          </a:p>
+          <a:p>
+            <a:pPr indent="0" marL="0">
+              <a:buNone/>
+            </a:pPr>
+            <a:r>
+              <a:rPr lang="en-US" sz="1150" dirty="0">
+                <a:solidFill>
+                  <a:srgbClr val="6B6B66"/>
+                </a:solidFill>
+                <a:latin typeface="Arial" pitchFamily="34" charset="0"/>
+                <a:ea typeface="Arial" pitchFamily="34" charset="-122"/>
+                <a:cs typeface="Arial" pitchFamily="34" charset="-120"/>
+              </a:rPr>
+              <a:t>her settings.json</a:t>
+            </a:r>
+            <a:endParaRPr lang="en-US" sz="1300" dirty="0"/>
+          </a:p>
+        </p:txBody>
+      </p:sp>
+      <p:sp>
+        <p:nvSpPr>
+          <p:cNvPr id="9" name="Shape 7"/>
+          <p:cNvSpPr/>
+          <p:nvPr/>
+        </p:nvSpPr>
+        <p:spPr>
+          <a:xfrm>
+            <a:off x="5212080" y="3291840"/>
+            <a:ext cx="3383280" cy="731520"/>
           </a:xfrm>
           <a:prstGeom prst="rect">
             <a:avLst/>
@@ -5483,271 +5767,68 @@
           <a:solidFill>
             <a:srgbClr val="F0EEE6"/>
           </a:solidFill>
-          <a:ln w="19050">
-            <a:solidFill>
-              <a:srgbClr val="CC785C"/>
-            </a:solidFill>
-            <a:prstDash val="solid"/>
-          </a:ln>
-        </p:spPr>
-      </p:sp>
-      <p:sp>
-        <p:nvSpPr>
-          <p:cNvPr id="9" name="Text 7"/>
-          <p:cNvSpPr/>
-          <p:nvPr/>
-        </p:nvSpPr>
-        <p:spPr>
-          <a:xfrm>
-            <a:off x="3657600" y="1737360"/>
-            <a:ext cx="1828800" cy="274320"/>
-          </a:xfrm>
-          <a:prstGeom prst="rect">
-            <a:avLst/>
-          </a:prstGeom>
-          <a:noFill/>
-          <a:ln/>
-        </p:spPr>
-        <p:txBody>
-          <a:bodyPr wrap="square" lIns="0" tIns="0" rIns="0" bIns="0" rtlCol="0" anchor="ctr"/>
-          <a:lstStyle/>
-          <a:p>
-            <a:pPr algn="l" indent="0" marL="0">
-              <a:buNone/>
-            </a:pPr>
-            <a:r>
-              <a:rPr lang="en-US" sz="1050" b="1" spc="300" kern="0" dirty="0">
-                <a:solidFill>
-                  <a:srgbClr val="6B6B66"/>
+          <a:ln/>
+        </p:spPr>
+      </p:sp>
+      <p:sp>
+        <p:nvSpPr>
+          <p:cNvPr id="10" name="Text 8"/>
+          <p:cNvSpPr/>
+          <p:nvPr/>
+        </p:nvSpPr>
+        <p:spPr>
+          <a:xfrm>
+            <a:off x="5468112" y="3401568"/>
+            <a:ext cx="2926080" cy="548640"/>
+          </a:xfrm>
+          <a:prstGeom prst="rect">
+            <a:avLst/>
+          </a:prstGeom>
+          <a:noFill/>
+          <a:ln/>
+        </p:spPr>
+        <p:txBody>
+          <a:bodyPr wrap="square" lIns="0" tIns="0" rIns="0" bIns="0" rtlCol="0" anchor="t"/>
+          <a:lstStyle/>
+          <a:p>
+            <a:pPr indent="0" marL="0">
+              <a:buNone/>
+            </a:pPr>
+            <a:r>
+              <a:rPr lang="en-US" sz="1300" b="1" dirty="0">
+                <a:solidFill>
+                  <a:srgbClr val="191919"/>
                 </a:solidFill>
                 <a:latin typeface="Arial" pitchFamily="34" charset="0"/>
                 <a:ea typeface="Arial" pitchFamily="34" charset="-122"/>
                 <a:cs typeface="Arial" pitchFamily="34" charset="-120"/>
               </a:rPr>
-              <a:t>THIS SESSION</a:t>
-            </a:r>
-            <a:endParaRPr lang="en-US" sz="1050" dirty="0"/>
-          </a:p>
-        </p:txBody>
-      </p:sp>
-      <p:sp>
-        <p:nvSpPr>
-          <p:cNvPr id="10" name="Text 8"/>
-          <p:cNvSpPr/>
-          <p:nvPr/>
-        </p:nvSpPr>
-        <p:spPr>
-          <a:xfrm>
-            <a:off x="3657600" y="2121408"/>
-            <a:ext cx="1828800" cy="1325880"/>
-          </a:xfrm>
-          <a:prstGeom prst="rect">
-            <a:avLst/>
-          </a:prstGeom>
-          <a:noFill/>
-          <a:ln/>
-        </p:spPr>
-        <p:txBody>
-          <a:bodyPr wrap="square" lIns="0" tIns="0" rIns="0" bIns="0" rtlCol="0" anchor="t"/>
-          <a:lstStyle/>
-          <a:p>
-            <a:pPr indent="0" marL="0">
-              <a:buNone/>
-            </a:pPr>
-            <a:r>
-              <a:rPr lang="en-US" sz="1250" dirty="0">
-                <a:solidFill>
-                  <a:srgbClr val="191919"/>
+              <a:t>instincts</a:t>
+            </a:r>
+            <a:endParaRPr lang="en-US" sz="1300" dirty="0"/>
+          </a:p>
+          <a:p>
+            <a:pPr indent="0" marL="0">
+              <a:buNone/>
+            </a:pPr>
+            <a:r>
+              <a:rPr lang="en-US" sz="1150" dirty="0">
+                <a:solidFill>
+                  <a:srgbClr val="6B6B66"/>
                 </a:solidFill>
                 <a:latin typeface="Arial" pitchFamily="34" charset="0"/>
                 <a:ea typeface="Arial" pitchFamily="34" charset="-122"/>
                 <a:cs typeface="Arial" pitchFamily="34" charset="-120"/>
               </a:rPr>
-              <a:t>Those pieces become one versioned unit your platform team installs, governs, and updates.</a:t>
-            </a:r>
-            <a:endParaRPr lang="en-US" sz="1250" dirty="0"/>
+              <a:t>in her head</a:t>
+            </a:r>
+            <a:endParaRPr lang="en-US" sz="1300" dirty="0"/>
           </a:p>
         </p:txBody>
       </p:sp>
       <p:sp>
         <p:nvSpPr>
           <p:cNvPr id="11" name="Text 9"/>
-          <p:cNvSpPr/>
-          <p:nvPr/>
-        </p:nvSpPr>
-        <p:spPr>
-          <a:xfrm>
-            <a:off x="5852160" y="2377440"/>
-            <a:ext cx="320040" cy="457200"/>
-          </a:xfrm>
-          <a:prstGeom prst="rect">
-            <a:avLst/>
-          </a:prstGeom>
-          <a:noFill/>
-          <a:ln/>
-        </p:spPr>
-        <p:txBody>
-          <a:bodyPr wrap="square" lIns="0" tIns="0" rIns="0" bIns="0" rtlCol="0" anchor="ctr"/>
-          <a:lstStyle/>
-          <a:p>
-            <a:pPr algn="ctr" indent="0" marL="0">
-              <a:buNone/>
-            </a:pPr>
-            <a:r>
-              <a:rPr lang="en-US" sz="1800" dirty="0">
-                <a:solidFill>
-                  <a:srgbClr val="CC785C"/>
-                </a:solidFill>
-                <a:latin typeface="Arial" pitchFamily="34" charset="0"/>
-                <a:ea typeface="Arial" pitchFamily="34" charset="-122"/>
-                <a:cs typeface="Arial" pitchFamily="34" charset="-120"/>
-              </a:rPr>
-              <a:t>→</a:t>
-            </a:r>
-            <a:endParaRPr lang="en-US" sz="1800" dirty="0"/>
-          </a:p>
-        </p:txBody>
-      </p:sp>
-      <p:sp>
-        <p:nvSpPr>
-          <p:cNvPr id="12" name="Shape 10"/>
-          <p:cNvSpPr/>
-          <p:nvPr/>
-        </p:nvSpPr>
-        <p:spPr>
-          <a:xfrm>
-            <a:off x="6309360" y="1554480"/>
-            <a:ext cx="2286000" cy="2103120"/>
-          </a:xfrm>
-          <a:prstGeom prst="rect">
-            <a:avLst/>
-          </a:prstGeom>
-          <a:solidFill>
-            <a:srgbClr val="F0EEE6"/>
-          </a:solidFill>
-          <a:ln/>
-        </p:spPr>
-      </p:sp>
-      <p:sp>
-        <p:nvSpPr>
-          <p:cNvPr id="13" name="Text 11"/>
-          <p:cNvSpPr/>
-          <p:nvPr/>
-        </p:nvSpPr>
-        <p:spPr>
-          <a:xfrm>
-            <a:off x="6537960" y="1737360"/>
-            <a:ext cx="1828800" cy="274320"/>
-          </a:xfrm>
-          <a:prstGeom prst="rect">
-            <a:avLst/>
-          </a:prstGeom>
-          <a:noFill/>
-          <a:ln/>
-        </p:spPr>
-        <p:txBody>
-          <a:bodyPr wrap="square" lIns="0" tIns="0" rIns="0" bIns="0" rtlCol="0" anchor="ctr"/>
-          <a:lstStyle/>
-          <a:p>
-            <a:pPr algn="l" indent="0" marL="0">
-              <a:buNone/>
-            </a:pPr>
-            <a:r>
-              <a:rPr lang="en-US" sz="1050" b="1" spc="300" kern="0" dirty="0">
-                <a:solidFill>
-                  <a:srgbClr val="6B6B66"/>
-                </a:solidFill>
-                <a:latin typeface="Arial" pitchFamily="34" charset="0"/>
-                <a:ea typeface="Arial" pitchFamily="34" charset="-122"/>
-                <a:cs typeface="Arial" pitchFamily="34" charset="-120"/>
-              </a:rPr>
-              <a:t>AFTER</a:t>
-            </a:r>
-            <a:endParaRPr lang="en-US" sz="1050" dirty="0"/>
-          </a:p>
-        </p:txBody>
-      </p:sp>
-      <p:sp>
-        <p:nvSpPr>
-          <p:cNvPr id="14" name="Text 12"/>
-          <p:cNvSpPr/>
-          <p:nvPr/>
-        </p:nvSpPr>
-        <p:spPr>
-          <a:xfrm>
-            <a:off x="6537960" y="2121408"/>
-            <a:ext cx="1828800" cy="1325880"/>
-          </a:xfrm>
-          <a:prstGeom prst="rect">
-            <a:avLst/>
-          </a:prstGeom>
-          <a:noFill/>
-          <a:ln/>
-        </p:spPr>
-        <p:txBody>
-          <a:bodyPr wrap="square" lIns="0" tIns="0" rIns="0" bIns="0" rtlCol="0" anchor="t"/>
-          <a:lstStyle/>
-          <a:p>
-            <a:pPr indent="0" marL="0">
-              <a:buNone/>
-            </a:pPr>
-            <a:r>
-              <a:rPr lang="en-US" sz="1250" dirty="0">
-                <a:solidFill>
-                  <a:srgbClr val="191919"/>
-                </a:solidFill>
-                <a:latin typeface="Arial" pitchFamily="34" charset="0"/>
-                <a:ea typeface="Arial" pitchFamily="34" charset="-122"/>
-                <a:cs typeface="Arial" pitchFamily="34" charset="-120"/>
-              </a:rPr>
-              <a:t>Fork the kit, swap in your conventions and policy, and run a two-week pilot in your repo.</a:t>
-            </a:r>
-            <a:endParaRPr lang="en-US" sz="1250" dirty="0"/>
-          </a:p>
-        </p:txBody>
-      </p:sp>
-      <p:sp>
-        <p:nvSpPr>
-          <p:cNvPr id="15" name="Text 13"/>
-          <p:cNvSpPr/>
-          <p:nvPr/>
-        </p:nvSpPr>
-        <p:spPr>
-          <a:xfrm>
-            <a:off x="548640" y="3977640"/>
-            <a:ext cx="8046720" cy="365760"/>
-          </a:xfrm>
-          <a:prstGeom prst="rect">
-            <a:avLst/>
-          </a:prstGeom>
-          <a:noFill/>
-          <a:ln/>
-        </p:spPr>
-        <p:txBody>
-          <a:bodyPr wrap="square" lIns="0" tIns="0" rIns="0" bIns="0" rtlCol="0" anchor="ctr"/>
-          <a:lstStyle/>
-          <a:p>
-            <a:pPr indent="0" marL="0">
-              <a:buNone/>
-            </a:pPr>
-            <a:r>
-              <a:rPr lang="en-US" sz="1150" dirty="0">
-                <a:solidFill>
-                  <a:srgbClr val="6B6B66"/>
-                </a:solidFill>
-                <a:latin typeface="Arial" pitchFamily="34" charset="0"/>
-                <a:ea typeface="Arial" pitchFamily="34" charset="-122"/>
-                <a:cs typeface="Arial" pitchFamily="34" charset="-120"/>
-              </a:rPr>
-              <a:t>To follow along on a laptop: Claude Code installed and authenticated, Node 18 or higher, and a clone of the repo.</a:t>
-            </a:r>
-            <a:endParaRPr lang="en-US" sz="1150" dirty="0"/>
-          </a:p>
-        </p:txBody>
-      </p:sp>
-      <p:sp>
-        <p:nvSpPr>
-          <p:cNvPr id="16" name="Text 14"/>
           <p:cNvSpPr/>
           <p:nvPr/>
         </p:nvSpPr>
@@ -5818,23 +5899,42 @@
       </p:grpSpPr>
       <p:sp>
         <p:nvSpPr>
-          <p:cNvPr id="2" name="Shape 0"/>
-          <p:cNvSpPr/>
-          <p:nvPr/>
-        </p:nvSpPr>
-        <p:spPr>
-          <a:xfrm>
-            <a:off x="548640" y="457200"/>
-            <a:ext cx="457200" cy="25603"/>
-          </a:xfrm>
-          <a:prstGeom prst="rect">
-            <a:avLst/>
-          </a:prstGeom>
-          <a:solidFill>
-            <a:srgbClr val="CC785C"/>
-          </a:solidFill>
-          <a:ln/>
-        </p:spPr>
+          <p:cNvPr id="2" name="Text 0"/>
+          <p:cNvSpPr/>
+          <p:nvPr/>
+        </p:nvSpPr>
+        <p:spPr>
+          <a:xfrm>
+            <a:off x="548640" y="777240"/>
+            <a:ext cx="4572000" cy="256032"/>
+          </a:xfrm>
+          <a:prstGeom prst="rect">
+            <a:avLst/>
+          </a:prstGeom>
+          <a:noFill/>
+          <a:ln/>
+        </p:spPr>
+        <p:txBody>
+          <a:bodyPr wrap="square" lIns="0" tIns="0" rIns="0" bIns="0" rtlCol="0" anchor="ctr"/>
+          <a:lstStyle/>
+          <a:p>
+            <a:pPr indent="0" marL="0">
+              <a:buNone/>
+            </a:pPr>
+            <a:r>
+              <a:rPr lang="en-US" sz="1050" b="1" spc="300" kern="0" dirty="0">
+                <a:solidFill>
+                  <a:srgbClr val="6B6B66"/>
+                </a:solidFill>
+                <a:latin typeface="Arial" pitchFamily="34" charset="0"/>
+                <a:ea typeface="Arial" pitchFamily="34" charset="-122"/>
+                <a:cs typeface="Arial" pitchFamily="34" charset="-120"/>
+              </a:rPr>
+              <a:t>THE SCALE PROBLEM</a:t>
+            </a:r>
+            <a:endParaRPr lang="en-US" sz="1050" dirty="0"/>
+          </a:p>
+        </p:txBody>
       </p:sp>
       <p:sp>
         <p:nvSpPr>
@@ -5844,24 +5944,24 @@
         </p:nvSpPr>
         <p:spPr>
           <a:xfrm>
-            <a:off x="548640" y="566928"/>
-            <a:ext cx="8046720" cy="685800"/>
-          </a:xfrm>
-          <a:prstGeom prst="rect">
-            <a:avLst/>
-          </a:prstGeom>
-          <a:noFill/>
-          <a:ln/>
-        </p:spPr>
-        <p:txBody>
-          <a:bodyPr wrap="square" lIns="0" tIns="0" rIns="0" bIns="0" rtlCol="0" anchor="t"/>
-          <a:lstStyle/>
-          <a:p>
-            <a:pPr algn="l" indent="0" marL="0">
-              <a:buNone/>
-            </a:pPr>
-            <a:r>
-              <a:rPr lang="en-US" sz="2600" dirty="0">
+            <a:off x="548640" y="1188720"/>
+            <a:ext cx="8046720" cy="1645920"/>
+          </a:xfrm>
+          <a:prstGeom prst="rect">
+            <a:avLst/>
+          </a:prstGeom>
+          <a:noFill/>
+          <a:ln/>
+        </p:spPr>
+        <p:txBody>
+          <a:bodyPr wrap="square" lIns="0" tIns="0" rIns="0" bIns="0" rtlCol="0" anchor="ctr"/>
+          <a:lstStyle/>
+          <a:p>
+            <a:pPr indent="0" marL="0">
+              <a:buNone/>
+            </a:pPr>
+            <a:r>
+              <a:rPr lang="en-US" sz="11000" dirty="0">
                 <a:solidFill>
                   <a:srgbClr val="191919"/>
                 </a:solidFill>
@@ -5869,42 +5969,22 @@
                 <a:ea typeface="Georgia" pitchFamily="34" charset="-122"/>
                 <a:cs typeface="Georgia" pitchFamily="34" charset="-120"/>
               </a:rPr>
-              <a:t>In 30 minutes, your team does four things.</a:t>
-            </a:r>
-            <a:endParaRPr lang="en-US" sz="2600" dirty="0"/>
-          </a:p>
-        </p:txBody>
-      </p:sp>
-      <p:sp>
-        <p:nvSpPr>
-          <p:cNvPr id="4" name="Shape 2"/>
-          <p:cNvSpPr/>
-          <p:nvPr/>
-        </p:nvSpPr>
-        <p:spPr>
-          <a:xfrm>
-            <a:off x="548640" y="1371600"/>
-            <a:ext cx="3886200" cy="1481328"/>
-          </a:xfrm>
-          <a:prstGeom prst="rect">
-            <a:avLst/>
-          </a:prstGeom>
-          <a:solidFill>
-            <a:srgbClr val="F0EEE6"/>
-          </a:solidFill>
-          <a:ln/>
-        </p:spPr>
-      </p:sp>
-      <p:sp>
-        <p:nvSpPr>
-          <p:cNvPr id="5" name="Text 3"/>
-          <p:cNvSpPr/>
-          <p:nvPr/>
-        </p:nvSpPr>
-        <p:spPr>
-          <a:xfrm>
-            <a:off x="749808" y="1536192"/>
-            <a:ext cx="457200" cy="457200"/>
+              <a:t>200</a:t>
+            </a:r>
+            <a:endParaRPr lang="en-US" sz="11000" dirty="0"/>
+          </a:p>
+        </p:txBody>
+      </p:sp>
+      <p:sp>
+        <p:nvSpPr>
+          <p:cNvPr id="4" name="Text 2"/>
+          <p:cNvSpPr/>
+          <p:nvPr/>
+        </p:nvSpPr>
+        <p:spPr>
+          <a:xfrm>
+            <a:off x="548640" y="3154680"/>
+            <a:ext cx="7680960" cy="457200"/>
           </a:xfrm>
           <a:prstGeom prst="rect">
             <a:avLst/>
@@ -5920,448 +6000,23 @@
               <a:buNone/>
             </a:pPr>
             <a:r>
-              <a:rPr lang="en-US" sz="2200" dirty="0">
-                <a:solidFill>
-                  <a:srgbClr val="CC785C"/>
-                </a:solidFill>
-                <a:latin typeface="Georgia" pitchFamily="34" charset="0"/>
-                <a:ea typeface="Georgia" pitchFamily="34" charset="-122"/>
-                <a:cs typeface="Georgia" pitchFamily="34" charset="-120"/>
-              </a:rPr>
-              <a:t>1</a:t>
-            </a:r>
-            <a:endParaRPr lang="en-US" sz="2200" dirty="0"/>
-          </a:p>
-        </p:txBody>
-      </p:sp>
-      <p:sp>
-        <p:nvSpPr>
-          <p:cNvPr id="6" name="Text 4"/>
-          <p:cNvSpPr/>
-          <p:nvPr/>
-        </p:nvSpPr>
-        <p:spPr>
-          <a:xfrm>
-            <a:off x="1234440" y="1554480"/>
-            <a:ext cx="2971800" cy="1115568"/>
-          </a:xfrm>
-          <a:prstGeom prst="rect">
-            <a:avLst/>
-          </a:prstGeom>
-          <a:noFill/>
-          <a:ln/>
-        </p:spPr>
-        <p:txBody>
-          <a:bodyPr wrap="square" lIns="0" tIns="0" rIns="0" bIns="0" rtlCol="0" anchor="t"/>
-          <a:lstStyle/>
-          <a:p>
-            <a:pPr indent="0" marL="0">
-              <a:spcAft>
-                <a:spcPts val="400"/>
-              </a:spcAft>
-              <a:buNone/>
-            </a:pPr>
-            <a:r>
-              <a:rPr lang="en-US" sz="1350" b="1" dirty="0">
-                <a:solidFill>
-                  <a:srgbClr val="191919"/>
+              <a:rPr lang="en-US" sz="1600" dirty="0">
+                <a:solidFill>
+                  <a:srgbClr val="6B6B66"/>
                 </a:solidFill>
                 <a:latin typeface="Arial" pitchFamily="34" charset="0"/>
                 <a:ea typeface="Arial" pitchFamily="34" charset="-122"/>
                 <a:cs typeface="Arial" pitchFamily="34" charset="-120"/>
               </a:rPr>
-              <a:t>Watch a vanilla machine standardize.</a:t>
-            </a:r>
-            <a:endParaRPr lang="en-US" sz="1350" dirty="0"/>
-          </a:p>
-          <a:p>
-            <a:pPr indent="0" marL="0">
-              <a:spcAft>
-                <a:spcPts val="400"/>
-              </a:spcAft>
-              <a:buNone/>
-            </a:pPr>
-            <a:r>
-              <a:rPr lang="en-US" sz="1200" dirty="0">
-                <a:solidFill>
-                  <a:srgbClr val="6B6B66"/>
-                </a:solidFill>
-                <a:latin typeface="Arial" pitchFamily="34" charset="0"/>
-                <a:ea typeface="Arial" pitchFamily="34" charset="-122"/>
-                <a:cs typeface="Arial" pitchFamily="34" charset="-120"/>
-              </a:rPr>
-              <a:t>The team's conventions, reviewer, and guardrails arrive in ninety seconds.</a:t>
-            </a:r>
-            <a:endParaRPr lang="en-US" sz="1350" dirty="0"/>
-          </a:p>
-        </p:txBody>
-      </p:sp>
-      <p:sp>
-        <p:nvSpPr>
-          <p:cNvPr id="7" name="Shape 5"/>
-          <p:cNvSpPr/>
-          <p:nvPr/>
-        </p:nvSpPr>
-        <p:spPr>
-          <a:xfrm>
-            <a:off x="4709160" y="1371600"/>
-            <a:ext cx="3886200" cy="1481328"/>
-          </a:xfrm>
-          <a:prstGeom prst="rect">
-            <a:avLst/>
-          </a:prstGeom>
-          <a:solidFill>
-            <a:srgbClr val="F0EEE6"/>
-          </a:solidFill>
-          <a:ln/>
-        </p:spPr>
-      </p:sp>
-      <p:sp>
-        <p:nvSpPr>
-          <p:cNvPr id="8" name="Text 6"/>
-          <p:cNvSpPr/>
-          <p:nvPr/>
-        </p:nvSpPr>
-        <p:spPr>
-          <a:xfrm>
-            <a:off x="4910328" y="1536192"/>
-            <a:ext cx="457200" cy="457200"/>
-          </a:xfrm>
-          <a:prstGeom prst="rect">
-            <a:avLst/>
-          </a:prstGeom>
-          <a:noFill/>
-          <a:ln/>
-        </p:spPr>
-        <p:txBody>
-          <a:bodyPr wrap="square" lIns="0" tIns="0" rIns="0" bIns="0" rtlCol="0" anchor="ctr"/>
-          <a:lstStyle/>
-          <a:p>
-            <a:pPr indent="0" marL="0">
-              <a:buNone/>
-            </a:pPr>
-            <a:r>
-              <a:rPr lang="en-US" sz="2200" dirty="0">
-                <a:solidFill>
-                  <a:srgbClr val="CC785C"/>
-                </a:solidFill>
-                <a:latin typeface="Georgia" pitchFamily="34" charset="0"/>
-                <a:ea typeface="Georgia" pitchFamily="34" charset="-122"/>
-                <a:cs typeface="Georgia" pitchFamily="34" charset="-120"/>
-              </a:rPr>
-              <a:t>2</a:t>
-            </a:r>
-            <a:endParaRPr lang="en-US" sz="2200" dirty="0"/>
-          </a:p>
-        </p:txBody>
-      </p:sp>
-      <p:sp>
-        <p:nvSpPr>
-          <p:cNvPr id="9" name="Text 7"/>
-          <p:cNvSpPr/>
-          <p:nvPr/>
-        </p:nvSpPr>
-        <p:spPr>
-          <a:xfrm>
-            <a:off x="5394960" y="1554480"/>
-            <a:ext cx="2971800" cy="1115568"/>
-          </a:xfrm>
-          <a:prstGeom prst="rect">
-            <a:avLst/>
-          </a:prstGeom>
-          <a:noFill/>
-          <a:ln/>
-        </p:spPr>
-        <p:txBody>
-          <a:bodyPr wrap="square" lIns="0" tIns="0" rIns="0" bIns="0" rtlCol="0" anchor="t"/>
-          <a:lstStyle/>
-          <a:p>
-            <a:pPr indent="0" marL="0">
-              <a:spcAft>
-                <a:spcPts val="400"/>
-              </a:spcAft>
-              <a:buNone/>
-            </a:pPr>
-            <a:r>
-              <a:rPr lang="en-US" sz="1350" b="1" dirty="0">
-                <a:solidFill>
-                  <a:srgbClr val="191919"/>
-                </a:solidFill>
-                <a:latin typeface="Arial" pitchFamily="34" charset="0"/>
-                <a:ea typeface="Arial" pitchFamily="34" charset="-122"/>
-                <a:cs typeface="Arial" pitchFamily="34" charset="-120"/>
-              </a:rPr>
-              <a:t>See your standards do the reviewing.</a:t>
-            </a:r>
-            <a:endParaRPr lang="en-US" sz="1350" dirty="0"/>
-          </a:p>
-          <a:p>
-            <a:pPr indent="0" marL="0">
-              <a:spcAft>
-                <a:spcPts val="400"/>
-              </a:spcAft>
-              <a:buNone/>
-            </a:pPr>
-            <a:r>
-              <a:rPr lang="en-US" sz="1200" dirty="0">
-                <a:solidFill>
-                  <a:srgbClr val="6B6B66"/>
-                </a:solidFill>
-                <a:latin typeface="Arial" pitchFamily="34" charset="0"/>
-                <a:ea typeface="Arial" pitchFamily="34" charset="-122"/>
-                <a:cs typeface="Arial" pitchFamily="34" charset="-120"/>
-              </a:rPr>
-              <a:t>Findings cite written rule numbers, not generic AI taste.</a:t>
-            </a:r>
-            <a:endParaRPr lang="en-US" sz="1350" dirty="0"/>
-          </a:p>
-        </p:txBody>
-      </p:sp>
-      <p:sp>
-        <p:nvSpPr>
-          <p:cNvPr id="10" name="Shape 8"/>
-          <p:cNvSpPr/>
-          <p:nvPr/>
-        </p:nvSpPr>
-        <p:spPr>
-          <a:xfrm>
-            <a:off x="548640" y="3081528"/>
-            <a:ext cx="3886200" cy="1481328"/>
-          </a:xfrm>
-          <a:prstGeom prst="rect">
-            <a:avLst/>
-          </a:prstGeom>
-          <a:solidFill>
-            <a:srgbClr val="F0EEE6"/>
-          </a:solidFill>
-          <a:ln/>
-        </p:spPr>
-      </p:sp>
-      <p:sp>
-        <p:nvSpPr>
-          <p:cNvPr id="11" name="Text 9"/>
-          <p:cNvSpPr/>
-          <p:nvPr/>
-        </p:nvSpPr>
-        <p:spPr>
-          <a:xfrm>
-            <a:off x="749808" y="3246120"/>
-            <a:ext cx="457200" cy="457200"/>
-          </a:xfrm>
-          <a:prstGeom prst="rect">
-            <a:avLst/>
-          </a:prstGeom>
-          <a:noFill/>
-          <a:ln/>
-        </p:spPr>
-        <p:txBody>
-          <a:bodyPr wrap="square" lIns="0" tIns="0" rIns="0" bIns="0" rtlCol="0" anchor="ctr"/>
-          <a:lstStyle/>
-          <a:p>
-            <a:pPr indent="0" marL="0">
-              <a:buNone/>
-            </a:pPr>
-            <a:r>
-              <a:rPr lang="en-US" sz="2200" dirty="0">
-                <a:solidFill>
-                  <a:srgbClr val="CC785C"/>
-                </a:solidFill>
-                <a:latin typeface="Georgia" pitchFamily="34" charset="0"/>
-                <a:ea typeface="Georgia" pitchFamily="34" charset="-122"/>
-                <a:cs typeface="Georgia" pitchFamily="34" charset="-120"/>
-              </a:rPr>
-              <a:t>3</a:t>
-            </a:r>
-            <a:endParaRPr lang="en-US" sz="2200" dirty="0"/>
-          </a:p>
-        </p:txBody>
-      </p:sp>
-      <p:sp>
-        <p:nvSpPr>
-          <p:cNvPr id="12" name="Text 10"/>
-          <p:cNvSpPr/>
-          <p:nvPr/>
-        </p:nvSpPr>
-        <p:spPr>
-          <a:xfrm>
-            <a:off x="1234440" y="3264408"/>
-            <a:ext cx="2971800" cy="1115568"/>
-          </a:xfrm>
-          <a:prstGeom prst="rect">
-            <a:avLst/>
-          </a:prstGeom>
-          <a:noFill/>
-          <a:ln/>
-        </p:spPr>
-        <p:txBody>
-          <a:bodyPr wrap="square" lIns="0" tIns="0" rIns="0" bIns="0" rtlCol="0" anchor="t"/>
-          <a:lstStyle/>
-          <a:p>
-            <a:pPr indent="0" marL="0">
-              <a:spcAft>
-                <a:spcPts val="400"/>
-              </a:spcAft>
-              <a:buNone/>
-            </a:pPr>
-            <a:r>
-              <a:rPr lang="en-US" sz="1350" b="1" dirty="0">
-                <a:solidFill>
-                  <a:srgbClr val="191919"/>
-                </a:solidFill>
-                <a:latin typeface="Arial" pitchFamily="34" charset="0"/>
-                <a:ea typeface="Arial" pitchFamily="34" charset="-122"/>
-                <a:cs typeface="Arial" pitchFamily="34" charset="-120"/>
-              </a:rPr>
-              <a:t>Trigger a deny and read its receipt.</a:t>
-            </a:r>
-            <a:endParaRPr lang="en-US" sz="1350" dirty="0"/>
-          </a:p>
-          <a:p>
-            <a:pPr indent="0" marL="0">
-              <a:spcAft>
-                <a:spcPts val="400"/>
-              </a:spcAft>
-              <a:buNone/>
-            </a:pPr>
-            <a:r>
-              <a:rPr lang="en-US" sz="1200" dirty="0">
-                <a:solidFill>
-                  <a:srgbClr val="6B6B66"/>
-                </a:solidFill>
-                <a:latin typeface="Arial" pitchFamily="34" charset="0"/>
-                <a:ea typeface="Arial" pitchFamily="34" charset="-122"/>
-                <a:cs typeface="Arial" pitchFamily="34" charset="-120"/>
-              </a:rPr>
-              <a:t>A process gate blocks the command and the audit trail shows it.</a:t>
-            </a:r>
-            <a:endParaRPr lang="en-US" sz="1350" dirty="0"/>
-          </a:p>
-        </p:txBody>
-      </p:sp>
-      <p:sp>
-        <p:nvSpPr>
-          <p:cNvPr id="13" name="Shape 11"/>
-          <p:cNvSpPr/>
-          <p:nvPr/>
-        </p:nvSpPr>
-        <p:spPr>
-          <a:xfrm>
-            <a:off x="4709160" y="3081528"/>
-            <a:ext cx="3886200" cy="1481328"/>
-          </a:xfrm>
-          <a:prstGeom prst="rect">
-            <a:avLst/>
-          </a:prstGeom>
-          <a:solidFill>
-            <a:srgbClr val="F0EEE6"/>
-          </a:solidFill>
-          <a:ln/>
-        </p:spPr>
-      </p:sp>
-      <p:sp>
-        <p:nvSpPr>
-          <p:cNvPr id="14" name="Text 12"/>
-          <p:cNvSpPr/>
-          <p:nvPr/>
-        </p:nvSpPr>
-        <p:spPr>
-          <a:xfrm>
-            <a:off x="4910328" y="3246120"/>
-            <a:ext cx="457200" cy="457200"/>
-          </a:xfrm>
-          <a:prstGeom prst="rect">
-            <a:avLst/>
-          </a:prstGeom>
-          <a:noFill/>
-          <a:ln/>
-        </p:spPr>
-        <p:txBody>
-          <a:bodyPr wrap="square" lIns="0" tIns="0" rIns="0" bIns="0" rtlCol="0" anchor="ctr"/>
-          <a:lstStyle/>
-          <a:p>
-            <a:pPr indent="0" marL="0">
-              <a:buNone/>
-            </a:pPr>
-            <a:r>
-              <a:rPr lang="en-US" sz="2200" dirty="0">
-                <a:solidFill>
-                  <a:srgbClr val="CC785C"/>
-                </a:solidFill>
-                <a:latin typeface="Georgia" pitchFamily="34" charset="0"/>
-                <a:ea typeface="Georgia" pitchFamily="34" charset="-122"/>
-                <a:cs typeface="Georgia" pitchFamily="34" charset="-120"/>
-              </a:rPr>
-              <a:t>4</a:t>
-            </a:r>
-            <a:endParaRPr lang="en-US" sz="2200" dirty="0"/>
-          </a:p>
-        </p:txBody>
-      </p:sp>
-      <p:sp>
-        <p:nvSpPr>
-          <p:cNvPr id="15" name="Text 13"/>
-          <p:cNvSpPr/>
-          <p:nvPr/>
-        </p:nvSpPr>
-        <p:spPr>
-          <a:xfrm>
-            <a:off x="5394960" y="3264408"/>
-            <a:ext cx="2971800" cy="1115568"/>
-          </a:xfrm>
-          <a:prstGeom prst="rect">
-            <a:avLst/>
-          </a:prstGeom>
-          <a:noFill/>
-          <a:ln/>
-        </p:spPr>
-        <p:txBody>
-          <a:bodyPr wrap="square" lIns="0" tIns="0" rIns="0" bIns="0" rtlCol="0" anchor="t"/>
-          <a:lstStyle/>
-          <a:p>
-            <a:pPr indent="0" marL="0">
-              <a:spcAft>
-                <a:spcPts val="400"/>
-              </a:spcAft>
-              <a:buNone/>
-            </a:pPr>
-            <a:r>
-              <a:rPr lang="en-US" sz="1350" b="1" dirty="0">
-                <a:solidFill>
-                  <a:srgbClr val="191919"/>
-                </a:solidFill>
-                <a:latin typeface="Arial" pitchFamily="34" charset="0"/>
-                <a:ea typeface="Arial" pitchFamily="34" charset="-122"/>
-                <a:cs typeface="Arial" pitchFamily="34" charset="-120"/>
-              </a:rPr>
-              <a:t>Ship a policy rule to the fleet.</a:t>
-            </a:r>
-            <a:endParaRPr lang="en-US" sz="1350" dirty="0"/>
-          </a:p>
-          <a:p>
-            <a:pPr indent="0" marL="0">
-              <a:spcAft>
-                <a:spcPts val="400"/>
-              </a:spcAft>
-              <a:buNone/>
-            </a:pPr>
-            <a:r>
-              <a:rPr lang="en-US" sz="1200" dirty="0">
-                <a:solidFill>
-                  <a:srgbClr val="6B6B66"/>
-                </a:solidFill>
-                <a:latin typeface="Arial" pitchFamily="34" charset="0"/>
-                <a:ea typeface="Arial" pitchFamily="34" charset="-122"/>
-                <a:cs typeface="Arial" pitchFamily="34" charset="-120"/>
-              </a:rPr>
-              <a:t>Your rule, proven offline in seconds, rolled out with one version bump.</a:t>
-            </a:r>
-            <a:endParaRPr lang="en-US" sz="1350" dirty="0"/>
-          </a:p>
-        </p:txBody>
-      </p:sp>
-      <p:sp>
-        <p:nvSpPr>
-          <p:cNvPr id="16" name="Text 14"/>
+              <a:t>engineers. 200 copies of a .claude/ folder. Zero versioning.</a:t>
+            </a:r>
+            <a:endParaRPr lang="en-US" sz="1600" dirty="0"/>
+          </a:p>
+        </p:txBody>
+      </p:sp>
+      <p:sp>
+        <p:nvSpPr>
+          <p:cNvPr id="5" name="Text 3"/>
           <p:cNvSpPr/>
           <p:nvPr/>
         </p:nvSpPr>
@@ -6438,8 +6093,8 @@
         </p:nvSpPr>
         <p:spPr>
           <a:xfrm>
-            <a:off x="548640" y="1234440"/>
-            <a:ext cx="3657600" cy="274320"/>
+            <a:off x="548640" y="1371600"/>
+            <a:ext cx="4572000" cy="256032"/>
           </a:xfrm>
           <a:prstGeom prst="rect">
             <a:avLst/>
@@ -6451,7 +6106,7 @@
           <a:bodyPr wrap="square" lIns="0" tIns="0" rIns="0" bIns="0" rtlCol="0" anchor="ctr"/>
           <a:lstStyle/>
           <a:p>
-            <a:pPr algn="l" indent="0" marL="0">
+            <a:pPr indent="0" marL="0">
               <a:buNone/>
             </a:pPr>
             <a:r>
@@ -6463,7 +6118,7 @@
                 <a:ea typeface="Arial" pitchFamily="34" charset="-122"/>
                 <a:cs typeface="Arial" pitchFamily="34" charset="-120"/>
               </a:rPr>
-              <a:t>THE PROBLEM</a:t>
+              <a:t>THE TRAP</a:t>
             </a:r>
             <a:endParaRPr lang="en-US" sz="1050" dirty="0"/>
           </a:p>
@@ -6477,8 +6132,8 @@
         </p:nvSpPr>
         <p:spPr>
           <a:xfrm>
-            <a:off x="548640" y="1600200"/>
-            <a:ext cx="7955280" cy="1554480"/>
+            <a:off x="548640" y="1783080"/>
+            <a:ext cx="7863840" cy="1645920"/>
           </a:xfrm>
           <a:prstGeom prst="rect">
             <a:avLst/>
@@ -6494,7 +6149,7 @@
               <a:buNone/>
             </a:pPr>
             <a:r>
-              <a:rPr lang="en-US" sz="3000" dirty="0">
+              <a:rPr lang="en-US" sz="3200" dirty="0">
                 <a:solidFill>
                   <a:srgbClr val="191919"/>
                 </a:solidFill>
@@ -6502,54 +6157,32 @@
                 <a:ea typeface="Georgia" pitchFamily="34" charset="-122"/>
                 <a:cs typeface="Georgia" pitchFamily="34" charset="-120"/>
               </a:rPr>
-              <a:t>200 engineers. 200 copies of a .claude/ folder. Zero versioning.</a:t>
-            </a:r>
-            <a:endParaRPr lang="en-US" sz="3000" dirty="0"/>
+              <a:t>Capability isn't your problem.</a:t>
+            </a:r>
+            <a:endParaRPr lang="en-US" sz="3200" dirty="0"/>
+          </a:p>
+          <a:p>
+            <a:pPr indent="0" marL="0">
+              <a:buNone/>
+            </a:pPr>
+            <a:r>
+              <a:rPr lang="en-US" sz="3200" dirty="0">
+                <a:solidFill>
+                  <a:srgbClr val="191919"/>
+                </a:solidFill>
+                <a:latin typeface="Georgia" pitchFamily="34" charset="0"/>
+                <a:ea typeface="Georgia" pitchFamily="34" charset="-122"/>
+                <a:cs typeface="Georgia" pitchFamily="34" charset="-120"/>
+              </a:rPr>
+              <a:t>Distribution is.</a:t>
+            </a:r>
+            <a:endParaRPr lang="en-US" sz="3200" dirty="0"/>
           </a:p>
         </p:txBody>
       </p:sp>
       <p:sp>
         <p:nvSpPr>
           <p:cNvPr id="4" name="Text 2"/>
-          <p:cNvSpPr/>
-          <p:nvPr/>
-        </p:nvSpPr>
-        <p:spPr>
-          <a:xfrm>
-            <a:off x="548640" y="3291840"/>
-            <a:ext cx="7315200" cy="411480"/>
-          </a:xfrm>
-          <a:prstGeom prst="rect">
-            <a:avLst/>
-          </a:prstGeom>
-          <a:noFill/>
-          <a:ln/>
-        </p:spPr>
-        <p:txBody>
-          <a:bodyPr wrap="square" lIns="0" tIns="0" rIns="0" bIns="0" rtlCol="0" anchor="ctr"/>
-          <a:lstStyle/>
-          <a:p>
-            <a:pPr indent="0" marL="0">
-              <a:buNone/>
-            </a:pPr>
-            <a:r>
-              <a:rPr lang="en-US" sz="1500" dirty="0">
-                <a:solidFill>
-                  <a:srgbClr val="6B6B66"/>
-                </a:solidFill>
-                <a:latin typeface="Arial" pitchFamily="34" charset="0"/>
-                <a:ea typeface="Arial" pitchFamily="34" charset="-122"/>
-                <a:cs typeface="Arial" pitchFamily="34" charset="-120"/>
-              </a:rPr>
-              <a:t>What stalls adoption isn't capability. It's rollout.</a:t>
-            </a:r>
-            <a:endParaRPr lang="en-US" sz="1500" dirty="0"/>
-          </a:p>
-        </p:txBody>
-      </p:sp>
-      <p:sp>
-        <p:nvSpPr>
-          <p:cNvPr id="5" name="Text 3"/>
           <p:cNvSpPr/>
           <p:nvPr/>
         </p:nvSpPr>
@@ -6663,7 +6296,7 @@
               <a:buNone/>
             </a:pPr>
             <a:r>
-              <a:rPr lang="en-US" sz="2600" dirty="0">
+              <a:rPr lang="en-US" sz="2400" dirty="0">
                 <a:solidFill>
                   <a:srgbClr val="191919"/>
                 </a:solidFill>
@@ -6671,22 +6304,42 @@
                 <a:ea typeface="Georgia" pitchFamily="34" charset="-122"/>
                 <a:cs typeface="Georgia" pitchFamily="34" charset="-120"/>
               </a:rPr>
-              <a:t>What a plugin is.</a:t>
-            </a:r>
-            <a:endParaRPr lang="en-US" sz="2600" dirty="0"/>
-          </a:p>
-        </p:txBody>
-      </p:sp>
-      <p:sp>
-        <p:nvSpPr>
-          <p:cNvPr id="4" name="Text 2"/>
-          <p:cNvSpPr/>
-          <p:nvPr/>
-        </p:nvSpPr>
-        <p:spPr>
-          <a:xfrm>
-            <a:off x="548640" y="1207008"/>
-            <a:ext cx="8046720" cy="502920"/>
+              <a:t>Maya's judgment, as a package.</a:t>
+            </a:r>
+            <a:endParaRPr lang="en-US" sz="2400" dirty="0"/>
+          </a:p>
+        </p:txBody>
+      </p:sp>
+      <p:sp>
+        <p:nvSpPr>
+          <p:cNvPr id="4" name="Shape 2"/>
+          <p:cNvSpPr/>
+          <p:nvPr/>
+        </p:nvSpPr>
+        <p:spPr>
+          <a:xfrm>
+            <a:off x="548640" y="1417320"/>
+            <a:ext cx="1965960" cy="713232"/>
+          </a:xfrm>
+          <a:prstGeom prst="rect">
+            <a:avLst/>
+          </a:prstGeom>
+          <a:solidFill>
+            <a:srgbClr val="F0EEE6"/>
+          </a:solidFill>
+          <a:ln/>
+        </p:spPr>
+      </p:sp>
+      <p:sp>
+        <p:nvSpPr>
+          <p:cNvPr id="5" name="Text 3"/>
+          <p:cNvSpPr/>
+          <p:nvPr/>
+        </p:nvSpPr>
+        <p:spPr>
+          <a:xfrm>
+            <a:off x="713232" y="1508760"/>
+            <a:ext cx="1691640" cy="530352"/>
           </a:xfrm>
           <a:prstGeom prst="rect">
             <a:avLst/>
@@ -6702,36 +6355,643 @@
               <a:buNone/>
             </a:pPr>
             <a:r>
-              <a:rPr lang="en-US" sz="1300" dirty="0">
-                <a:solidFill>
-                  <a:srgbClr val="6B6B66"/>
+              <a:rPr lang="en-US" sz="1150" b="1" dirty="0">
+                <a:solidFill>
+                  <a:srgbClr val="191919"/>
                 </a:solidFill>
                 <a:latin typeface="Arial" pitchFamily="34" charset="0"/>
                 <a:ea typeface="Arial" pitchFamily="34" charset="-122"/>
                 <a:cs typeface="Arial" pitchFamily="34" charset="-120"/>
               </a:rPr>
-              <a:t>Your team's Claude Code setup, shipped as one versioned package: skills, agents, hooks, and policy, installed from a marketplace your platform team owns.</a:t>
-            </a:r>
-            <a:endParaRPr lang="en-US" sz="1300" dirty="0"/>
-          </a:p>
-        </p:txBody>
-      </p:sp>
-      <p:sp>
-        <p:nvSpPr>
-          <p:cNvPr id="5" name="Shape 3"/>
-          <p:cNvSpPr/>
-          <p:nvPr/>
-        </p:nvSpPr>
-        <p:spPr>
-          <a:xfrm>
-            <a:off x="548640" y="1874520"/>
-            <a:ext cx="2194560" cy="1417320"/>
+              <a:t>review checklist</a:t>
+            </a:r>
+            <a:endParaRPr lang="en-US" sz="1150" dirty="0"/>
+          </a:p>
+          <a:p>
+            <a:pPr indent="0" marL="0">
+              <a:buNone/>
+            </a:pPr>
+            <a:r>
+              <a:rPr lang="en-US" sz="1050" dirty="0">
+                <a:solidFill>
+                  <a:srgbClr val="6B6B66"/>
+                </a:solidFill>
+                <a:latin typeface="Arial" pitchFamily="34" charset="0"/>
+                <a:ea typeface="Arial" pitchFamily="34" charset="-122"/>
+                <a:cs typeface="Arial" pitchFamily="34" charset="-120"/>
+              </a:rPr>
+              <a:t>a Google Doc</a:t>
+            </a:r>
+            <a:endParaRPr lang="en-US" sz="1150" dirty="0"/>
+          </a:p>
+        </p:txBody>
+      </p:sp>
+      <p:sp>
+        <p:nvSpPr>
+          <p:cNvPr id="6" name="Shape 4"/>
+          <p:cNvSpPr/>
+          <p:nvPr/>
+        </p:nvSpPr>
+        <p:spPr>
+          <a:xfrm>
+            <a:off x="548640" y="2313432"/>
+            <a:ext cx="1965960" cy="713232"/>
           </a:xfrm>
           <a:prstGeom prst="rect">
             <a:avLst/>
           </a:prstGeom>
           <a:solidFill>
             <a:srgbClr val="F0EEE6"/>
+          </a:solidFill>
+          <a:ln/>
+        </p:spPr>
+      </p:sp>
+      <p:sp>
+        <p:nvSpPr>
+          <p:cNvPr id="7" name="Text 5"/>
+          <p:cNvSpPr/>
+          <p:nvPr/>
+        </p:nvSpPr>
+        <p:spPr>
+          <a:xfrm>
+            <a:off x="713232" y="2404872"/>
+            <a:ext cx="1691640" cy="530352"/>
+          </a:xfrm>
+          <a:prstGeom prst="rect">
+            <a:avLst/>
+          </a:prstGeom>
+          <a:noFill/>
+          <a:ln/>
+        </p:spPr>
+        <p:txBody>
+          <a:bodyPr wrap="square" lIns="0" tIns="0" rIns="0" bIns="0" rtlCol="0" anchor="t"/>
+          <a:lstStyle/>
+          <a:p>
+            <a:pPr indent="0" marL="0">
+              <a:buNone/>
+            </a:pPr>
+            <a:r>
+              <a:rPr lang="en-US" sz="1150" b="1" dirty="0">
+                <a:solidFill>
+                  <a:srgbClr val="191919"/>
+                </a:solidFill>
+                <a:latin typeface="Arial" pitchFamily="34" charset="0"/>
+                <a:ea typeface="Arial" pitchFamily="34" charset="-122"/>
+                <a:cs typeface="Arial" pitchFamily="34" charset="-120"/>
+              </a:rPr>
+              <a:t>guardrails</a:t>
+            </a:r>
+            <a:endParaRPr lang="en-US" sz="1150" dirty="0"/>
+          </a:p>
+          <a:p>
+            <a:pPr indent="0" marL="0">
+              <a:buNone/>
+            </a:pPr>
+            <a:r>
+              <a:rPr lang="en-US" sz="1050" dirty="0">
+                <a:solidFill>
+                  <a:srgbClr val="6B6B66"/>
+                </a:solidFill>
+                <a:latin typeface="Arial" pitchFamily="34" charset="0"/>
+                <a:ea typeface="Arial" pitchFamily="34" charset="-122"/>
+                <a:cs typeface="Arial" pitchFamily="34" charset="-120"/>
+              </a:rPr>
+              <a:t>her settings.json</a:t>
+            </a:r>
+            <a:endParaRPr lang="en-US" sz="1150" dirty="0"/>
+          </a:p>
+        </p:txBody>
+      </p:sp>
+      <p:sp>
+        <p:nvSpPr>
+          <p:cNvPr id="8" name="Shape 6"/>
+          <p:cNvSpPr/>
+          <p:nvPr/>
+        </p:nvSpPr>
+        <p:spPr>
+          <a:xfrm>
+            <a:off x="548640" y="3209544"/>
+            <a:ext cx="1965960" cy="713232"/>
+          </a:xfrm>
+          <a:prstGeom prst="rect">
+            <a:avLst/>
+          </a:prstGeom>
+          <a:solidFill>
+            <a:srgbClr val="F0EEE6"/>
+          </a:solidFill>
+          <a:ln/>
+        </p:spPr>
+      </p:sp>
+      <p:sp>
+        <p:nvSpPr>
+          <p:cNvPr id="9" name="Text 7"/>
+          <p:cNvSpPr/>
+          <p:nvPr/>
+        </p:nvSpPr>
+        <p:spPr>
+          <a:xfrm>
+            <a:off x="713232" y="3300984"/>
+            <a:ext cx="1691640" cy="530352"/>
+          </a:xfrm>
+          <a:prstGeom prst="rect">
+            <a:avLst/>
+          </a:prstGeom>
+          <a:noFill/>
+          <a:ln/>
+        </p:spPr>
+        <p:txBody>
+          <a:bodyPr wrap="square" lIns="0" tIns="0" rIns="0" bIns="0" rtlCol="0" anchor="t"/>
+          <a:lstStyle/>
+          <a:p>
+            <a:pPr indent="0" marL="0">
+              <a:buNone/>
+            </a:pPr>
+            <a:r>
+              <a:rPr lang="en-US" sz="1150" b="1" dirty="0">
+                <a:solidFill>
+                  <a:srgbClr val="191919"/>
+                </a:solidFill>
+                <a:latin typeface="Arial" pitchFamily="34" charset="0"/>
+                <a:ea typeface="Arial" pitchFamily="34" charset="-122"/>
+                <a:cs typeface="Arial" pitchFamily="34" charset="-120"/>
+              </a:rPr>
+              <a:t>instincts</a:t>
+            </a:r>
+            <a:endParaRPr lang="en-US" sz="1150" dirty="0"/>
+          </a:p>
+          <a:p>
+            <a:pPr indent="0" marL="0">
+              <a:buNone/>
+            </a:pPr>
+            <a:r>
+              <a:rPr lang="en-US" sz="1050" dirty="0">
+                <a:solidFill>
+                  <a:srgbClr val="6B6B66"/>
+                </a:solidFill>
+                <a:latin typeface="Arial" pitchFamily="34" charset="0"/>
+                <a:ea typeface="Arial" pitchFamily="34" charset="-122"/>
+                <a:cs typeface="Arial" pitchFamily="34" charset="-120"/>
+              </a:rPr>
+              <a:t>in her head</a:t>
+            </a:r>
+            <a:endParaRPr lang="en-US" sz="1150" dirty="0"/>
+          </a:p>
+        </p:txBody>
+      </p:sp>
+      <p:sp>
+        <p:nvSpPr>
+          <p:cNvPr id="10" name="Text 8"/>
+          <p:cNvSpPr/>
+          <p:nvPr/>
+        </p:nvSpPr>
+        <p:spPr>
+          <a:xfrm>
+            <a:off x="2606040" y="2468880"/>
+            <a:ext cx="411480" cy="457200"/>
+          </a:xfrm>
+          <a:prstGeom prst="rect">
+            <a:avLst/>
+          </a:prstGeom>
+          <a:noFill/>
+          <a:ln/>
+        </p:spPr>
+        <p:txBody>
+          <a:bodyPr wrap="square" lIns="0" tIns="0" rIns="0" bIns="0" rtlCol="0" anchor="ctr"/>
+          <a:lstStyle/>
+          <a:p>
+            <a:pPr algn="ctr" indent="0" marL="0">
+              <a:buNone/>
+            </a:pPr>
+            <a:r>
+              <a:rPr lang="en-US" sz="2000" dirty="0">
+                <a:solidFill>
+                  <a:srgbClr val="CC785C"/>
+                </a:solidFill>
+                <a:latin typeface="Arial" pitchFamily="34" charset="0"/>
+                <a:ea typeface="Arial" pitchFamily="34" charset="-122"/>
+                <a:cs typeface="Arial" pitchFamily="34" charset="-120"/>
+              </a:rPr>
+              <a:t>→</a:t>
+            </a:r>
+            <a:endParaRPr lang="en-US" sz="2000" dirty="0"/>
+          </a:p>
+        </p:txBody>
+      </p:sp>
+      <p:sp>
+        <p:nvSpPr>
+          <p:cNvPr id="11" name="Shape 9"/>
+          <p:cNvSpPr/>
+          <p:nvPr/>
+        </p:nvSpPr>
+        <p:spPr>
+          <a:xfrm>
+            <a:off x="3108960" y="1371600"/>
+            <a:ext cx="3017520" cy="3063240"/>
+          </a:xfrm>
+          <a:prstGeom prst="rect">
+            <a:avLst/>
+          </a:prstGeom>
+          <a:solidFill>
+            <a:srgbClr val="FAF9F5"/>
+          </a:solidFill>
+          <a:ln w="19050">
+            <a:solidFill>
+              <a:srgbClr val="191919"/>
+            </a:solidFill>
+            <a:prstDash val="solid"/>
+          </a:ln>
+        </p:spPr>
+      </p:sp>
+      <p:sp>
+        <p:nvSpPr>
+          <p:cNvPr id="12" name="Text 10"/>
+          <p:cNvSpPr/>
+          <p:nvPr/>
+        </p:nvSpPr>
+        <p:spPr>
+          <a:xfrm>
+            <a:off x="3310128" y="1536192"/>
+            <a:ext cx="2011680" cy="274320"/>
+          </a:xfrm>
+          <a:prstGeom prst="rect">
+            <a:avLst/>
+          </a:prstGeom>
+          <a:noFill/>
+          <a:ln/>
+        </p:spPr>
+        <p:txBody>
+          <a:bodyPr wrap="square" lIns="0" tIns="0" rIns="0" bIns="0" rtlCol="0" anchor="ctr"/>
+          <a:lstStyle/>
+          <a:p>
+            <a:pPr indent="0" marL="0">
+              <a:buNone/>
+            </a:pPr>
+            <a:r>
+              <a:rPr lang="en-US" sz="1200" dirty="0">
+                <a:solidFill>
+                  <a:srgbClr val="191919"/>
+                </a:solidFill>
+                <a:latin typeface="Consolas" pitchFamily="34" charset="0"/>
+                <a:ea typeface="Consolas" pitchFamily="34" charset="-122"/>
+                <a:cs typeface="Consolas" pitchFamily="34" charset="-120"/>
+              </a:rPr>
+              <a:t>data-platform-pack</a:t>
+            </a:r>
+            <a:endParaRPr lang="en-US" sz="1200" dirty="0"/>
+          </a:p>
+        </p:txBody>
+      </p:sp>
+      <p:sp>
+        <p:nvSpPr>
+          <p:cNvPr id="13" name="Shape 11"/>
+          <p:cNvSpPr/>
+          <p:nvPr/>
+        </p:nvSpPr>
+        <p:spPr>
+          <a:xfrm>
+            <a:off x="5349240" y="1517904"/>
+            <a:ext cx="621792" cy="256032"/>
+          </a:xfrm>
+          <a:prstGeom prst="roundRect">
+            <a:avLst>
+              <a:gd name="adj" fmla="val 46429"/>
+            </a:avLst>
+          </a:prstGeom>
+          <a:solidFill>
+            <a:srgbClr val="CC785C"/>
+          </a:solidFill>
+          <a:ln/>
+        </p:spPr>
+      </p:sp>
+      <p:sp>
+        <p:nvSpPr>
+          <p:cNvPr id="14" name="Text 12"/>
+          <p:cNvSpPr/>
+          <p:nvPr/>
+        </p:nvSpPr>
+        <p:spPr>
+          <a:xfrm>
+            <a:off x="5349240" y="1517904"/>
+            <a:ext cx="621792" cy="256032"/>
+          </a:xfrm>
+          <a:prstGeom prst="rect">
+            <a:avLst/>
+          </a:prstGeom>
+          <a:noFill/>
+          <a:ln/>
+        </p:spPr>
+        <p:txBody>
+          <a:bodyPr wrap="square" lIns="0" tIns="0" rIns="0" bIns="0" rtlCol="0" anchor="ctr"/>
+          <a:lstStyle/>
+          <a:p>
+            <a:pPr algn="ctr" indent="0" marL="0">
+              <a:buNone/>
+            </a:pPr>
+            <a:r>
+              <a:rPr lang="en-US" sz="1050" dirty="0">
+                <a:solidFill>
+                  <a:srgbClr val="FAF9F5"/>
+                </a:solidFill>
+                <a:latin typeface="Arial" pitchFamily="34" charset="0"/>
+                <a:ea typeface="Arial" pitchFamily="34" charset="-122"/>
+                <a:cs typeface="Arial" pitchFamily="34" charset="-120"/>
+              </a:rPr>
+              <a:t>v1.0.0</a:t>
+            </a:r>
+            <a:endParaRPr lang="en-US" sz="1050" dirty="0"/>
+          </a:p>
+        </p:txBody>
+      </p:sp>
+      <p:sp>
+        <p:nvSpPr>
+          <p:cNvPr id="15" name="Shape 13"/>
+          <p:cNvSpPr/>
+          <p:nvPr/>
+        </p:nvSpPr>
+        <p:spPr>
+          <a:xfrm>
+            <a:off x="3310128" y="1938528"/>
+            <a:ext cx="2615184" cy="0"/>
+          </a:xfrm>
+          <a:prstGeom prst="line">
+            <a:avLst/>
+          </a:prstGeom>
+          <a:noFill/>
+          <a:ln w="9525">
+            <a:solidFill>
+              <a:srgbClr val="D3D1C7"/>
+            </a:solidFill>
+            <a:prstDash val="solid"/>
+          </a:ln>
+        </p:spPr>
+      </p:sp>
+      <p:sp>
+        <p:nvSpPr>
+          <p:cNvPr id="16" name="Text 14"/>
+          <p:cNvSpPr/>
+          <p:nvPr/>
+        </p:nvSpPr>
+        <p:spPr>
+          <a:xfrm>
+            <a:off x="3310128" y="2103120"/>
+            <a:ext cx="2697480" cy="502920"/>
+          </a:xfrm>
+          <a:prstGeom prst="rect">
+            <a:avLst/>
+          </a:prstGeom>
+          <a:noFill/>
+          <a:ln/>
+        </p:spPr>
+        <p:txBody>
+          <a:bodyPr wrap="square" lIns="0" tIns="0" rIns="0" bIns="0" rtlCol="0" anchor="t"/>
+          <a:lstStyle/>
+          <a:p>
+            <a:pPr indent="0" marL="0">
+              <a:buNone/>
+            </a:pPr>
+            <a:r>
+              <a:rPr lang="en-US" sz="1300" dirty="0">
+                <a:solidFill>
+                  <a:srgbClr val="191919"/>
+                </a:solidFill>
+                <a:latin typeface="Georgia" pitchFamily="34" charset="0"/>
+                <a:ea typeface="Georgia" pitchFamily="34" charset="-122"/>
+                <a:cs typeface="Georgia" pitchFamily="34" charset="-120"/>
+              </a:rPr>
+              <a:t>skill  </a:t>
+            </a:r>
+            <a:pPr indent="0" marL="0">
+              <a:buNone/>
+            </a:pPr>
+            <a:r>
+              <a:rPr lang="en-US" sz="1050" dirty="0">
+                <a:solidFill>
+                  <a:srgbClr val="6B6B66"/>
+                </a:solidFill>
+                <a:latin typeface="Arial" pitchFamily="34" charset="0"/>
+                <a:ea typeface="Arial" pitchFamily="34" charset="-122"/>
+                <a:cs typeface="Arial" pitchFamily="34" charset="-120"/>
+              </a:rPr>
+              <a:t>/sql-review, her checklist</a:t>
+            </a:r>
+            <a:endParaRPr lang="en-US" sz="1300" dirty="0"/>
+          </a:p>
+        </p:txBody>
+      </p:sp>
+      <p:sp>
+        <p:nvSpPr>
+          <p:cNvPr id="17" name="Text 15"/>
+          <p:cNvSpPr/>
+          <p:nvPr/>
+        </p:nvSpPr>
+        <p:spPr>
+          <a:xfrm>
+            <a:off x="3310128" y="2670048"/>
+            <a:ext cx="2697480" cy="502920"/>
+          </a:xfrm>
+          <a:prstGeom prst="rect">
+            <a:avLst/>
+          </a:prstGeom>
+          <a:noFill/>
+          <a:ln/>
+        </p:spPr>
+        <p:txBody>
+          <a:bodyPr wrap="square" lIns="0" tIns="0" rIns="0" bIns="0" rtlCol="0" anchor="t"/>
+          <a:lstStyle/>
+          <a:p>
+            <a:pPr indent="0" marL="0">
+              <a:buNone/>
+            </a:pPr>
+            <a:r>
+              <a:rPr lang="en-US" sz="1300" dirty="0">
+                <a:solidFill>
+                  <a:srgbClr val="191919"/>
+                </a:solidFill>
+                <a:latin typeface="Georgia" pitchFamily="34" charset="0"/>
+                <a:ea typeface="Georgia" pitchFamily="34" charset="-122"/>
+                <a:cs typeface="Georgia" pitchFamily="34" charset="-120"/>
+              </a:rPr>
+              <a:t>agent  </a:t>
+            </a:r>
+            <a:pPr indent="0" marL="0">
+              <a:buNone/>
+            </a:pPr>
+            <a:r>
+              <a:rPr lang="en-US" sz="1050" dirty="0">
+                <a:solidFill>
+                  <a:srgbClr val="6B6B66"/>
+                </a:solidFill>
+                <a:latin typeface="Arial" pitchFamily="34" charset="0"/>
+                <a:ea typeface="Arial" pitchFamily="34" charset="-122"/>
+                <a:cs typeface="Arial" pitchFamily="34" charset="-120"/>
+              </a:rPr>
+              <a:t>her review process, read-only</a:t>
+            </a:r>
+            <a:endParaRPr lang="en-US" sz="1300" dirty="0"/>
+          </a:p>
+        </p:txBody>
+      </p:sp>
+      <p:sp>
+        <p:nvSpPr>
+          <p:cNvPr id="18" name="Text 16"/>
+          <p:cNvSpPr/>
+          <p:nvPr/>
+        </p:nvSpPr>
+        <p:spPr>
+          <a:xfrm>
+            <a:off x="3310128" y="3236976"/>
+            <a:ext cx="2697480" cy="502920"/>
+          </a:xfrm>
+          <a:prstGeom prst="rect">
+            <a:avLst/>
+          </a:prstGeom>
+          <a:noFill/>
+          <a:ln/>
+        </p:spPr>
+        <p:txBody>
+          <a:bodyPr wrap="square" lIns="0" tIns="0" rIns="0" bIns="0" rtlCol="0" anchor="t"/>
+          <a:lstStyle/>
+          <a:p>
+            <a:pPr indent="0" marL="0">
+              <a:buNone/>
+            </a:pPr>
+            <a:r>
+              <a:rPr lang="en-US" sz="1300" dirty="0">
+                <a:solidFill>
+                  <a:srgbClr val="191919"/>
+                </a:solidFill>
+                <a:latin typeface="Georgia" pitchFamily="34" charset="0"/>
+                <a:ea typeface="Georgia" pitchFamily="34" charset="-122"/>
+                <a:cs typeface="Georgia" pitchFamily="34" charset="-120"/>
+              </a:rPr>
+              <a:t>hooks  </a:t>
+            </a:r>
+            <a:pPr indent="0" marL="0">
+              <a:buNone/>
+            </a:pPr>
+            <a:r>
+              <a:rPr lang="en-US" sz="1050" dirty="0">
+                <a:solidFill>
+                  <a:srgbClr val="6B6B66"/>
+                </a:solidFill>
+                <a:latin typeface="Arial" pitchFamily="34" charset="0"/>
+                <a:ea typeface="Arial" pitchFamily="34" charset="-122"/>
+                <a:cs typeface="Arial" pitchFamily="34" charset="-120"/>
+              </a:rPr>
+              <a:t>never-on-prod, enforced</a:t>
+            </a:r>
+            <a:endParaRPr lang="en-US" sz="1300" dirty="0"/>
+          </a:p>
+        </p:txBody>
+      </p:sp>
+      <p:sp>
+        <p:nvSpPr>
+          <p:cNvPr id="19" name="Text 17"/>
+          <p:cNvSpPr/>
+          <p:nvPr/>
+        </p:nvSpPr>
+        <p:spPr>
+          <a:xfrm>
+            <a:off x="3310128" y="3803904"/>
+            <a:ext cx="2697480" cy="502920"/>
+          </a:xfrm>
+          <a:prstGeom prst="rect">
+            <a:avLst/>
+          </a:prstGeom>
+          <a:noFill/>
+          <a:ln/>
+        </p:spPr>
+        <p:txBody>
+          <a:bodyPr wrap="square" lIns="0" tIns="0" rIns="0" bIns="0" rtlCol="0" anchor="t"/>
+          <a:lstStyle/>
+          <a:p>
+            <a:pPr indent="0" marL="0">
+              <a:buNone/>
+            </a:pPr>
+            <a:r>
+              <a:rPr lang="en-US" sz="1300" dirty="0">
+                <a:solidFill>
+                  <a:srgbClr val="191919"/>
+                </a:solidFill>
+                <a:latin typeface="Georgia" pitchFamily="34" charset="0"/>
+                <a:ea typeface="Georgia" pitchFamily="34" charset="-122"/>
+                <a:cs typeface="Georgia" pitchFamily="34" charset="-120"/>
+              </a:rPr>
+              <a:t>manifest  </a:t>
+            </a:r>
+            <a:pPr indent="0" marL="0">
+              <a:buNone/>
+            </a:pPr>
+            <a:r>
+              <a:rPr lang="en-US" sz="1050" dirty="0">
+                <a:solidFill>
+                  <a:srgbClr val="6B6B66"/>
+                </a:solidFill>
+                <a:latin typeface="Arial" pitchFamily="34" charset="0"/>
+                <a:ea typeface="Arial" pitchFamily="34" charset="-122"/>
+                <a:cs typeface="Arial" pitchFamily="34" charset="-120"/>
+              </a:rPr>
+              <a:t>the version pin, releases</a:t>
+            </a:r>
+            <a:endParaRPr lang="en-US" sz="1300" dirty="0"/>
+          </a:p>
+        </p:txBody>
+      </p:sp>
+      <p:sp>
+        <p:nvSpPr>
+          <p:cNvPr id="20" name="Text 18"/>
+          <p:cNvSpPr/>
+          <p:nvPr/>
+        </p:nvSpPr>
+        <p:spPr>
+          <a:xfrm>
+            <a:off x="6263640" y="2468880"/>
+            <a:ext cx="411480" cy="457200"/>
+          </a:xfrm>
+          <a:prstGeom prst="rect">
+            <a:avLst/>
+          </a:prstGeom>
+          <a:noFill/>
+          <a:ln/>
+        </p:spPr>
+        <p:txBody>
+          <a:bodyPr wrap="square" lIns="0" tIns="0" rIns="0" bIns="0" rtlCol="0" anchor="ctr"/>
+          <a:lstStyle/>
+          <a:p>
+            <a:pPr algn="ctr" indent="0" marL="0">
+              <a:buNone/>
+            </a:pPr>
+            <a:r>
+              <a:rPr lang="en-US" sz="2000" dirty="0">
+                <a:solidFill>
+                  <a:srgbClr val="CC785C"/>
+                </a:solidFill>
+                <a:latin typeface="Arial" pitchFamily="34" charset="0"/>
+                <a:ea typeface="Arial" pitchFamily="34" charset="-122"/>
+                <a:cs typeface="Arial" pitchFamily="34" charset="-120"/>
+              </a:rPr>
+              <a:t>→</a:t>
+            </a:r>
+            <a:endParaRPr lang="en-US" sz="2000" dirty="0"/>
+          </a:p>
+        </p:txBody>
+      </p:sp>
+      <p:sp>
+        <p:nvSpPr>
+          <p:cNvPr id="21" name="Shape 19"/>
+          <p:cNvSpPr/>
+          <p:nvPr/>
+        </p:nvSpPr>
+        <p:spPr>
+          <a:xfrm>
+            <a:off x="6812280" y="1600200"/>
+            <a:ext cx="1783080" cy="566928"/>
+          </a:xfrm>
+          <a:prstGeom prst="rect">
+            <a:avLst/>
+          </a:prstGeom>
+          <a:solidFill>
+            <a:srgbClr val="FAF9F5"/>
           </a:solidFill>
           <a:ln w="9525">
             <a:solidFill>
@@ -6743,14 +7003,14 @@
       </p:sp>
       <p:sp>
         <p:nvSpPr>
-          <p:cNvPr id="6" name="Text 4"/>
-          <p:cNvSpPr/>
-          <p:nvPr/>
-        </p:nvSpPr>
-        <p:spPr>
-          <a:xfrm>
-            <a:off x="731520" y="2020824"/>
-            <a:ext cx="1828800" cy="292608"/>
+          <p:cNvPr id="22" name="Text 20"/>
+          <p:cNvSpPr/>
+          <p:nvPr/>
+        </p:nvSpPr>
+        <p:spPr>
+          <a:xfrm>
+            <a:off x="6812280" y="1600200"/>
+            <a:ext cx="1783080" cy="566928"/>
           </a:xfrm>
           <a:prstGeom prst="rect">
             <a:avLst/>
@@ -6762,11 +7022,11 @@
           <a:bodyPr wrap="square" lIns="0" tIns="0" rIns="0" bIns="0" rtlCol="0" anchor="ctr"/>
           <a:lstStyle/>
           <a:p>
-            <a:pPr indent="0" marL="0">
-              <a:buNone/>
-            </a:pPr>
-            <a:r>
-              <a:rPr lang="en-US" sz="1350" b="1" dirty="0">
+            <a:pPr algn="ctr" indent="0" marL="0">
+              <a:buNone/>
+            </a:pPr>
+            <a:r>
+              <a:rPr lang="en-US" sz="1050" dirty="0">
                 <a:solidFill>
                   <a:srgbClr val="191919"/>
                 </a:solidFill>
@@ -6774,282 +7034,28 @@
                 <a:ea typeface="Arial" pitchFamily="34" charset="-122"/>
                 <a:cs typeface="Arial" pitchFamily="34" charset="-120"/>
               </a:rPr>
-              <a:t>marketplace repo</a:t>
-            </a:r>
-            <a:endParaRPr lang="en-US" sz="1350" dirty="0"/>
-          </a:p>
-        </p:txBody>
-      </p:sp>
-      <p:sp>
-        <p:nvSpPr>
-          <p:cNvPr id="7" name="Text 5"/>
-          <p:cNvSpPr/>
-          <p:nvPr/>
-        </p:nvSpPr>
-        <p:spPr>
-          <a:xfrm>
-            <a:off x="731520" y="2377440"/>
-            <a:ext cx="1828800" cy="777240"/>
-          </a:xfrm>
-          <a:prstGeom prst="rect">
-            <a:avLst/>
-          </a:prstGeom>
-          <a:noFill/>
-          <a:ln/>
-        </p:spPr>
-        <p:txBody>
-          <a:bodyPr wrap="square" lIns="0" tIns="0" rIns="0" bIns="0" rtlCol="0" anchor="t"/>
-          <a:lstStyle/>
-          <a:p>
-            <a:pPr indent="0" marL="0">
-              <a:buNone/>
-            </a:pPr>
-            <a:r>
-              <a:rPr lang="en-US" sz="1050" dirty="0">
-                <a:solidFill>
-                  <a:srgbClr val="6B6B66"/>
-                </a:solidFill>
-                <a:latin typeface="Consolas" pitchFamily="34" charset="0"/>
-                <a:ea typeface="Consolas" pitchFamily="34" charset="-122"/>
-                <a:cs typeface="Consolas" pitchFamily="34" charset="-120"/>
-              </a:rPr>
-              <a:t>.claude-plugin/</a:t>
+              <a:t>engineer's machine</a:t>
             </a:r>
             <a:endParaRPr lang="en-US" sz="1050" dirty="0"/>
           </a:p>
-          <a:p>
-            <a:pPr indent="0" marL="0">
-              <a:buNone/>
-            </a:pPr>
-            <a:r>
-              <a:rPr lang="en-US" sz="1050" dirty="0">
-                <a:solidFill>
-                  <a:srgbClr val="6B6B66"/>
-                </a:solidFill>
-                <a:latin typeface="Consolas" pitchFamily="34" charset="0"/>
-                <a:ea typeface="Consolas" pitchFamily="34" charset="-122"/>
-                <a:cs typeface="Consolas" pitchFamily="34" charset="-120"/>
-              </a:rPr>
-              <a:t>marketplace.json</a:t>
-            </a:r>
-            <a:endParaRPr lang="en-US" sz="1050" dirty="0"/>
-          </a:p>
-        </p:txBody>
-      </p:sp>
-      <p:sp>
-        <p:nvSpPr>
-          <p:cNvPr id="8" name="Text 6"/>
-          <p:cNvSpPr/>
-          <p:nvPr/>
-        </p:nvSpPr>
-        <p:spPr>
-          <a:xfrm>
-            <a:off x="2862072" y="2354580"/>
-            <a:ext cx="402336" cy="457200"/>
-          </a:xfrm>
-          <a:prstGeom prst="rect">
-            <a:avLst/>
-          </a:prstGeom>
-          <a:noFill/>
-          <a:ln/>
-        </p:spPr>
-        <p:txBody>
-          <a:bodyPr wrap="square" lIns="0" tIns="0" rIns="0" bIns="0" rtlCol="0" anchor="ctr"/>
-          <a:lstStyle/>
-          <a:p>
-            <a:pPr algn="ctr" indent="0" marL="0">
-              <a:buNone/>
-            </a:pPr>
-            <a:r>
-              <a:rPr lang="en-US" sz="1800" dirty="0">
-                <a:solidFill>
-                  <a:srgbClr val="CC785C"/>
-                </a:solidFill>
-                <a:latin typeface="Arial" pitchFamily="34" charset="0"/>
-                <a:ea typeface="Arial" pitchFamily="34" charset="-122"/>
-                <a:cs typeface="Arial" pitchFamily="34" charset="-120"/>
-              </a:rPr>
-              <a:t>→</a:t>
-            </a:r>
-            <a:endParaRPr lang="en-US" sz="1800" dirty="0"/>
-          </a:p>
-        </p:txBody>
-      </p:sp>
-      <p:sp>
-        <p:nvSpPr>
-          <p:cNvPr id="9" name="Shape 7"/>
-          <p:cNvSpPr/>
-          <p:nvPr/>
-        </p:nvSpPr>
-        <p:spPr>
-          <a:xfrm>
-            <a:off x="3383280" y="1874520"/>
-            <a:ext cx="2194560" cy="1417320"/>
+        </p:txBody>
+      </p:sp>
+      <p:sp>
+        <p:nvSpPr>
+          <p:cNvPr id="23" name="Shape 21"/>
+          <p:cNvSpPr/>
+          <p:nvPr/>
+        </p:nvSpPr>
+        <p:spPr>
+          <a:xfrm>
+            <a:off x="6812280" y="2468880"/>
+            <a:ext cx="1783080" cy="566928"/>
           </a:xfrm>
           <a:prstGeom prst="rect">
             <a:avLst/>
           </a:prstGeom>
           <a:solidFill>
-            <a:srgbClr val="F0EEE6"/>
-          </a:solidFill>
-          <a:ln w="15875">
-            <a:solidFill>
-              <a:srgbClr val="CC785C"/>
-            </a:solidFill>
-            <a:prstDash val="solid"/>
-          </a:ln>
-        </p:spPr>
-      </p:sp>
-      <p:sp>
-        <p:nvSpPr>
-          <p:cNvPr id="10" name="Text 8"/>
-          <p:cNvSpPr/>
-          <p:nvPr/>
-        </p:nvSpPr>
-        <p:spPr>
-          <a:xfrm>
-            <a:off x="3566160" y="2020824"/>
-            <a:ext cx="1828800" cy="292608"/>
-          </a:xfrm>
-          <a:prstGeom prst="rect">
-            <a:avLst/>
-          </a:prstGeom>
-          <a:noFill/>
-          <a:ln/>
-        </p:spPr>
-        <p:txBody>
-          <a:bodyPr wrap="square" lIns="0" tIns="0" rIns="0" bIns="0" rtlCol="0" anchor="ctr"/>
-          <a:lstStyle/>
-          <a:p>
-            <a:pPr indent="0" marL="0">
-              <a:buNone/>
-            </a:pPr>
-            <a:r>
-              <a:rPr lang="en-US" sz="1350" b="1" dirty="0">
-                <a:solidFill>
-                  <a:srgbClr val="191919"/>
-                </a:solidFill>
-                <a:latin typeface="Arial" pitchFamily="34" charset="0"/>
-                <a:ea typeface="Arial" pitchFamily="34" charset="-122"/>
-                <a:cs typeface="Arial" pitchFamily="34" charset="-120"/>
-              </a:rPr>
-              <a:t>plugin</a:t>
-            </a:r>
-            <a:endParaRPr lang="en-US" sz="1350" dirty="0"/>
-          </a:p>
-        </p:txBody>
-      </p:sp>
-      <p:sp>
-        <p:nvSpPr>
-          <p:cNvPr id="11" name="Text 9"/>
-          <p:cNvSpPr/>
-          <p:nvPr/>
-        </p:nvSpPr>
-        <p:spPr>
-          <a:xfrm>
-            <a:off x="3566160" y="2377440"/>
-            <a:ext cx="1828800" cy="777240"/>
-          </a:xfrm>
-          <a:prstGeom prst="rect">
-            <a:avLst/>
-          </a:prstGeom>
-          <a:noFill/>
-          <a:ln/>
-        </p:spPr>
-        <p:txBody>
-          <a:bodyPr wrap="square" lIns="0" tIns="0" rIns="0" bIns="0" rtlCol="0" anchor="t"/>
-          <a:lstStyle/>
-          <a:p>
-            <a:pPr indent="0" marL="0">
-              <a:buNone/>
-            </a:pPr>
-            <a:r>
-              <a:rPr lang="en-US" sz="1050" dirty="0">
-                <a:solidFill>
-                  <a:srgbClr val="6B6B66"/>
-                </a:solidFill>
-                <a:latin typeface="Consolas" pitchFamily="34" charset="0"/>
-                <a:ea typeface="Consolas" pitchFamily="34" charset="-122"/>
-                <a:cs typeface="Consolas" pitchFamily="34" charset="-120"/>
-              </a:rPr>
-              <a:t>manifest</a:t>
-            </a:r>
-            <a:endParaRPr lang="en-US" sz="1050" dirty="0"/>
-          </a:p>
-          <a:p>
-            <a:pPr indent="0" marL="0">
-              <a:buNone/>
-            </a:pPr>
-            <a:r>
-              <a:rPr lang="en-US" sz="1050" dirty="0">
-                <a:solidFill>
-                  <a:srgbClr val="6B6B66"/>
-                </a:solidFill>
-                <a:latin typeface="Consolas" pitchFamily="34" charset="0"/>
-                <a:ea typeface="Consolas" pitchFamily="34" charset="-122"/>
-                <a:cs typeface="Consolas" pitchFamily="34" charset="-120"/>
-              </a:rPr>
-              <a:t>skills/  agents/  hooks/</a:t>
-            </a:r>
-            <a:endParaRPr lang="en-US" sz="1050" dirty="0"/>
-          </a:p>
-        </p:txBody>
-      </p:sp>
-      <p:sp>
-        <p:nvSpPr>
-          <p:cNvPr id="12" name="Text 10"/>
-          <p:cNvSpPr/>
-          <p:nvPr/>
-        </p:nvSpPr>
-        <p:spPr>
-          <a:xfrm>
-            <a:off x="5696712" y="2354580"/>
-            <a:ext cx="402336" cy="457200"/>
-          </a:xfrm>
-          <a:prstGeom prst="rect">
-            <a:avLst/>
-          </a:prstGeom>
-          <a:noFill/>
-          <a:ln/>
-        </p:spPr>
-        <p:txBody>
-          <a:bodyPr wrap="square" lIns="0" tIns="0" rIns="0" bIns="0" rtlCol="0" anchor="ctr"/>
-          <a:lstStyle/>
-          <a:p>
-            <a:pPr algn="ctr" indent="0" marL="0">
-              <a:buNone/>
-            </a:pPr>
-            <a:r>
-              <a:rPr lang="en-US" sz="1800" dirty="0">
-                <a:solidFill>
-                  <a:srgbClr val="CC785C"/>
-                </a:solidFill>
-                <a:latin typeface="Arial" pitchFamily="34" charset="0"/>
-                <a:ea typeface="Arial" pitchFamily="34" charset="-122"/>
-                <a:cs typeface="Arial" pitchFamily="34" charset="-120"/>
-              </a:rPr>
-              <a:t>→</a:t>
-            </a:r>
-            <a:endParaRPr lang="en-US" sz="1800" dirty="0"/>
-          </a:p>
-        </p:txBody>
-      </p:sp>
-      <p:sp>
-        <p:nvSpPr>
-          <p:cNvPr id="13" name="Shape 11"/>
-          <p:cNvSpPr/>
-          <p:nvPr/>
-        </p:nvSpPr>
-        <p:spPr>
-          <a:xfrm>
-            <a:off x="6217920" y="1874520"/>
-            <a:ext cx="2194560" cy="1417320"/>
-          </a:xfrm>
-          <a:prstGeom prst="rect">
-            <a:avLst/>
-          </a:prstGeom>
-          <a:solidFill>
-            <a:srgbClr val="F0EEE6"/>
+            <a:srgbClr val="FAF9F5"/>
           </a:solidFill>
           <a:ln w="9525">
             <a:solidFill>
@@ -7061,14 +7067,14 @@
       </p:sp>
       <p:sp>
         <p:nvSpPr>
-          <p:cNvPr id="14" name="Text 12"/>
-          <p:cNvSpPr/>
-          <p:nvPr/>
-        </p:nvSpPr>
-        <p:spPr>
-          <a:xfrm>
-            <a:off x="6400800" y="2020824"/>
-            <a:ext cx="1828800" cy="292608"/>
+          <p:cNvPr id="24" name="Text 22"/>
+          <p:cNvSpPr/>
+          <p:nvPr/>
+        </p:nvSpPr>
+        <p:spPr>
+          <a:xfrm>
+            <a:off x="6812280" y="2468880"/>
+            <a:ext cx="1783080" cy="566928"/>
           </a:xfrm>
           <a:prstGeom prst="rect">
             <a:avLst/>
@@ -7080,11 +7086,11 @@
           <a:bodyPr wrap="square" lIns="0" tIns="0" rIns="0" bIns="0" rtlCol="0" anchor="ctr"/>
           <a:lstStyle/>
           <a:p>
-            <a:pPr indent="0" marL="0">
-              <a:buNone/>
-            </a:pPr>
-            <a:r>
-              <a:rPr lang="en-US" sz="1350" b="1" dirty="0">
+            <a:pPr algn="ctr" indent="0" marL="0">
+              <a:buNone/>
+            </a:pPr>
+            <a:r>
+              <a:rPr lang="en-US" sz="1050" dirty="0">
                 <a:solidFill>
                   <a:srgbClr val="191919"/>
                 </a:solidFill>
@@ -7094,32 +7100,57 @@
               </a:rPr>
               <a:t>engineer's machine</a:t>
             </a:r>
-            <a:endParaRPr lang="en-US" sz="1350" dirty="0"/>
-          </a:p>
-        </p:txBody>
-      </p:sp>
-      <p:sp>
-        <p:nvSpPr>
-          <p:cNvPr id="15" name="Text 13"/>
-          <p:cNvSpPr/>
-          <p:nvPr/>
-        </p:nvSpPr>
-        <p:spPr>
-          <a:xfrm>
-            <a:off x="6400800" y="2377440"/>
-            <a:ext cx="1828800" cy="777240"/>
-          </a:xfrm>
-          <a:prstGeom prst="rect">
-            <a:avLst/>
-          </a:prstGeom>
-          <a:noFill/>
-          <a:ln/>
-        </p:spPr>
-        <p:txBody>
-          <a:bodyPr wrap="square" lIns="0" tIns="0" rIns="0" bIns="0" rtlCol="0" anchor="t"/>
-          <a:lstStyle/>
-          <a:p>
-            <a:pPr indent="0" marL="0">
+            <a:endParaRPr lang="en-US" sz="1050" dirty="0"/>
+          </a:p>
+        </p:txBody>
+      </p:sp>
+      <p:sp>
+        <p:nvSpPr>
+          <p:cNvPr id="25" name="Shape 23"/>
+          <p:cNvSpPr/>
+          <p:nvPr/>
+        </p:nvSpPr>
+        <p:spPr>
+          <a:xfrm>
+            <a:off x="6812280" y="3337560"/>
+            <a:ext cx="1783080" cy="566928"/>
+          </a:xfrm>
+          <a:prstGeom prst="rect">
+            <a:avLst/>
+          </a:prstGeom>
+          <a:solidFill>
+            <a:srgbClr val="FAF9F5"/>
+          </a:solidFill>
+          <a:ln w="9525">
+            <a:solidFill>
+              <a:srgbClr val="D4A27F"/>
+            </a:solidFill>
+            <a:prstDash val="solid"/>
+          </a:ln>
+        </p:spPr>
+      </p:sp>
+      <p:sp>
+        <p:nvSpPr>
+          <p:cNvPr id="26" name="Text 24"/>
+          <p:cNvSpPr/>
+          <p:nvPr/>
+        </p:nvSpPr>
+        <p:spPr>
+          <a:xfrm>
+            <a:off x="6812280" y="3337560"/>
+            <a:ext cx="1783080" cy="566928"/>
+          </a:xfrm>
+          <a:prstGeom prst="rect">
+            <a:avLst/>
+          </a:prstGeom>
+          <a:noFill/>
+          <a:ln/>
+        </p:spPr>
+        <p:txBody>
+          <a:bodyPr wrap="square" lIns="0" tIns="0" rIns="0" bIns="0" rtlCol="0" anchor="ctr"/>
+          <a:lstStyle/>
+          <a:p>
+            <a:pPr algn="ctr" indent="0" marL="0">
               <a:buNone/>
             </a:pPr>
             <a:r>
@@ -7127,118 +7158,58 @@
                 <a:solidFill>
                   <a:srgbClr val="6B6B66"/>
                 </a:solidFill>
-                <a:latin typeface="Consolas" pitchFamily="34" charset="0"/>
-                <a:ea typeface="Consolas" pitchFamily="34" charset="-122"/>
-                <a:cs typeface="Consolas" pitchFamily="34" charset="-120"/>
-              </a:rPr>
-              <a:t>installed, version-pinned,</a:t>
+                <a:latin typeface="Arial" pitchFamily="34" charset="0"/>
+                <a:ea typeface="Arial" pitchFamily="34" charset="-122"/>
+                <a:cs typeface="Arial" pitchFamily="34" charset="-120"/>
+              </a:rPr>
+              <a:t>identical, ×200</a:t>
             </a:r>
             <a:endParaRPr lang="en-US" sz="1050" dirty="0"/>
           </a:p>
-          <a:p>
-            <a:pPr indent="0" marL="0">
-              <a:buNone/>
-            </a:pPr>
-            <a:r>
-              <a:rPr lang="en-US" sz="1050" dirty="0">
+        </p:txBody>
+      </p:sp>
+      <p:sp>
+        <p:nvSpPr>
+          <p:cNvPr id="27" name="Text 25"/>
+          <p:cNvSpPr/>
+          <p:nvPr/>
+        </p:nvSpPr>
+        <p:spPr>
+          <a:xfrm>
+            <a:off x="548640" y="4590288"/>
+            <a:ext cx="7315200" cy="320040"/>
+          </a:xfrm>
+          <a:prstGeom prst="rect">
+            <a:avLst/>
+          </a:prstGeom>
+          <a:noFill/>
+          <a:ln/>
+        </p:spPr>
+        <p:txBody>
+          <a:bodyPr wrap="square" lIns="0" tIns="0" rIns="0" bIns="0" rtlCol="0" anchor="ctr"/>
+          <a:lstStyle/>
+          <a:p>
+            <a:pPr indent="0" marL="0">
+              <a:buNone/>
+            </a:pPr>
+            <a:r>
+              <a:rPr lang="en-US" sz="1250" dirty="0">
                 <a:solidFill>
                   <a:srgbClr val="6B6B66"/>
                 </a:solidFill>
-                <a:latin typeface="Consolas" pitchFamily="34" charset="0"/>
-                <a:ea typeface="Consolas" pitchFamily="34" charset="-122"/>
-                <a:cs typeface="Consolas" pitchFamily="34" charset="-120"/>
-              </a:rPr>
-              <a:t>namespaced</a:t>
-            </a:r>
-            <a:endParaRPr lang="en-US" sz="1050" dirty="0"/>
-          </a:p>
-        </p:txBody>
-      </p:sp>
-      <p:sp>
-        <p:nvSpPr>
-          <p:cNvPr id="16" name="Shape 14"/>
-          <p:cNvSpPr/>
-          <p:nvPr/>
-        </p:nvSpPr>
-        <p:spPr>
-          <a:xfrm>
-            <a:off x="548640" y="3657600"/>
-            <a:ext cx="8046720" cy="868680"/>
-          </a:xfrm>
-          <a:prstGeom prst="rect">
-            <a:avLst/>
-          </a:prstGeom>
-          <a:solidFill>
-            <a:srgbClr val="F0EEE6"/>
-          </a:solidFill>
-          <a:ln/>
-        </p:spPr>
-      </p:sp>
-      <p:sp>
-        <p:nvSpPr>
-          <p:cNvPr id="17" name="Text 15"/>
-          <p:cNvSpPr/>
-          <p:nvPr/>
-        </p:nvSpPr>
-        <p:spPr>
-          <a:xfrm>
-            <a:off x="822960" y="3767328"/>
-            <a:ext cx="7498080" cy="658368"/>
-          </a:xfrm>
-          <a:prstGeom prst="rect">
-            <a:avLst/>
-          </a:prstGeom>
-          <a:noFill/>
-          <a:ln/>
-        </p:spPr>
-        <p:txBody>
-          <a:bodyPr wrap="square" lIns="0" tIns="0" rIns="0" bIns="0" rtlCol="0" anchor="t"/>
-          <a:lstStyle/>
-          <a:p>
-            <a:pPr indent="0" marL="0">
-              <a:spcAft>
-                <a:spcPts val="400"/>
-              </a:spcAft>
-              <a:buNone/>
-            </a:pPr>
-            <a:r>
-              <a:rPr lang="en-US" sz="1250" dirty="0">
-                <a:solidFill>
-                  <a:srgbClr val="191919"/>
-                </a:solidFill>
-                <a:latin typeface="Consolas" pitchFamily="34" charset="0"/>
-                <a:ea typeface="Consolas" pitchFamily="34" charset="-122"/>
-                <a:cs typeface="Consolas" pitchFamily="34" charset="-120"/>
-              </a:rPr>
-              <a:t>/plugin marketplace add owner/repo</a:t>
+                <a:latin typeface="Arial" pitchFamily="34" charset="0"/>
+                <a:ea typeface="Arial" pitchFamily="34" charset="-122"/>
+                <a:cs typeface="Arial" pitchFamily="34" charset="-120"/>
+              </a:rPr>
+              <a:t>One PR to the package updates every one of them.</a:t>
             </a:r>
             <a:endParaRPr lang="en-US" sz="1250" dirty="0"/>
           </a:p>
-          <a:p>
-            <a:pPr indent="0" marL="0">
-              <a:spcAft>
-                <a:spcPts val="400"/>
-              </a:spcAft>
-              <a:buNone/>
-            </a:pPr>
-            <a:r>
-              <a:rPr lang="en-US" sz="1250" dirty="0">
-                <a:solidFill>
-                  <a:srgbClr val="191919"/>
-                </a:solidFill>
-                <a:latin typeface="Consolas" pitchFamily="34" charset="0"/>
-                <a:ea typeface="Consolas" pitchFamily="34" charset="-122"/>
-                <a:cs typeface="Consolas" pitchFamily="34" charset="-120"/>
-              </a:rPr>
-              <a:t>/plugin install data-platform-pack@platform-tools</a:t>
-            </a:r>
-            <a:endParaRPr lang="en-US" sz="1250" dirty="0"/>
-          </a:p>
-        </p:txBody>
-      </p:sp>
-      <p:sp>
-        <p:nvSpPr>
-          <p:cNvPr id="18" name="Text 16"/>
+        </p:txBody>
+      </p:sp>
+      <p:sp>
+        <p:nvSpPr>
+          <p:cNvPr id="28" name="Text 26"/>
           <p:cNvSpPr/>
           <p:nvPr/>
         </p:nvSpPr>
@@ -7458,7 +7429,7 @@
                 <a:ea typeface="Arial" pitchFamily="34" charset="-122"/>
                 <a:cs typeface="Arial" pitchFamily="34" charset="-120"/>
               </a:rPr>
-              <a:t>Slash commands and written conventions. /sql-review applies the team's standards, not generic taste.</a:t>
+              <a:t>Maya's checklist as a slash command. /sql-review applies written rule numbers, not taste.</a:t>
             </a:r>
             <a:endParaRPr lang="en-US" sz="1200" dirty="0"/>
           </a:p>
@@ -7556,7 +7527,7 @@
                 <a:ea typeface="Arial" pitchFamily="34" charset="-122"/>
                 <a:cs typeface="Arial" pitchFamily="34" charset="-120"/>
               </a:rPr>
-              <a:t>A read-only sql-reviewer that does the detailed pass, with scoped tools.</a:t>
+              <a:t>Her review process as a read-only subagent with scoped tools.</a:t>
             </a:r>
             <a:endParaRPr lang="en-US" sz="1200" dirty="0"/>
           </a:p>
@@ -7654,7 +7625,7 @@
                 <a:ea typeface="Arial" pitchFamily="34" charset="-122"/>
                 <a:cs typeface="Arial" pitchFamily="34" charset="-120"/>
               </a:rPr>
-              <a:t>The policy guard and the audit trail. Processes, not prompts, so they're testable in CI.</a:t>
+              <a:t>Her never-on-prod rules as a process gate, plus an audit trail. Testable in CI.</a:t>
             </a:r>
             <a:endParaRPr lang="en-US" sz="1200" dirty="0"/>
           </a:p>
@@ -7882,7 +7853,7 @@
                 <a:ea typeface="Georgia" pitchFamily="34" charset="-122"/>
                 <a:cs typeface="Georgia" pitchFamily="34" charset="-120"/>
               </a:rPr>
-              <a:t>Why not just copy .claude/ folders around?</a:t>
+              <a:t>When a plugin is the right tool.</a:t>
             </a:r>
             <a:endParaRPr lang="en-US" sz="2600" dirty="0"/>
           </a:p>
@@ -7897,178 +7868,13 @@
         <p:spPr>
           <a:xfrm>
             <a:off x="548640" y="1371600"/>
-            <a:ext cx="3886200" cy="2834640"/>
+            <a:ext cx="3886200" cy="2377440"/>
           </a:xfrm>
           <a:prstGeom prst="rect">
             <a:avLst/>
           </a:prstGeom>
           <a:solidFill>
             <a:srgbClr val="F0EEE6"/>
-          </a:solidFill>
-          <a:ln/>
-        </p:spPr>
-      </p:sp>
-      <p:sp>
-        <p:nvSpPr>
-          <p:cNvPr id="5" name="Text 3"/>
-          <p:cNvSpPr/>
-          <p:nvPr/>
-        </p:nvSpPr>
-        <p:spPr>
-          <a:xfrm>
-            <a:off x="822960" y="1572768"/>
-            <a:ext cx="3337560" cy="320040"/>
-          </a:xfrm>
-          <a:prstGeom prst="rect">
-            <a:avLst/>
-          </a:prstGeom>
-          <a:noFill/>
-          <a:ln/>
-        </p:spPr>
-        <p:txBody>
-          <a:bodyPr wrap="square" lIns="0" tIns="0" rIns="0" bIns="0" rtlCol="0" anchor="ctr"/>
-          <a:lstStyle/>
-          <a:p>
-            <a:pPr indent="0" marL="0">
-              <a:buNone/>
-            </a:pPr>
-            <a:r>
-              <a:rPr lang="en-US" sz="1600" b="1" dirty="0">
-                <a:solidFill>
-                  <a:srgbClr val="191919"/>
-                </a:solidFill>
-                <a:latin typeface="Georgia" pitchFamily="34" charset="0"/>
-                <a:ea typeface="Georgia" pitchFamily="34" charset="-122"/>
-                <a:cs typeface="Georgia" pitchFamily="34" charset="-120"/>
-              </a:rPr>
-              <a:t>Copied folders</a:t>
-            </a:r>
-            <a:endParaRPr lang="en-US" sz="1600" dirty="0"/>
-          </a:p>
-        </p:txBody>
-      </p:sp>
-      <p:sp>
-        <p:nvSpPr>
-          <p:cNvPr id="6" name="Text 4"/>
-          <p:cNvSpPr/>
-          <p:nvPr/>
-        </p:nvSpPr>
-        <p:spPr>
-          <a:xfrm>
-            <a:off x="822960" y="2011680"/>
-            <a:ext cx="3337560" cy="1920240"/>
-          </a:xfrm>
-          <a:prstGeom prst="rect">
-            <a:avLst/>
-          </a:prstGeom>
-          <a:noFill/>
-          <a:ln/>
-        </p:spPr>
-        <p:txBody>
-          <a:bodyPr wrap="square" lIns="0" tIns="0" rIns="0" bIns="0" rtlCol="0" anchor="t"/>
-          <a:lstStyle/>
-          <a:p>
-            <a:pPr marL="342900" indent="-342900">
-              <a:spcAft>
-                <a:spcPts val="1000"/>
-              </a:spcAft>
-              <a:buSzPct val="100000"/>
-              <a:buChar char="•"/>
-            </a:pPr>
-            <a:r>
-              <a:rPr lang="en-US" sz="1250" dirty="0">
-                <a:solidFill>
-                  <a:srgbClr val="191919"/>
-                </a:solidFill>
-                <a:latin typeface="Arial" pitchFamily="34" charset="0"/>
-                <a:ea typeface="Arial" pitchFamily="34" charset="-122"/>
-                <a:cs typeface="Arial" pitchFamily="34" charset="-120"/>
-              </a:rPr>
-              <a:t>Drift from day one</a:t>
-            </a:r>
-            <a:endParaRPr lang="en-US" sz="1250" dirty="0"/>
-          </a:p>
-          <a:p>
-            <a:pPr marL="342900" indent="-342900">
-              <a:spcAft>
-                <a:spcPts val="1000"/>
-              </a:spcAft>
-              <a:buSzPct val="100000"/>
-              <a:buChar char="•"/>
-            </a:pPr>
-            <a:r>
-              <a:rPr lang="en-US" sz="1250" dirty="0">
-                <a:solidFill>
-                  <a:srgbClr val="191919"/>
-                </a:solidFill>
-                <a:latin typeface="Arial" pitchFamily="34" charset="0"/>
-                <a:ea typeface="Arial" pitchFamily="34" charset="-122"/>
-                <a:cs typeface="Arial" pitchFamily="34" charset="-120"/>
-              </a:rPr>
-              <a:t>No versioning, no rollback</a:t>
-            </a:r>
-            <a:endParaRPr lang="en-US" sz="1250" dirty="0"/>
-          </a:p>
-          <a:p>
-            <a:pPr marL="342900" indent="-342900">
-              <a:spcAft>
-                <a:spcPts val="1000"/>
-              </a:spcAft>
-              <a:buSzPct val="100000"/>
-              <a:buChar char="•"/>
-            </a:pPr>
-            <a:r>
-              <a:rPr lang="en-US" sz="1250" dirty="0">
-                <a:solidFill>
-                  <a:srgbClr val="191919"/>
-                </a:solidFill>
-                <a:latin typeface="Arial" pitchFamily="34" charset="0"/>
-                <a:ea typeface="Arial" pitchFamily="34" charset="-122"/>
-                <a:cs typeface="Arial" pitchFamily="34" charset="-120"/>
-              </a:rPr>
-              <a:t>A fix reaches whoever notices</a:t>
-            </a:r>
-            <a:endParaRPr lang="en-US" sz="1250" dirty="0"/>
-          </a:p>
-          <a:p>
-            <a:pPr marL="342900" indent="-342900">
-              <a:spcAft>
-                <a:spcPts val="1000"/>
-              </a:spcAft>
-              <a:buSzPct val="100000"/>
-              <a:buChar char="•"/>
-            </a:pPr>
-            <a:r>
-              <a:rPr lang="en-US" sz="1250" dirty="0">
-                <a:solidFill>
-                  <a:srgbClr val="191919"/>
-                </a:solidFill>
-                <a:latin typeface="Arial" pitchFamily="34" charset="0"/>
-                <a:ea typeface="Arial" pitchFamily="34" charset="-122"/>
-                <a:cs typeface="Arial" pitchFamily="34" charset="-120"/>
-              </a:rPr>
-              <a:t>Security can't see what's running where</a:t>
-            </a:r>
-            <a:endParaRPr lang="en-US" sz="1250" dirty="0"/>
-          </a:p>
-        </p:txBody>
-      </p:sp>
-      <p:sp>
-        <p:nvSpPr>
-          <p:cNvPr id="7" name="Shape 5"/>
-          <p:cNvSpPr/>
-          <p:nvPr/>
-        </p:nvSpPr>
-        <p:spPr>
-          <a:xfrm>
-            <a:off x="4709160" y="1371600"/>
-            <a:ext cx="3886200" cy="2834640"/>
-          </a:xfrm>
-          <a:prstGeom prst="rect">
-            <a:avLst/>
-          </a:prstGeom>
-          <a:solidFill>
-            <a:srgbClr val="FAF9F5"/>
           </a:solidFill>
           <a:ln w="15875">
             <a:solidFill>
@@ -8080,13 +7886,13 @@
       </p:sp>
       <p:sp>
         <p:nvSpPr>
-          <p:cNvPr id="8" name="Text 6"/>
-          <p:cNvSpPr/>
-          <p:nvPr/>
-        </p:nvSpPr>
-        <p:spPr>
-          <a:xfrm>
-            <a:off x="4983480" y="1572768"/>
+          <p:cNvPr id="5" name="Text 3"/>
+          <p:cNvSpPr/>
+          <p:nvPr/>
+        </p:nvSpPr>
+        <p:spPr>
+          <a:xfrm>
+            <a:off x="822960" y="1572768"/>
             <a:ext cx="3337560" cy="320040"/>
           </a:xfrm>
           <a:prstGeom prst="rect">
@@ -8103,7 +7909,7 @@
               <a:buNone/>
             </a:pPr>
             <a:r>
-              <a:rPr lang="en-US" sz="1600" b="1" dirty="0">
+              <a:rPr lang="en-US" sz="1550" b="1" dirty="0">
                 <a:solidFill>
                   <a:srgbClr val="191919"/>
                 </a:solidFill>
@@ -8111,22 +7917,22 @@
                 <a:ea typeface="Georgia" pitchFamily="34" charset="-122"/>
                 <a:cs typeface="Georgia" pitchFamily="34" charset="-120"/>
               </a:rPr>
-              <a:t>A plugin from your marketplace</a:t>
-            </a:r>
-            <a:endParaRPr lang="en-US" sz="1600" dirty="0"/>
-          </a:p>
-        </p:txBody>
-      </p:sp>
-      <p:sp>
-        <p:nvSpPr>
-          <p:cNvPr id="9" name="Text 7"/>
-          <p:cNvSpPr/>
-          <p:nvPr/>
-        </p:nvSpPr>
-        <p:spPr>
-          <a:xfrm>
-            <a:off x="4983480" y="2011680"/>
-            <a:ext cx="3337560" cy="1920240"/>
+              <a:t>Reach for a plugin when</a:t>
+            </a:r>
+            <a:endParaRPr lang="en-US" sz="1550" dirty="0"/>
+          </a:p>
+        </p:txBody>
+      </p:sp>
+      <p:sp>
+        <p:nvSpPr>
+          <p:cNvPr id="6" name="Text 4"/>
+          <p:cNvSpPr/>
+          <p:nvPr/>
+        </p:nvSpPr>
+        <p:spPr>
+          <a:xfrm>
+            <a:off x="822960" y="2029968"/>
+            <a:ext cx="3337560" cy="1463040"/>
           </a:xfrm>
           <a:prstGeom prst="rect">
             <a:avLst/>
@@ -8154,7 +7960,7 @@
                 <a:ea typeface="Arial" pitchFamily="34" charset="-122"/>
                 <a:cs typeface="Arial" pitchFamily="34" charset="-120"/>
               </a:rPr>
-              <a:t>Identical on every machine</a:t>
+              <a:t>One person's workflow should become the team's standard</a:t>
             </a:r>
             <a:endParaRPr lang="en-US" sz="1250" dirty="0"/>
           </a:p>
@@ -8175,7 +7981,7 @@
                 <a:ea typeface="Arial" pitchFamily="34" charset="-122"/>
                 <a:cs typeface="Arial" pitchFamily="34" charset="-120"/>
               </a:rPr>
-              <a:t>Version-pinned, one-command update</a:t>
+              <a:t>A rule has to hold on every machine, every run</a:t>
             </a:r>
             <a:endParaRPr lang="en-US" sz="1250" dirty="0"/>
           </a:p>
@@ -8196,10 +8002,91 @@
                 <a:ea typeface="Arial" pitchFamily="34" charset="-122"/>
                 <a:cs typeface="Arial" pitchFamily="34" charset="-120"/>
               </a:rPr>
-              <a:t>One PR ships a fix to the whole fleet</a:t>
+              <a:t>A fix has to reach the whole fleet at once</a:t>
             </a:r>
             <a:endParaRPr lang="en-US" sz="1250" dirty="0"/>
           </a:p>
+        </p:txBody>
+      </p:sp>
+      <p:sp>
+        <p:nvSpPr>
+          <p:cNvPr id="7" name="Shape 5"/>
+          <p:cNvSpPr/>
+          <p:nvPr/>
+        </p:nvSpPr>
+        <p:spPr>
+          <a:xfrm>
+            <a:off x="4709160" y="1371600"/>
+            <a:ext cx="3886200" cy="2377440"/>
+          </a:xfrm>
+          <a:prstGeom prst="rect">
+            <a:avLst/>
+          </a:prstGeom>
+          <a:solidFill>
+            <a:srgbClr val="F0EEE6"/>
+          </a:solidFill>
+          <a:ln/>
+        </p:spPr>
+      </p:sp>
+      <p:sp>
+        <p:nvSpPr>
+          <p:cNvPr id="8" name="Text 6"/>
+          <p:cNvSpPr/>
+          <p:nvPr/>
+        </p:nvSpPr>
+        <p:spPr>
+          <a:xfrm>
+            <a:off x="4983480" y="1572768"/>
+            <a:ext cx="3337560" cy="320040"/>
+          </a:xfrm>
+          <a:prstGeom prst="rect">
+            <a:avLst/>
+          </a:prstGeom>
+          <a:noFill/>
+          <a:ln/>
+        </p:spPr>
+        <p:txBody>
+          <a:bodyPr wrap="square" lIns="0" tIns="0" rIns="0" bIns="0" rtlCol="0" anchor="ctr"/>
+          <a:lstStyle/>
+          <a:p>
+            <a:pPr indent="0" marL="0">
+              <a:buNone/>
+            </a:pPr>
+            <a:r>
+              <a:rPr lang="en-US" sz="1550" b="1" dirty="0">
+                <a:solidFill>
+                  <a:srgbClr val="191919"/>
+                </a:solidFill>
+                <a:latin typeface="Georgia" pitchFamily="34" charset="0"/>
+                <a:ea typeface="Georgia" pitchFamily="34" charset="-122"/>
+                <a:cs typeface="Georgia" pitchFamily="34" charset="-120"/>
+              </a:rPr>
+              <a:t>Skip it when</a:t>
+            </a:r>
+            <a:endParaRPr lang="en-US" sz="1550" dirty="0"/>
+          </a:p>
+        </p:txBody>
+      </p:sp>
+      <p:sp>
+        <p:nvSpPr>
+          <p:cNvPr id="9" name="Text 7"/>
+          <p:cNvSpPr/>
+          <p:nvPr/>
+        </p:nvSpPr>
+        <p:spPr>
+          <a:xfrm>
+            <a:off x="4983480" y="2029968"/>
+            <a:ext cx="3337560" cy="1463040"/>
+          </a:xfrm>
+          <a:prstGeom prst="rect">
+            <a:avLst/>
+          </a:prstGeom>
+          <a:noFill/>
+          <a:ln/>
+        </p:spPr>
+        <p:txBody>
+          <a:bodyPr wrap="square" lIns="0" tIns="0" rIns="0" bIns="0" rtlCol="0" anchor="t"/>
+          <a:lstStyle/>
           <a:p>
             <a:pPr marL="342900" indent="-342900">
               <a:spcAft>
@@ -8217,10 +8104,52 @@
                 <a:ea typeface="Arial" pitchFamily="34" charset="-122"/>
                 <a:cs typeface="Arial" pitchFamily="34" charset="-120"/>
               </a:rPr>
-              <a:t>Namespaced, auditable, governed</a:t>
+              <a:t>One repo, one laptop, one engineer</a:t>
             </a:r>
             <a:endParaRPr lang="en-US" sz="1250" dirty="0"/>
           </a:p>
+          <a:p>
+            <a:pPr marL="342900" indent="-342900">
+              <a:spcAft>
+                <a:spcPts val="1000"/>
+              </a:spcAft>
+              <a:buSzPct val="100000"/>
+              <a:buChar char="•"/>
+            </a:pPr>
+            <a:r>
+              <a:rPr lang="en-US" sz="1250" dirty="0">
+                <a:solidFill>
+                  <a:srgbClr val="191919"/>
+                </a:solidFill>
+                <a:latin typeface="Arial" pitchFamily="34" charset="0"/>
+                <a:ea typeface="Arial" pitchFamily="34" charset="-122"/>
+                <a:cs typeface="Arial" pitchFamily="34" charset="-120"/>
+              </a:rPr>
+              <a:t>A committed .claude/ folder already does the job</a:t>
+            </a:r>
+            <a:endParaRPr lang="en-US" sz="1250" dirty="0"/>
+          </a:p>
+          <a:p>
+            <a:pPr marL="342900" indent="-342900">
+              <a:spcAft>
+                <a:spcPts val="1000"/>
+              </a:spcAft>
+              <a:buSzPct val="100000"/>
+              <a:buChar char="•"/>
+            </a:pPr>
+            <a:r>
+              <a:rPr lang="en-US" sz="1250" dirty="0">
+                <a:solidFill>
+                  <a:srgbClr val="191919"/>
+                </a:solidFill>
+                <a:latin typeface="Arial" pitchFamily="34" charset="0"/>
+                <a:ea typeface="Arial" pitchFamily="34" charset="-122"/>
+                <a:cs typeface="Arial" pitchFamily="34" charset="-120"/>
+              </a:rPr>
+              <a:t>There's nothing to version and nothing to enforce</a:t>
+            </a:r>
+            <a:endParaRPr lang="en-US" sz="1250" dirty="0"/>
+          </a:p>
         </p:txBody>
       </p:sp>
       <p:sp>
@@ -8231,7 +8160,7 @@
         </p:nvSpPr>
         <p:spPr>
           <a:xfrm>
-            <a:off x="548640" y="4434840"/>
+            <a:off x="548640" y="3950208"/>
             <a:ext cx="7315200" cy="365760"/>
           </a:xfrm>
           <a:prstGeom prst="rect">
@@ -8256,7 +8185,7 @@
                 <a:ea typeface="Georgia" pitchFamily="34" charset="-122"/>
                 <a:cs typeface="Georgia" pitchFamily="34" charset="-120"/>
               </a:rPr>
-              <a:t>Same content. A different operating model.</a:t>
+              <a:t>The plugin earns its keep at fleet scale.</a:t>
             </a:r>
             <a:endParaRPr lang="en-US" sz="1400" dirty="0"/>
           </a:p>
@@ -8362,7 +8291,7 @@
         <p:spPr>
           <a:xfrm>
             <a:off x="548640" y="566928"/>
-            <a:ext cx="8046720" cy="1005840"/>
+            <a:ext cx="8046720" cy="685800"/>
           </a:xfrm>
           <a:prstGeom prst="rect">
             <a:avLst/>
@@ -8378,7 +8307,7 @@
               <a:buNone/>
             </a:pPr>
             <a:r>
-              <a:rPr lang="en-US" sz="2400" dirty="0">
+              <a:rPr lang="en-US" sz="2600" dirty="0">
                 <a:solidFill>
                   <a:srgbClr val="191919"/>
                 </a:solidFill>
@@ -8386,26 +8315,9 @@
                 <a:ea typeface="Georgia" pitchFamily="34" charset="-122"/>
                 <a:cs typeface="Georgia" pitchFamily="34" charset="-120"/>
               </a:rPr>
-              <a:t>An instruction can be ignored.</a:t>
-            </a:r>
-            <a:endParaRPr lang="en-US" sz="2400" dirty="0"/>
-          </a:p>
-          <a:p>
-            <a:pPr algn="l" indent="0" marL="0">
-              <a:buNone/>
-            </a:pPr>
-            <a:r>
-              <a:rPr lang="en-US" sz="2400" dirty="0">
-                <a:solidFill>
-                  <a:srgbClr val="191919"/>
-                </a:solidFill>
-                <a:latin typeface="Georgia" pitchFamily="34" charset="0"/>
-                <a:ea typeface="Georgia" pitchFamily="34" charset="-122"/>
-                <a:cs typeface="Georgia" pitchFamily="34" charset="-120"/>
-              </a:rPr>
-              <a:t>A process gate can't.</a:t>
-            </a:r>
-            <a:endParaRPr lang="en-US" sz="2400" dirty="0"/>
+              <a:t>Two commands to everywhere.</a:t>
+            </a:r>
+            <a:endParaRPr lang="en-US" sz="2600" dirty="0"/>
           </a:p>
         </p:txBody>
       </p:sp>
@@ -8417,8 +8329,8 @@
         </p:nvSpPr>
         <p:spPr>
           <a:xfrm>
-            <a:off x="548640" y="2103120"/>
-            <a:ext cx="1737360" cy="685800"/>
+            <a:off x="548640" y="1463040"/>
+            <a:ext cx="2423160" cy="914400"/>
           </a:xfrm>
           <a:prstGeom prst="rect">
             <a:avLst/>
@@ -8437,34 +8349,51 @@
         </p:nvSpPr>
         <p:spPr>
           <a:xfrm>
-            <a:off x="548640" y="2103120"/>
-            <a:ext cx="1737360" cy="685800"/>
-          </a:xfrm>
-          <a:prstGeom prst="rect">
-            <a:avLst/>
-          </a:prstGeom>
-          <a:noFill/>
-          <a:ln/>
-        </p:spPr>
-        <p:txBody>
-          <a:bodyPr wrap="square" lIns="0" tIns="0" rIns="0" bIns="0" rtlCol="0" anchor="ctr"/>
-          <a:lstStyle/>
-          <a:p>
-            <a:pPr algn="ctr" indent="0" marL="0">
-              <a:buNone/>
-            </a:pPr>
-            <a:r>
-              <a:rPr lang="en-US" sz="1200" dirty="0">
+            <a:off x="749808" y="1609344"/>
+            <a:ext cx="2020824" cy="621792"/>
+          </a:xfrm>
+          <a:prstGeom prst="rect">
+            <a:avLst/>
+          </a:prstGeom>
+          <a:noFill/>
+          <a:ln/>
+        </p:spPr>
+        <p:txBody>
+          <a:bodyPr wrap="square" lIns="0" tIns="0" rIns="0" bIns="0" rtlCol="0" anchor="t"/>
+          <a:lstStyle/>
+          <a:p>
+            <a:pPr indent="0" marL="0">
+              <a:buNone/>
+            </a:pPr>
+            <a:r>
+              <a:rPr lang="en-US" sz="1300" b="1" dirty="0">
                 <a:solidFill>
                   <a:srgbClr val="191919"/>
                 </a:solidFill>
-                <a:latin typeface="Consolas" pitchFamily="34" charset="0"/>
-                <a:ea typeface="Consolas" pitchFamily="34" charset="-122"/>
-                <a:cs typeface="Consolas" pitchFamily="34" charset="-120"/>
-              </a:rPr>
-              <a:t>tool call</a:t>
-            </a:r>
-            <a:endParaRPr lang="en-US" sz="1200" dirty="0"/>
+                <a:latin typeface="Arial" pitchFamily="34" charset="0"/>
+                <a:ea typeface="Arial" pitchFamily="34" charset="-122"/>
+                <a:cs typeface="Arial" pitchFamily="34" charset="-120"/>
+              </a:rPr>
+              <a:t>marketplace repo</a:t>
+            </a:r>
+            <a:endParaRPr lang="en-US" sz="1300" dirty="0"/>
+          </a:p>
+          <a:p>
+            <a:pPr indent="0" marL="0">
+              <a:buNone/>
+            </a:pPr>
+            <a:r>
+              <a:rPr lang="en-US" sz="1050" dirty="0">
+                <a:solidFill>
+                  <a:srgbClr val="6B6B66"/>
+                </a:solidFill>
+                <a:latin typeface="Arial" pitchFamily="34" charset="0"/>
+                <a:ea typeface="Arial" pitchFamily="34" charset="-122"/>
+                <a:cs typeface="Arial" pitchFamily="34" charset="-120"/>
+              </a:rPr>
+              <a:t>a git repo the platform team owns</a:t>
+            </a:r>
+            <a:endParaRPr lang="en-US" sz="1300" dirty="0"/>
           </a:p>
         </p:txBody>
       </p:sp>
@@ -8476,8 +8405,8 @@
         </p:nvSpPr>
         <p:spPr>
           <a:xfrm>
-            <a:off x="2286000" y="2446020"/>
-            <a:ext cx="594360" cy="0"/>
+            <a:off x="3026664" y="1920240"/>
+            <a:ext cx="256032" cy="0"/>
           </a:xfrm>
           <a:prstGeom prst="line">
             <a:avLst/>
@@ -8500,268 +8429,14 @@
         </p:nvSpPr>
         <p:spPr>
           <a:xfrm>
-            <a:off x="2880360" y="2103120"/>
-            <a:ext cx="1737360" cy="685800"/>
+            <a:off x="3337560" y="1463040"/>
+            <a:ext cx="2423160" cy="914400"/>
           </a:xfrm>
           <a:prstGeom prst="rect">
             <a:avLst/>
           </a:prstGeom>
           <a:solidFill>
             <a:srgbClr val="F0EEE6"/>
-          </a:solidFill>
-          <a:ln w="12700">
-            <a:solidFill>
-              <a:srgbClr val="D4A27F"/>
-            </a:solidFill>
-            <a:prstDash val="solid"/>
-          </a:ln>
-        </p:spPr>
-      </p:sp>
-      <p:sp>
-        <p:nvSpPr>
-          <p:cNvPr id="8" name="Text 6"/>
-          <p:cNvSpPr/>
-          <p:nvPr/>
-        </p:nvSpPr>
-        <p:spPr>
-          <a:xfrm>
-            <a:off x="2880360" y="2103120"/>
-            <a:ext cx="1737360" cy="685800"/>
-          </a:xfrm>
-          <a:prstGeom prst="rect">
-            <a:avLst/>
-          </a:prstGeom>
-          <a:noFill/>
-          <a:ln/>
-        </p:spPr>
-        <p:txBody>
-          <a:bodyPr wrap="square" lIns="0" tIns="0" rIns="0" bIns="0" rtlCol="0" anchor="ctr"/>
-          <a:lstStyle/>
-          <a:p>
-            <a:pPr algn="ctr" indent="0" marL="0">
-              <a:buNone/>
-            </a:pPr>
-            <a:r>
-              <a:rPr lang="en-US" sz="1200" dirty="0">
-                <a:solidFill>
-                  <a:srgbClr val="191919"/>
-                </a:solidFill>
-                <a:latin typeface="Consolas" pitchFamily="34" charset="0"/>
-                <a:ea typeface="Consolas" pitchFamily="34" charset="-122"/>
-                <a:cs typeface="Consolas" pitchFamily="34" charset="-120"/>
-              </a:rPr>
-              <a:t>guard.js</a:t>
-            </a:r>
-            <a:endParaRPr lang="en-US" sz="1200" dirty="0"/>
-          </a:p>
-        </p:txBody>
-      </p:sp>
-      <p:sp>
-        <p:nvSpPr>
-          <p:cNvPr id="9" name="Shape 7"/>
-          <p:cNvSpPr/>
-          <p:nvPr/>
-        </p:nvSpPr>
-        <p:spPr>
-          <a:xfrm flipV="1">
-            <a:off x="4617720" y="1668780"/>
-            <a:ext cx="777240" cy="777240"/>
-          </a:xfrm>
-          <a:prstGeom prst="line">
-            <a:avLst/>
-          </a:prstGeom>
-          <a:noFill/>
-          <a:ln w="12700">
-            <a:solidFill>
-              <a:srgbClr val="6B6B66"/>
-            </a:solidFill>
-            <a:prstDash val="solid"/>
-            <a:tailEnd type="triangle"/>
-          </a:ln>
-        </p:spPr>
-      </p:sp>
-      <p:sp>
-        <p:nvSpPr>
-          <p:cNvPr id="10" name="Shape 8"/>
-          <p:cNvSpPr/>
-          <p:nvPr/>
-        </p:nvSpPr>
-        <p:spPr>
-          <a:xfrm>
-            <a:off x="5394960" y="1394460"/>
-            <a:ext cx="1417320" cy="548640"/>
-          </a:xfrm>
-          <a:prstGeom prst="rect">
-            <a:avLst/>
-          </a:prstGeom>
-          <a:solidFill>
-            <a:srgbClr val="F0EEE6"/>
-          </a:solidFill>
-          <a:ln/>
-        </p:spPr>
-      </p:sp>
-      <p:sp>
-        <p:nvSpPr>
-          <p:cNvPr id="11" name="Text 9"/>
-          <p:cNvSpPr/>
-          <p:nvPr/>
-        </p:nvSpPr>
-        <p:spPr>
-          <a:xfrm>
-            <a:off x="5394960" y="1394460"/>
-            <a:ext cx="1417320" cy="548640"/>
-          </a:xfrm>
-          <a:prstGeom prst="rect">
-            <a:avLst/>
-          </a:prstGeom>
-          <a:noFill/>
-          <a:ln/>
-        </p:spPr>
-        <p:txBody>
-          <a:bodyPr wrap="square" lIns="0" tIns="0" rIns="0" bIns="0" rtlCol="0" anchor="ctr"/>
-          <a:lstStyle/>
-          <a:p>
-            <a:pPr algn="ctr" indent="0" marL="0">
-              <a:buNone/>
-            </a:pPr>
-            <a:r>
-              <a:rPr lang="en-US" sz="1200" dirty="0">
-                <a:solidFill>
-                  <a:srgbClr val="191919"/>
-                </a:solidFill>
-                <a:latin typeface="Consolas" pitchFamily="34" charset="0"/>
-                <a:ea typeface="Consolas" pitchFamily="34" charset="-122"/>
-                <a:cs typeface="Consolas" pitchFamily="34" charset="-120"/>
-              </a:rPr>
-              <a:t>allow</a:t>
-            </a:r>
-            <a:endParaRPr lang="en-US" sz="1200" dirty="0"/>
-          </a:p>
-        </p:txBody>
-      </p:sp>
-      <p:sp>
-        <p:nvSpPr>
-          <p:cNvPr id="12" name="Shape 10"/>
-          <p:cNvSpPr/>
-          <p:nvPr/>
-        </p:nvSpPr>
-        <p:spPr>
-          <a:xfrm>
-            <a:off x="4617720" y="2446020"/>
-            <a:ext cx="777240" cy="914"/>
-          </a:xfrm>
-          <a:prstGeom prst="line">
-            <a:avLst/>
-          </a:prstGeom>
-          <a:noFill/>
-          <a:ln w="12700">
-            <a:solidFill>
-              <a:srgbClr val="6B6B66"/>
-            </a:solidFill>
-            <a:prstDash val="solid"/>
-            <a:tailEnd type="triangle"/>
-          </a:ln>
-        </p:spPr>
-      </p:sp>
-      <p:sp>
-        <p:nvSpPr>
-          <p:cNvPr id="13" name="Shape 11"/>
-          <p:cNvSpPr/>
-          <p:nvPr/>
-        </p:nvSpPr>
-        <p:spPr>
-          <a:xfrm>
-            <a:off x="5394960" y="2171700"/>
-            <a:ext cx="1417320" cy="548640"/>
-          </a:xfrm>
-          <a:prstGeom prst="rect">
-            <a:avLst/>
-          </a:prstGeom>
-          <a:solidFill>
-            <a:srgbClr val="F0EEE6"/>
-          </a:solidFill>
-          <a:ln/>
-        </p:spPr>
-      </p:sp>
-      <p:sp>
-        <p:nvSpPr>
-          <p:cNvPr id="14" name="Text 12"/>
-          <p:cNvSpPr/>
-          <p:nvPr/>
-        </p:nvSpPr>
-        <p:spPr>
-          <a:xfrm>
-            <a:off x="5394960" y="2171700"/>
-            <a:ext cx="1417320" cy="548640"/>
-          </a:xfrm>
-          <a:prstGeom prst="rect">
-            <a:avLst/>
-          </a:prstGeom>
-          <a:noFill/>
-          <a:ln/>
-        </p:spPr>
-        <p:txBody>
-          <a:bodyPr wrap="square" lIns="0" tIns="0" rIns="0" bIns="0" rtlCol="0" anchor="ctr"/>
-          <a:lstStyle/>
-          <a:p>
-            <a:pPr algn="ctr" indent="0" marL="0">
-              <a:buNone/>
-            </a:pPr>
-            <a:r>
-              <a:rPr lang="en-US" sz="1200" dirty="0">
-                <a:solidFill>
-                  <a:srgbClr val="191919"/>
-                </a:solidFill>
-                <a:latin typeface="Consolas" pitchFamily="34" charset="0"/>
-                <a:ea typeface="Consolas" pitchFamily="34" charset="-122"/>
-                <a:cs typeface="Consolas" pitchFamily="34" charset="-120"/>
-              </a:rPr>
-              <a:t>ask</a:t>
-            </a:r>
-            <a:endParaRPr lang="en-US" sz="1200" dirty="0"/>
-          </a:p>
-        </p:txBody>
-      </p:sp>
-      <p:sp>
-        <p:nvSpPr>
-          <p:cNvPr id="15" name="Shape 13"/>
-          <p:cNvSpPr/>
-          <p:nvPr/>
-        </p:nvSpPr>
-        <p:spPr>
-          <a:xfrm>
-            <a:off x="4617720" y="2446020"/>
-            <a:ext cx="777240" cy="777240"/>
-          </a:xfrm>
-          <a:prstGeom prst="line">
-            <a:avLst/>
-          </a:prstGeom>
-          <a:noFill/>
-          <a:ln w="12700">
-            <a:solidFill>
-              <a:srgbClr val="6B6B66"/>
-            </a:solidFill>
-            <a:prstDash val="solid"/>
-            <a:tailEnd type="triangle"/>
-          </a:ln>
-        </p:spPr>
-      </p:sp>
-      <p:sp>
-        <p:nvSpPr>
-          <p:cNvPr id="16" name="Shape 14"/>
-          <p:cNvSpPr/>
-          <p:nvPr/>
-        </p:nvSpPr>
-        <p:spPr>
-          <a:xfrm>
-            <a:off x="5394960" y="2948940"/>
-            <a:ext cx="1417320" cy="548640"/>
-          </a:xfrm>
-          <a:prstGeom prst="rect">
-            <a:avLst/>
-          </a:prstGeom>
-          <a:solidFill>
-            <a:srgbClr val="FAF9F5"/>
           </a:solidFill>
           <a:ln w="15875">
             <a:solidFill>
@@ -8773,124 +8448,267 @@
       </p:sp>
       <p:sp>
         <p:nvSpPr>
-          <p:cNvPr id="17" name="Text 15"/>
-          <p:cNvSpPr/>
-          <p:nvPr/>
-        </p:nvSpPr>
-        <p:spPr>
-          <a:xfrm>
-            <a:off x="5394960" y="2948940"/>
-            <a:ext cx="1417320" cy="548640"/>
-          </a:xfrm>
-          <a:prstGeom prst="rect">
-            <a:avLst/>
-          </a:prstGeom>
-          <a:noFill/>
-          <a:ln/>
-        </p:spPr>
-        <p:txBody>
-          <a:bodyPr wrap="square" lIns="0" tIns="0" rIns="0" bIns="0" rtlCol="0" anchor="ctr"/>
-          <a:lstStyle/>
-          <a:p>
-            <a:pPr algn="ctr" indent="0" marL="0">
-              <a:buNone/>
-            </a:pPr>
-            <a:r>
-              <a:rPr lang="en-US" sz="1200" dirty="0">
-                <a:solidFill>
-                  <a:srgbClr val="CC785C"/>
+          <p:cNvPr id="8" name="Text 6"/>
+          <p:cNvSpPr/>
+          <p:nvPr/>
+        </p:nvSpPr>
+        <p:spPr>
+          <a:xfrm>
+            <a:off x="3538728" y="1609344"/>
+            <a:ext cx="2020824" cy="621792"/>
+          </a:xfrm>
+          <a:prstGeom prst="rect">
+            <a:avLst/>
+          </a:prstGeom>
+          <a:noFill/>
+          <a:ln/>
+        </p:spPr>
+        <p:txBody>
+          <a:bodyPr wrap="square" lIns="0" tIns="0" rIns="0" bIns="0" rtlCol="0" anchor="t"/>
+          <a:lstStyle/>
+          <a:p>
+            <a:pPr indent="0" marL="0">
+              <a:buNone/>
+            </a:pPr>
+            <a:r>
+              <a:rPr lang="en-US" sz="1300" b="1" dirty="0">
+                <a:solidFill>
+                  <a:srgbClr val="191919"/>
+                </a:solidFill>
+                <a:latin typeface="Arial" pitchFamily="34" charset="0"/>
+                <a:ea typeface="Arial" pitchFamily="34" charset="-122"/>
+                <a:cs typeface="Arial" pitchFamily="34" charset="-120"/>
+              </a:rPr>
+              <a:t>plugin</a:t>
+            </a:r>
+            <a:endParaRPr lang="en-US" sz="1300" dirty="0"/>
+          </a:p>
+          <a:p>
+            <a:pPr indent="0" marL="0">
+              <a:buNone/>
+            </a:pPr>
+            <a:r>
+              <a:rPr lang="en-US" sz="1050" dirty="0">
+                <a:solidFill>
+                  <a:srgbClr val="6B6B66"/>
+                </a:solidFill>
+                <a:latin typeface="Arial" pitchFamily="34" charset="0"/>
+                <a:ea typeface="Arial" pitchFamily="34" charset="-122"/>
+                <a:cs typeface="Arial" pitchFamily="34" charset="-120"/>
+              </a:rPr>
+              <a:t>versioned, reviewed, namespaced</a:t>
+            </a:r>
+            <a:endParaRPr lang="en-US" sz="1300" dirty="0"/>
+          </a:p>
+        </p:txBody>
+      </p:sp>
+      <p:sp>
+        <p:nvSpPr>
+          <p:cNvPr id="9" name="Shape 7"/>
+          <p:cNvSpPr/>
+          <p:nvPr/>
+        </p:nvSpPr>
+        <p:spPr>
+          <a:xfrm>
+            <a:off x="5815584" y="1920240"/>
+            <a:ext cx="256032" cy="0"/>
+          </a:xfrm>
+          <a:prstGeom prst="line">
+            <a:avLst/>
+          </a:prstGeom>
+          <a:noFill/>
+          <a:ln w="19050">
+            <a:solidFill>
+              <a:srgbClr val="CC785C"/>
+            </a:solidFill>
+            <a:prstDash val="solid"/>
+            <a:tailEnd type="triangle"/>
+          </a:ln>
+        </p:spPr>
+      </p:sp>
+      <p:sp>
+        <p:nvSpPr>
+          <p:cNvPr id="10" name="Shape 8"/>
+          <p:cNvSpPr/>
+          <p:nvPr/>
+        </p:nvSpPr>
+        <p:spPr>
+          <a:xfrm>
+            <a:off x="6126480" y="1463040"/>
+            <a:ext cx="2423160" cy="914400"/>
+          </a:xfrm>
+          <a:prstGeom prst="rect">
+            <a:avLst/>
+          </a:prstGeom>
+          <a:solidFill>
+            <a:srgbClr val="F0EEE6"/>
+          </a:solidFill>
+          <a:ln/>
+        </p:spPr>
+      </p:sp>
+      <p:sp>
+        <p:nvSpPr>
+          <p:cNvPr id="11" name="Text 9"/>
+          <p:cNvSpPr/>
+          <p:nvPr/>
+        </p:nvSpPr>
+        <p:spPr>
+          <a:xfrm>
+            <a:off x="6327648" y="1609344"/>
+            <a:ext cx="2020824" cy="621792"/>
+          </a:xfrm>
+          <a:prstGeom prst="rect">
+            <a:avLst/>
+          </a:prstGeom>
+          <a:noFill/>
+          <a:ln/>
+        </p:spPr>
+        <p:txBody>
+          <a:bodyPr wrap="square" lIns="0" tIns="0" rIns="0" bIns="0" rtlCol="0" anchor="t"/>
+          <a:lstStyle/>
+          <a:p>
+            <a:pPr indent="0" marL="0">
+              <a:buNone/>
+            </a:pPr>
+            <a:r>
+              <a:rPr lang="en-US" sz="1300" b="1" dirty="0">
+                <a:solidFill>
+                  <a:srgbClr val="191919"/>
+                </a:solidFill>
+                <a:latin typeface="Arial" pitchFamily="34" charset="0"/>
+                <a:ea typeface="Arial" pitchFamily="34" charset="-122"/>
+                <a:cs typeface="Arial" pitchFamily="34" charset="-120"/>
+              </a:rPr>
+              <a:t>every machine</a:t>
+            </a:r>
+            <a:endParaRPr lang="en-US" sz="1300" dirty="0"/>
+          </a:p>
+          <a:p>
+            <a:pPr indent="0" marL="0">
+              <a:buNone/>
+            </a:pPr>
+            <a:r>
+              <a:rPr lang="en-US" sz="1050" dirty="0">
+                <a:solidFill>
+                  <a:srgbClr val="6B6B66"/>
+                </a:solidFill>
+                <a:latin typeface="Arial" pitchFamily="34" charset="0"/>
+                <a:ea typeface="Arial" pitchFamily="34" charset="-122"/>
+                <a:cs typeface="Arial" pitchFamily="34" charset="-120"/>
+              </a:rPr>
+              <a:t>installed from the same catalog</a:t>
+            </a:r>
+            <a:endParaRPr lang="en-US" sz="1300" dirty="0"/>
+          </a:p>
+        </p:txBody>
+      </p:sp>
+      <p:sp>
+        <p:nvSpPr>
+          <p:cNvPr id="12" name="Shape 10"/>
+          <p:cNvSpPr/>
+          <p:nvPr/>
+        </p:nvSpPr>
+        <p:spPr>
+          <a:xfrm>
+            <a:off x="548640" y="2834640"/>
+            <a:ext cx="8046720" cy="1051560"/>
+          </a:xfrm>
+          <a:prstGeom prst="roundRect">
+            <a:avLst>
+              <a:gd name="adj" fmla="val 6087"/>
+            </a:avLst>
+          </a:prstGeom>
+          <a:solidFill>
+            <a:srgbClr val="191919"/>
+          </a:solidFill>
+          <a:ln/>
+        </p:spPr>
+      </p:sp>
+      <p:sp>
+        <p:nvSpPr>
+          <p:cNvPr id="13" name="Text 11"/>
+          <p:cNvSpPr/>
+          <p:nvPr/>
+        </p:nvSpPr>
+        <p:spPr>
+          <a:xfrm>
+            <a:off x="804672" y="2980944"/>
+            <a:ext cx="7534656" cy="758952"/>
+          </a:xfrm>
+          <a:prstGeom prst="rect">
+            <a:avLst/>
+          </a:prstGeom>
+          <a:noFill/>
+          <a:ln/>
+        </p:spPr>
+        <p:txBody>
+          <a:bodyPr wrap="square" lIns="0" tIns="0" rIns="0" bIns="0" rtlCol="0" anchor="t"/>
+          <a:lstStyle/>
+          <a:p>
+            <a:pPr indent="0" marL="0">
+              <a:spcAft>
+                <a:spcPts val="500"/>
+              </a:spcAft>
+              <a:buNone/>
+            </a:pPr>
+            <a:r>
+              <a:rPr lang="en-US" sz="1150" dirty="0">
+                <a:solidFill>
+                  <a:srgbClr val="F0EEE6"/>
                 </a:solidFill>
                 <a:latin typeface="Consolas" pitchFamily="34" charset="0"/>
                 <a:ea typeface="Consolas" pitchFamily="34" charset="-122"/>
                 <a:cs typeface="Consolas" pitchFamily="34" charset="-120"/>
               </a:rPr>
-              <a:t>deny</a:t>
-            </a:r>
-            <a:endParaRPr lang="en-US" sz="1200" dirty="0"/>
-          </a:p>
-        </p:txBody>
-      </p:sp>
-      <p:sp>
-        <p:nvSpPr>
-          <p:cNvPr id="18" name="Text 16"/>
-          <p:cNvSpPr/>
-          <p:nvPr/>
-        </p:nvSpPr>
-        <p:spPr>
-          <a:xfrm>
-            <a:off x="548640" y="3886200"/>
-            <a:ext cx="5852160" cy="777240"/>
-          </a:xfrm>
-          <a:prstGeom prst="rect">
-            <a:avLst/>
-          </a:prstGeom>
-          <a:noFill/>
-          <a:ln/>
-        </p:spPr>
-        <p:txBody>
-          <a:bodyPr wrap="square" lIns="0" tIns="0" rIns="0" bIns="0" rtlCol="0" anchor="t"/>
-          <a:lstStyle/>
-          <a:p>
-            <a:pPr indent="0" marL="0">
-              <a:buNone/>
-            </a:pPr>
-            <a:r>
-              <a:rPr lang="en-US" sz="1250" dirty="0">
-                <a:solidFill>
-                  <a:srgbClr val="191919"/>
-                </a:solidFill>
-                <a:latin typeface="Arial" pitchFamily="34" charset="0"/>
-                <a:ea typeface="Arial" pitchFamily="34" charset="-122"/>
-                <a:cs typeface="Arial" pitchFamily="34" charset="-120"/>
-              </a:rPr>
-              <a:t>The decision is a regex match against policy.json, not a model choice. Same input, same block, every run. Denials and executions land side by side in the audit trail.</a:t>
-            </a:r>
-            <a:endParaRPr lang="en-US" sz="1250" dirty="0"/>
-          </a:p>
-        </p:txBody>
-      </p:sp>
-      <p:sp>
-        <p:nvSpPr>
-          <p:cNvPr id="19" name="Text 17"/>
-          <p:cNvSpPr/>
-          <p:nvPr/>
-        </p:nvSpPr>
-        <p:spPr>
-          <a:xfrm>
-            <a:off x="6629400" y="3886200"/>
-            <a:ext cx="1965960" cy="777240"/>
-          </a:xfrm>
-          <a:prstGeom prst="rect">
-            <a:avLst/>
-          </a:prstGeom>
-          <a:noFill/>
-          <a:ln/>
-        </p:spPr>
-        <p:txBody>
-          <a:bodyPr wrap="square" lIns="0" tIns="0" rIns="0" bIns="0" rtlCol="0" anchor="t"/>
-          <a:lstStyle/>
-          <a:p>
-            <a:pPr indent="0" marL="0">
-              <a:buNone/>
-            </a:pPr>
-            <a:r>
-              <a:rPr lang="en-US" sz="1050" dirty="0">
-                <a:solidFill>
-                  <a:srgbClr val="6B6B66"/>
+              <a:t>$ /plugin marketplace add owner/repo</a:t>
+            </a:r>
+            <a:endParaRPr lang="en-US" sz="1150" dirty="0"/>
+          </a:p>
+          <a:p>
+            <a:pPr indent="0" marL="0">
+              <a:spcAft>
+                <a:spcPts val="500"/>
+              </a:spcAft>
+              <a:buNone/>
+            </a:pPr>
+            <a:r>
+              <a:rPr lang="en-US" sz="1150" dirty="0">
+                <a:solidFill>
+                  <a:srgbClr val="F0EEE6"/>
                 </a:solidFill>
                 <a:latin typeface="Consolas" pitchFamily="34" charset="0"/>
                 <a:ea typeface="Consolas" pitchFamily="34" charset="-122"/>
                 <a:cs typeface="Consolas" pitchFamily="34" charset="-120"/>
               </a:rPr>
-              <a:t>guard.js: 158 lines, tested offline, zero tokens.</a:t>
-            </a:r>
-            <a:endParaRPr lang="en-US" sz="1050" dirty="0"/>
-          </a:p>
-        </p:txBody>
-      </p:sp>
-      <p:sp>
-        <p:nvSpPr>
-          <p:cNvPr id="20" name="Text 18"/>
+              <a:t>$ /plugin install data-platform-pack@platform-tools</a:t>
+            </a:r>
+            <a:endParaRPr lang="en-US" sz="1150" dirty="0"/>
+          </a:p>
+          <a:p>
+            <a:pPr indent="0" marL="0">
+              <a:spcAft>
+                <a:spcPts val="500"/>
+              </a:spcAft>
+              <a:buNone/>
+            </a:pPr>
+            <a:r>
+              <a:rPr lang="en-US" sz="1150" dirty="0">
+                <a:solidFill>
+                  <a:srgbClr val="D4A27F"/>
+                </a:solidFill>
+                <a:latin typeface="Consolas" pitchFamily="34" charset="0"/>
+                <a:ea typeface="Consolas" pitchFamily="34" charset="-122"/>
+                <a:cs typeface="Consolas" pitchFamily="34" charset="-120"/>
+              </a:rPr>
+              <a:t>✔ installed, version-pinned, namespaced</a:t>
+            </a:r>
+            <a:endParaRPr lang="en-US" sz="1150" dirty="0"/>
+          </a:p>
+        </p:txBody>
+      </p:sp>
+      <p:sp>
+        <p:nvSpPr>
+          <p:cNvPr id="14" name="Text 12"/>
           <p:cNvSpPr/>
           <p:nvPr/>
         </p:nvSpPr>
